--- a/output/wordlabs-sect-3day.pptx
+++ b/output/wordlabs-sect-3day.pptx
@@ -5622,7 +5622,7 @@
                 <a:ea typeface="Trebuchet MS" pitchFamily="34" charset="-122"/>
                 <a:cs typeface="Trebuchet MS" pitchFamily="34" charset="-120"/>
               </a:rPr>
-              <a:t>1</a:t>
+              <a:t>2</a:t>
             </a:r>
             <a:pPr algn="ctr" indent="0" marL="0">
               <a:buNone/>
@@ -5636,7 +5636,7 @@
                 <a:ea typeface="Trebuchet MS" pitchFamily="34" charset="-122"/>
                 <a:cs typeface="Trebuchet MS" pitchFamily="34" charset="-120"/>
               </a:rPr>
-              <a:t>  punctuation mark</a:t>
+              <a:t>  punctuation marks</a:t>
             </a:r>
             <a:endParaRPr lang="en-US" sz="2800" dirty="0"/>
           </a:p>
@@ -6071,7 +6071,7 @@
                 <a:ea typeface="Calibri" pitchFamily="34" charset="-122"/>
                 <a:cs typeface="Calibri" pitchFamily="34" charset="-120"/>
               </a:rPr>
-              <a:t> the shape, then label each </a:t>
+              <a:t> this shape, or will you need to </a:t>
             </a:r>
             <a:pPr algn="l" indent="0" marL="0">
               <a:buNone/>
@@ -6088,7 +6088,7 @@
                 <a:ea typeface="Calibri" pitchFamily="34" charset="-122"/>
                 <a:cs typeface="Calibri" pitchFamily="34" charset="-120"/>
               </a:rPr>
-              <a:t>section</a:t>
+              <a:t>intersect</a:t>
             </a:r>
             <a:pPr algn="l" indent="0" marL="0">
               <a:buNone/>
@@ -6102,7 +6102,7 @@
                 <a:ea typeface="Calibri" pitchFamily="34" charset="-122"/>
                 <a:cs typeface="Calibri" pitchFamily="34" charset="-120"/>
               </a:rPr>
-              <a:t> clearly?</a:t>
+              <a:t> those two lines first?</a:t>
             </a:r>
             <a:endParaRPr lang="en-US" sz="1800" dirty="0"/>
           </a:p>
@@ -6385,7 +6385,7 @@
                 <a:ea typeface="Trebuchet MS" pitchFamily="34" charset="-122"/>
                 <a:cs typeface="Trebuchet MS" pitchFamily="34" charset="-120"/>
               </a:rPr>
-              <a:t>section</a:t>
+              <a:t>intersect</a:t>
             </a:r>
             <a:endParaRPr lang="en-US" sz="1400" dirty="0"/>
           </a:p>
@@ -11258,7 +11258,7 @@
                 <a:ea typeface="Trebuchet MS" pitchFamily="34" charset="-122"/>
                 <a:cs typeface="Trebuchet MS" pitchFamily="34" charset="-120"/>
               </a:rPr>
-              <a:t>section</a:t>
+              <a:t>intersect</a:t>
             </a:r>
             <a:endParaRPr lang="en-US" sz="2800" dirty="0"/>
           </a:p>
@@ -12085,7 +12085,7 @@
                 <a:ea typeface="Trebuchet MS" pitchFamily="34" charset="-122"/>
                 <a:cs typeface="Trebuchet MS" pitchFamily="34" charset="-120"/>
               </a:rPr>
-              <a:t>section</a:t>
+              <a:t>intersect</a:t>
             </a:r>
             <a:endParaRPr lang="en-US" sz="2800" dirty="0"/>
           </a:p>
@@ -12174,11 +12174,11 @@
             </a:avLst>
           </a:prstGeom>
           <a:solidFill>
-            <a:srgbClr val="CCFBF1"/>
+            <a:srgbClr val="DDD6FE"/>
           </a:solidFill>
           <a:ln w="19050">
             <a:solidFill>
-              <a:srgbClr val="0D9488"/>
+              <a:srgbClr val="7C3AED"/>
             </a:solidFill>
             <a:prstDash val="solid"/>
           </a:ln>
@@ -12218,13 +12218,13 @@
             <a:r>
               <a:rPr lang="en-US" sz="1300" b="1" dirty="0">
                 <a:solidFill>
-                  <a:srgbClr val="0F766E"/>
+                  <a:srgbClr val="4C1D95"/>
                 </a:solidFill>
                 <a:latin typeface="Trebuchet MS" pitchFamily="34" charset="0"/>
                 <a:ea typeface="Trebuchet MS" pitchFamily="34" charset="-122"/>
                 <a:cs typeface="Trebuchet MS" pitchFamily="34" charset="-120"/>
               </a:rPr>
-              <a:t>sect</a:t>
+              <a:t>inter</a:t>
             </a:r>
             <a:endParaRPr lang="en-US" sz="1300" dirty="0"/>
           </a:p>
@@ -12263,7 +12263,7 @@
                 <a:ea typeface="Calibri" pitchFamily="34" charset="-122"/>
                 <a:cs typeface="Calibri" pitchFamily="34" charset="-120"/>
               </a:rPr>
-              <a:t>cut, divide</a:t>
+              <a:t>between</a:t>
             </a:r>
             <a:endParaRPr lang="en-US" sz="850" dirty="0"/>
           </a:p>
@@ -12286,11 +12286,11 @@
             </a:avLst>
           </a:prstGeom>
           <a:solidFill>
-            <a:srgbClr val="FCE7F3"/>
+            <a:srgbClr val="CCFBF1"/>
           </a:solidFill>
           <a:ln w="19050">
             <a:solidFill>
-              <a:srgbClr val="DB2777"/>
+              <a:srgbClr val="0D9488"/>
             </a:solidFill>
             <a:prstDash val="solid"/>
           </a:ln>
@@ -12330,13 +12330,13 @@
             <a:r>
               <a:rPr lang="en-US" sz="1300" b="1" dirty="0">
                 <a:solidFill>
-                  <a:srgbClr val="9D174D"/>
+                  <a:srgbClr val="0F766E"/>
                 </a:solidFill>
                 <a:latin typeface="Trebuchet MS" pitchFamily="34" charset="0"/>
                 <a:ea typeface="Trebuchet MS" pitchFamily="34" charset="-122"/>
                 <a:cs typeface="Trebuchet MS" pitchFamily="34" charset="-120"/>
               </a:rPr>
-              <a:t>ion</a:t>
+              <a:t>sect</a:t>
             </a:r>
             <a:endParaRPr lang="en-US" sz="1300" dirty="0"/>
           </a:p>
@@ -12375,7 +12375,7 @@
                 <a:ea typeface="Calibri" pitchFamily="34" charset="-122"/>
                 <a:cs typeface="Calibri" pitchFamily="34" charset="-120"/>
               </a:rPr>
-              <a:t>act or result of</a:t>
+              <a:t>cut, divide</a:t>
             </a:r>
             <a:endParaRPr lang="en-US" sz="850" dirty="0"/>
           </a:p>
@@ -13070,7 +13070,7 @@
                 <a:ea typeface="Trebuchet MS" pitchFamily="34" charset="-122"/>
                 <a:cs typeface="Trebuchet MS" pitchFamily="34" charset="-120"/>
               </a:rPr>
-              <a:t>section</a:t>
+              <a:t>intersect</a:t>
             </a:r>
             <a:endParaRPr lang="en-US" sz="2800" dirty="0"/>
           </a:p>
@@ -13159,11 +13159,11 @@
             </a:avLst>
           </a:prstGeom>
           <a:solidFill>
-            <a:srgbClr val="CCFBF1"/>
+            <a:srgbClr val="DDD6FE"/>
           </a:solidFill>
           <a:ln w="19050">
             <a:solidFill>
-              <a:srgbClr val="0D9488"/>
+              <a:srgbClr val="7C3AED"/>
             </a:solidFill>
             <a:prstDash val="solid"/>
           </a:ln>
@@ -13203,13 +13203,13 @@
             <a:r>
               <a:rPr lang="en-US" sz="1300" b="1" dirty="0">
                 <a:solidFill>
-                  <a:srgbClr val="0F766E"/>
+                  <a:srgbClr val="4C1D95"/>
                 </a:solidFill>
                 <a:latin typeface="Trebuchet MS" pitchFamily="34" charset="0"/>
                 <a:ea typeface="Trebuchet MS" pitchFamily="34" charset="-122"/>
                 <a:cs typeface="Trebuchet MS" pitchFamily="34" charset="-120"/>
               </a:rPr>
-              <a:t>sect</a:t>
+              <a:t>inter</a:t>
             </a:r>
             <a:endParaRPr lang="en-US" sz="1300" dirty="0"/>
           </a:p>
@@ -13248,7 +13248,7 @@
                 <a:ea typeface="Calibri" pitchFamily="34" charset="-122"/>
                 <a:cs typeface="Calibri" pitchFamily="34" charset="-120"/>
               </a:rPr>
-              <a:t>cut, divide</a:t>
+              <a:t>between</a:t>
             </a:r>
             <a:endParaRPr lang="en-US" sz="850" dirty="0"/>
           </a:p>
@@ -13271,11 +13271,11 @@
             </a:avLst>
           </a:prstGeom>
           <a:solidFill>
-            <a:srgbClr val="FCE7F3"/>
+            <a:srgbClr val="CCFBF1"/>
           </a:solidFill>
           <a:ln w="19050">
             <a:solidFill>
-              <a:srgbClr val="DB2777"/>
+              <a:srgbClr val="0D9488"/>
             </a:solidFill>
             <a:prstDash val="solid"/>
           </a:ln>
@@ -13315,13 +13315,13 @@
             <a:r>
               <a:rPr lang="en-US" sz="1300" b="1" dirty="0">
                 <a:solidFill>
-                  <a:srgbClr val="9D174D"/>
+                  <a:srgbClr val="0F766E"/>
                 </a:solidFill>
                 <a:latin typeface="Trebuchet MS" pitchFamily="34" charset="0"/>
                 <a:ea typeface="Trebuchet MS" pitchFamily="34" charset="-122"/>
                 <a:cs typeface="Trebuchet MS" pitchFamily="34" charset="-120"/>
               </a:rPr>
-              <a:t>ion</a:t>
+              <a:t>sect</a:t>
             </a:r>
             <a:endParaRPr lang="en-US" sz="1300" dirty="0"/>
           </a:p>
@@ -13360,7 +13360,7 @@
                 <a:ea typeface="Calibri" pitchFamily="34" charset="-122"/>
                 <a:cs typeface="Calibri" pitchFamily="34" charset="-120"/>
               </a:rPr>
-              <a:t>act or result of</a:t>
+              <a:t>cut, divide</a:t>
             </a:r>
             <a:endParaRPr lang="en-US" sz="850" dirty="0"/>
           </a:p>
@@ -13467,7 +13467,7 @@
         </p:nvSpPr>
         <p:spPr>
           <a:xfrm>
-            <a:off x="2999232" y="3364992"/>
+            <a:off x="2313432" y="3364992"/>
             <a:ext cx="1645920" cy="475488"/>
           </a:xfrm>
           <a:prstGeom prst="rect">
@@ -13494,7 +13494,7 @@
         </p:nvSpPr>
         <p:spPr>
           <a:xfrm>
-            <a:off x="2999232" y="3364992"/>
+            <a:off x="2313432" y="3364992"/>
             <a:ext cx="1645920" cy="475488"/>
           </a:xfrm>
           <a:prstGeom prst="rect">
@@ -13519,7 +13519,7 @@
                 <a:ea typeface="Trebuchet MS" pitchFamily="34" charset="-122"/>
                 <a:cs typeface="Trebuchet MS" pitchFamily="34" charset="-120"/>
               </a:rPr>
-              <a:t>sec</a:t>
+              <a:t>in</a:t>
             </a:r>
             <a:endParaRPr lang="en-US" sz="1400" dirty="0"/>
           </a:p>
@@ -13533,8 +13533,8 @@
         </p:nvSpPr>
         <p:spPr>
           <a:xfrm>
-            <a:off x="4645152" y="3364992"/>
-            <a:ext cx="1097280" cy="475488"/>
+            <a:off x="3959352" y="3364992"/>
+            <a:ext cx="411480" cy="475488"/>
           </a:xfrm>
           <a:prstGeom prst="rect">
             <a:avLst/>
@@ -13572,7 +13572,7 @@
         </p:nvSpPr>
         <p:spPr>
           <a:xfrm>
-            <a:off x="5742432" y="3364992"/>
+            <a:off x="4370832" y="3364992"/>
             <a:ext cx="1645920" cy="475488"/>
           </a:xfrm>
           <a:prstGeom prst="rect">
@@ -13599,7 +13599,7 @@
         </p:nvSpPr>
         <p:spPr>
           <a:xfrm>
-            <a:off x="5742432" y="3364992"/>
+            <a:off x="4370832" y="3364992"/>
             <a:ext cx="1645920" cy="475488"/>
           </a:xfrm>
           <a:prstGeom prst="rect">
@@ -13624,7 +13624,7 @@
                 <a:ea typeface="Trebuchet MS" pitchFamily="34" charset="-122"/>
                 <a:cs typeface="Trebuchet MS" pitchFamily="34" charset="-120"/>
               </a:rPr>
-              <a:t>tion</a:t>
+              <a:t>ter</a:t>
             </a:r>
             <a:endParaRPr lang="en-US" sz="1400" dirty="0"/>
           </a:p>
@@ -13632,7 +13632,112 @@
       </p:sp>
       <p:sp>
         <p:nvSpPr>
-          <p:cNvPr id="30" name="Shape 28"/>
+          <p:cNvPr id="30" name="Text 28"/>
+          <p:cNvSpPr/>
+          <p:nvPr/>
+        </p:nvSpPr>
+        <p:spPr>
+          <a:xfrm>
+            <a:off x="6016752" y="3364992"/>
+            <a:ext cx="411480" cy="475488"/>
+          </a:xfrm>
+          <a:prstGeom prst="rect">
+            <a:avLst/>
+          </a:prstGeom>
+          <a:noFill/>
+          <a:ln/>
+        </p:spPr>
+        <p:txBody>
+          <a:bodyPr wrap="square" lIns="0" tIns="0" rIns="0" bIns="0" rtlCol="0" anchor="ctr"/>
+          <a:lstStyle/>
+          <a:p>
+            <a:pPr algn="ctr" indent="0" marL="0">
+              <a:buNone/>
+            </a:pPr>
+            <a:r>
+              <a:rPr lang="en-US" sz="1600" b="1" dirty="0">
+                <a:solidFill>
+                  <a:srgbClr val="0D9488"/>
+                </a:solidFill>
+                <a:latin typeface="Trebuchet MS" pitchFamily="34" charset="0"/>
+                <a:ea typeface="Trebuchet MS" pitchFamily="34" charset="-122"/>
+                <a:cs typeface="Trebuchet MS" pitchFamily="34" charset="-120"/>
+              </a:rPr>
+              <a:t>·</a:t>
+            </a:r>
+            <a:endParaRPr lang="en-US" sz="1600" dirty="0"/>
+          </a:p>
+        </p:txBody>
+      </p:sp>
+      <p:sp>
+        <p:nvSpPr>
+          <p:cNvPr id="31" name="Shape 29"/>
+          <p:cNvSpPr/>
+          <p:nvPr/>
+        </p:nvSpPr>
+        <p:spPr>
+          <a:xfrm>
+            <a:off x="6428232" y="3364992"/>
+            <a:ext cx="1645920" cy="475488"/>
+          </a:xfrm>
+          <a:prstGeom prst="rect">
+            <a:avLst>
+              <a:gd name="adj" fmla="val 9615"/>
+            </a:avLst>
+          </a:prstGeom>
+          <a:solidFill>
+            <a:srgbClr val="FFFFFF"/>
+          </a:solidFill>
+          <a:ln w="12700">
+            <a:solidFill>
+              <a:srgbClr val="0D9488"/>
+            </a:solidFill>
+            <a:prstDash val="solid"/>
+          </a:ln>
+        </p:spPr>
+      </p:sp>
+      <p:sp>
+        <p:nvSpPr>
+          <p:cNvPr id="32" name="Text 30"/>
+          <p:cNvSpPr/>
+          <p:nvPr/>
+        </p:nvSpPr>
+        <p:spPr>
+          <a:xfrm>
+            <a:off x="6428232" y="3364992"/>
+            <a:ext cx="1645920" cy="475488"/>
+          </a:xfrm>
+          <a:prstGeom prst="rect">
+            <a:avLst/>
+          </a:prstGeom>
+          <a:noFill/>
+          <a:ln/>
+        </p:spPr>
+        <p:txBody>
+          <a:bodyPr wrap="square" lIns="0" tIns="0" rIns="0" bIns="0" rtlCol="0" anchor="ctr"/>
+          <a:lstStyle/>
+          <a:p>
+            <a:pPr algn="ctr" indent="0" marL="0">
+              <a:buNone/>
+            </a:pPr>
+            <a:r>
+              <a:rPr lang="en-US" sz="1400" b="1" dirty="0">
+                <a:solidFill>
+                  <a:srgbClr val="0D9488"/>
+                </a:solidFill>
+                <a:latin typeface="Trebuchet MS" pitchFamily="34" charset="0"/>
+                <a:ea typeface="Trebuchet MS" pitchFamily="34" charset="-122"/>
+                <a:cs typeface="Trebuchet MS" pitchFamily="34" charset="-120"/>
+              </a:rPr>
+              <a:t>sect</a:t>
+            </a:r>
+            <a:endParaRPr lang="en-US" sz="1400" dirty="0"/>
+          </a:p>
+        </p:txBody>
+      </p:sp>
+      <p:sp>
+        <p:nvSpPr>
+          <p:cNvPr id="33" name="Shape 31"/>
           <p:cNvSpPr/>
           <p:nvPr/>
         </p:nvSpPr>
@@ -13659,7 +13764,7 @@
       </p:sp>
       <p:sp>
         <p:nvSpPr>
-          <p:cNvPr id="31" name="Text 29"/>
+          <p:cNvPr id="34" name="Text 32"/>
           <p:cNvSpPr/>
           <p:nvPr/>
         </p:nvSpPr>
@@ -13698,7 +13803,7 @@
       </p:sp>
       <p:sp>
         <p:nvSpPr>
-          <p:cNvPr id="32" name="Shape 30"/>
+          <p:cNvPr id="35" name="Shape 33"/>
           <p:cNvSpPr/>
           <p:nvPr/>
         </p:nvSpPr>
@@ -13725,7 +13830,7 @@
       </p:sp>
       <p:sp>
         <p:nvSpPr>
-          <p:cNvPr id="33" name="Text 31"/>
+          <p:cNvPr id="36" name="Text 34"/>
           <p:cNvSpPr/>
           <p:nvPr/>
         </p:nvSpPr>
@@ -14452,7 +14557,7 @@
                 <a:ea typeface="Trebuchet MS" pitchFamily="34" charset="-122"/>
                 <a:cs typeface="Trebuchet MS" pitchFamily="34" charset="-120"/>
               </a:rPr>
-              <a:t>section</a:t>
+              <a:t>intersect</a:t>
             </a:r>
             <a:endParaRPr lang="en-US" sz="2800" dirty="0"/>
           </a:p>
@@ -14541,11 +14646,11 @@
             </a:avLst>
           </a:prstGeom>
           <a:solidFill>
-            <a:srgbClr val="CCFBF1"/>
+            <a:srgbClr val="DDD6FE"/>
           </a:solidFill>
           <a:ln w="19050">
             <a:solidFill>
-              <a:srgbClr val="0D9488"/>
+              <a:srgbClr val="7C3AED"/>
             </a:solidFill>
             <a:prstDash val="solid"/>
           </a:ln>
@@ -14585,13 +14690,13 @@
             <a:r>
               <a:rPr lang="en-US" sz="1300" b="1" dirty="0">
                 <a:solidFill>
-                  <a:srgbClr val="0F766E"/>
+                  <a:srgbClr val="4C1D95"/>
                 </a:solidFill>
                 <a:latin typeface="Trebuchet MS" pitchFamily="34" charset="0"/>
                 <a:ea typeface="Trebuchet MS" pitchFamily="34" charset="-122"/>
                 <a:cs typeface="Trebuchet MS" pitchFamily="34" charset="-120"/>
               </a:rPr>
-              <a:t>sect</a:t>
+              <a:t>inter</a:t>
             </a:r>
             <a:endParaRPr lang="en-US" sz="1300" dirty="0"/>
           </a:p>
@@ -14630,7 +14735,7 @@
                 <a:ea typeface="Calibri" pitchFamily="34" charset="-122"/>
                 <a:cs typeface="Calibri" pitchFamily="34" charset="-120"/>
               </a:rPr>
-              <a:t>cut, divide</a:t>
+              <a:t>between</a:t>
             </a:r>
             <a:endParaRPr lang="en-US" sz="850" dirty="0"/>
           </a:p>
@@ -14653,11 +14758,11 @@
             </a:avLst>
           </a:prstGeom>
           <a:solidFill>
-            <a:srgbClr val="FCE7F3"/>
+            <a:srgbClr val="CCFBF1"/>
           </a:solidFill>
           <a:ln w="19050">
             <a:solidFill>
-              <a:srgbClr val="DB2777"/>
+              <a:srgbClr val="0D9488"/>
             </a:solidFill>
             <a:prstDash val="solid"/>
           </a:ln>
@@ -14697,13 +14802,13 @@
             <a:r>
               <a:rPr lang="en-US" sz="1300" b="1" dirty="0">
                 <a:solidFill>
-                  <a:srgbClr val="9D174D"/>
+                  <a:srgbClr val="0F766E"/>
                 </a:solidFill>
                 <a:latin typeface="Trebuchet MS" pitchFamily="34" charset="0"/>
                 <a:ea typeface="Trebuchet MS" pitchFamily="34" charset="-122"/>
                 <a:cs typeface="Trebuchet MS" pitchFamily="34" charset="-120"/>
               </a:rPr>
-              <a:t>ion</a:t>
+              <a:t>sect</a:t>
             </a:r>
             <a:endParaRPr lang="en-US" sz="1300" dirty="0"/>
           </a:p>
@@ -14742,7 +14847,7 @@
                 <a:ea typeface="Calibri" pitchFamily="34" charset="-122"/>
                 <a:cs typeface="Calibri" pitchFamily="34" charset="-120"/>
               </a:rPr>
-              <a:t>act or result of</a:t>
+              <a:t>cut, divide</a:t>
             </a:r>
             <a:endParaRPr lang="en-US" sz="850" dirty="0"/>
           </a:p>
@@ -14849,7 +14954,7 @@
         </p:nvSpPr>
         <p:spPr>
           <a:xfrm>
-            <a:off x="2999232" y="3364992"/>
+            <a:off x="2313432" y="3364992"/>
             <a:ext cx="1645920" cy="475488"/>
           </a:xfrm>
           <a:prstGeom prst="rect">
@@ -14876,7 +14981,7 @@
         </p:nvSpPr>
         <p:spPr>
           <a:xfrm>
-            <a:off x="2999232" y="3364992"/>
+            <a:off x="2313432" y="3364992"/>
             <a:ext cx="1645920" cy="475488"/>
           </a:xfrm>
           <a:prstGeom prst="rect">
@@ -14901,7 +15006,7 @@
                 <a:ea typeface="Trebuchet MS" pitchFamily="34" charset="-122"/>
                 <a:cs typeface="Trebuchet MS" pitchFamily="34" charset="-120"/>
               </a:rPr>
-              <a:t>sec</a:t>
+              <a:t>in</a:t>
             </a:r>
             <a:endParaRPr lang="en-US" sz="1400" dirty="0"/>
           </a:p>
@@ -14915,8 +15020,8 @@
         </p:nvSpPr>
         <p:spPr>
           <a:xfrm>
-            <a:off x="4645152" y="3364992"/>
-            <a:ext cx="1097280" cy="475488"/>
+            <a:off x="3959352" y="3364992"/>
+            <a:ext cx="411480" cy="475488"/>
           </a:xfrm>
           <a:prstGeom prst="rect">
             <a:avLst/>
@@ -14954,7 +15059,7 @@
         </p:nvSpPr>
         <p:spPr>
           <a:xfrm>
-            <a:off x="5742432" y="3364992"/>
+            <a:off x="4370832" y="3364992"/>
             <a:ext cx="1645920" cy="475488"/>
           </a:xfrm>
           <a:prstGeom prst="rect">
@@ -14981,7 +15086,7 @@
         </p:nvSpPr>
         <p:spPr>
           <a:xfrm>
-            <a:off x="5742432" y="3364992"/>
+            <a:off x="4370832" y="3364992"/>
             <a:ext cx="1645920" cy="475488"/>
           </a:xfrm>
           <a:prstGeom prst="rect">
@@ -15006,7 +15111,7 @@
                 <a:ea typeface="Trebuchet MS" pitchFamily="34" charset="-122"/>
                 <a:cs typeface="Trebuchet MS" pitchFamily="34" charset="-120"/>
               </a:rPr>
-              <a:t>tion</a:t>
+              <a:t>ter</a:t>
             </a:r>
             <a:endParaRPr lang="en-US" sz="1400" dirty="0"/>
           </a:p>
@@ -15014,7 +15119,112 @@
       </p:sp>
       <p:sp>
         <p:nvSpPr>
-          <p:cNvPr id="30" name="Shape 28"/>
+          <p:cNvPr id="30" name="Text 28"/>
+          <p:cNvSpPr/>
+          <p:nvPr/>
+        </p:nvSpPr>
+        <p:spPr>
+          <a:xfrm>
+            <a:off x="6016752" y="3364992"/>
+            <a:ext cx="411480" cy="475488"/>
+          </a:xfrm>
+          <a:prstGeom prst="rect">
+            <a:avLst/>
+          </a:prstGeom>
+          <a:noFill/>
+          <a:ln/>
+        </p:spPr>
+        <p:txBody>
+          <a:bodyPr wrap="square" lIns="0" tIns="0" rIns="0" bIns="0" rtlCol="0" anchor="ctr"/>
+          <a:lstStyle/>
+          <a:p>
+            <a:pPr algn="ctr" indent="0" marL="0">
+              <a:buNone/>
+            </a:pPr>
+            <a:r>
+              <a:rPr lang="en-US" sz="1600" b="1" dirty="0">
+                <a:solidFill>
+                  <a:srgbClr val="0D9488"/>
+                </a:solidFill>
+                <a:latin typeface="Trebuchet MS" pitchFamily="34" charset="0"/>
+                <a:ea typeface="Trebuchet MS" pitchFamily="34" charset="-122"/>
+                <a:cs typeface="Trebuchet MS" pitchFamily="34" charset="-120"/>
+              </a:rPr>
+              <a:t>·</a:t>
+            </a:r>
+            <a:endParaRPr lang="en-US" sz="1600" dirty="0"/>
+          </a:p>
+        </p:txBody>
+      </p:sp>
+      <p:sp>
+        <p:nvSpPr>
+          <p:cNvPr id="31" name="Shape 29"/>
+          <p:cNvSpPr/>
+          <p:nvPr/>
+        </p:nvSpPr>
+        <p:spPr>
+          <a:xfrm>
+            <a:off x="6428232" y="3364992"/>
+            <a:ext cx="1645920" cy="475488"/>
+          </a:xfrm>
+          <a:prstGeom prst="rect">
+            <a:avLst>
+              <a:gd name="adj" fmla="val 9615"/>
+            </a:avLst>
+          </a:prstGeom>
+          <a:solidFill>
+            <a:srgbClr val="FFFFFF"/>
+          </a:solidFill>
+          <a:ln w="12700">
+            <a:solidFill>
+              <a:srgbClr val="0D9488"/>
+            </a:solidFill>
+            <a:prstDash val="solid"/>
+          </a:ln>
+        </p:spPr>
+      </p:sp>
+      <p:sp>
+        <p:nvSpPr>
+          <p:cNvPr id="32" name="Text 30"/>
+          <p:cNvSpPr/>
+          <p:nvPr/>
+        </p:nvSpPr>
+        <p:spPr>
+          <a:xfrm>
+            <a:off x="6428232" y="3364992"/>
+            <a:ext cx="1645920" cy="475488"/>
+          </a:xfrm>
+          <a:prstGeom prst="rect">
+            <a:avLst/>
+          </a:prstGeom>
+          <a:noFill/>
+          <a:ln/>
+        </p:spPr>
+        <p:txBody>
+          <a:bodyPr wrap="square" lIns="0" tIns="0" rIns="0" bIns="0" rtlCol="0" anchor="ctr"/>
+          <a:lstStyle/>
+          <a:p>
+            <a:pPr algn="ctr" indent="0" marL="0">
+              <a:buNone/>
+            </a:pPr>
+            <a:r>
+              <a:rPr lang="en-US" sz="1400" b="1" dirty="0">
+                <a:solidFill>
+                  <a:srgbClr val="0D9488"/>
+                </a:solidFill>
+                <a:latin typeface="Trebuchet MS" pitchFamily="34" charset="0"/>
+                <a:ea typeface="Trebuchet MS" pitchFamily="34" charset="-122"/>
+                <a:cs typeface="Trebuchet MS" pitchFamily="34" charset="-120"/>
+              </a:rPr>
+              <a:t>sect</a:t>
+            </a:r>
+            <a:endParaRPr lang="en-US" sz="1400" dirty="0"/>
+          </a:p>
+        </p:txBody>
+      </p:sp>
+      <p:sp>
+        <p:nvSpPr>
+          <p:cNvPr id="33" name="Shape 31"/>
           <p:cNvSpPr/>
           <p:nvPr/>
         </p:nvSpPr>
@@ -15041,7 +15251,7 @@
       </p:sp>
       <p:sp>
         <p:nvSpPr>
-          <p:cNvPr id="31" name="Text 29"/>
+          <p:cNvPr id="34" name="Text 32"/>
           <p:cNvSpPr/>
           <p:nvPr/>
         </p:nvSpPr>
@@ -15080,18 +15290,18 @@
       </p:sp>
       <p:sp>
         <p:nvSpPr>
-          <p:cNvPr id="32" name="Shape 30"/>
+          <p:cNvPr id="35" name="Shape 33"/>
           <p:cNvSpPr/>
           <p:nvPr/>
         </p:nvSpPr>
         <p:spPr>
           <a:xfrm>
             <a:off x="1874520" y="4096512"/>
-            <a:ext cx="6903720" cy="804672"/>
+            <a:ext cx="6903720" cy="658368"/>
           </a:xfrm>
           <a:prstGeom prst="rect">
             <a:avLst>
-              <a:gd name="adj" fmla="val 6818"/>
+              <a:gd name="adj" fmla="val 8333"/>
             </a:avLst>
           </a:prstGeom>
           <a:solidFill>
@@ -15107,18 +15317,18 @@
       </p:sp>
       <p:sp>
         <p:nvSpPr>
-          <p:cNvPr id="33" name="Shape 31"/>
-          <p:cNvSpPr/>
-          <p:nvPr/>
-        </p:nvSpPr>
-        <p:spPr>
-          <a:xfrm>
-            <a:off x="2254649" y="4169664"/>
-            <a:ext cx="685800" cy="384048"/>
+          <p:cNvPr id="36" name="Shape 34"/>
+          <p:cNvSpPr/>
+          <p:nvPr/>
+        </p:nvSpPr>
+        <p:spPr>
+          <a:xfrm>
+            <a:off x="2023872" y="4169664"/>
+            <a:ext cx="685800" cy="475488"/>
           </a:xfrm>
           <a:prstGeom prst="rect">
             <a:avLst>
-              <a:gd name="adj" fmla="val 9524"/>
+              <a:gd name="adj" fmla="val 7692"/>
             </a:avLst>
           </a:prstGeom>
           <a:solidFill>
@@ -15134,14 +15344,14 @@
       </p:sp>
       <p:sp>
         <p:nvSpPr>
-          <p:cNvPr id="34" name="Text 32"/>
-          <p:cNvSpPr/>
-          <p:nvPr/>
-        </p:nvSpPr>
-        <p:spPr>
-          <a:xfrm>
-            <a:off x="2254649" y="4169664"/>
-            <a:ext cx="685800" cy="384048"/>
+          <p:cNvPr id="37" name="Text 35"/>
+          <p:cNvSpPr/>
+          <p:nvPr/>
+        </p:nvSpPr>
+        <p:spPr>
+          <a:xfrm>
+            <a:off x="2023872" y="4169664"/>
+            <a:ext cx="685800" cy="475488"/>
           </a:xfrm>
           <a:prstGeom prst="rect">
             <a:avLst/>
@@ -15165,7 +15375,7 @@
                 <a:ea typeface="Trebuchet MS" pitchFamily="34" charset="-122"/>
                 <a:cs typeface="Trebuchet MS" pitchFamily="34" charset="-120"/>
               </a:rPr>
-              <a:t>s</a:t>
+              <a:t>i</a:t>
             </a:r>
             <a:endParaRPr lang="en-US" sz="900" dirty="0"/>
           </a:p>
@@ -15173,18 +15383,18 @@
       </p:sp>
       <p:sp>
         <p:nvSpPr>
-          <p:cNvPr id="35" name="Shape 33"/>
-          <p:cNvSpPr/>
-          <p:nvPr/>
-        </p:nvSpPr>
-        <p:spPr>
-          <a:xfrm>
-            <a:off x="3293146" y="4169664"/>
-            <a:ext cx="685800" cy="384048"/>
+          <p:cNvPr id="38" name="Shape 36"/>
+          <p:cNvSpPr/>
+          <p:nvPr/>
+        </p:nvSpPr>
+        <p:spPr>
+          <a:xfrm>
+            <a:off x="2831592" y="4169664"/>
+            <a:ext cx="685800" cy="475488"/>
           </a:xfrm>
           <a:prstGeom prst="rect">
             <a:avLst>
-              <a:gd name="adj" fmla="val 9524"/>
+              <a:gd name="adj" fmla="val 7692"/>
             </a:avLst>
           </a:prstGeom>
           <a:solidFill>
@@ -15200,14 +15410,14 @@
       </p:sp>
       <p:sp>
         <p:nvSpPr>
-          <p:cNvPr id="36" name="Text 34"/>
-          <p:cNvSpPr/>
-          <p:nvPr/>
-        </p:nvSpPr>
-        <p:spPr>
-          <a:xfrm>
-            <a:off x="3293146" y="4169664"/>
-            <a:ext cx="685800" cy="384048"/>
+          <p:cNvPr id="39" name="Text 37"/>
+          <p:cNvSpPr/>
+          <p:nvPr/>
+        </p:nvSpPr>
+        <p:spPr>
+          <a:xfrm>
+            <a:off x="2831592" y="4169664"/>
+            <a:ext cx="685800" cy="475488"/>
           </a:xfrm>
           <a:prstGeom prst="rect">
             <a:avLst/>
@@ -15231,7 +15441,7 @@
                 <a:ea typeface="Trebuchet MS" pitchFamily="34" charset="-122"/>
                 <a:cs typeface="Trebuchet MS" pitchFamily="34" charset="-120"/>
               </a:rPr>
-              <a:t>e</a:t>
+              <a:t>n</a:t>
             </a:r>
             <a:endParaRPr lang="en-US" sz="900" dirty="0"/>
           </a:p>
@@ -15239,18 +15449,18 @@
       </p:sp>
       <p:sp>
         <p:nvSpPr>
-          <p:cNvPr id="37" name="Shape 35"/>
-          <p:cNvSpPr/>
-          <p:nvPr/>
-        </p:nvSpPr>
-        <p:spPr>
-          <a:xfrm>
-            <a:off x="4331643" y="4169664"/>
-            <a:ext cx="685800" cy="384048"/>
+          <p:cNvPr id="40" name="Shape 38"/>
+          <p:cNvSpPr/>
+          <p:nvPr/>
+        </p:nvSpPr>
+        <p:spPr>
+          <a:xfrm>
+            <a:off x="3639312" y="4169664"/>
+            <a:ext cx="685800" cy="475488"/>
           </a:xfrm>
           <a:prstGeom prst="rect">
             <a:avLst>
-              <a:gd name="adj" fmla="val 9524"/>
+              <a:gd name="adj" fmla="val 7692"/>
             </a:avLst>
           </a:prstGeom>
           <a:solidFill>
@@ -15266,14 +15476,14 @@
       </p:sp>
       <p:sp>
         <p:nvSpPr>
-          <p:cNvPr id="38" name="Text 36"/>
-          <p:cNvSpPr/>
-          <p:nvPr/>
-        </p:nvSpPr>
-        <p:spPr>
-          <a:xfrm>
-            <a:off x="4331643" y="4169664"/>
-            <a:ext cx="685800" cy="384048"/>
+          <p:cNvPr id="41" name="Text 39"/>
+          <p:cNvSpPr/>
+          <p:nvPr/>
+        </p:nvSpPr>
+        <p:spPr>
+          <a:xfrm>
+            <a:off x="3639312" y="4169664"/>
+            <a:ext cx="685800" cy="475488"/>
           </a:xfrm>
           <a:prstGeom prst="rect">
             <a:avLst/>
@@ -15297,7 +15507,7 @@
                 <a:ea typeface="Trebuchet MS" pitchFamily="34" charset="-122"/>
                 <a:cs typeface="Trebuchet MS" pitchFamily="34" charset="-120"/>
               </a:rPr>
-              <a:t>c</a:t>
+              <a:t>t</a:t>
             </a:r>
             <a:endParaRPr lang="en-US" sz="900" dirty="0"/>
           </a:p>
@@ -15305,18 +15515,18 @@
       </p:sp>
       <p:sp>
         <p:nvSpPr>
-          <p:cNvPr id="39" name="Shape 37"/>
-          <p:cNvSpPr/>
-          <p:nvPr/>
-        </p:nvSpPr>
-        <p:spPr>
-          <a:xfrm>
-            <a:off x="5370141" y="4169664"/>
-            <a:ext cx="685800" cy="384048"/>
+          <p:cNvPr id="42" name="Shape 40"/>
+          <p:cNvSpPr/>
+          <p:nvPr/>
+        </p:nvSpPr>
+        <p:spPr>
+          <a:xfrm>
+            <a:off x="4447032" y="4169664"/>
+            <a:ext cx="685800" cy="475488"/>
           </a:xfrm>
           <a:prstGeom prst="rect">
             <a:avLst>
-              <a:gd name="adj" fmla="val 9524"/>
+              <a:gd name="adj" fmla="val 7692"/>
             </a:avLst>
           </a:prstGeom>
           <a:solidFill>
@@ -15332,14 +15542,14 @@
       </p:sp>
       <p:sp>
         <p:nvSpPr>
-          <p:cNvPr id="40" name="Text 38"/>
-          <p:cNvSpPr/>
-          <p:nvPr/>
-        </p:nvSpPr>
-        <p:spPr>
-          <a:xfrm>
-            <a:off x="5370141" y="4169664"/>
-            <a:ext cx="685800" cy="384048"/>
+          <p:cNvPr id="43" name="Text 41"/>
+          <p:cNvSpPr/>
+          <p:nvPr/>
+        </p:nvSpPr>
+        <p:spPr>
+          <a:xfrm>
+            <a:off x="4447032" y="4169664"/>
+            <a:ext cx="685800" cy="475488"/>
           </a:xfrm>
           <a:prstGeom prst="rect">
             <a:avLst/>
@@ -15363,7 +15573,7 @@
                 <a:ea typeface="Trebuchet MS" pitchFamily="34" charset="-122"/>
                 <a:cs typeface="Trebuchet MS" pitchFamily="34" charset="-120"/>
               </a:rPr>
-              <a:t>t</a:t>
+              <a:t>er</a:t>
             </a:r>
             <a:endParaRPr lang="en-US" sz="900" dirty="0"/>
           </a:p>
@@ -15371,18 +15581,18 @@
       </p:sp>
       <p:sp>
         <p:nvSpPr>
-          <p:cNvPr id="41" name="Shape 39"/>
-          <p:cNvSpPr/>
-          <p:nvPr/>
-        </p:nvSpPr>
-        <p:spPr>
-          <a:xfrm>
-            <a:off x="6408638" y="4169664"/>
-            <a:ext cx="685800" cy="384048"/>
+          <p:cNvPr id="44" name="Shape 42"/>
+          <p:cNvSpPr/>
+          <p:nvPr/>
+        </p:nvSpPr>
+        <p:spPr>
+          <a:xfrm>
+            <a:off x="5254752" y="4169664"/>
+            <a:ext cx="685800" cy="475488"/>
           </a:xfrm>
           <a:prstGeom prst="rect">
             <a:avLst>
-              <a:gd name="adj" fmla="val 9524"/>
+              <a:gd name="adj" fmla="val 7692"/>
             </a:avLst>
           </a:prstGeom>
           <a:solidFill>
@@ -15398,14 +15608,14 @@
       </p:sp>
       <p:sp>
         <p:nvSpPr>
-          <p:cNvPr id="42" name="Text 40"/>
-          <p:cNvSpPr/>
-          <p:nvPr/>
-        </p:nvSpPr>
-        <p:spPr>
-          <a:xfrm>
-            <a:off x="6408638" y="4169664"/>
-            <a:ext cx="685800" cy="384048"/>
+          <p:cNvPr id="45" name="Text 43"/>
+          <p:cNvSpPr/>
+          <p:nvPr/>
+        </p:nvSpPr>
+        <p:spPr>
+          <a:xfrm>
+            <a:off x="5254752" y="4169664"/>
+            <a:ext cx="685800" cy="475488"/>
           </a:xfrm>
           <a:prstGeom prst="rect">
             <a:avLst/>
@@ -15429,7 +15639,7 @@
                 <a:ea typeface="Trebuchet MS" pitchFamily="34" charset="-122"/>
                 <a:cs typeface="Trebuchet MS" pitchFamily="34" charset="-120"/>
               </a:rPr>
-              <a:t>io</a:t>
+              <a:t>s</a:t>
             </a:r>
             <a:endParaRPr lang="en-US" sz="900" dirty="0"/>
           </a:p>
@@ -15437,57 +15647,18 @@
       </p:sp>
       <p:sp>
         <p:nvSpPr>
-          <p:cNvPr id="43" name="Text 41"/>
-          <p:cNvSpPr/>
-          <p:nvPr/>
-        </p:nvSpPr>
-        <p:spPr>
-          <a:xfrm>
-            <a:off x="6408638" y="4572000"/>
-            <a:ext cx="685800" cy="219456"/>
-          </a:xfrm>
-          <a:prstGeom prst="rect">
-            <a:avLst/>
-          </a:prstGeom>
-          <a:noFill/>
-          <a:ln/>
-        </p:spPr>
-        <p:txBody>
-          <a:bodyPr wrap="square" lIns="0" tIns="0" rIns="0" bIns="0" rtlCol="0" anchor="t"/>
-          <a:lstStyle/>
-          <a:p>
-            <a:pPr algn="ctr" indent="0" marL="0">
-              <a:buNone/>
-            </a:pPr>
-            <a:r>
-              <a:rPr lang="en-US" sz="750" i="1" dirty="0">
-                <a:solidFill>
-                  <a:srgbClr val="94A3B8"/>
-                </a:solidFill>
-                <a:latin typeface="Calibri" pitchFamily="34" charset="0"/>
-                <a:ea typeface="Calibri" pitchFamily="34" charset="-122"/>
-                <a:cs typeface="Calibri" pitchFamily="34" charset="-120"/>
-              </a:rPr>
-              <a:t>/sh/</a:t>
-            </a:r>
-            <a:endParaRPr lang="en-US" sz="750" dirty="0"/>
-          </a:p>
-        </p:txBody>
-      </p:sp>
-      <p:sp>
-        <p:nvSpPr>
-          <p:cNvPr id="44" name="Shape 42"/>
-          <p:cNvSpPr/>
-          <p:nvPr/>
-        </p:nvSpPr>
-        <p:spPr>
-          <a:xfrm>
-            <a:off x="7447135" y="4169664"/>
-            <a:ext cx="685800" cy="384048"/>
+          <p:cNvPr id="46" name="Shape 44"/>
+          <p:cNvSpPr/>
+          <p:nvPr/>
+        </p:nvSpPr>
+        <p:spPr>
+          <a:xfrm>
+            <a:off x="6062472" y="4169664"/>
+            <a:ext cx="685800" cy="475488"/>
           </a:xfrm>
           <a:prstGeom prst="rect">
             <a:avLst>
-              <a:gd name="adj" fmla="val 9524"/>
+              <a:gd name="adj" fmla="val 7692"/>
             </a:avLst>
           </a:prstGeom>
           <a:solidFill>
@@ -15503,14 +15674,14 @@
       </p:sp>
       <p:sp>
         <p:nvSpPr>
-          <p:cNvPr id="45" name="Text 43"/>
-          <p:cNvSpPr/>
-          <p:nvPr/>
-        </p:nvSpPr>
-        <p:spPr>
-          <a:xfrm>
-            <a:off x="7447135" y="4169664"/>
-            <a:ext cx="685800" cy="384048"/>
+          <p:cNvPr id="47" name="Text 45"/>
+          <p:cNvSpPr/>
+          <p:nvPr/>
+        </p:nvSpPr>
+        <p:spPr>
+          <a:xfrm>
+            <a:off x="6062472" y="4169664"/>
+            <a:ext cx="685800" cy="475488"/>
           </a:xfrm>
           <a:prstGeom prst="rect">
             <a:avLst/>
@@ -15534,7 +15705,139 @@
                 <a:ea typeface="Trebuchet MS" pitchFamily="34" charset="-122"/>
                 <a:cs typeface="Trebuchet MS" pitchFamily="34" charset="-120"/>
               </a:rPr>
-              <a:t>n</a:t>
+              <a:t>e</a:t>
+            </a:r>
+            <a:endParaRPr lang="en-US" sz="900" dirty="0"/>
+          </a:p>
+        </p:txBody>
+      </p:sp>
+      <p:sp>
+        <p:nvSpPr>
+          <p:cNvPr id="48" name="Shape 46"/>
+          <p:cNvSpPr/>
+          <p:nvPr/>
+        </p:nvSpPr>
+        <p:spPr>
+          <a:xfrm>
+            <a:off x="6870192" y="4169664"/>
+            <a:ext cx="685800" cy="475488"/>
+          </a:xfrm>
+          <a:prstGeom prst="rect">
+            <a:avLst>
+              <a:gd name="adj" fmla="val 7692"/>
+            </a:avLst>
+          </a:prstGeom>
+          <a:solidFill>
+            <a:srgbClr val="FFFFFF"/>
+          </a:solidFill>
+          <a:ln w="12700">
+            <a:solidFill>
+              <a:srgbClr val="DB2777"/>
+            </a:solidFill>
+            <a:prstDash val="solid"/>
+          </a:ln>
+        </p:spPr>
+      </p:sp>
+      <p:sp>
+        <p:nvSpPr>
+          <p:cNvPr id="49" name="Text 47"/>
+          <p:cNvSpPr/>
+          <p:nvPr/>
+        </p:nvSpPr>
+        <p:spPr>
+          <a:xfrm>
+            <a:off x="6870192" y="4169664"/>
+            <a:ext cx="685800" cy="475488"/>
+          </a:xfrm>
+          <a:prstGeom prst="rect">
+            <a:avLst/>
+          </a:prstGeom>
+          <a:noFill/>
+          <a:ln/>
+        </p:spPr>
+        <p:txBody>
+          <a:bodyPr wrap="square" lIns="0" tIns="0" rIns="0" bIns="0" rtlCol="0" anchor="ctr"/>
+          <a:lstStyle/>
+          <a:p>
+            <a:pPr algn="ctr" indent="0" marL="0">
+              <a:buNone/>
+            </a:pPr>
+            <a:r>
+              <a:rPr lang="en-US" sz="900" b="1" dirty="0">
+                <a:solidFill>
+                  <a:srgbClr val="9D174D"/>
+                </a:solidFill>
+                <a:latin typeface="Trebuchet MS" pitchFamily="34" charset="0"/>
+                <a:ea typeface="Trebuchet MS" pitchFamily="34" charset="-122"/>
+                <a:cs typeface="Trebuchet MS" pitchFamily="34" charset="-120"/>
+              </a:rPr>
+              <a:t>c</a:t>
+            </a:r>
+            <a:endParaRPr lang="en-US" sz="900" dirty="0"/>
+          </a:p>
+        </p:txBody>
+      </p:sp>
+      <p:sp>
+        <p:nvSpPr>
+          <p:cNvPr id="50" name="Shape 48"/>
+          <p:cNvSpPr/>
+          <p:nvPr/>
+        </p:nvSpPr>
+        <p:spPr>
+          <a:xfrm>
+            <a:off x="7677912" y="4169664"/>
+            <a:ext cx="685800" cy="475488"/>
+          </a:xfrm>
+          <a:prstGeom prst="rect">
+            <a:avLst>
+              <a:gd name="adj" fmla="val 7692"/>
+            </a:avLst>
+          </a:prstGeom>
+          <a:solidFill>
+            <a:srgbClr val="FFFFFF"/>
+          </a:solidFill>
+          <a:ln w="12700">
+            <a:solidFill>
+              <a:srgbClr val="DB2777"/>
+            </a:solidFill>
+            <a:prstDash val="solid"/>
+          </a:ln>
+        </p:spPr>
+      </p:sp>
+      <p:sp>
+        <p:nvSpPr>
+          <p:cNvPr id="51" name="Text 49"/>
+          <p:cNvSpPr/>
+          <p:nvPr/>
+        </p:nvSpPr>
+        <p:spPr>
+          <a:xfrm>
+            <a:off x="7677912" y="4169664"/>
+            <a:ext cx="685800" cy="475488"/>
+          </a:xfrm>
+          <a:prstGeom prst="rect">
+            <a:avLst/>
+          </a:prstGeom>
+          <a:noFill/>
+          <a:ln/>
+        </p:spPr>
+        <p:txBody>
+          <a:bodyPr wrap="square" lIns="0" tIns="0" rIns="0" bIns="0" rtlCol="0" anchor="ctr"/>
+          <a:lstStyle/>
+          <a:p>
+            <a:pPr algn="ctr" indent="0" marL="0">
+              <a:buNone/>
+            </a:pPr>
+            <a:r>
+              <a:rPr lang="en-US" sz="900" b="1" dirty="0">
+                <a:solidFill>
+                  <a:srgbClr val="9D174D"/>
+                </a:solidFill>
+                <a:latin typeface="Trebuchet MS" pitchFamily="34" charset="0"/>
+                <a:ea typeface="Trebuchet MS" pitchFamily="34" charset="-122"/>
+                <a:cs typeface="Trebuchet MS" pitchFamily="34" charset="-120"/>
+              </a:rPr>
+              <a:t>t</a:t>
             </a:r>
             <a:endParaRPr lang="en-US" sz="900" dirty="0"/>
           </a:p>
@@ -16442,7 +16745,7 @@
                 <a:ea typeface="Trebuchet MS" pitchFamily="34" charset="-122"/>
                 <a:cs typeface="Trebuchet MS" pitchFamily="34" charset="-120"/>
               </a:rPr>
-              <a:t>1</a:t>
+              <a:t>2</a:t>
             </a:r>
             <a:pPr algn="ctr" indent="0" marL="0">
               <a:buNone/>
@@ -16456,7 +16759,7 @@
                 <a:ea typeface="Trebuchet MS" pitchFamily="34" charset="-122"/>
                 <a:cs typeface="Trebuchet MS" pitchFamily="34" charset="-120"/>
               </a:rPr>
-              <a:t>  punctuation mark</a:t>
+              <a:t>  punctuation marks</a:t>
             </a:r>
             <a:endParaRPr lang="en-US" sz="2800" dirty="0"/>
           </a:p>
@@ -16860,7 +17163,7 @@
                 <a:ea typeface="Calibri" pitchFamily="34" charset="-122"/>
                 <a:cs typeface="Calibri" pitchFamily="34" charset="-120"/>
               </a:rPr>
-              <a:t>When you </a:t>
+              <a:t>During </a:t>
             </a:r>
             <a:pPr algn="l" indent="0" marL="0">
               <a:buNone/>
@@ -16877,7 +17180,7 @@
                 <a:ea typeface="Calibri" pitchFamily="34" charset="-122"/>
                 <a:cs typeface="Calibri" pitchFamily="34" charset="-120"/>
               </a:rPr>
-              <a:t>dissect</a:t>
+              <a:t>dissection</a:t>
             </a:r>
             <a:pPr algn="l" indent="0" marL="0">
               <a:buNone/>
@@ -16891,7 +17194,7 @@
                 <a:ea typeface="Calibri" pitchFamily="34" charset="-122"/>
                 <a:cs typeface="Calibri" pitchFamily="34" charset="-120"/>
               </a:rPr>
-              <a:t> a leaf, you can identify each </a:t>
+              <a:t>, the scientist recorded each </a:t>
             </a:r>
             <a:pPr algn="l" indent="0" marL="0">
               <a:buNone/>
@@ -16922,7 +17225,7 @@
                 <a:ea typeface="Calibri" pitchFamily="34" charset="-122"/>
                 <a:cs typeface="Calibri" pitchFamily="34" charset="-120"/>
               </a:rPr>
-              <a:t> where the veins </a:t>
+              <a:t> carefully, then studied the </a:t>
             </a:r>
             <a:pPr algn="l" indent="0" marL="0">
               <a:buNone/>
@@ -16939,7 +17242,7 @@
                 <a:ea typeface="Calibri" pitchFamily="34" charset="-122"/>
                 <a:cs typeface="Calibri" pitchFamily="34" charset="-120"/>
               </a:rPr>
-              <a:t>intersect</a:t>
+              <a:t>insect</a:t>
             </a:r>
             <a:pPr algn="l" indent="0" marL="0">
               <a:buNone/>
@@ -16953,7 +17256,7 @@
                 <a:ea typeface="Calibri" pitchFamily="34" charset="-122"/>
                 <a:cs typeface="Calibri" pitchFamily="34" charset="-120"/>
               </a:rPr>
-              <a:t>.</a:t>
+              <a:t>'s body parts.</a:t>
             </a:r>
             <a:endParaRPr lang="en-US" sz="1800" dirty="0"/>
           </a:p>
@@ -17108,7 +17411,7 @@
                 <a:ea typeface="Trebuchet MS" pitchFamily="34" charset="-122"/>
                 <a:cs typeface="Trebuchet MS" pitchFamily="34" charset="-120"/>
               </a:rPr>
-              <a:t>dissect</a:t>
+              <a:t>dissection</a:t>
             </a:r>
             <a:endParaRPr lang="en-US" sz="1400" dirty="0"/>
           </a:p>
@@ -17364,7 +17667,7 @@
                 <a:ea typeface="Trebuchet MS" pitchFamily="34" charset="-122"/>
                 <a:cs typeface="Trebuchet MS" pitchFamily="34" charset="-120"/>
               </a:rPr>
-              <a:t>intersect</a:t>
+              <a:t>insect</a:t>
             </a:r>
             <a:endParaRPr lang="en-US" sz="1400" dirty="0"/>
           </a:p>
@@ -17834,7 +18137,7 @@
                 <a:ea typeface="Trebuchet MS" pitchFamily="34" charset="-122"/>
                 <a:cs typeface="Trebuchet MS" pitchFamily="34" charset="-120"/>
               </a:rPr>
-              <a:t>dissect</a:t>
+              <a:t>dissection</a:t>
             </a:r>
             <a:endParaRPr lang="en-US" sz="2800" dirty="0"/>
           </a:p>
@@ -18661,7 +18964,7 @@
                 <a:ea typeface="Trebuchet MS" pitchFamily="34" charset="-122"/>
                 <a:cs typeface="Trebuchet MS" pitchFamily="34" charset="-120"/>
               </a:rPr>
-              <a:t>dissect</a:t>
+              <a:t>dissection</a:t>
             </a:r>
             <a:endParaRPr lang="en-US" sz="2800" dirty="0"/>
           </a:p>
@@ -18862,11 +19165,11 @@
             </a:avLst>
           </a:prstGeom>
           <a:solidFill>
-            <a:srgbClr val="FCE7F3"/>
+            <a:srgbClr val="CCFBF1"/>
           </a:solidFill>
           <a:ln w="19050">
             <a:solidFill>
-              <a:srgbClr val="DB2777"/>
+              <a:srgbClr val="0D9488"/>
             </a:solidFill>
             <a:prstDash val="solid"/>
           </a:ln>
@@ -18906,13 +19209,13 @@
             <a:r>
               <a:rPr lang="en-US" sz="1300" b="1" dirty="0">
                 <a:solidFill>
-                  <a:srgbClr val="9D174D"/>
+                  <a:srgbClr val="0F766E"/>
                 </a:solidFill>
                 <a:latin typeface="Trebuchet MS" pitchFamily="34" charset="0"/>
                 <a:ea typeface="Trebuchet MS" pitchFamily="34" charset="-122"/>
                 <a:cs typeface="Trebuchet MS" pitchFamily="34" charset="-120"/>
               </a:rPr>
-              <a:t>ss</a:t>
+              <a:t>sect</a:t>
             </a:r>
             <a:endParaRPr lang="en-US" sz="1300" dirty="0"/>
           </a:p>
@@ -18951,7 +19254,7 @@
                 <a:ea typeface="Calibri" pitchFamily="34" charset="-122"/>
                 <a:cs typeface="Calibri" pitchFamily="34" charset="-120"/>
               </a:rPr>
-              <a:t>connecting consonant</a:t>
+              <a:t>cut, divide</a:t>
             </a:r>
             <a:endParaRPr lang="en-US" sz="850" dirty="0"/>
           </a:p>
@@ -18959,46 +19262,7 @@
       </p:sp>
       <p:sp>
         <p:nvSpPr>
-          <p:cNvPr id="22" name="Text 20"/>
-          <p:cNvSpPr/>
-          <p:nvPr/>
-        </p:nvSpPr>
-        <p:spPr>
-          <a:xfrm>
-            <a:off x="4370832" y="2752344"/>
-            <a:ext cx="1828800" cy="182880"/>
-          </a:xfrm>
-          <a:prstGeom prst="rect">
-            <a:avLst/>
-          </a:prstGeom>
-          <a:noFill/>
-          <a:ln/>
-        </p:spPr>
-        <p:txBody>
-          <a:bodyPr wrap="square" lIns="0" tIns="0" rIns="0" bIns="0" rtlCol="0" anchor="t"/>
-          <a:lstStyle/>
-          <a:p>
-            <a:pPr algn="ctr" indent="0" marL="0">
-              <a:buNone/>
-            </a:pPr>
-            <a:r>
-              <a:rPr lang="en-US" sz="700" i="1" dirty="0">
-                <a:solidFill>
-                  <a:srgbClr val="94A3B8"/>
-                </a:solidFill>
-                <a:latin typeface="Calibri" pitchFamily="34" charset="0"/>
-                <a:ea typeface="Calibri" pitchFamily="34" charset="-122"/>
-                <a:cs typeface="Calibri" pitchFamily="34" charset="-120"/>
-              </a:rPr>
-              <a:t>di + sect → dissect, doubled 's' at join</a:t>
-            </a:r>
-            <a:endParaRPr lang="en-US" sz="700" dirty="0"/>
-          </a:p>
-        </p:txBody>
-      </p:sp>
-      <p:sp>
-        <p:nvSpPr>
-          <p:cNvPr id="23" name="Shape 21"/>
+          <p:cNvPr id="22" name="Shape 20"/>
           <p:cNvSpPr/>
           <p:nvPr/>
         </p:nvSpPr>
@@ -19013,11 +19277,11 @@
             </a:avLst>
           </a:prstGeom>
           <a:solidFill>
-            <a:srgbClr val="CCFBF1"/>
+            <a:srgbClr val="FCE7F3"/>
           </a:solidFill>
           <a:ln w="19050">
             <a:solidFill>
-              <a:srgbClr val="0D9488"/>
+              <a:srgbClr val="DB2777"/>
             </a:solidFill>
             <a:prstDash val="solid"/>
           </a:ln>
@@ -19032,7 +19296,7 @@
       </p:sp>
       <p:sp>
         <p:nvSpPr>
-          <p:cNvPr id="24" name="Text 22"/>
+          <p:cNvPr id="23" name="Text 21"/>
           <p:cNvSpPr/>
           <p:nvPr/>
         </p:nvSpPr>
@@ -19057,13 +19321,13 @@
             <a:r>
               <a:rPr lang="en-US" sz="1300" b="1" dirty="0">
                 <a:solidFill>
-                  <a:srgbClr val="0F766E"/>
+                  <a:srgbClr val="9D174D"/>
                 </a:solidFill>
                 <a:latin typeface="Trebuchet MS" pitchFamily="34" charset="0"/>
                 <a:ea typeface="Trebuchet MS" pitchFamily="34" charset="-122"/>
                 <a:cs typeface="Trebuchet MS" pitchFamily="34" charset="-120"/>
               </a:rPr>
-              <a:t>sect</a:t>
+              <a:t>ion</a:t>
             </a:r>
             <a:endParaRPr lang="en-US" sz="1300" dirty="0"/>
           </a:p>
@@ -19071,7 +19335,7 @@
       </p:sp>
       <p:sp>
         <p:nvSpPr>
-          <p:cNvPr id="25" name="Text 23"/>
+          <p:cNvPr id="24" name="Text 22"/>
           <p:cNvSpPr/>
           <p:nvPr/>
         </p:nvSpPr>
@@ -19102,7 +19366,7 @@
                 <a:ea typeface="Calibri" pitchFamily="34" charset="-122"/>
                 <a:cs typeface="Calibri" pitchFamily="34" charset="-120"/>
               </a:rPr>
-              <a:t>cut, divide</a:t>
+              <a:t>act or process of</a:t>
             </a:r>
             <a:endParaRPr lang="en-US" sz="850" dirty="0"/>
           </a:p>
@@ -19110,7 +19374,7 @@
       </p:sp>
       <p:sp>
         <p:nvSpPr>
-          <p:cNvPr id="26" name="Shape 24"/>
+          <p:cNvPr id="25" name="Shape 23"/>
           <p:cNvSpPr/>
           <p:nvPr/>
         </p:nvSpPr>
@@ -19137,7 +19401,7 @@
       </p:sp>
       <p:sp>
         <p:nvSpPr>
-          <p:cNvPr id="27" name="Text 25"/>
+          <p:cNvPr id="26" name="Text 24"/>
           <p:cNvSpPr/>
           <p:nvPr/>
         </p:nvSpPr>
@@ -19176,7 +19440,7 @@
       </p:sp>
       <p:sp>
         <p:nvSpPr>
-          <p:cNvPr id="28" name="Shape 26"/>
+          <p:cNvPr id="27" name="Shape 25"/>
           <p:cNvSpPr/>
           <p:nvPr/>
         </p:nvSpPr>
@@ -19203,7 +19467,7 @@
       </p:sp>
       <p:sp>
         <p:nvSpPr>
-          <p:cNvPr id="29" name="Text 27"/>
+          <p:cNvPr id="28" name="Text 26"/>
           <p:cNvSpPr/>
           <p:nvPr/>
         </p:nvSpPr>
@@ -19242,7 +19506,7 @@
       </p:sp>
       <p:sp>
         <p:nvSpPr>
-          <p:cNvPr id="30" name="Shape 28"/>
+          <p:cNvPr id="29" name="Shape 27"/>
           <p:cNvSpPr/>
           <p:nvPr/>
         </p:nvSpPr>
@@ -19269,7 +19533,7 @@
       </p:sp>
       <p:sp>
         <p:nvSpPr>
-          <p:cNvPr id="31" name="Text 29"/>
+          <p:cNvPr id="30" name="Text 28"/>
           <p:cNvSpPr/>
           <p:nvPr/>
         </p:nvSpPr>
@@ -19308,7 +19572,7 @@
       </p:sp>
       <p:sp>
         <p:nvSpPr>
-          <p:cNvPr id="32" name="Shape 30"/>
+          <p:cNvPr id="31" name="Shape 29"/>
           <p:cNvSpPr/>
           <p:nvPr/>
         </p:nvSpPr>
@@ -19335,7 +19599,7 @@
       </p:sp>
       <p:sp>
         <p:nvSpPr>
-          <p:cNvPr id="33" name="Text 31"/>
+          <p:cNvPr id="32" name="Text 30"/>
           <p:cNvSpPr/>
           <p:nvPr/>
         </p:nvSpPr>
@@ -19797,7 +20061,7 @@
                 <a:ea typeface="Trebuchet MS" pitchFamily="34" charset="-122"/>
                 <a:cs typeface="Trebuchet MS" pitchFamily="34" charset="-120"/>
               </a:rPr>
-              <a:t>dissect</a:t>
+              <a:t>dissection</a:t>
             </a:r>
             <a:endParaRPr lang="en-US" sz="2800" dirty="0"/>
           </a:p>
@@ -19998,11 +20262,11 @@
             </a:avLst>
           </a:prstGeom>
           <a:solidFill>
-            <a:srgbClr val="FCE7F3"/>
+            <a:srgbClr val="CCFBF1"/>
           </a:solidFill>
           <a:ln w="19050">
             <a:solidFill>
-              <a:srgbClr val="DB2777"/>
+              <a:srgbClr val="0D9488"/>
             </a:solidFill>
             <a:prstDash val="solid"/>
           </a:ln>
@@ -20042,13 +20306,13 @@
             <a:r>
               <a:rPr lang="en-US" sz="1300" b="1" dirty="0">
                 <a:solidFill>
-                  <a:srgbClr val="9D174D"/>
+                  <a:srgbClr val="0F766E"/>
                 </a:solidFill>
                 <a:latin typeface="Trebuchet MS" pitchFamily="34" charset="0"/>
                 <a:ea typeface="Trebuchet MS" pitchFamily="34" charset="-122"/>
                 <a:cs typeface="Trebuchet MS" pitchFamily="34" charset="-120"/>
               </a:rPr>
-              <a:t>ss</a:t>
+              <a:t>sect</a:t>
             </a:r>
             <a:endParaRPr lang="en-US" sz="1300" dirty="0"/>
           </a:p>
@@ -20087,7 +20351,7 @@
                 <a:ea typeface="Calibri" pitchFamily="34" charset="-122"/>
                 <a:cs typeface="Calibri" pitchFamily="34" charset="-120"/>
               </a:rPr>
-              <a:t>connecting consonant</a:t>
+              <a:t>cut, divide</a:t>
             </a:r>
             <a:endParaRPr lang="en-US" sz="850" dirty="0"/>
           </a:p>
@@ -20095,46 +20359,7 @@
       </p:sp>
       <p:sp>
         <p:nvSpPr>
-          <p:cNvPr id="22" name="Text 20"/>
-          <p:cNvSpPr/>
-          <p:nvPr/>
-        </p:nvSpPr>
-        <p:spPr>
-          <a:xfrm>
-            <a:off x="4370832" y="2752344"/>
-            <a:ext cx="1828800" cy="182880"/>
-          </a:xfrm>
-          <a:prstGeom prst="rect">
-            <a:avLst/>
-          </a:prstGeom>
-          <a:noFill/>
-          <a:ln/>
-        </p:spPr>
-        <p:txBody>
-          <a:bodyPr wrap="square" lIns="0" tIns="0" rIns="0" bIns="0" rtlCol="0" anchor="t"/>
-          <a:lstStyle/>
-          <a:p>
-            <a:pPr algn="ctr" indent="0" marL="0">
-              <a:buNone/>
-            </a:pPr>
-            <a:r>
-              <a:rPr lang="en-US" sz="700" i="1" dirty="0">
-                <a:solidFill>
-                  <a:srgbClr val="94A3B8"/>
-                </a:solidFill>
-                <a:latin typeface="Calibri" pitchFamily="34" charset="0"/>
-                <a:ea typeface="Calibri" pitchFamily="34" charset="-122"/>
-                <a:cs typeface="Calibri" pitchFamily="34" charset="-120"/>
-              </a:rPr>
-              <a:t>di + sect → dissect, doubled 's' at join</a:t>
-            </a:r>
-            <a:endParaRPr lang="en-US" sz="700" dirty="0"/>
-          </a:p>
-        </p:txBody>
-      </p:sp>
-      <p:sp>
-        <p:nvSpPr>
-          <p:cNvPr id="23" name="Shape 21"/>
+          <p:cNvPr id="22" name="Shape 20"/>
           <p:cNvSpPr/>
           <p:nvPr/>
         </p:nvSpPr>
@@ -20149,11 +20374,11 @@
             </a:avLst>
           </a:prstGeom>
           <a:solidFill>
-            <a:srgbClr val="CCFBF1"/>
+            <a:srgbClr val="FCE7F3"/>
           </a:solidFill>
           <a:ln w="19050">
             <a:solidFill>
-              <a:srgbClr val="0D9488"/>
+              <a:srgbClr val="DB2777"/>
             </a:solidFill>
             <a:prstDash val="solid"/>
           </a:ln>
@@ -20168,7 +20393,7 @@
       </p:sp>
       <p:sp>
         <p:nvSpPr>
-          <p:cNvPr id="24" name="Text 22"/>
+          <p:cNvPr id="23" name="Text 21"/>
           <p:cNvSpPr/>
           <p:nvPr/>
         </p:nvSpPr>
@@ -20193,13 +20418,13 @@
             <a:r>
               <a:rPr lang="en-US" sz="1300" b="1" dirty="0">
                 <a:solidFill>
-                  <a:srgbClr val="0F766E"/>
+                  <a:srgbClr val="9D174D"/>
                 </a:solidFill>
                 <a:latin typeface="Trebuchet MS" pitchFamily="34" charset="0"/>
                 <a:ea typeface="Trebuchet MS" pitchFamily="34" charset="-122"/>
                 <a:cs typeface="Trebuchet MS" pitchFamily="34" charset="-120"/>
               </a:rPr>
-              <a:t>sect</a:t>
+              <a:t>ion</a:t>
             </a:r>
             <a:endParaRPr lang="en-US" sz="1300" dirty="0"/>
           </a:p>
@@ -20207,7 +20432,7 @@
       </p:sp>
       <p:sp>
         <p:nvSpPr>
-          <p:cNvPr id="25" name="Text 23"/>
+          <p:cNvPr id="24" name="Text 22"/>
           <p:cNvSpPr/>
           <p:nvPr/>
         </p:nvSpPr>
@@ -20238,7 +20463,7 @@
                 <a:ea typeface="Calibri" pitchFamily="34" charset="-122"/>
                 <a:cs typeface="Calibri" pitchFamily="34" charset="-120"/>
               </a:rPr>
-              <a:t>cut, divide</a:t>
+              <a:t>act or process of</a:t>
             </a:r>
             <a:endParaRPr lang="en-US" sz="850" dirty="0"/>
           </a:p>
@@ -20246,7 +20471,7 @@
       </p:sp>
       <p:sp>
         <p:nvSpPr>
-          <p:cNvPr id="26" name="Shape 24"/>
+          <p:cNvPr id="25" name="Shape 23"/>
           <p:cNvSpPr/>
           <p:nvPr/>
         </p:nvSpPr>
@@ -20273,7 +20498,7 @@
       </p:sp>
       <p:sp>
         <p:nvSpPr>
-          <p:cNvPr id="27" name="Text 25"/>
+          <p:cNvPr id="26" name="Text 24"/>
           <p:cNvSpPr/>
           <p:nvPr/>
         </p:nvSpPr>
@@ -20312,7 +20537,7 @@
       </p:sp>
       <p:sp>
         <p:nvSpPr>
-          <p:cNvPr id="28" name="Shape 26"/>
+          <p:cNvPr id="27" name="Shape 25"/>
           <p:cNvSpPr/>
           <p:nvPr/>
         </p:nvSpPr>
@@ -20339,13 +20564,13 @@
       </p:sp>
       <p:sp>
         <p:nvSpPr>
-          <p:cNvPr id="29" name="Shape 27"/>
-          <p:cNvSpPr/>
-          <p:nvPr/>
-        </p:nvSpPr>
-        <p:spPr>
-          <a:xfrm>
-            <a:off x="2999232" y="3364992"/>
+          <p:cNvPr id="28" name="Shape 26"/>
+          <p:cNvSpPr/>
+          <p:nvPr/>
+        </p:nvSpPr>
+        <p:spPr>
+          <a:xfrm>
+            <a:off x="2313432" y="3364992"/>
             <a:ext cx="1645920" cy="475488"/>
           </a:xfrm>
           <a:prstGeom prst="rect">
@@ -20366,13 +20591,13 @@
       </p:sp>
       <p:sp>
         <p:nvSpPr>
-          <p:cNvPr id="30" name="Text 28"/>
-          <p:cNvSpPr/>
-          <p:nvPr/>
-        </p:nvSpPr>
-        <p:spPr>
-          <a:xfrm>
-            <a:off x="2999232" y="3364992"/>
+          <p:cNvPr id="29" name="Text 27"/>
+          <p:cNvSpPr/>
+          <p:nvPr/>
+        </p:nvSpPr>
+        <p:spPr>
+          <a:xfrm>
+            <a:off x="2313432" y="3364992"/>
             <a:ext cx="1645920" cy="475488"/>
           </a:xfrm>
           <a:prstGeom prst="rect">
@@ -20397,7 +20622,7 @@
                 <a:ea typeface="Trebuchet MS" pitchFamily="34" charset="-122"/>
                 <a:cs typeface="Trebuchet MS" pitchFamily="34" charset="-120"/>
               </a:rPr>
-              <a:t>dis</a:t>
+              <a:t>di</a:t>
             </a:r>
             <a:endParaRPr lang="en-US" sz="1400" dirty="0"/>
           </a:p>
@@ -20405,14 +20630,14 @@
       </p:sp>
       <p:sp>
         <p:nvSpPr>
-          <p:cNvPr id="31" name="Text 29"/>
-          <p:cNvSpPr/>
-          <p:nvPr/>
-        </p:nvSpPr>
-        <p:spPr>
-          <a:xfrm>
-            <a:off x="4645152" y="3364992"/>
-            <a:ext cx="1097280" cy="475488"/>
+          <p:cNvPr id="30" name="Text 28"/>
+          <p:cNvSpPr/>
+          <p:nvPr/>
+        </p:nvSpPr>
+        <p:spPr>
+          <a:xfrm>
+            <a:off x="3959352" y="3364992"/>
+            <a:ext cx="411480" cy="475488"/>
           </a:xfrm>
           <a:prstGeom prst="rect">
             <a:avLst/>
@@ -20444,13 +20669,13 @@
       </p:sp>
       <p:sp>
         <p:nvSpPr>
-          <p:cNvPr id="32" name="Shape 30"/>
-          <p:cNvSpPr/>
-          <p:nvPr/>
-        </p:nvSpPr>
-        <p:spPr>
-          <a:xfrm>
-            <a:off x="5742432" y="3364992"/>
+          <p:cNvPr id="31" name="Shape 29"/>
+          <p:cNvSpPr/>
+          <p:nvPr/>
+        </p:nvSpPr>
+        <p:spPr>
+          <a:xfrm>
+            <a:off x="4370832" y="3364992"/>
             <a:ext cx="1645920" cy="475488"/>
           </a:xfrm>
           <a:prstGeom prst="rect">
@@ -20471,13 +20696,13 @@
       </p:sp>
       <p:sp>
         <p:nvSpPr>
-          <p:cNvPr id="33" name="Text 31"/>
-          <p:cNvSpPr/>
-          <p:nvPr/>
-        </p:nvSpPr>
-        <p:spPr>
-          <a:xfrm>
-            <a:off x="5742432" y="3364992"/>
+          <p:cNvPr id="32" name="Text 30"/>
+          <p:cNvSpPr/>
+          <p:nvPr/>
+        </p:nvSpPr>
+        <p:spPr>
+          <a:xfrm>
+            <a:off x="4370832" y="3364992"/>
             <a:ext cx="1645920" cy="475488"/>
           </a:xfrm>
           <a:prstGeom prst="rect">
@@ -20502,7 +20727,7 @@
                 <a:ea typeface="Trebuchet MS" pitchFamily="34" charset="-122"/>
                 <a:cs typeface="Trebuchet MS" pitchFamily="34" charset="-120"/>
               </a:rPr>
-              <a:t>sect</a:t>
+              <a:t>sec</a:t>
             </a:r>
             <a:endParaRPr lang="en-US" sz="1400" dirty="0"/>
           </a:p>
@@ -20510,7 +20735,112 @@
       </p:sp>
       <p:sp>
         <p:nvSpPr>
+          <p:cNvPr id="33" name="Text 31"/>
+          <p:cNvSpPr/>
+          <p:nvPr/>
+        </p:nvSpPr>
+        <p:spPr>
+          <a:xfrm>
+            <a:off x="6016752" y="3364992"/>
+            <a:ext cx="411480" cy="475488"/>
+          </a:xfrm>
+          <a:prstGeom prst="rect">
+            <a:avLst/>
+          </a:prstGeom>
+          <a:noFill/>
+          <a:ln/>
+        </p:spPr>
+        <p:txBody>
+          <a:bodyPr wrap="square" lIns="0" tIns="0" rIns="0" bIns="0" rtlCol="0" anchor="ctr"/>
+          <a:lstStyle/>
+          <a:p>
+            <a:pPr algn="ctr" indent="0" marL="0">
+              <a:buNone/>
+            </a:pPr>
+            <a:r>
+              <a:rPr lang="en-US" sz="1600" b="1" dirty="0">
+                <a:solidFill>
+                  <a:srgbClr val="0D9488"/>
+                </a:solidFill>
+                <a:latin typeface="Trebuchet MS" pitchFamily="34" charset="0"/>
+                <a:ea typeface="Trebuchet MS" pitchFamily="34" charset="-122"/>
+                <a:cs typeface="Trebuchet MS" pitchFamily="34" charset="-120"/>
+              </a:rPr>
+              <a:t>·</a:t>
+            </a:r>
+            <a:endParaRPr lang="en-US" sz="1600" dirty="0"/>
+          </a:p>
+        </p:txBody>
+      </p:sp>
+      <p:sp>
+        <p:nvSpPr>
           <p:cNvPr id="34" name="Shape 32"/>
+          <p:cNvSpPr/>
+          <p:nvPr/>
+        </p:nvSpPr>
+        <p:spPr>
+          <a:xfrm>
+            <a:off x="6428232" y="3364992"/>
+            <a:ext cx="1645920" cy="475488"/>
+          </a:xfrm>
+          <a:prstGeom prst="rect">
+            <a:avLst>
+              <a:gd name="adj" fmla="val 9615"/>
+            </a:avLst>
+          </a:prstGeom>
+          <a:solidFill>
+            <a:srgbClr val="FFFFFF"/>
+          </a:solidFill>
+          <a:ln w="12700">
+            <a:solidFill>
+              <a:srgbClr val="0D9488"/>
+            </a:solidFill>
+            <a:prstDash val="solid"/>
+          </a:ln>
+        </p:spPr>
+      </p:sp>
+      <p:sp>
+        <p:nvSpPr>
+          <p:cNvPr id="35" name="Text 33"/>
+          <p:cNvSpPr/>
+          <p:nvPr/>
+        </p:nvSpPr>
+        <p:spPr>
+          <a:xfrm>
+            <a:off x="6428232" y="3364992"/>
+            <a:ext cx="1645920" cy="475488"/>
+          </a:xfrm>
+          <a:prstGeom prst="rect">
+            <a:avLst/>
+          </a:prstGeom>
+          <a:noFill/>
+          <a:ln/>
+        </p:spPr>
+        <p:txBody>
+          <a:bodyPr wrap="square" lIns="0" tIns="0" rIns="0" bIns="0" rtlCol="0" anchor="ctr"/>
+          <a:lstStyle/>
+          <a:p>
+            <a:pPr algn="ctr" indent="0" marL="0">
+              <a:buNone/>
+            </a:pPr>
+            <a:r>
+              <a:rPr lang="en-US" sz="1400" b="1" dirty="0">
+                <a:solidFill>
+                  <a:srgbClr val="0D9488"/>
+                </a:solidFill>
+                <a:latin typeface="Trebuchet MS" pitchFamily="34" charset="0"/>
+                <a:ea typeface="Trebuchet MS" pitchFamily="34" charset="-122"/>
+                <a:cs typeface="Trebuchet MS" pitchFamily="34" charset="-120"/>
+              </a:rPr>
+              <a:t>tion</a:t>
+            </a:r>
+            <a:endParaRPr lang="en-US" sz="1400" dirty="0"/>
+          </a:p>
+        </p:txBody>
+      </p:sp>
+      <p:sp>
+        <p:nvSpPr>
+          <p:cNvPr id="36" name="Shape 34"/>
           <p:cNvSpPr/>
           <p:nvPr/>
         </p:nvSpPr>
@@ -20537,7 +20867,7 @@
       </p:sp>
       <p:sp>
         <p:nvSpPr>
-          <p:cNvPr id="35" name="Text 33"/>
+          <p:cNvPr id="37" name="Text 35"/>
           <p:cNvSpPr/>
           <p:nvPr/>
         </p:nvSpPr>
@@ -20576,7 +20906,7 @@
       </p:sp>
       <p:sp>
         <p:nvSpPr>
-          <p:cNvPr id="36" name="Shape 34"/>
+          <p:cNvPr id="38" name="Shape 36"/>
           <p:cNvSpPr/>
           <p:nvPr/>
         </p:nvSpPr>
@@ -20603,7 +20933,7 @@
       </p:sp>
       <p:sp>
         <p:nvSpPr>
-          <p:cNvPr id="37" name="Text 35"/>
+          <p:cNvPr id="39" name="Text 37"/>
           <p:cNvSpPr/>
           <p:nvPr/>
         </p:nvSpPr>
@@ -21065,7 +21395,7 @@
                 <a:ea typeface="Trebuchet MS" pitchFamily="34" charset="-122"/>
                 <a:cs typeface="Trebuchet MS" pitchFamily="34" charset="-120"/>
               </a:rPr>
-              <a:t>dissect</a:t>
+              <a:t>dissection</a:t>
             </a:r>
             <a:endParaRPr lang="en-US" sz="2800" dirty="0"/>
           </a:p>
@@ -21266,11 +21596,11 @@
             </a:avLst>
           </a:prstGeom>
           <a:solidFill>
-            <a:srgbClr val="FCE7F3"/>
+            <a:srgbClr val="CCFBF1"/>
           </a:solidFill>
           <a:ln w="19050">
             <a:solidFill>
-              <a:srgbClr val="DB2777"/>
+              <a:srgbClr val="0D9488"/>
             </a:solidFill>
             <a:prstDash val="solid"/>
           </a:ln>
@@ -21310,13 +21640,13 @@
             <a:r>
               <a:rPr lang="en-US" sz="1300" b="1" dirty="0">
                 <a:solidFill>
-                  <a:srgbClr val="9D174D"/>
+                  <a:srgbClr val="0F766E"/>
                 </a:solidFill>
                 <a:latin typeface="Trebuchet MS" pitchFamily="34" charset="0"/>
                 <a:ea typeface="Trebuchet MS" pitchFamily="34" charset="-122"/>
                 <a:cs typeface="Trebuchet MS" pitchFamily="34" charset="-120"/>
               </a:rPr>
-              <a:t>ss</a:t>
+              <a:t>sect</a:t>
             </a:r>
             <a:endParaRPr lang="en-US" sz="1300" dirty="0"/>
           </a:p>
@@ -21355,7 +21685,7 @@
                 <a:ea typeface="Calibri" pitchFamily="34" charset="-122"/>
                 <a:cs typeface="Calibri" pitchFamily="34" charset="-120"/>
               </a:rPr>
-              <a:t>connecting consonant</a:t>
+              <a:t>cut, divide</a:t>
             </a:r>
             <a:endParaRPr lang="en-US" sz="850" dirty="0"/>
           </a:p>
@@ -21363,46 +21693,7 @@
       </p:sp>
       <p:sp>
         <p:nvSpPr>
-          <p:cNvPr id="22" name="Text 20"/>
-          <p:cNvSpPr/>
-          <p:nvPr/>
-        </p:nvSpPr>
-        <p:spPr>
-          <a:xfrm>
-            <a:off x="4370832" y="2752344"/>
-            <a:ext cx="1828800" cy="182880"/>
-          </a:xfrm>
-          <a:prstGeom prst="rect">
-            <a:avLst/>
-          </a:prstGeom>
-          <a:noFill/>
-          <a:ln/>
-        </p:spPr>
-        <p:txBody>
-          <a:bodyPr wrap="square" lIns="0" tIns="0" rIns="0" bIns="0" rtlCol="0" anchor="t"/>
-          <a:lstStyle/>
-          <a:p>
-            <a:pPr algn="ctr" indent="0" marL="0">
-              <a:buNone/>
-            </a:pPr>
-            <a:r>
-              <a:rPr lang="en-US" sz="700" i="1" dirty="0">
-                <a:solidFill>
-                  <a:srgbClr val="94A3B8"/>
-                </a:solidFill>
-                <a:latin typeface="Calibri" pitchFamily="34" charset="0"/>
-                <a:ea typeface="Calibri" pitchFamily="34" charset="-122"/>
-                <a:cs typeface="Calibri" pitchFamily="34" charset="-120"/>
-              </a:rPr>
-              <a:t>di + sect → dissect, doubled 's' at join</a:t>
-            </a:r>
-            <a:endParaRPr lang="en-US" sz="700" dirty="0"/>
-          </a:p>
-        </p:txBody>
-      </p:sp>
-      <p:sp>
-        <p:nvSpPr>
-          <p:cNvPr id="23" name="Shape 21"/>
+          <p:cNvPr id="22" name="Shape 20"/>
           <p:cNvSpPr/>
           <p:nvPr/>
         </p:nvSpPr>
@@ -21417,11 +21708,11 @@
             </a:avLst>
           </a:prstGeom>
           <a:solidFill>
-            <a:srgbClr val="CCFBF1"/>
+            <a:srgbClr val="FCE7F3"/>
           </a:solidFill>
           <a:ln w="19050">
             <a:solidFill>
-              <a:srgbClr val="0D9488"/>
+              <a:srgbClr val="DB2777"/>
             </a:solidFill>
             <a:prstDash val="solid"/>
           </a:ln>
@@ -21436,7 +21727,7 @@
       </p:sp>
       <p:sp>
         <p:nvSpPr>
-          <p:cNvPr id="24" name="Text 22"/>
+          <p:cNvPr id="23" name="Text 21"/>
           <p:cNvSpPr/>
           <p:nvPr/>
         </p:nvSpPr>
@@ -21461,13 +21752,13 @@
             <a:r>
               <a:rPr lang="en-US" sz="1300" b="1" dirty="0">
                 <a:solidFill>
-                  <a:srgbClr val="0F766E"/>
+                  <a:srgbClr val="9D174D"/>
                 </a:solidFill>
                 <a:latin typeface="Trebuchet MS" pitchFamily="34" charset="0"/>
                 <a:ea typeface="Trebuchet MS" pitchFamily="34" charset="-122"/>
                 <a:cs typeface="Trebuchet MS" pitchFamily="34" charset="-120"/>
               </a:rPr>
-              <a:t>sect</a:t>
+              <a:t>ion</a:t>
             </a:r>
             <a:endParaRPr lang="en-US" sz="1300" dirty="0"/>
           </a:p>
@@ -21475,7 +21766,7 @@
       </p:sp>
       <p:sp>
         <p:nvSpPr>
-          <p:cNvPr id="25" name="Text 23"/>
+          <p:cNvPr id="24" name="Text 22"/>
           <p:cNvSpPr/>
           <p:nvPr/>
         </p:nvSpPr>
@@ -21506,7 +21797,7 @@
                 <a:ea typeface="Calibri" pitchFamily="34" charset="-122"/>
                 <a:cs typeface="Calibri" pitchFamily="34" charset="-120"/>
               </a:rPr>
-              <a:t>cut, divide</a:t>
+              <a:t>act or process of</a:t>
             </a:r>
             <a:endParaRPr lang="en-US" sz="850" dirty="0"/>
           </a:p>
@@ -21514,7 +21805,7 @@
       </p:sp>
       <p:sp>
         <p:nvSpPr>
-          <p:cNvPr id="26" name="Shape 24"/>
+          <p:cNvPr id="25" name="Shape 23"/>
           <p:cNvSpPr/>
           <p:nvPr/>
         </p:nvSpPr>
@@ -21541,7 +21832,7 @@
       </p:sp>
       <p:sp>
         <p:nvSpPr>
-          <p:cNvPr id="27" name="Text 25"/>
+          <p:cNvPr id="26" name="Text 24"/>
           <p:cNvSpPr/>
           <p:nvPr/>
         </p:nvSpPr>
@@ -21580,7 +21871,7 @@
       </p:sp>
       <p:sp>
         <p:nvSpPr>
-          <p:cNvPr id="28" name="Shape 26"/>
+          <p:cNvPr id="27" name="Shape 25"/>
           <p:cNvSpPr/>
           <p:nvPr/>
         </p:nvSpPr>
@@ -21607,13 +21898,13 @@
       </p:sp>
       <p:sp>
         <p:nvSpPr>
-          <p:cNvPr id="29" name="Shape 27"/>
-          <p:cNvSpPr/>
-          <p:nvPr/>
-        </p:nvSpPr>
-        <p:spPr>
-          <a:xfrm>
-            <a:off x="2999232" y="3364992"/>
+          <p:cNvPr id="28" name="Shape 26"/>
+          <p:cNvSpPr/>
+          <p:nvPr/>
+        </p:nvSpPr>
+        <p:spPr>
+          <a:xfrm>
+            <a:off x="2313432" y="3364992"/>
             <a:ext cx="1645920" cy="475488"/>
           </a:xfrm>
           <a:prstGeom prst="rect">
@@ -21634,13 +21925,13 @@
       </p:sp>
       <p:sp>
         <p:nvSpPr>
-          <p:cNvPr id="30" name="Text 28"/>
-          <p:cNvSpPr/>
-          <p:nvPr/>
-        </p:nvSpPr>
-        <p:spPr>
-          <a:xfrm>
-            <a:off x="2999232" y="3364992"/>
+          <p:cNvPr id="29" name="Text 27"/>
+          <p:cNvSpPr/>
+          <p:nvPr/>
+        </p:nvSpPr>
+        <p:spPr>
+          <a:xfrm>
+            <a:off x="2313432" y="3364992"/>
             <a:ext cx="1645920" cy="475488"/>
           </a:xfrm>
           <a:prstGeom prst="rect">
@@ -21665,7 +21956,7 @@
                 <a:ea typeface="Trebuchet MS" pitchFamily="34" charset="-122"/>
                 <a:cs typeface="Trebuchet MS" pitchFamily="34" charset="-120"/>
               </a:rPr>
-              <a:t>dis</a:t>
+              <a:t>di</a:t>
             </a:r>
             <a:endParaRPr lang="en-US" sz="1400" dirty="0"/>
           </a:p>
@@ -21673,14 +21964,14 @@
       </p:sp>
       <p:sp>
         <p:nvSpPr>
-          <p:cNvPr id="31" name="Text 29"/>
-          <p:cNvSpPr/>
-          <p:nvPr/>
-        </p:nvSpPr>
-        <p:spPr>
-          <a:xfrm>
-            <a:off x="4645152" y="3364992"/>
-            <a:ext cx="1097280" cy="475488"/>
+          <p:cNvPr id="30" name="Text 28"/>
+          <p:cNvSpPr/>
+          <p:nvPr/>
+        </p:nvSpPr>
+        <p:spPr>
+          <a:xfrm>
+            <a:off x="3959352" y="3364992"/>
+            <a:ext cx="411480" cy="475488"/>
           </a:xfrm>
           <a:prstGeom prst="rect">
             <a:avLst/>
@@ -21712,13 +22003,13 @@
       </p:sp>
       <p:sp>
         <p:nvSpPr>
-          <p:cNvPr id="32" name="Shape 30"/>
-          <p:cNvSpPr/>
-          <p:nvPr/>
-        </p:nvSpPr>
-        <p:spPr>
-          <a:xfrm>
-            <a:off x="5742432" y="3364992"/>
+          <p:cNvPr id="31" name="Shape 29"/>
+          <p:cNvSpPr/>
+          <p:nvPr/>
+        </p:nvSpPr>
+        <p:spPr>
+          <a:xfrm>
+            <a:off x="4370832" y="3364992"/>
             <a:ext cx="1645920" cy="475488"/>
           </a:xfrm>
           <a:prstGeom prst="rect">
@@ -21739,13 +22030,13 @@
       </p:sp>
       <p:sp>
         <p:nvSpPr>
-          <p:cNvPr id="33" name="Text 31"/>
-          <p:cNvSpPr/>
-          <p:nvPr/>
-        </p:nvSpPr>
-        <p:spPr>
-          <a:xfrm>
-            <a:off x="5742432" y="3364992"/>
+          <p:cNvPr id="32" name="Text 30"/>
+          <p:cNvSpPr/>
+          <p:nvPr/>
+        </p:nvSpPr>
+        <p:spPr>
+          <a:xfrm>
+            <a:off x="4370832" y="3364992"/>
             <a:ext cx="1645920" cy="475488"/>
           </a:xfrm>
           <a:prstGeom prst="rect">
@@ -21770,7 +22061,7 @@
                 <a:ea typeface="Trebuchet MS" pitchFamily="34" charset="-122"/>
                 <a:cs typeface="Trebuchet MS" pitchFamily="34" charset="-120"/>
               </a:rPr>
-              <a:t>sect</a:t>
+              <a:t>sec</a:t>
             </a:r>
             <a:endParaRPr lang="en-US" sz="1400" dirty="0"/>
           </a:p>
@@ -21778,7 +22069,112 @@
       </p:sp>
       <p:sp>
         <p:nvSpPr>
+          <p:cNvPr id="33" name="Text 31"/>
+          <p:cNvSpPr/>
+          <p:nvPr/>
+        </p:nvSpPr>
+        <p:spPr>
+          <a:xfrm>
+            <a:off x="6016752" y="3364992"/>
+            <a:ext cx="411480" cy="475488"/>
+          </a:xfrm>
+          <a:prstGeom prst="rect">
+            <a:avLst/>
+          </a:prstGeom>
+          <a:noFill/>
+          <a:ln/>
+        </p:spPr>
+        <p:txBody>
+          <a:bodyPr wrap="square" lIns="0" tIns="0" rIns="0" bIns="0" rtlCol="0" anchor="ctr"/>
+          <a:lstStyle/>
+          <a:p>
+            <a:pPr algn="ctr" indent="0" marL="0">
+              <a:buNone/>
+            </a:pPr>
+            <a:r>
+              <a:rPr lang="en-US" sz="1600" b="1" dirty="0">
+                <a:solidFill>
+                  <a:srgbClr val="0D9488"/>
+                </a:solidFill>
+                <a:latin typeface="Trebuchet MS" pitchFamily="34" charset="0"/>
+                <a:ea typeface="Trebuchet MS" pitchFamily="34" charset="-122"/>
+                <a:cs typeface="Trebuchet MS" pitchFamily="34" charset="-120"/>
+              </a:rPr>
+              <a:t>·</a:t>
+            </a:r>
+            <a:endParaRPr lang="en-US" sz="1600" dirty="0"/>
+          </a:p>
+        </p:txBody>
+      </p:sp>
+      <p:sp>
+        <p:nvSpPr>
           <p:cNvPr id="34" name="Shape 32"/>
+          <p:cNvSpPr/>
+          <p:nvPr/>
+        </p:nvSpPr>
+        <p:spPr>
+          <a:xfrm>
+            <a:off x="6428232" y="3364992"/>
+            <a:ext cx="1645920" cy="475488"/>
+          </a:xfrm>
+          <a:prstGeom prst="rect">
+            <a:avLst>
+              <a:gd name="adj" fmla="val 9615"/>
+            </a:avLst>
+          </a:prstGeom>
+          <a:solidFill>
+            <a:srgbClr val="FFFFFF"/>
+          </a:solidFill>
+          <a:ln w="12700">
+            <a:solidFill>
+              <a:srgbClr val="0D9488"/>
+            </a:solidFill>
+            <a:prstDash val="solid"/>
+          </a:ln>
+        </p:spPr>
+      </p:sp>
+      <p:sp>
+        <p:nvSpPr>
+          <p:cNvPr id="35" name="Text 33"/>
+          <p:cNvSpPr/>
+          <p:nvPr/>
+        </p:nvSpPr>
+        <p:spPr>
+          <a:xfrm>
+            <a:off x="6428232" y="3364992"/>
+            <a:ext cx="1645920" cy="475488"/>
+          </a:xfrm>
+          <a:prstGeom prst="rect">
+            <a:avLst/>
+          </a:prstGeom>
+          <a:noFill/>
+          <a:ln/>
+        </p:spPr>
+        <p:txBody>
+          <a:bodyPr wrap="square" lIns="0" tIns="0" rIns="0" bIns="0" rtlCol="0" anchor="ctr"/>
+          <a:lstStyle/>
+          <a:p>
+            <a:pPr algn="ctr" indent="0" marL="0">
+              <a:buNone/>
+            </a:pPr>
+            <a:r>
+              <a:rPr lang="en-US" sz="1400" b="1" dirty="0">
+                <a:solidFill>
+                  <a:srgbClr val="0D9488"/>
+                </a:solidFill>
+                <a:latin typeface="Trebuchet MS" pitchFamily="34" charset="0"/>
+                <a:ea typeface="Trebuchet MS" pitchFamily="34" charset="-122"/>
+                <a:cs typeface="Trebuchet MS" pitchFamily="34" charset="-120"/>
+              </a:rPr>
+              <a:t>tion</a:t>
+            </a:r>
+            <a:endParaRPr lang="en-US" sz="1400" dirty="0"/>
+          </a:p>
+        </p:txBody>
+      </p:sp>
+      <p:sp>
+        <p:nvSpPr>
+          <p:cNvPr id="36" name="Shape 34"/>
           <p:cNvSpPr/>
           <p:nvPr/>
         </p:nvSpPr>
@@ -21805,7 +22201,7 @@
       </p:sp>
       <p:sp>
         <p:nvSpPr>
-          <p:cNvPr id="35" name="Text 33"/>
+          <p:cNvPr id="37" name="Text 35"/>
           <p:cNvSpPr/>
           <p:nvPr/>
         </p:nvSpPr>
@@ -21844,18 +22240,18 @@
       </p:sp>
       <p:sp>
         <p:nvSpPr>
-          <p:cNvPr id="36" name="Shape 34"/>
+          <p:cNvPr id="38" name="Shape 36"/>
           <p:cNvSpPr/>
           <p:nvPr/>
         </p:nvSpPr>
         <p:spPr>
           <a:xfrm>
             <a:off x="1874520" y="4096512"/>
-            <a:ext cx="6903720" cy="658368"/>
+            <a:ext cx="6903720" cy="804672"/>
           </a:xfrm>
           <a:prstGeom prst="rect">
             <a:avLst>
-              <a:gd name="adj" fmla="val 8333"/>
+              <a:gd name="adj" fmla="val 6818"/>
             </a:avLst>
           </a:prstGeom>
           <a:solidFill>
@@ -21871,18 +22267,18 @@
       </p:sp>
       <p:sp>
         <p:nvSpPr>
-          <p:cNvPr id="37" name="Shape 35"/>
-          <p:cNvSpPr/>
-          <p:nvPr/>
-        </p:nvSpPr>
-        <p:spPr>
-          <a:xfrm>
-            <a:off x="2254649" y="4169664"/>
-            <a:ext cx="685800" cy="475488"/>
+          <p:cNvPr id="39" name="Shape 37"/>
+          <p:cNvSpPr/>
+          <p:nvPr/>
+        </p:nvSpPr>
+        <p:spPr>
+          <a:xfrm>
+            <a:off x="2023872" y="4169664"/>
+            <a:ext cx="685800" cy="384048"/>
           </a:xfrm>
           <a:prstGeom prst="rect">
             <a:avLst>
-              <a:gd name="adj" fmla="val 7692"/>
+              <a:gd name="adj" fmla="val 9524"/>
             </a:avLst>
           </a:prstGeom>
           <a:solidFill>
@@ -21898,14 +22294,14 @@
       </p:sp>
       <p:sp>
         <p:nvSpPr>
-          <p:cNvPr id="38" name="Text 36"/>
-          <p:cNvSpPr/>
-          <p:nvPr/>
-        </p:nvSpPr>
-        <p:spPr>
-          <a:xfrm>
-            <a:off x="2254649" y="4169664"/>
-            <a:ext cx="685800" cy="475488"/>
+          <p:cNvPr id="40" name="Text 38"/>
+          <p:cNvSpPr/>
+          <p:nvPr/>
+        </p:nvSpPr>
+        <p:spPr>
+          <a:xfrm>
+            <a:off x="2023872" y="4169664"/>
+            <a:ext cx="685800" cy="384048"/>
           </a:xfrm>
           <a:prstGeom prst="rect">
             <a:avLst/>
@@ -21937,18 +22333,18 @@
       </p:sp>
       <p:sp>
         <p:nvSpPr>
-          <p:cNvPr id="39" name="Shape 37"/>
-          <p:cNvSpPr/>
-          <p:nvPr/>
-        </p:nvSpPr>
-        <p:spPr>
-          <a:xfrm>
-            <a:off x="3293146" y="4169664"/>
-            <a:ext cx="685800" cy="475488"/>
+          <p:cNvPr id="41" name="Shape 39"/>
+          <p:cNvSpPr/>
+          <p:nvPr/>
+        </p:nvSpPr>
+        <p:spPr>
+          <a:xfrm>
+            <a:off x="2831592" y="4169664"/>
+            <a:ext cx="685800" cy="384048"/>
           </a:xfrm>
           <a:prstGeom prst="rect">
             <a:avLst>
-              <a:gd name="adj" fmla="val 7692"/>
+              <a:gd name="adj" fmla="val 9524"/>
             </a:avLst>
           </a:prstGeom>
           <a:solidFill>
@@ -21964,14 +22360,14 @@
       </p:sp>
       <p:sp>
         <p:nvSpPr>
-          <p:cNvPr id="40" name="Text 38"/>
-          <p:cNvSpPr/>
-          <p:nvPr/>
-        </p:nvSpPr>
-        <p:spPr>
-          <a:xfrm>
-            <a:off x="3293146" y="4169664"/>
-            <a:ext cx="685800" cy="475488"/>
+          <p:cNvPr id="42" name="Text 40"/>
+          <p:cNvSpPr/>
+          <p:nvPr/>
+        </p:nvSpPr>
+        <p:spPr>
+          <a:xfrm>
+            <a:off x="2831592" y="4169664"/>
+            <a:ext cx="685800" cy="384048"/>
           </a:xfrm>
           <a:prstGeom prst="rect">
             <a:avLst/>
@@ -22003,18 +22399,18 @@
       </p:sp>
       <p:sp>
         <p:nvSpPr>
-          <p:cNvPr id="41" name="Shape 39"/>
-          <p:cNvSpPr/>
-          <p:nvPr/>
-        </p:nvSpPr>
-        <p:spPr>
-          <a:xfrm>
-            <a:off x="4331643" y="4169664"/>
-            <a:ext cx="685800" cy="475488"/>
+          <p:cNvPr id="43" name="Shape 41"/>
+          <p:cNvSpPr/>
+          <p:nvPr/>
+        </p:nvSpPr>
+        <p:spPr>
+          <a:xfrm>
+            <a:off x="3639312" y="4169664"/>
+            <a:ext cx="685800" cy="384048"/>
           </a:xfrm>
           <a:prstGeom prst="rect">
             <a:avLst>
-              <a:gd name="adj" fmla="val 7692"/>
+              <a:gd name="adj" fmla="val 9524"/>
             </a:avLst>
           </a:prstGeom>
           <a:solidFill>
@@ -22030,14 +22426,14 @@
       </p:sp>
       <p:sp>
         <p:nvSpPr>
-          <p:cNvPr id="42" name="Text 40"/>
-          <p:cNvSpPr/>
-          <p:nvPr/>
-        </p:nvSpPr>
-        <p:spPr>
-          <a:xfrm>
-            <a:off x="4331643" y="4169664"/>
-            <a:ext cx="685800" cy="475488"/>
+          <p:cNvPr id="44" name="Text 42"/>
+          <p:cNvSpPr/>
+          <p:nvPr/>
+        </p:nvSpPr>
+        <p:spPr>
+          <a:xfrm>
+            <a:off x="3639312" y="4169664"/>
+            <a:ext cx="685800" cy="384048"/>
           </a:xfrm>
           <a:prstGeom prst="rect">
             <a:avLst/>
@@ -22061,7 +22457,7 @@
                 <a:ea typeface="Trebuchet MS" pitchFamily="34" charset="-122"/>
                 <a:cs typeface="Trebuchet MS" pitchFamily="34" charset="-120"/>
               </a:rPr>
-              <a:t>ss</a:t>
+              <a:t>s</a:t>
             </a:r>
             <a:endParaRPr lang="en-US" sz="900" dirty="0"/>
           </a:p>
@@ -22069,18 +22465,18 @@
       </p:sp>
       <p:sp>
         <p:nvSpPr>
-          <p:cNvPr id="43" name="Shape 41"/>
-          <p:cNvSpPr/>
-          <p:nvPr/>
-        </p:nvSpPr>
-        <p:spPr>
-          <a:xfrm>
-            <a:off x="5370141" y="4169664"/>
-            <a:ext cx="685800" cy="475488"/>
+          <p:cNvPr id="45" name="Shape 43"/>
+          <p:cNvSpPr/>
+          <p:nvPr/>
+        </p:nvSpPr>
+        <p:spPr>
+          <a:xfrm>
+            <a:off x="4447032" y="4169664"/>
+            <a:ext cx="685800" cy="384048"/>
           </a:xfrm>
           <a:prstGeom prst="rect">
             <a:avLst>
-              <a:gd name="adj" fmla="val 7692"/>
+              <a:gd name="adj" fmla="val 9524"/>
             </a:avLst>
           </a:prstGeom>
           <a:solidFill>
@@ -22096,14 +22492,14 @@
       </p:sp>
       <p:sp>
         <p:nvSpPr>
-          <p:cNvPr id="44" name="Text 42"/>
-          <p:cNvSpPr/>
-          <p:nvPr/>
-        </p:nvSpPr>
-        <p:spPr>
-          <a:xfrm>
-            <a:off x="5370141" y="4169664"/>
-            <a:ext cx="685800" cy="475488"/>
+          <p:cNvPr id="46" name="Text 44"/>
+          <p:cNvSpPr/>
+          <p:nvPr/>
+        </p:nvSpPr>
+        <p:spPr>
+          <a:xfrm>
+            <a:off x="4447032" y="4169664"/>
+            <a:ext cx="685800" cy="384048"/>
           </a:xfrm>
           <a:prstGeom prst="rect">
             <a:avLst/>
@@ -22135,18 +22531,18 @@
       </p:sp>
       <p:sp>
         <p:nvSpPr>
-          <p:cNvPr id="45" name="Shape 43"/>
-          <p:cNvSpPr/>
-          <p:nvPr/>
-        </p:nvSpPr>
-        <p:spPr>
-          <a:xfrm>
-            <a:off x="6408638" y="4169664"/>
-            <a:ext cx="685800" cy="475488"/>
+          <p:cNvPr id="47" name="Shape 45"/>
+          <p:cNvSpPr/>
+          <p:nvPr/>
+        </p:nvSpPr>
+        <p:spPr>
+          <a:xfrm>
+            <a:off x="5254752" y="4169664"/>
+            <a:ext cx="685800" cy="384048"/>
           </a:xfrm>
           <a:prstGeom prst="rect">
             <a:avLst>
-              <a:gd name="adj" fmla="val 7692"/>
+              <a:gd name="adj" fmla="val 9524"/>
             </a:avLst>
           </a:prstGeom>
           <a:solidFill>
@@ -22162,14 +22558,14 @@
       </p:sp>
       <p:sp>
         <p:nvSpPr>
-          <p:cNvPr id="46" name="Text 44"/>
-          <p:cNvSpPr/>
-          <p:nvPr/>
-        </p:nvSpPr>
-        <p:spPr>
-          <a:xfrm>
-            <a:off x="6408638" y="4169664"/>
-            <a:ext cx="685800" cy="475488"/>
+          <p:cNvPr id="48" name="Text 46"/>
+          <p:cNvSpPr/>
+          <p:nvPr/>
+        </p:nvSpPr>
+        <p:spPr>
+          <a:xfrm>
+            <a:off x="5254752" y="4169664"/>
+            <a:ext cx="685800" cy="384048"/>
           </a:xfrm>
           <a:prstGeom prst="rect">
             <a:avLst/>
@@ -22201,18 +22597,18 @@
       </p:sp>
       <p:sp>
         <p:nvSpPr>
-          <p:cNvPr id="47" name="Shape 45"/>
-          <p:cNvSpPr/>
-          <p:nvPr/>
-        </p:nvSpPr>
-        <p:spPr>
-          <a:xfrm>
-            <a:off x="7447135" y="4169664"/>
-            <a:ext cx="685800" cy="475488"/>
+          <p:cNvPr id="49" name="Shape 47"/>
+          <p:cNvSpPr/>
+          <p:nvPr/>
+        </p:nvSpPr>
+        <p:spPr>
+          <a:xfrm>
+            <a:off x="6062472" y="4169664"/>
+            <a:ext cx="685800" cy="384048"/>
           </a:xfrm>
           <a:prstGeom prst="rect">
             <a:avLst>
-              <a:gd name="adj" fmla="val 7692"/>
+              <a:gd name="adj" fmla="val 9524"/>
             </a:avLst>
           </a:prstGeom>
           <a:solidFill>
@@ -22228,14 +22624,14 @@
       </p:sp>
       <p:sp>
         <p:nvSpPr>
-          <p:cNvPr id="48" name="Text 46"/>
-          <p:cNvSpPr/>
-          <p:nvPr/>
-        </p:nvSpPr>
-        <p:spPr>
-          <a:xfrm>
-            <a:off x="7447135" y="4169664"/>
-            <a:ext cx="685800" cy="475488"/>
+          <p:cNvPr id="50" name="Text 48"/>
+          <p:cNvSpPr/>
+          <p:nvPr/>
+        </p:nvSpPr>
+        <p:spPr>
+          <a:xfrm>
+            <a:off x="6062472" y="4169664"/>
+            <a:ext cx="685800" cy="384048"/>
           </a:xfrm>
           <a:prstGeom prst="rect">
             <a:avLst/>
@@ -22262,6 +22658,177 @@
               <a:t>t</a:t>
             </a:r>
             <a:endParaRPr lang="en-US" sz="900" dirty="0"/>
+          </a:p>
+        </p:txBody>
+      </p:sp>
+      <p:sp>
+        <p:nvSpPr>
+          <p:cNvPr id="51" name="Shape 49"/>
+          <p:cNvSpPr/>
+          <p:nvPr/>
+        </p:nvSpPr>
+        <p:spPr>
+          <a:xfrm>
+            <a:off x="6870192" y="4169664"/>
+            <a:ext cx="685800" cy="384048"/>
+          </a:xfrm>
+          <a:prstGeom prst="rect">
+            <a:avLst>
+              <a:gd name="adj" fmla="val 9524"/>
+            </a:avLst>
+          </a:prstGeom>
+          <a:solidFill>
+            <a:srgbClr val="FFFFFF"/>
+          </a:solidFill>
+          <a:ln w="12700">
+            <a:solidFill>
+              <a:srgbClr val="DB2777"/>
+            </a:solidFill>
+            <a:prstDash val="solid"/>
+          </a:ln>
+        </p:spPr>
+      </p:sp>
+      <p:sp>
+        <p:nvSpPr>
+          <p:cNvPr id="52" name="Text 50"/>
+          <p:cNvSpPr/>
+          <p:nvPr/>
+        </p:nvSpPr>
+        <p:spPr>
+          <a:xfrm>
+            <a:off x="6870192" y="4169664"/>
+            <a:ext cx="685800" cy="384048"/>
+          </a:xfrm>
+          <a:prstGeom prst="rect">
+            <a:avLst/>
+          </a:prstGeom>
+          <a:noFill/>
+          <a:ln/>
+        </p:spPr>
+        <p:txBody>
+          <a:bodyPr wrap="square" lIns="0" tIns="0" rIns="0" bIns="0" rtlCol="0" anchor="ctr"/>
+          <a:lstStyle/>
+          <a:p>
+            <a:pPr algn="ctr" indent="0" marL="0">
+              <a:buNone/>
+            </a:pPr>
+            <a:r>
+              <a:rPr lang="en-US" sz="900" b="1" dirty="0">
+                <a:solidFill>
+                  <a:srgbClr val="9D174D"/>
+                </a:solidFill>
+                <a:latin typeface="Trebuchet MS" pitchFamily="34" charset="0"/>
+                <a:ea typeface="Trebuchet MS" pitchFamily="34" charset="-122"/>
+                <a:cs typeface="Trebuchet MS" pitchFamily="34" charset="-120"/>
+              </a:rPr>
+              <a:t>i</a:t>
+            </a:r>
+            <a:endParaRPr lang="en-US" sz="900" dirty="0"/>
+          </a:p>
+        </p:txBody>
+      </p:sp>
+      <p:sp>
+        <p:nvSpPr>
+          <p:cNvPr id="53" name="Shape 51"/>
+          <p:cNvSpPr/>
+          <p:nvPr/>
+        </p:nvSpPr>
+        <p:spPr>
+          <a:xfrm>
+            <a:off x="7677912" y="4169664"/>
+            <a:ext cx="685800" cy="384048"/>
+          </a:xfrm>
+          <a:prstGeom prst="rect">
+            <a:avLst>
+              <a:gd name="adj" fmla="val 9524"/>
+            </a:avLst>
+          </a:prstGeom>
+          <a:solidFill>
+            <a:srgbClr val="FFFFFF"/>
+          </a:solidFill>
+          <a:ln w="12700">
+            <a:solidFill>
+              <a:srgbClr val="DB2777"/>
+            </a:solidFill>
+            <a:prstDash val="solid"/>
+          </a:ln>
+        </p:spPr>
+      </p:sp>
+      <p:sp>
+        <p:nvSpPr>
+          <p:cNvPr id="54" name="Text 52"/>
+          <p:cNvSpPr/>
+          <p:nvPr/>
+        </p:nvSpPr>
+        <p:spPr>
+          <a:xfrm>
+            <a:off x="7677912" y="4169664"/>
+            <a:ext cx="685800" cy="384048"/>
+          </a:xfrm>
+          <a:prstGeom prst="rect">
+            <a:avLst/>
+          </a:prstGeom>
+          <a:noFill/>
+          <a:ln/>
+        </p:spPr>
+        <p:txBody>
+          <a:bodyPr wrap="square" lIns="0" tIns="0" rIns="0" bIns="0" rtlCol="0" anchor="ctr"/>
+          <a:lstStyle/>
+          <a:p>
+            <a:pPr algn="ctr" indent="0" marL="0">
+              <a:buNone/>
+            </a:pPr>
+            <a:r>
+              <a:rPr lang="en-US" sz="900" b="1" dirty="0">
+                <a:solidFill>
+                  <a:srgbClr val="9D174D"/>
+                </a:solidFill>
+                <a:latin typeface="Trebuchet MS" pitchFamily="34" charset="0"/>
+                <a:ea typeface="Trebuchet MS" pitchFamily="34" charset="-122"/>
+                <a:cs typeface="Trebuchet MS" pitchFamily="34" charset="-120"/>
+              </a:rPr>
+              <a:t>on</a:t>
+            </a:r>
+            <a:endParaRPr lang="en-US" sz="900" dirty="0"/>
+          </a:p>
+        </p:txBody>
+      </p:sp>
+      <p:sp>
+        <p:nvSpPr>
+          <p:cNvPr id="55" name="Text 53"/>
+          <p:cNvSpPr/>
+          <p:nvPr/>
+        </p:nvSpPr>
+        <p:spPr>
+          <a:xfrm>
+            <a:off x="7677912" y="4572000"/>
+            <a:ext cx="685800" cy="219456"/>
+          </a:xfrm>
+          <a:prstGeom prst="rect">
+            <a:avLst/>
+          </a:prstGeom>
+          <a:noFill/>
+          <a:ln/>
+        </p:spPr>
+        <p:txBody>
+          <a:bodyPr wrap="square" lIns="0" tIns="0" rIns="0" bIns="0" rtlCol="0" anchor="t"/>
+          <a:lstStyle/>
+          <a:p>
+            <a:pPr algn="ctr" indent="0" marL="0">
+              <a:buNone/>
+            </a:pPr>
+            <a:r>
+              <a:rPr lang="en-US" sz="750" i="1" dirty="0">
+                <a:solidFill>
+                  <a:srgbClr val="94A3B8"/>
+                </a:solidFill>
+                <a:latin typeface="Calibri" pitchFamily="34" charset="0"/>
+                <a:ea typeface="Calibri" pitchFamily="34" charset="-122"/>
+                <a:cs typeface="Calibri" pitchFamily="34" charset="-120"/>
+              </a:rPr>
+              <a:t>/un/</a:t>
+            </a:r>
+            <a:endParaRPr lang="en-US" sz="750" dirty="0"/>
           </a:p>
         </p:txBody>
       </p:sp>
@@ -23807,7 +24374,7 @@
                 <a:ea typeface="Calibri" pitchFamily="34" charset="-122"/>
                 <a:cs typeface="Calibri" pitchFamily="34" charset="-120"/>
               </a:rPr>
-              <a:t>act or result of</a:t>
+              <a:t>act or process of</a:t>
             </a:r>
             <a:endParaRPr lang="en-US" sz="850" dirty="0"/>
           </a:p>
@@ -25511,7 +26078,7 @@
                 <a:ea typeface="Calibri" pitchFamily="34" charset="-122"/>
                 <a:cs typeface="Calibri" pitchFamily="34" charset="-120"/>
               </a:rPr>
-              <a:t>act or result of</a:t>
+              <a:t>act or process of</a:t>
             </a:r>
             <a:endParaRPr lang="en-US" sz="850" dirty="0"/>
           </a:p>
@@ -26628,7 +27195,7 @@
                 <a:ea typeface="Calibri" pitchFamily="34" charset="-122"/>
                 <a:cs typeface="Calibri" pitchFamily="34" charset="-120"/>
               </a:rPr>
-              <a:t>act or result of</a:t>
+              <a:t>act or process of</a:t>
             </a:r>
             <a:endParaRPr lang="en-US" sz="850" dirty="0"/>
           </a:p>
@@ -27315,7 +27882,7 @@
                 <a:ea typeface="Trebuchet MS" pitchFamily="34" charset="-122"/>
                 <a:cs typeface="Trebuchet MS" pitchFamily="34" charset="-120"/>
               </a:rPr>
-              <a:t>io</a:t>
+              <a:t>i</a:t>
             </a:r>
             <a:endParaRPr lang="en-US" sz="900" dirty="0"/>
           </a:p>
@@ -27323,13 +27890,79 @@
       </p:sp>
       <p:sp>
         <p:nvSpPr>
-          <p:cNvPr id="43" name="Text 41"/>
-          <p:cNvSpPr/>
-          <p:nvPr/>
-        </p:nvSpPr>
-        <p:spPr>
-          <a:xfrm>
-            <a:off x="6408638" y="4572000"/>
+          <p:cNvPr id="43" name="Shape 41"/>
+          <p:cNvSpPr/>
+          <p:nvPr/>
+        </p:nvSpPr>
+        <p:spPr>
+          <a:xfrm>
+            <a:off x="7447135" y="4169664"/>
+            <a:ext cx="685800" cy="384048"/>
+          </a:xfrm>
+          <a:prstGeom prst="rect">
+            <a:avLst>
+              <a:gd name="adj" fmla="val 9524"/>
+            </a:avLst>
+          </a:prstGeom>
+          <a:solidFill>
+            <a:srgbClr val="FFFFFF"/>
+          </a:solidFill>
+          <a:ln w="12700">
+            <a:solidFill>
+              <a:srgbClr val="DB2777"/>
+            </a:solidFill>
+            <a:prstDash val="solid"/>
+          </a:ln>
+        </p:spPr>
+      </p:sp>
+      <p:sp>
+        <p:nvSpPr>
+          <p:cNvPr id="44" name="Text 42"/>
+          <p:cNvSpPr/>
+          <p:nvPr/>
+        </p:nvSpPr>
+        <p:spPr>
+          <a:xfrm>
+            <a:off x="7447135" y="4169664"/>
+            <a:ext cx="685800" cy="384048"/>
+          </a:xfrm>
+          <a:prstGeom prst="rect">
+            <a:avLst/>
+          </a:prstGeom>
+          <a:noFill/>
+          <a:ln/>
+        </p:spPr>
+        <p:txBody>
+          <a:bodyPr wrap="square" lIns="0" tIns="0" rIns="0" bIns="0" rtlCol="0" anchor="ctr"/>
+          <a:lstStyle/>
+          <a:p>
+            <a:pPr algn="ctr" indent="0" marL="0">
+              <a:buNone/>
+            </a:pPr>
+            <a:r>
+              <a:rPr lang="en-US" sz="900" b="1" dirty="0">
+                <a:solidFill>
+                  <a:srgbClr val="9D174D"/>
+                </a:solidFill>
+                <a:latin typeface="Trebuchet MS" pitchFamily="34" charset="0"/>
+                <a:ea typeface="Trebuchet MS" pitchFamily="34" charset="-122"/>
+                <a:cs typeface="Trebuchet MS" pitchFamily="34" charset="-120"/>
+              </a:rPr>
+              <a:t>on</a:t>
+            </a:r>
+            <a:endParaRPr lang="en-US" sz="900" dirty="0"/>
+          </a:p>
+        </p:txBody>
+      </p:sp>
+      <p:sp>
+        <p:nvSpPr>
+          <p:cNvPr id="45" name="Text 43"/>
+          <p:cNvSpPr/>
+          <p:nvPr/>
+        </p:nvSpPr>
+        <p:spPr>
+          <a:xfrm>
+            <a:off x="7447135" y="4572000"/>
             <a:ext cx="685800" cy="219456"/>
           </a:xfrm>
           <a:prstGeom prst="rect">
@@ -27354,75 +27987,9 @@
                 <a:ea typeface="Calibri" pitchFamily="34" charset="-122"/>
                 <a:cs typeface="Calibri" pitchFamily="34" charset="-120"/>
               </a:rPr>
-              <a:t>/sh/</a:t>
+              <a:t>/un/</a:t>
             </a:r>
             <a:endParaRPr lang="en-US" sz="750" dirty="0"/>
-          </a:p>
-        </p:txBody>
-      </p:sp>
-      <p:sp>
-        <p:nvSpPr>
-          <p:cNvPr id="44" name="Shape 42"/>
-          <p:cNvSpPr/>
-          <p:nvPr/>
-        </p:nvSpPr>
-        <p:spPr>
-          <a:xfrm>
-            <a:off x="7447135" y="4169664"/>
-            <a:ext cx="685800" cy="384048"/>
-          </a:xfrm>
-          <a:prstGeom prst="rect">
-            <a:avLst>
-              <a:gd name="adj" fmla="val 9524"/>
-            </a:avLst>
-          </a:prstGeom>
-          <a:solidFill>
-            <a:srgbClr val="FFFFFF"/>
-          </a:solidFill>
-          <a:ln w="12700">
-            <a:solidFill>
-              <a:srgbClr val="DB2777"/>
-            </a:solidFill>
-            <a:prstDash val="solid"/>
-          </a:ln>
-        </p:spPr>
-      </p:sp>
-      <p:sp>
-        <p:nvSpPr>
-          <p:cNvPr id="45" name="Text 43"/>
-          <p:cNvSpPr/>
-          <p:nvPr/>
-        </p:nvSpPr>
-        <p:spPr>
-          <a:xfrm>
-            <a:off x="7447135" y="4169664"/>
-            <a:ext cx="685800" cy="384048"/>
-          </a:xfrm>
-          <a:prstGeom prst="rect">
-            <a:avLst/>
-          </a:prstGeom>
-          <a:noFill/>
-          <a:ln/>
-        </p:spPr>
-        <p:txBody>
-          <a:bodyPr wrap="square" lIns="0" tIns="0" rIns="0" bIns="0" rtlCol="0" anchor="ctr"/>
-          <a:lstStyle/>
-          <a:p>
-            <a:pPr algn="ctr" indent="0" marL="0">
-              <a:buNone/>
-            </a:pPr>
-            <a:r>
-              <a:rPr lang="en-US" sz="900" b="1" dirty="0">
-                <a:solidFill>
-                  <a:srgbClr val="9D174D"/>
-                </a:solidFill>
-                <a:latin typeface="Trebuchet MS" pitchFamily="34" charset="0"/>
-                <a:ea typeface="Trebuchet MS" pitchFamily="34" charset="-122"/>
-                <a:cs typeface="Trebuchet MS" pitchFamily="34" charset="-120"/>
-              </a:rPr>
-              <a:t>n</a:t>
-            </a:r>
-            <a:endParaRPr lang="en-US" sz="900" dirty="0"/>
           </a:p>
         </p:txBody>
       </p:sp>
@@ -27851,7 +28418,7 @@
                 <a:ea typeface="Trebuchet MS" pitchFamily="34" charset="-122"/>
                 <a:cs typeface="Trebuchet MS" pitchFamily="34" charset="-120"/>
               </a:rPr>
-              <a:t>intersect</a:t>
+              <a:t>insect</a:t>
             </a:r>
             <a:endParaRPr lang="en-US" sz="2800" dirty="0"/>
           </a:p>
@@ -28678,7 +29245,7 @@
                 <a:ea typeface="Trebuchet MS" pitchFamily="34" charset="-122"/>
                 <a:cs typeface="Trebuchet MS" pitchFamily="34" charset="-120"/>
               </a:rPr>
-              <a:t>intersect</a:t>
+              <a:t>insect</a:t>
             </a:r>
             <a:endParaRPr lang="en-US" sz="2800" dirty="0"/>
           </a:p>
@@ -28817,7 +29384,7 @@
                 <a:ea typeface="Trebuchet MS" pitchFamily="34" charset="-122"/>
                 <a:cs typeface="Trebuchet MS" pitchFamily="34" charset="-120"/>
               </a:rPr>
-              <a:t>inter</a:t>
+              <a:t>in</a:t>
             </a:r>
             <a:endParaRPr lang="en-US" sz="1300" dirty="0"/>
           </a:p>
@@ -28856,7 +29423,7 @@
                 <a:ea typeface="Calibri" pitchFamily="34" charset="-122"/>
                 <a:cs typeface="Calibri" pitchFamily="34" charset="-120"/>
               </a:rPr>
-              <a:t>between, among</a:t>
+              <a:t>into, within</a:t>
             </a:r>
             <a:endParaRPr lang="en-US" sz="850" dirty="0"/>
           </a:p>
@@ -29663,7 +30230,7 @@
                 <a:ea typeface="Trebuchet MS" pitchFamily="34" charset="-122"/>
                 <a:cs typeface="Trebuchet MS" pitchFamily="34" charset="-120"/>
               </a:rPr>
-              <a:t>intersect</a:t>
+              <a:t>insect</a:t>
             </a:r>
             <a:endParaRPr lang="en-US" sz="2800" dirty="0"/>
           </a:p>
@@ -29802,7 +30369,7 @@
                 <a:ea typeface="Trebuchet MS" pitchFamily="34" charset="-122"/>
                 <a:cs typeface="Trebuchet MS" pitchFamily="34" charset="-120"/>
               </a:rPr>
-              <a:t>inter</a:t>
+              <a:t>in</a:t>
             </a:r>
             <a:endParaRPr lang="en-US" sz="1300" dirty="0"/>
           </a:p>
@@ -29841,7 +30408,7 @@
                 <a:ea typeface="Calibri" pitchFamily="34" charset="-122"/>
                 <a:cs typeface="Calibri" pitchFamily="34" charset="-120"/>
               </a:rPr>
-              <a:t>between, among</a:t>
+              <a:t>into, within</a:t>
             </a:r>
             <a:endParaRPr lang="en-US" sz="850" dirty="0"/>
           </a:p>
@@ -30060,7 +30627,7 @@
         </p:nvSpPr>
         <p:spPr>
           <a:xfrm>
-            <a:off x="2313432" y="3364992"/>
+            <a:off x="2999232" y="3364992"/>
             <a:ext cx="1645920" cy="475488"/>
           </a:xfrm>
           <a:prstGeom prst="rect">
@@ -30087,7 +30654,7 @@
         </p:nvSpPr>
         <p:spPr>
           <a:xfrm>
-            <a:off x="2313432" y="3364992"/>
+            <a:off x="2999232" y="3364992"/>
             <a:ext cx="1645920" cy="475488"/>
           </a:xfrm>
           <a:prstGeom prst="rect">
@@ -30126,8 +30693,8 @@
         </p:nvSpPr>
         <p:spPr>
           <a:xfrm>
-            <a:off x="3959352" y="3364992"/>
-            <a:ext cx="411480" cy="475488"/>
+            <a:off x="4645152" y="3364992"/>
+            <a:ext cx="1097280" cy="475488"/>
           </a:xfrm>
           <a:prstGeom prst="rect">
             <a:avLst/>
@@ -30165,7 +30732,7 @@
         </p:nvSpPr>
         <p:spPr>
           <a:xfrm>
-            <a:off x="4370832" y="3364992"/>
+            <a:off x="5742432" y="3364992"/>
             <a:ext cx="1645920" cy="475488"/>
           </a:xfrm>
           <a:prstGeom prst="rect">
@@ -30192,7 +30759,7 @@
         </p:nvSpPr>
         <p:spPr>
           <a:xfrm>
-            <a:off x="4370832" y="3364992"/>
+            <a:off x="5742432" y="3364992"/>
             <a:ext cx="1645920" cy="475488"/>
           </a:xfrm>
           <a:prstGeom prst="rect">
@@ -30217,7 +30784,7 @@
                 <a:ea typeface="Trebuchet MS" pitchFamily="34" charset="-122"/>
                 <a:cs typeface="Trebuchet MS" pitchFamily="34" charset="-120"/>
               </a:rPr>
-              <a:t>ter</a:t>
+              <a:t>sect</a:t>
             </a:r>
             <a:endParaRPr lang="en-US" sz="1400" dirty="0"/>
           </a:p>
@@ -30225,119 +30792,80 @@
       </p:sp>
       <p:sp>
         <p:nvSpPr>
-          <p:cNvPr id="30" name="Text 28"/>
-          <p:cNvSpPr/>
-          <p:nvPr/>
-        </p:nvSpPr>
-        <p:spPr>
-          <a:xfrm>
-            <a:off x="6016752" y="3364992"/>
-            <a:ext cx="411480" cy="475488"/>
-          </a:xfrm>
-          <a:prstGeom prst="rect">
-            <a:avLst/>
-          </a:prstGeom>
-          <a:noFill/>
-          <a:ln/>
-        </p:spPr>
-        <p:txBody>
-          <a:bodyPr wrap="square" lIns="0" tIns="0" rIns="0" bIns="0" rtlCol="0" anchor="ctr"/>
-          <a:lstStyle/>
-          <a:p>
-            <a:pPr algn="ctr" indent="0" marL="0">
-              <a:buNone/>
-            </a:pPr>
-            <a:r>
-              <a:rPr lang="en-US" sz="1600" b="1" dirty="0">
-                <a:solidFill>
-                  <a:srgbClr val="0D9488"/>
+          <p:cNvPr id="30" name="Shape 28"/>
+          <p:cNvSpPr/>
+          <p:nvPr/>
+        </p:nvSpPr>
+        <p:spPr>
+          <a:xfrm>
+            <a:off x="365760" y="4096512"/>
+            <a:ext cx="1371600" cy="804672"/>
+          </a:xfrm>
+          <a:prstGeom prst="rect">
+            <a:avLst>
+              <a:gd name="adj" fmla="val 6818"/>
+            </a:avLst>
+          </a:prstGeom>
+          <a:solidFill>
+            <a:srgbClr val="E2E8F0"/>
+          </a:solidFill>
+          <a:ln w="12700">
+            <a:solidFill>
+              <a:srgbClr val="E2E8F0"/>
+            </a:solidFill>
+            <a:prstDash val="solid"/>
+          </a:ln>
+        </p:spPr>
+      </p:sp>
+      <p:sp>
+        <p:nvSpPr>
+          <p:cNvPr id="31" name="Text 29"/>
+          <p:cNvSpPr/>
+          <p:nvPr/>
+        </p:nvSpPr>
+        <p:spPr>
+          <a:xfrm>
+            <a:off x="365760" y="4096512"/>
+            <a:ext cx="1371600" cy="804672"/>
+          </a:xfrm>
+          <a:prstGeom prst="rect">
+            <a:avLst/>
+          </a:prstGeom>
+          <a:noFill/>
+          <a:ln/>
+        </p:spPr>
+        <p:txBody>
+          <a:bodyPr wrap="square" lIns="0" tIns="0" rIns="0" bIns="0" rtlCol="0" anchor="ctr"/>
+          <a:lstStyle/>
+          <a:p>
+            <a:pPr algn="ctr" indent="0" marL="0">
+              <a:buNone/>
+            </a:pPr>
+            <a:r>
+              <a:rPr lang="en-US" sz="1100" b="1" dirty="0">
+                <a:solidFill>
+                  <a:srgbClr val="475569"/>
                 </a:solidFill>
                 <a:latin typeface="Trebuchet MS" pitchFamily="34" charset="0"/>
                 <a:ea typeface="Trebuchet MS" pitchFamily="34" charset="-122"/>
                 <a:cs typeface="Trebuchet MS" pitchFamily="34" charset="-120"/>
               </a:rPr>
-              <a:t>·</a:t>
-            </a:r>
-            <a:endParaRPr lang="en-US" sz="1600" dirty="0"/>
-          </a:p>
-        </p:txBody>
-      </p:sp>
-      <p:sp>
-        <p:nvSpPr>
-          <p:cNvPr id="31" name="Shape 29"/>
-          <p:cNvSpPr/>
-          <p:nvPr/>
-        </p:nvSpPr>
-        <p:spPr>
-          <a:xfrm>
-            <a:off x="6428232" y="3364992"/>
-            <a:ext cx="1645920" cy="475488"/>
-          </a:xfrm>
-          <a:prstGeom prst="rect">
-            <a:avLst>
-              <a:gd name="adj" fmla="val 9615"/>
-            </a:avLst>
-          </a:prstGeom>
-          <a:solidFill>
-            <a:srgbClr val="FFFFFF"/>
-          </a:solidFill>
-          <a:ln w="12700">
-            <a:solidFill>
-              <a:srgbClr val="0D9488"/>
-            </a:solidFill>
-            <a:prstDash val="solid"/>
-          </a:ln>
-        </p:spPr>
-      </p:sp>
-      <p:sp>
-        <p:nvSpPr>
-          <p:cNvPr id="32" name="Text 30"/>
-          <p:cNvSpPr/>
-          <p:nvPr/>
-        </p:nvSpPr>
-        <p:spPr>
-          <a:xfrm>
-            <a:off x="6428232" y="3364992"/>
-            <a:ext cx="1645920" cy="475488"/>
-          </a:xfrm>
-          <a:prstGeom prst="rect">
-            <a:avLst/>
-          </a:prstGeom>
-          <a:noFill/>
-          <a:ln/>
-        </p:spPr>
-        <p:txBody>
-          <a:bodyPr wrap="square" lIns="0" tIns="0" rIns="0" bIns="0" rtlCol="0" anchor="ctr"/>
-          <a:lstStyle/>
-          <a:p>
-            <a:pPr algn="ctr" indent="0" marL="0">
-              <a:buNone/>
-            </a:pPr>
-            <a:r>
-              <a:rPr lang="en-US" sz="1400" b="1" dirty="0">
-                <a:solidFill>
-                  <a:srgbClr val="0D9488"/>
-                </a:solidFill>
-                <a:latin typeface="Trebuchet MS" pitchFamily="34" charset="0"/>
-                <a:ea typeface="Trebuchet MS" pitchFamily="34" charset="-122"/>
-                <a:cs typeface="Trebuchet MS" pitchFamily="34" charset="-120"/>
-              </a:rPr>
-              <a:t>sect</a:t>
-            </a:r>
-            <a:endParaRPr lang="en-US" sz="1400" dirty="0"/>
-          </a:p>
-        </p:txBody>
-      </p:sp>
-      <p:sp>
-        <p:nvSpPr>
-          <p:cNvPr id="33" name="Shape 31"/>
-          <p:cNvSpPr/>
-          <p:nvPr/>
-        </p:nvSpPr>
-        <p:spPr>
-          <a:xfrm>
-            <a:off x="365760" y="4096512"/>
-            <a:ext cx="1371600" cy="804672"/>
+              <a:t>Phonemes</a:t>
+            </a:r>
+            <a:endParaRPr lang="en-US" sz="1100" dirty="0"/>
+          </a:p>
+        </p:txBody>
+      </p:sp>
+      <p:sp>
+        <p:nvSpPr>
+          <p:cNvPr id="32" name="Shape 30"/>
+          <p:cNvSpPr/>
+          <p:nvPr/>
+        </p:nvSpPr>
+        <p:spPr>
+          <a:xfrm>
+            <a:off x="1874520" y="4096512"/>
+            <a:ext cx="6903720" cy="804672"/>
           </a:xfrm>
           <a:prstGeom prst="rect">
             <a:avLst>
@@ -30345,85 +30873,19 @@
             </a:avLst>
           </a:prstGeom>
           <a:solidFill>
-            <a:srgbClr val="E2E8F0"/>
+            <a:srgbClr val="F8FAFC"/>
           </a:solidFill>
           <a:ln w="12700">
             <a:solidFill>
               <a:srgbClr val="E2E8F0"/>
             </a:solidFill>
-            <a:prstDash val="solid"/>
-          </a:ln>
-        </p:spPr>
-      </p:sp>
-      <p:sp>
-        <p:nvSpPr>
-          <p:cNvPr id="34" name="Text 32"/>
-          <p:cNvSpPr/>
-          <p:nvPr/>
-        </p:nvSpPr>
-        <p:spPr>
-          <a:xfrm>
-            <a:off x="365760" y="4096512"/>
-            <a:ext cx="1371600" cy="804672"/>
-          </a:xfrm>
-          <a:prstGeom prst="rect">
-            <a:avLst/>
-          </a:prstGeom>
-          <a:noFill/>
-          <a:ln/>
-        </p:spPr>
-        <p:txBody>
-          <a:bodyPr wrap="square" lIns="0" tIns="0" rIns="0" bIns="0" rtlCol="0" anchor="ctr"/>
-          <a:lstStyle/>
-          <a:p>
-            <a:pPr algn="ctr" indent="0" marL="0">
-              <a:buNone/>
-            </a:pPr>
-            <a:r>
-              <a:rPr lang="en-US" sz="1100" b="1" dirty="0">
-                <a:solidFill>
-                  <a:srgbClr val="475569"/>
-                </a:solidFill>
-                <a:latin typeface="Trebuchet MS" pitchFamily="34" charset="0"/>
-                <a:ea typeface="Trebuchet MS" pitchFamily="34" charset="-122"/>
-                <a:cs typeface="Trebuchet MS" pitchFamily="34" charset="-120"/>
-              </a:rPr>
-              <a:t>Phonemes</a:t>
-            </a:r>
-            <a:endParaRPr lang="en-US" sz="1100" dirty="0"/>
-          </a:p>
-        </p:txBody>
-      </p:sp>
-      <p:sp>
-        <p:nvSpPr>
-          <p:cNvPr id="35" name="Shape 33"/>
-          <p:cNvSpPr/>
-          <p:nvPr/>
-        </p:nvSpPr>
-        <p:spPr>
-          <a:xfrm>
-            <a:off x="1874520" y="4096512"/>
-            <a:ext cx="6903720" cy="804672"/>
-          </a:xfrm>
-          <a:prstGeom prst="rect">
-            <a:avLst>
-              <a:gd name="adj" fmla="val 6818"/>
-            </a:avLst>
-          </a:prstGeom>
-          <a:solidFill>
-            <a:srgbClr val="F8FAFC"/>
-          </a:solidFill>
-          <a:ln w="12700">
-            <a:solidFill>
-              <a:srgbClr val="E2E8F0"/>
-            </a:solidFill>
             <a:prstDash val="dash"/>
           </a:ln>
         </p:spPr>
       </p:sp>
       <p:sp>
         <p:nvSpPr>
-          <p:cNvPr id="36" name="Text 34"/>
+          <p:cNvPr id="33" name="Text 31"/>
           <p:cNvSpPr/>
           <p:nvPr/>
         </p:nvSpPr>
@@ -30885,7 +31347,7 @@
                 <a:ea typeface="Trebuchet MS" pitchFamily="34" charset="-122"/>
                 <a:cs typeface="Trebuchet MS" pitchFamily="34" charset="-120"/>
               </a:rPr>
-              <a:t>intersect</a:t>
+              <a:t>insect</a:t>
             </a:r>
             <a:endParaRPr lang="en-US" sz="2800" dirty="0"/>
           </a:p>
@@ -31024,7 +31486,7 @@
                 <a:ea typeface="Trebuchet MS" pitchFamily="34" charset="-122"/>
                 <a:cs typeface="Trebuchet MS" pitchFamily="34" charset="-120"/>
               </a:rPr>
-              <a:t>inter</a:t>
+              <a:t>in</a:t>
             </a:r>
             <a:endParaRPr lang="en-US" sz="1300" dirty="0"/>
           </a:p>
@@ -31063,7 +31525,7 @@
                 <a:ea typeface="Calibri" pitchFamily="34" charset="-122"/>
                 <a:cs typeface="Calibri" pitchFamily="34" charset="-120"/>
               </a:rPr>
-              <a:t>between, among</a:t>
+              <a:t>into, within</a:t>
             </a:r>
             <a:endParaRPr lang="en-US" sz="850" dirty="0"/>
           </a:p>
@@ -31282,7 +31744,7 @@
         </p:nvSpPr>
         <p:spPr>
           <a:xfrm>
-            <a:off x="2313432" y="3364992"/>
+            <a:off x="2999232" y="3364992"/>
             <a:ext cx="1645920" cy="475488"/>
           </a:xfrm>
           <a:prstGeom prst="rect">
@@ -31309,7 +31771,7 @@
         </p:nvSpPr>
         <p:spPr>
           <a:xfrm>
-            <a:off x="2313432" y="3364992"/>
+            <a:off x="2999232" y="3364992"/>
             <a:ext cx="1645920" cy="475488"/>
           </a:xfrm>
           <a:prstGeom prst="rect">
@@ -31348,8 +31810,8 @@
         </p:nvSpPr>
         <p:spPr>
           <a:xfrm>
-            <a:off x="3959352" y="3364992"/>
-            <a:ext cx="411480" cy="475488"/>
+            <a:off x="4645152" y="3364992"/>
+            <a:ext cx="1097280" cy="475488"/>
           </a:xfrm>
           <a:prstGeom prst="rect">
             <a:avLst/>
@@ -31387,7 +31849,7 @@
         </p:nvSpPr>
         <p:spPr>
           <a:xfrm>
-            <a:off x="4370832" y="3364992"/>
+            <a:off x="5742432" y="3364992"/>
             <a:ext cx="1645920" cy="475488"/>
           </a:xfrm>
           <a:prstGeom prst="rect">
@@ -31414,7 +31876,7 @@
         </p:nvSpPr>
         <p:spPr>
           <a:xfrm>
-            <a:off x="4370832" y="3364992"/>
+            <a:off x="5742432" y="3364992"/>
             <a:ext cx="1645920" cy="475488"/>
           </a:xfrm>
           <a:prstGeom prst="rect">
@@ -31439,7 +31901,7 @@
                 <a:ea typeface="Trebuchet MS" pitchFamily="34" charset="-122"/>
                 <a:cs typeface="Trebuchet MS" pitchFamily="34" charset="-120"/>
               </a:rPr>
-              <a:t>ter</a:t>
+              <a:t>sect</a:t>
             </a:r>
             <a:endParaRPr lang="en-US" sz="1400" dirty="0"/>
           </a:p>
@@ -31447,211 +31909,238 @@
       </p:sp>
       <p:sp>
         <p:nvSpPr>
-          <p:cNvPr id="30" name="Text 28"/>
-          <p:cNvSpPr/>
-          <p:nvPr/>
-        </p:nvSpPr>
-        <p:spPr>
-          <a:xfrm>
-            <a:off x="6016752" y="3364992"/>
-            <a:ext cx="411480" cy="475488"/>
-          </a:xfrm>
-          <a:prstGeom prst="rect">
-            <a:avLst/>
-          </a:prstGeom>
-          <a:noFill/>
-          <a:ln/>
-        </p:spPr>
-        <p:txBody>
-          <a:bodyPr wrap="square" lIns="0" tIns="0" rIns="0" bIns="0" rtlCol="0" anchor="ctr"/>
-          <a:lstStyle/>
-          <a:p>
-            <a:pPr algn="ctr" indent="0" marL="0">
-              <a:buNone/>
-            </a:pPr>
-            <a:r>
-              <a:rPr lang="en-US" sz="1600" b="1" dirty="0">
-                <a:solidFill>
-                  <a:srgbClr val="0D9488"/>
+          <p:cNvPr id="30" name="Shape 28"/>
+          <p:cNvSpPr/>
+          <p:nvPr/>
+        </p:nvSpPr>
+        <p:spPr>
+          <a:xfrm>
+            <a:off x="365760" y="4096512"/>
+            <a:ext cx="1371600" cy="804672"/>
+          </a:xfrm>
+          <a:prstGeom prst="rect">
+            <a:avLst>
+              <a:gd name="adj" fmla="val 6818"/>
+            </a:avLst>
+          </a:prstGeom>
+          <a:solidFill>
+            <a:srgbClr val="E2E8F0"/>
+          </a:solidFill>
+          <a:ln w="12700">
+            <a:solidFill>
+              <a:srgbClr val="E2E8F0"/>
+            </a:solidFill>
+            <a:prstDash val="solid"/>
+          </a:ln>
+        </p:spPr>
+      </p:sp>
+      <p:sp>
+        <p:nvSpPr>
+          <p:cNvPr id="31" name="Text 29"/>
+          <p:cNvSpPr/>
+          <p:nvPr/>
+        </p:nvSpPr>
+        <p:spPr>
+          <a:xfrm>
+            <a:off x="365760" y="4096512"/>
+            <a:ext cx="1371600" cy="804672"/>
+          </a:xfrm>
+          <a:prstGeom prst="rect">
+            <a:avLst/>
+          </a:prstGeom>
+          <a:noFill/>
+          <a:ln/>
+        </p:spPr>
+        <p:txBody>
+          <a:bodyPr wrap="square" lIns="0" tIns="0" rIns="0" bIns="0" rtlCol="0" anchor="ctr"/>
+          <a:lstStyle/>
+          <a:p>
+            <a:pPr algn="ctr" indent="0" marL="0">
+              <a:buNone/>
+            </a:pPr>
+            <a:r>
+              <a:rPr lang="en-US" sz="1100" b="1" dirty="0">
+                <a:solidFill>
+                  <a:srgbClr val="475569"/>
                 </a:solidFill>
                 <a:latin typeface="Trebuchet MS" pitchFamily="34" charset="0"/>
                 <a:ea typeface="Trebuchet MS" pitchFamily="34" charset="-122"/>
                 <a:cs typeface="Trebuchet MS" pitchFamily="34" charset="-120"/>
               </a:rPr>
-              <a:t>·</a:t>
-            </a:r>
-            <a:endParaRPr lang="en-US" sz="1600" dirty="0"/>
-          </a:p>
-        </p:txBody>
-      </p:sp>
-      <p:sp>
-        <p:nvSpPr>
-          <p:cNvPr id="31" name="Shape 29"/>
-          <p:cNvSpPr/>
-          <p:nvPr/>
-        </p:nvSpPr>
-        <p:spPr>
-          <a:xfrm>
-            <a:off x="6428232" y="3364992"/>
-            <a:ext cx="1645920" cy="475488"/>
+              <a:t>Phonemes</a:t>
+            </a:r>
+            <a:endParaRPr lang="en-US" sz="1100" dirty="0"/>
+          </a:p>
+        </p:txBody>
+      </p:sp>
+      <p:sp>
+        <p:nvSpPr>
+          <p:cNvPr id="32" name="Shape 30"/>
+          <p:cNvSpPr/>
+          <p:nvPr/>
+        </p:nvSpPr>
+        <p:spPr>
+          <a:xfrm>
+            <a:off x="1874520" y="4096512"/>
+            <a:ext cx="6903720" cy="658368"/>
           </a:xfrm>
           <a:prstGeom prst="rect">
             <a:avLst>
-              <a:gd name="adj" fmla="val 9615"/>
+              <a:gd name="adj" fmla="val 8333"/>
             </a:avLst>
           </a:prstGeom>
           <a:solidFill>
+            <a:srgbClr val="FCE7F3"/>
+          </a:solidFill>
+          <a:ln w="12700">
+            <a:solidFill>
+              <a:srgbClr val="DB2777"/>
+            </a:solidFill>
+            <a:prstDash val="solid"/>
+          </a:ln>
+        </p:spPr>
+      </p:sp>
+      <p:sp>
+        <p:nvSpPr>
+          <p:cNvPr id="33" name="Shape 31"/>
+          <p:cNvSpPr/>
+          <p:nvPr/>
+        </p:nvSpPr>
+        <p:spPr>
+          <a:xfrm>
+            <a:off x="2254649" y="4169664"/>
+            <a:ext cx="685800" cy="475488"/>
+          </a:xfrm>
+          <a:prstGeom prst="rect">
+            <a:avLst>
+              <a:gd name="adj" fmla="val 7692"/>
+            </a:avLst>
+          </a:prstGeom>
+          <a:solidFill>
             <a:srgbClr val="FFFFFF"/>
           </a:solidFill>
           <a:ln w="12700">
             <a:solidFill>
-              <a:srgbClr val="0D9488"/>
-            </a:solidFill>
-            <a:prstDash val="solid"/>
-          </a:ln>
-        </p:spPr>
-      </p:sp>
-      <p:sp>
-        <p:nvSpPr>
-          <p:cNvPr id="32" name="Text 30"/>
-          <p:cNvSpPr/>
-          <p:nvPr/>
-        </p:nvSpPr>
-        <p:spPr>
-          <a:xfrm>
-            <a:off x="6428232" y="3364992"/>
-            <a:ext cx="1645920" cy="475488"/>
-          </a:xfrm>
-          <a:prstGeom prst="rect">
-            <a:avLst/>
-          </a:prstGeom>
-          <a:noFill/>
-          <a:ln/>
-        </p:spPr>
-        <p:txBody>
-          <a:bodyPr wrap="square" lIns="0" tIns="0" rIns="0" bIns="0" rtlCol="0" anchor="ctr"/>
-          <a:lstStyle/>
-          <a:p>
-            <a:pPr algn="ctr" indent="0" marL="0">
-              <a:buNone/>
-            </a:pPr>
-            <a:r>
-              <a:rPr lang="en-US" sz="1400" b="1" dirty="0">
-                <a:solidFill>
-                  <a:srgbClr val="0D9488"/>
+              <a:srgbClr val="DB2777"/>
+            </a:solidFill>
+            <a:prstDash val="solid"/>
+          </a:ln>
+        </p:spPr>
+      </p:sp>
+      <p:sp>
+        <p:nvSpPr>
+          <p:cNvPr id="34" name="Text 32"/>
+          <p:cNvSpPr/>
+          <p:nvPr/>
+        </p:nvSpPr>
+        <p:spPr>
+          <a:xfrm>
+            <a:off x="2254649" y="4169664"/>
+            <a:ext cx="685800" cy="475488"/>
+          </a:xfrm>
+          <a:prstGeom prst="rect">
+            <a:avLst/>
+          </a:prstGeom>
+          <a:noFill/>
+          <a:ln/>
+        </p:spPr>
+        <p:txBody>
+          <a:bodyPr wrap="square" lIns="0" tIns="0" rIns="0" bIns="0" rtlCol="0" anchor="ctr"/>
+          <a:lstStyle/>
+          <a:p>
+            <a:pPr algn="ctr" indent="0" marL="0">
+              <a:buNone/>
+            </a:pPr>
+            <a:r>
+              <a:rPr lang="en-US" sz="900" b="1" dirty="0">
+                <a:solidFill>
+                  <a:srgbClr val="9D174D"/>
                 </a:solidFill>
                 <a:latin typeface="Trebuchet MS" pitchFamily="34" charset="0"/>
                 <a:ea typeface="Trebuchet MS" pitchFamily="34" charset="-122"/>
                 <a:cs typeface="Trebuchet MS" pitchFamily="34" charset="-120"/>
               </a:rPr>
-              <a:t>sect</a:t>
-            </a:r>
-            <a:endParaRPr lang="en-US" sz="1400" dirty="0"/>
-          </a:p>
-        </p:txBody>
-      </p:sp>
-      <p:sp>
-        <p:nvSpPr>
-          <p:cNvPr id="33" name="Shape 31"/>
-          <p:cNvSpPr/>
-          <p:nvPr/>
-        </p:nvSpPr>
-        <p:spPr>
-          <a:xfrm>
-            <a:off x="365760" y="4096512"/>
-            <a:ext cx="1371600" cy="804672"/>
+              <a:t>i</a:t>
+            </a:r>
+            <a:endParaRPr lang="en-US" sz="900" dirty="0"/>
+          </a:p>
+        </p:txBody>
+      </p:sp>
+      <p:sp>
+        <p:nvSpPr>
+          <p:cNvPr id="35" name="Shape 33"/>
+          <p:cNvSpPr/>
+          <p:nvPr/>
+        </p:nvSpPr>
+        <p:spPr>
+          <a:xfrm>
+            <a:off x="3293146" y="4169664"/>
+            <a:ext cx="685800" cy="475488"/>
           </a:xfrm>
           <a:prstGeom prst="rect">
             <a:avLst>
-              <a:gd name="adj" fmla="val 6818"/>
+              <a:gd name="adj" fmla="val 7692"/>
             </a:avLst>
           </a:prstGeom>
           <a:solidFill>
-            <a:srgbClr val="E2E8F0"/>
-          </a:solidFill>
-          <a:ln w="12700">
-            <a:solidFill>
-              <a:srgbClr val="E2E8F0"/>
-            </a:solidFill>
-            <a:prstDash val="solid"/>
-          </a:ln>
-        </p:spPr>
-      </p:sp>
-      <p:sp>
-        <p:nvSpPr>
-          <p:cNvPr id="34" name="Text 32"/>
-          <p:cNvSpPr/>
-          <p:nvPr/>
-        </p:nvSpPr>
-        <p:spPr>
-          <a:xfrm>
-            <a:off x="365760" y="4096512"/>
-            <a:ext cx="1371600" cy="804672"/>
-          </a:xfrm>
-          <a:prstGeom prst="rect">
-            <a:avLst/>
-          </a:prstGeom>
-          <a:noFill/>
-          <a:ln/>
-        </p:spPr>
-        <p:txBody>
-          <a:bodyPr wrap="square" lIns="0" tIns="0" rIns="0" bIns="0" rtlCol="0" anchor="ctr"/>
-          <a:lstStyle/>
-          <a:p>
-            <a:pPr algn="ctr" indent="0" marL="0">
-              <a:buNone/>
-            </a:pPr>
-            <a:r>
-              <a:rPr lang="en-US" sz="1100" b="1" dirty="0">
-                <a:solidFill>
-                  <a:srgbClr val="475569"/>
+            <a:srgbClr val="FFFFFF"/>
+          </a:solidFill>
+          <a:ln w="12700">
+            <a:solidFill>
+              <a:srgbClr val="DB2777"/>
+            </a:solidFill>
+            <a:prstDash val="solid"/>
+          </a:ln>
+        </p:spPr>
+      </p:sp>
+      <p:sp>
+        <p:nvSpPr>
+          <p:cNvPr id="36" name="Text 34"/>
+          <p:cNvSpPr/>
+          <p:nvPr/>
+        </p:nvSpPr>
+        <p:spPr>
+          <a:xfrm>
+            <a:off x="3293146" y="4169664"/>
+            <a:ext cx="685800" cy="475488"/>
+          </a:xfrm>
+          <a:prstGeom prst="rect">
+            <a:avLst/>
+          </a:prstGeom>
+          <a:noFill/>
+          <a:ln/>
+        </p:spPr>
+        <p:txBody>
+          <a:bodyPr wrap="square" lIns="0" tIns="0" rIns="0" bIns="0" rtlCol="0" anchor="ctr"/>
+          <a:lstStyle/>
+          <a:p>
+            <a:pPr algn="ctr" indent="0" marL="0">
+              <a:buNone/>
+            </a:pPr>
+            <a:r>
+              <a:rPr lang="en-US" sz="900" b="1" dirty="0">
+                <a:solidFill>
+                  <a:srgbClr val="9D174D"/>
                 </a:solidFill>
                 <a:latin typeface="Trebuchet MS" pitchFamily="34" charset="0"/>
                 <a:ea typeface="Trebuchet MS" pitchFamily="34" charset="-122"/>
                 <a:cs typeface="Trebuchet MS" pitchFamily="34" charset="-120"/>
               </a:rPr>
-              <a:t>Phonemes</a:t>
-            </a:r>
-            <a:endParaRPr lang="en-US" sz="1100" dirty="0"/>
-          </a:p>
-        </p:txBody>
-      </p:sp>
-      <p:sp>
-        <p:nvSpPr>
-          <p:cNvPr id="35" name="Shape 33"/>
-          <p:cNvSpPr/>
-          <p:nvPr/>
-        </p:nvSpPr>
-        <p:spPr>
-          <a:xfrm>
-            <a:off x="1874520" y="4096512"/>
-            <a:ext cx="6903720" cy="658368"/>
-          </a:xfrm>
-          <a:prstGeom prst="rect">
-            <a:avLst>
-              <a:gd name="adj" fmla="val 8333"/>
-            </a:avLst>
-          </a:prstGeom>
-          <a:solidFill>
-            <a:srgbClr val="FCE7F3"/>
-          </a:solidFill>
-          <a:ln w="12700">
-            <a:solidFill>
-              <a:srgbClr val="DB2777"/>
-            </a:solidFill>
-            <a:prstDash val="solid"/>
-          </a:ln>
-        </p:spPr>
-      </p:sp>
-      <p:sp>
-        <p:nvSpPr>
-          <p:cNvPr id="36" name="Shape 34"/>
-          <p:cNvSpPr/>
-          <p:nvPr/>
-        </p:nvSpPr>
-        <p:spPr>
-          <a:xfrm>
-            <a:off x="2023872" y="4169664"/>
+              <a:t>n</a:t>
+            </a:r>
+            <a:endParaRPr lang="en-US" sz="900" dirty="0"/>
+          </a:p>
+        </p:txBody>
+      </p:sp>
+      <p:sp>
+        <p:nvSpPr>
+          <p:cNvPr id="37" name="Shape 35"/>
+          <p:cNvSpPr/>
+          <p:nvPr/>
+        </p:nvSpPr>
+        <p:spPr>
+          <a:xfrm>
+            <a:off x="4331643" y="4169664"/>
             <a:ext cx="685800" cy="475488"/>
           </a:xfrm>
           <a:prstGeom prst="rect">
@@ -31672,13 +32161,13 @@
       </p:sp>
       <p:sp>
         <p:nvSpPr>
-          <p:cNvPr id="37" name="Text 35"/>
-          <p:cNvSpPr/>
-          <p:nvPr/>
-        </p:nvSpPr>
-        <p:spPr>
-          <a:xfrm>
-            <a:off x="2023872" y="4169664"/>
+          <p:cNvPr id="38" name="Text 36"/>
+          <p:cNvSpPr/>
+          <p:nvPr/>
+        </p:nvSpPr>
+        <p:spPr>
+          <a:xfrm>
+            <a:off x="4331643" y="4169664"/>
             <a:ext cx="685800" cy="475488"/>
           </a:xfrm>
           <a:prstGeom prst="rect">
@@ -31703,7 +32192,7 @@
                 <a:ea typeface="Trebuchet MS" pitchFamily="34" charset="-122"/>
                 <a:cs typeface="Trebuchet MS" pitchFamily="34" charset="-120"/>
               </a:rPr>
-              <a:t>i</a:t>
+              <a:t>s</a:t>
             </a:r>
             <a:endParaRPr lang="en-US" sz="900" dirty="0"/>
           </a:p>
@@ -31711,13 +32200,13 @@
       </p:sp>
       <p:sp>
         <p:nvSpPr>
-          <p:cNvPr id="38" name="Shape 36"/>
-          <p:cNvSpPr/>
-          <p:nvPr/>
-        </p:nvSpPr>
-        <p:spPr>
-          <a:xfrm>
-            <a:off x="2831592" y="4169664"/>
+          <p:cNvPr id="39" name="Shape 37"/>
+          <p:cNvSpPr/>
+          <p:nvPr/>
+        </p:nvSpPr>
+        <p:spPr>
+          <a:xfrm>
+            <a:off x="5370141" y="4169664"/>
             <a:ext cx="685800" cy="475488"/>
           </a:xfrm>
           <a:prstGeom prst="rect">
@@ -31738,13 +32227,13 @@
       </p:sp>
       <p:sp>
         <p:nvSpPr>
-          <p:cNvPr id="39" name="Text 37"/>
-          <p:cNvSpPr/>
-          <p:nvPr/>
-        </p:nvSpPr>
-        <p:spPr>
-          <a:xfrm>
-            <a:off x="2831592" y="4169664"/>
+          <p:cNvPr id="40" name="Text 38"/>
+          <p:cNvSpPr/>
+          <p:nvPr/>
+        </p:nvSpPr>
+        <p:spPr>
+          <a:xfrm>
+            <a:off x="5370141" y="4169664"/>
             <a:ext cx="685800" cy="475488"/>
           </a:xfrm>
           <a:prstGeom prst="rect">
@@ -31769,7 +32258,7 @@
                 <a:ea typeface="Trebuchet MS" pitchFamily="34" charset="-122"/>
                 <a:cs typeface="Trebuchet MS" pitchFamily="34" charset="-120"/>
               </a:rPr>
-              <a:t>n</a:t>
+              <a:t>e</a:t>
             </a:r>
             <a:endParaRPr lang="en-US" sz="900" dirty="0"/>
           </a:p>
@@ -31777,13 +32266,13 @@
       </p:sp>
       <p:sp>
         <p:nvSpPr>
-          <p:cNvPr id="40" name="Shape 38"/>
-          <p:cNvSpPr/>
-          <p:nvPr/>
-        </p:nvSpPr>
-        <p:spPr>
-          <a:xfrm>
-            <a:off x="3639312" y="4169664"/>
+          <p:cNvPr id="41" name="Shape 39"/>
+          <p:cNvSpPr/>
+          <p:nvPr/>
+        </p:nvSpPr>
+        <p:spPr>
+          <a:xfrm>
+            <a:off x="6408638" y="4169664"/>
             <a:ext cx="685800" cy="475488"/>
           </a:xfrm>
           <a:prstGeom prst="rect">
@@ -31804,13 +32293,13 @@
       </p:sp>
       <p:sp>
         <p:nvSpPr>
-          <p:cNvPr id="41" name="Text 39"/>
-          <p:cNvSpPr/>
-          <p:nvPr/>
-        </p:nvSpPr>
-        <p:spPr>
-          <a:xfrm>
-            <a:off x="3639312" y="4169664"/>
+          <p:cNvPr id="42" name="Text 40"/>
+          <p:cNvSpPr/>
+          <p:nvPr/>
+        </p:nvSpPr>
+        <p:spPr>
+          <a:xfrm>
+            <a:off x="6408638" y="4169664"/>
             <a:ext cx="685800" cy="475488"/>
           </a:xfrm>
           <a:prstGeom prst="rect">
@@ -31835,7 +32324,7 @@
                 <a:ea typeface="Trebuchet MS" pitchFamily="34" charset="-122"/>
                 <a:cs typeface="Trebuchet MS" pitchFamily="34" charset="-120"/>
               </a:rPr>
-              <a:t>t</a:t>
+              <a:t>c</a:t>
             </a:r>
             <a:endParaRPr lang="en-US" sz="900" dirty="0"/>
           </a:p>
@@ -31843,13 +32332,13 @@
       </p:sp>
       <p:sp>
         <p:nvSpPr>
-          <p:cNvPr id="42" name="Shape 40"/>
-          <p:cNvSpPr/>
-          <p:nvPr/>
-        </p:nvSpPr>
-        <p:spPr>
-          <a:xfrm>
-            <a:off x="4447032" y="4169664"/>
+          <p:cNvPr id="43" name="Shape 41"/>
+          <p:cNvSpPr/>
+          <p:nvPr/>
+        </p:nvSpPr>
+        <p:spPr>
+          <a:xfrm>
+            <a:off x="7447135" y="4169664"/>
             <a:ext cx="685800" cy="475488"/>
           </a:xfrm>
           <a:prstGeom prst="rect">
@@ -31870,277 +32359,13 @@
       </p:sp>
       <p:sp>
         <p:nvSpPr>
-          <p:cNvPr id="43" name="Text 41"/>
-          <p:cNvSpPr/>
-          <p:nvPr/>
-        </p:nvSpPr>
-        <p:spPr>
-          <a:xfrm>
-            <a:off x="4447032" y="4169664"/>
-            <a:ext cx="685800" cy="475488"/>
-          </a:xfrm>
-          <a:prstGeom prst="rect">
-            <a:avLst/>
-          </a:prstGeom>
-          <a:noFill/>
-          <a:ln/>
-        </p:spPr>
-        <p:txBody>
-          <a:bodyPr wrap="square" lIns="0" tIns="0" rIns="0" bIns="0" rtlCol="0" anchor="ctr"/>
-          <a:lstStyle/>
-          <a:p>
-            <a:pPr algn="ctr" indent="0" marL="0">
-              <a:buNone/>
-            </a:pPr>
-            <a:r>
-              <a:rPr lang="en-US" sz="900" b="1" dirty="0">
-                <a:solidFill>
-                  <a:srgbClr val="9D174D"/>
-                </a:solidFill>
-                <a:latin typeface="Trebuchet MS" pitchFamily="34" charset="0"/>
-                <a:ea typeface="Trebuchet MS" pitchFamily="34" charset="-122"/>
-                <a:cs typeface="Trebuchet MS" pitchFamily="34" charset="-120"/>
-              </a:rPr>
-              <a:t>er</a:t>
-            </a:r>
-            <a:endParaRPr lang="en-US" sz="900" dirty="0"/>
-          </a:p>
-        </p:txBody>
-      </p:sp>
-      <p:sp>
-        <p:nvSpPr>
-          <p:cNvPr id="44" name="Shape 42"/>
-          <p:cNvSpPr/>
-          <p:nvPr/>
-        </p:nvSpPr>
-        <p:spPr>
-          <a:xfrm>
-            <a:off x="5254752" y="4169664"/>
-            <a:ext cx="685800" cy="475488"/>
-          </a:xfrm>
-          <a:prstGeom prst="rect">
-            <a:avLst>
-              <a:gd name="adj" fmla="val 7692"/>
-            </a:avLst>
-          </a:prstGeom>
-          <a:solidFill>
-            <a:srgbClr val="FFFFFF"/>
-          </a:solidFill>
-          <a:ln w="12700">
-            <a:solidFill>
-              <a:srgbClr val="DB2777"/>
-            </a:solidFill>
-            <a:prstDash val="solid"/>
-          </a:ln>
-        </p:spPr>
-      </p:sp>
-      <p:sp>
-        <p:nvSpPr>
-          <p:cNvPr id="45" name="Text 43"/>
-          <p:cNvSpPr/>
-          <p:nvPr/>
-        </p:nvSpPr>
-        <p:spPr>
-          <a:xfrm>
-            <a:off x="5254752" y="4169664"/>
-            <a:ext cx="685800" cy="475488"/>
-          </a:xfrm>
-          <a:prstGeom prst="rect">
-            <a:avLst/>
-          </a:prstGeom>
-          <a:noFill/>
-          <a:ln/>
-        </p:spPr>
-        <p:txBody>
-          <a:bodyPr wrap="square" lIns="0" tIns="0" rIns="0" bIns="0" rtlCol="0" anchor="ctr"/>
-          <a:lstStyle/>
-          <a:p>
-            <a:pPr algn="ctr" indent="0" marL="0">
-              <a:buNone/>
-            </a:pPr>
-            <a:r>
-              <a:rPr lang="en-US" sz="900" b="1" dirty="0">
-                <a:solidFill>
-                  <a:srgbClr val="9D174D"/>
-                </a:solidFill>
-                <a:latin typeface="Trebuchet MS" pitchFamily="34" charset="0"/>
-                <a:ea typeface="Trebuchet MS" pitchFamily="34" charset="-122"/>
-                <a:cs typeface="Trebuchet MS" pitchFamily="34" charset="-120"/>
-              </a:rPr>
-              <a:t>s</a:t>
-            </a:r>
-            <a:endParaRPr lang="en-US" sz="900" dirty="0"/>
-          </a:p>
-        </p:txBody>
-      </p:sp>
-      <p:sp>
-        <p:nvSpPr>
-          <p:cNvPr id="46" name="Shape 44"/>
-          <p:cNvSpPr/>
-          <p:nvPr/>
-        </p:nvSpPr>
-        <p:spPr>
-          <a:xfrm>
-            <a:off x="6062472" y="4169664"/>
-            <a:ext cx="685800" cy="475488"/>
-          </a:xfrm>
-          <a:prstGeom prst="rect">
-            <a:avLst>
-              <a:gd name="adj" fmla="val 7692"/>
-            </a:avLst>
-          </a:prstGeom>
-          <a:solidFill>
-            <a:srgbClr val="FFFFFF"/>
-          </a:solidFill>
-          <a:ln w="12700">
-            <a:solidFill>
-              <a:srgbClr val="DB2777"/>
-            </a:solidFill>
-            <a:prstDash val="solid"/>
-          </a:ln>
-        </p:spPr>
-      </p:sp>
-      <p:sp>
-        <p:nvSpPr>
-          <p:cNvPr id="47" name="Text 45"/>
-          <p:cNvSpPr/>
-          <p:nvPr/>
-        </p:nvSpPr>
-        <p:spPr>
-          <a:xfrm>
-            <a:off x="6062472" y="4169664"/>
-            <a:ext cx="685800" cy="475488"/>
-          </a:xfrm>
-          <a:prstGeom prst="rect">
-            <a:avLst/>
-          </a:prstGeom>
-          <a:noFill/>
-          <a:ln/>
-        </p:spPr>
-        <p:txBody>
-          <a:bodyPr wrap="square" lIns="0" tIns="0" rIns="0" bIns="0" rtlCol="0" anchor="ctr"/>
-          <a:lstStyle/>
-          <a:p>
-            <a:pPr algn="ctr" indent="0" marL="0">
-              <a:buNone/>
-            </a:pPr>
-            <a:r>
-              <a:rPr lang="en-US" sz="900" b="1" dirty="0">
-                <a:solidFill>
-                  <a:srgbClr val="9D174D"/>
-                </a:solidFill>
-                <a:latin typeface="Trebuchet MS" pitchFamily="34" charset="0"/>
-                <a:ea typeface="Trebuchet MS" pitchFamily="34" charset="-122"/>
-                <a:cs typeface="Trebuchet MS" pitchFamily="34" charset="-120"/>
-              </a:rPr>
-              <a:t>e</a:t>
-            </a:r>
-            <a:endParaRPr lang="en-US" sz="900" dirty="0"/>
-          </a:p>
-        </p:txBody>
-      </p:sp>
-      <p:sp>
-        <p:nvSpPr>
-          <p:cNvPr id="48" name="Shape 46"/>
-          <p:cNvSpPr/>
-          <p:nvPr/>
-        </p:nvSpPr>
-        <p:spPr>
-          <a:xfrm>
-            <a:off x="6870192" y="4169664"/>
-            <a:ext cx="685800" cy="475488"/>
-          </a:xfrm>
-          <a:prstGeom prst="rect">
-            <a:avLst>
-              <a:gd name="adj" fmla="val 7692"/>
-            </a:avLst>
-          </a:prstGeom>
-          <a:solidFill>
-            <a:srgbClr val="FFFFFF"/>
-          </a:solidFill>
-          <a:ln w="12700">
-            <a:solidFill>
-              <a:srgbClr val="DB2777"/>
-            </a:solidFill>
-            <a:prstDash val="solid"/>
-          </a:ln>
-        </p:spPr>
-      </p:sp>
-      <p:sp>
-        <p:nvSpPr>
-          <p:cNvPr id="49" name="Text 47"/>
-          <p:cNvSpPr/>
-          <p:nvPr/>
-        </p:nvSpPr>
-        <p:spPr>
-          <a:xfrm>
-            <a:off x="6870192" y="4169664"/>
-            <a:ext cx="685800" cy="475488"/>
-          </a:xfrm>
-          <a:prstGeom prst="rect">
-            <a:avLst/>
-          </a:prstGeom>
-          <a:noFill/>
-          <a:ln/>
-        </p:spPr>
-        <p:txBody>
-          <a:bodyPr wrap="square" lIns="0" tIns="0" rIns="0" bIns="0" rtlCol="0" anchor="ctr"/>
-          <a:lstStyle/>
-          <a:p>
-            <a:pPr algn="ctr" indent="0" marL="0">
-              <a:buNone/>
-            </a:pPr>
-            <a:r>
-              <a:rPr lang="en-US" sz="900" b="1" dirty="0">
-                <a:solidFill>
-                  <a:srgbClr val="9D174D"/>
-                </a:solidFill>
-                <a:latin typeface="Trebuchet MS" pitchFamily="34" charset="0"/>
-                <a:ea typeface="Trebuchet MS" pitchFamily="34" charset="-122"/>
-                <a:cs typeface="Trebuchet MS" pitchFamily="34" charset="-120"/>
-              </a:rPr>
-              <a:t>c</a:t>
-            </a:r>
-            <a:endParaRPr lang="en-US" sz="900" dirty="0"/>
-          </a:p>
-        </p:txBody>
-      </p:sp>
-      <p:sp>
-        <p:nvSpPr>
-          <p:cNvPr id="50" name="Shape 48"/>
-          <p:cNvSpPr/>
-          <p:nvPr/>
-        </p:nvSpPr>
-        <p:spPr>
-          <a:xfrm>
-            <a:off x="7677912" y="4169664"/>
-            <a:ext cx="685800" cy="475488"/>
-          </a:xfrm>
-          <a:prstGeom prst="rect">
-            <a:avLst>
-              <a:gd name="adj" fmla="val 7692"/>
-            </a:avLst>
-          </a:prstGeom>
-          <a:solidFill>
-            <a:srgbClr val="FFFFFF"/>
-          </a:solidFill>
-          <a:ln w="12700">
-            <a:solidFill>
-              <a:srgbClr val="DB2777"/>
-            </a:solidFill>
-            <a:prstDash val="solid"/>
-          </a:ln>
-        </p:spPr>
-      </p:sp>
-      <p:sp>
-        <p:nvSpPr>
-          <p:cNvPr id="51" name="Text 49"/>
-          <p:cNvSpPr/>
-          <p:nvPr/>
-        </p:nvSpPr>
-        <p:spPr>
-          <a:xfrm>
-            <a:off x="7677912" y="4169664"/>
+          <p:cNvPr id="44" name="Text 42"/>
+          <p:cNvSpPr/>
+          <p:nvPr/>
+        </p:nvSpPr>
+        <p:spPr>
+          <a:xfrm>
+            <a:off x="7447135" y="4169664"/>
             <a:ext cx="685800" cy="475488"/>
           </a:xfrm>
           <a:prstGeom prst="rect">
@@ -34272,7 +34497,7 @@
                 <a:ea typeface="Trebuchet MS" pitchFamily="34" charset="-122"/>
                 <a:cs typeface="Trebuchet MS" pitchFamily="34" charset="-120"/>
               </a:rPr>
-              <a:t>in-</a:t>
+              <a:t>inter-</a:t>
             </a:r>
             <a:endParaRPr lang="en-US" sz="1300" dirty="0"/>
           </a:p>
@@ -34361,7 +34586,7 @@
                 <a:ea typeface="Trebuchet MS" pitchFamily="34" charset="-122"/>
                 <a:cs typeface="Trebuchet MS" pitchFamily="34" charset="-120"/>
               </a:rPr>
-              <a:t>-ed</a:t>
+              <a:t>-ing</a:t>
             </a:r>
             <a:endParaRPr lang="en-US" sz="1300" dirty="0"/>
           </a:p>
@@ -34425,7 +34650,7 @@
                 <a:ea typeface="Trebuchet MS" pitchFamily="34" charset="-122"/>
                 <a:cs typeface="Trebuchet MS" pitchFamily="34" charset="-120"/>
               </a:rPr>
-              <a:t>inter-</a:t>
+              <a:t>re-</a:t>
             </a:r>
             <a:endParaRPr lang="en-US" sz="1300" dirty="0"/>
           </a:p>
@@ -34514,7 +34739,7 @@
                 <a:ea typeface="Trebuchet MS" pitchFamily="34" charset="-122"/>
                 <a:cs typeface="Trebuchet MS" pitchFamily="34" charset="-120"/>
               </a:rPr>
-              <a:t>-ing</a:t>
+              <a:t>-ed</a:t>
             </a:r>
             <a:endParaRPr lang="en-US" sz="1300" dirty="0"/>
           </a:p>
@@ -34578,7 +34803,7 @@
                 <a:ea typeface="Trebuchet MS" pitchFamily="34" charset="-122"/>
                 <a:cs typeface="Trebuchet MS" pitchFamily="34" charset="-120"/>
               </a:rPr>
-              <a:t>re-</a:t>
+              <a:t>trans-</a:t>
             </a:r>
             <a:endParaRPr lang="en-US" sz="1300" dirty="0"/>
           </a:p>
@@ -34667,7 +34892,7 @@
                 <a:ea typeface="Trebuchet MS" pitchFamily="34" charset="-122"/>
                 <a:cs typeface="Trebuchet MS" pitchFamily="34" charset="-120"/>
               </a:rPr>
-              <a:t>-al</a:t>
+              <a:t>-ile</a:t>
             </a:r>
             <a:endParaRPr lang="en-US" sz="1300" dirty="0"/>
           </a:p>
@@ -34772,7 +34997,7 @@
                 <a:ea typeface="Trebuchet MS" pitchFamily="34" charset="-122"/>
                 <a:cs typeface="Trebuchet MS" pitchFamily="34" charset="-120"/>
               </a:rPr>
-              <a:t>bisect</a:t>
+              <a:t>section</a:t>
             </a:r>
             <a:endParaRPr lang="en-US" sz="1200" dirty="0"/>
           </a:p>
@@ -34838,7 +35063,7 @@
                 <a:ea typeface="Trebuchet MS" pitchFamily="34" charset="-122"/>
                 <a:cs typeface="Trebuchet MS" pitchFamily="34" charset="-120"/>
               </a:rPr>
-              <a:t>dissect</a:t>
+              <a:t>intersect</a:t>
             </a:r>
             <a:endParaRPr lang="en-US" sz="1200" dirty="0"/>
           </a:p>
@@ -34904,7 +35129,7 @@
                 <a:ea typeface="Trebuchet MS" pitchFamily="34" charset="-122"/>
                 <a:cs typeface="Trebuchet MS" pitchFamily="34" charset="-120"/>
               </a:rPr>
-              <a:t>intersect</a:t>
+              <a:t>bisect</a:t>
             </a:r>
             <a:endParaRPr lang="en-US" sz="1200" dirty="0"/>
           </a:p>
@@ -34970,7 +35195,7 @@
                 <a:ea typeface="Trebuchet MS" pitchFamily="34" charset="-122"/>
                 <a:cs typeface="Trebuchet MS" pitchFamily="34" charset="-120"/>
               </a:rPr>
-              <a:t>section</a:t>
+              <a:t>dissect</a:t>
             </a:r>
             <a:endParaRPr lang="en-US" sz="1200" dirty="0"/>
           </a:p>
@@ -35168,7 +35393,7 @@
                 <a:ea typeface="Trebuchet MS" pitchFamily="34" charset="-122"/>
                 <a:cs typeface="Trebuchet MS" pitchFamily="34" charset="-120"/>
               </a:rPr>
-              <a:t>dissection</a:t>
+              <a:t>transect</a:t>
             </a:r>
             <a:endParaRPr lang="en-US" sz="1200" dirty="0"/>
           </a:p>
@@ -35234,7 +35459,7 @@
                 <a:ea typeface="Trebuchet MS" pitchFamily="34" charset="-122"/>
                 <a:cs typeface="Trebuchet MS" pitchFamily="34" charset="-120"/>
               </a:rPr>
-              <a:t>intersection</a:t>
+              <a:t>resection</a:t>
             </a:r>
             <a:endParaRPr lang="en-US" sz="1200" dirty="0"/>
           </a:p>
@@ -36422,7 +36647,7 @@
                 <a:ea typeface="Calibri" pitchFamily="34" charset="-122"/>
                 <a:cs typeface="Calibri" pitchFamily="34" charset="-120"/>
               </a:rPr>
-              <a:t>1.  The root 'sect' comes from Latin and means to cut or divide.</a:t>
+              <a:t>1.  The word 'insect' has nothing to do with the root 'sect'.</a:t>
             </a:r>
             <a:endParaRPr lang="en-US" sz="1300" dirty="0"/>
           </a:p>
@@ -36445,11 +36670,11 @@
             </a:avLst>
           </a:prstGeom>
           <a:solidFill>
-            <a:srgbClr val="DCFCE7"/>
-          </a:solidFill>
-          <a:ln w="12700">
-            <a:solidFill>
-              <a:srgbClr val="16A34A"/>
+            <a:srgbClr val="FEE2E2"/>
+          </a:solidFill>
+          <a:ln w="12700">
+            <a:solidFill>
+              <a:srgbClr val="DC2626"/>
             </a:solidFill>
             <a:prstDash val="solid"/>
           </a:ln>
@@ -36482,13 +36707,13 @@
             <a:r>
               <a:rPr lang="en-US" sz="1100" b="1" dirty="0">
                 <a:solidFill>
-                  <a:srgbClr val="16A34A"/>
+                  <a:srgbClr val="DC2626"/>
                 </a:solidFill>
                 <a:latin typeface="Trebuchet MS" pitchFamily="34" charset="0"/>
                 <a:ea typeface="Trebuchet MS" pitchFamily="34" charset="-122"/>
                 <a:cs typeface="Trebuchet MS" pitchFamily="34" charset="-120"/>
               </a:rPr>
-              <a:t>TRUE</a:t>
+              <a:t>FALSE</a:t>
             </a:r>
             <a:endParaRPr lang="en-US" sz="1100" dirty="0"/>
           </a:p>
@@ -36561,7 +36786,7 @@
                 <a:ea typeface="Calibri" pitchFamily="34" charset="-122"/>
                 <a:cs typeface="Calibri" pitchFamily="34" charset="-120"/>
               </a:rPr>
-              <a:t>2.  The word 'bisect' means to cut something into three equal parts.</a:t>
+              <a:t>2.  The root 'sect' means to join or connect things together.</a:t>
             </a:r>
             <a:endParaRPr lang="en-US" sz="1300" dirty="0"/>
           </a:p>
@@ -36700,7 +36925,7 @@
                 <a:ea typeface="Calibri" pitchFamily="34" charset="-122"/>
                 <a:cs typeface="Calibri" pitchFamily="34" charset="-120"/>
               </a:rPr>
-              <a:t>3.  An insect has a body that is divided into three sections.</a:t>
+              <a:t>3.  The root 'sect' can be found in the word 'intersect'.</a:t>
             </a:r>
             <a:endParaRPr lang="en-US" sz="1300" dirty="0"/>
           </a:p>
@@ -36839,7 +37064,7 @@
                 <a:ea typeface="Calibri" pitchFamily="34" charset="-122"/>
                 <a:cs typeface="Calibri" pitchFamily="34" charset="-120"/>
               </a:rPr>
-              <a:t>4.  The word 'intersect' contains the root 'sect' meaning cut or divide.</a:t>
+              <a:t>4.  The root 'sect' comes from a Latin word meaning to cut or divide.</a:t>
             </a:r>
             <a:endParaRPr lang="en-US" sz="1300" dirty="0"/>
           </a:p>
@@ -36978,7 +37203,7 @@
                 <a:ea typeface="Calibri" pitchFamily="34" charset="-122"/>
                 <a:cs typeface="Calibri" pitchFamily="34" charset="-120"/>
               </a:rPr>
-              <a:t>5.  The root 'sect' comes from the Greek word for circle.</a:t>
+              <a:t>5.  To bisect a line means to cut it into two equal parts.</a:t>
             </a:r>
             <a:endParaRPr lang="en-US" sz="1300" dirty="0"/>
           </a:p>
@@ -37001,11 +37226,11 @@
             </a:avLst>
           </a:prstGeom>
           <a:solidFill>
-            <a:srgbClr val="FEE2E2"/>
-          </a:solidFill>
-          <a:ln w="12700">
-            <a:solidFill>
-              <a:srgbClr val="DC2626"/>
+            <a:srgbClr val="DCFCE7"/>
+          </a:solidFill>
+          <a:ln w="12700">
+            <a:solidFill>
+              <a:srgbClr val="16A34A"/>
             </a:solidFill>
             <a:prstDash val="solid"/>
           </a:ln>
@@ -37038,13 +37263,13 @@
             <a:r>
               <a:rPr lang="en-US" sz="1100" b="1" dirty="0">
                 <a:solidFill>
-                  <a:srgbClr val="DC2626"/>
+                  <a:srgbClr val="16A34A"/>
                 </a:solidFill>
                 <a:latin typeface="Trebuchet MS" pitchFamily="34" charset="0"/>
                 <a:ea typeface="Trebuchet MS" pitchFamily="34" charset="-122"/>
                 <a:cs typeface="Trebuchet MS" pitchFamily="34" charset="-120"/>
               </a:rPr>
-              <a:t>FALSE</a:t>
+              <a:t>TRUE</a:t>
             </a:r>
             <a:endParaRPr lang="en-US" sz="1100" dirty="0"/>
           </a:p>
@@ -37617,7 +37842,7 @@
                 <a:ea typeface="Trebuchet MS" pitchFamily="34" charset="-122"/>
                 <a:cs typeface="Trebuchet MS" pitchFamily="34" charset="-120"/>
               </a:rPr>
-              <a:t>bisect</a:t>
+              <a:t>section</a:t>
             </a:r>
             <a:endParaRPr lang="en-US" sz="1300" dirty="0"/>
           </a:p>
@@ -37683,7 +37908,7 @@
                 <a:ea typeface="Trebuchet MS" pitchFamily="34" charset="-122"/>
                 <a:cs typeface="Trebuchet MS" pitchFamily="34" charset="-120"/>
               </a:rPr>
-              <a:t>dissect</a:t>
+              <a:t>intersect</a:t>
             </a:r>
             <a:endParaRPr lang="en-US" sz="1300" dirty="0"/>
           </a:p>
@@ -37749,7 +37974,7 @@
                 <a:ea typeface="Trebuchet MS" pitchFamily="34" charset="-122"/>
                 <a:cs typeface="Trebuchet MS" pitchFamily="34" charset="-120"/>
               </a:rPr>
-              <a:t>intersect</a:t>
+              <a:t>bisect</a:t>
             </a:r>
             <a:endParaRPr lang="en-US" sz="1300" dirty="0"/>
           </a:p>
@@ -37815,7 +38040,7 @@
                 <a:ea typeface="Trebuchet MS" pitchFamily="34" charset="-122"/>
                 <a:cs typeface="Trebuchet MS" pitchFamily="34" charset="-120"/>
               </a:rPr>
-              <a:t>section</a:t>
+              <a:t>dissect</a:t>
             </a:r>
             <a:endParaRPr lang="en-US" sz="1300" dirty="0"/>
           </a:p>
@@ -38013,7 +38238,7 @@
                 <a:ea typeface="Trebuchet MS" pitchFamily="34" charset="-122"/>
                 <a:cs typeface="Trebuchet MS" pitchFamily="34" charset="-120"/>
               </a:rPr>
-              <a:t>dissection</a:t>
+              <a:t>transect</a:t>
             </a:r>
             <a:endParaRPr lang="en-US" sz="1300" dirty="0"/>
           </a:p>
@@ -38951,7 +39176,7 @@
                 <a:ea typeface="Trebuchet MS" pitchFamily="34" charset="-122"/>
                 <a:cs typeface="Trebuchet MS" pitchFamily="34" charset="-120"/>
               </a:rPr>
-              <a:t>in-</a:t>
+              <a:t>inter-</a:t>
             </a:r>
             <a:endParaRPr lang="en-US" sz="1300" dirty="0"/>
           </a:p>
@@ -39040,7 +39265,7 @@
                 <a:ea typeface="Trebuchet MS" pitchFamily="34" charset="-122"/>
                 <a:cs typeface="Trebuchet MS" pitchFamily="34" charset="-120"/>
               </a:rPr>
-              <a:t>-ed</a:t>
+              <a:t>-ing</a:t>
             </a:r>
             <a:endParaRPr lang="en-US" sz="1300" dirty="0"/>
           </a:p>
@@ -39104,7 +39329,7 @@
                 <a:ea typeface="Trebuchet MS" pitchFamily="34" charset="-122"/>
                 <a:cs typeface="Trebuchet MS" pitchFamily="34" charset="-120"/>
               </a:rPr>
-              <a:t>inter-</a:t>
+              <a:t>re-</a:t>
             </a:r>
             <a:endParaRPr lang="en-US" sz="1300" dirty="0"/>
           </a:p>
@@ -39193,7 +39418,7 @@
                 <a:ea typeface="Trebuchet MS" pitchFamily="34" charset="-122"/>
                 <a:cs typeface="Trebuchet MS" pitchFamily="34" charset="-120"/>
               </a:rPr>
-              <a:t>-ing</a:t>
+              <a:t>-ed</a:t>
             </a:r>
             <a:endParaRPr lang="en-US" sz="1300" dirty="0"/>
           </a:p>
@@ -39257,7 +39482,7 @@
                 <a:ea typeface="Trebuchet MS" pitchFamily="34" charset="-122"/>
                 <a:cs typeface="Trebuchet MS" pitchFamily="34" charset="-120"/>
               </a:rPr>
-              <a:t>re-</a:t>
+              <a:t>trans-</a:t>
             </a:r>
             <a:endParaRPr lang="en-US" sz="1300" dirty="0"/>
           </a:p>
@@ -39346,7 +39571,7 @@
                 <a:ea typeface="Trebuchet MS" pitchFamily="34" charset="-122"/>
                 <a:cs typeface="Trebuchet MS" pitchFamily="34" charset="-120"/>
               </a:rPr>
-              <a:t>-al</a:t>
+              <a:t>-ile</a:t>
             </a:r>
             <a:endParaRPr lang="en-US" sz="1300" dirty="0"/>
           </a:p>
@@ -39787,7 +40012,7 @@
                 <a:ea typeface="Trebuchet MS" pitchFamily="34" charset="-122"/>
                 <a:cs typeface="Trebuchet MS" pitchFamily="34" charset="-120"/>
               </a:rPr>
-              <a:t>bisect</a:t>
+              <a:t>section</a:t>
             </a:r>
             <a:endParaRPr lang="en-US" sz="1400" dirty="0"/>
           </a:p>
@@ -40191,7 +40416,7 @@
                 <a:ea typeface="Trebuchet MS" pitchFamily="34" charset="-122"/>
                 <a:cs typeface="Trebuchet MS" pitchFamily="34" charset="-120"/>
               </a:rPr>
-              <a:t>bisect</a:t>
+              <a:t>section</a:t>
             </a:r>
             <a:endParaRPr lang="en-US" sz="1200" dirty="0"/>
           </a:p>
@@ -40257,7 +40482,7 @@
                 <a:ea typeface="Calibri" pitchFamily="34" charset="-122"/>
                 <a:cs typeface="Calibri" pitchFamily="34" charset="-120"/>
               </a:rPr>
-              <a:t>The act of carefully cutting something apart to examine it, often done in science class.</a:t>
+              <a:t>A line or strip used by scientists to study plants and animals across an area.</a:t>
             </a:r>
             <a:endParaRPr lang="en-US" sz="1200" dirty="0"/>
           </a:p>
@@ -40330,7 +40555,7 @@
                 <a:ea typeface="Trebuchet MS" pitchFamily="34" charset="-122"/>
                 <a:cs typeface="Trebuchet MS" pitchFamily="34" charset="-120"/>
               </a:rPr>
-              <a:t>dissect</a:t>
+              <a:t>intersect</a:t>
             </a:r>
             <a:endParaRPr lang="en-US" sz="1200" dirty="0"/>
           </a:p>
@@ -40396,7 +40621,7 @@
                 <a:ea typeface="Calibri" pitchFamily="34" charset="-122"/>
                 <a:cs typeface="Calibri" pitchFamily="34" charset="-120"/>
               </a:rPr>
-              <a:t>A distinct part or division of something, like a section of a pie chart or a part of a city.</a:t>
+              <a:t>A separate part or division of something, like a city or economy.</a:t>
             </a:r>
             <a:endParaRPr lang="en-US" sz="1200" dirty="0"/>
           </a:p>
@@ -40469,7 +40694,7 @@
                 <a:ea typeface="Trebuchet MS" pitchFamily="34" charset="-122"/>
                 <a:cs typeface="Trebuchet MS" pitchFamily="34" charset="-120"/>
               </a:rPr>
-              <a:t>intersect</a:t>
+              <a:t>bisect</a:t>
             </a:r>
             <a:endParaRPr lang="en-US" sz="1200" dirty="0"/>
           </a:p>
@@ -40535,7 +40760,7 @@
                 <a:ea typeface="Calibri" pitchFamily="34" charset="-122"/>
                 <a:cs typeface="Calibri" pitchFamily="34" charset="-120"/>
               </a:rPr>
-              <a:t>A part or piece that has been cut or divided from a whole.</a:t>
+              <a:t>To carefully cut something open to examine its parts.</a:t>
             </a:r>
             <a:endParaRPr lang="en-US" sz="1200" dirty="0"/>
           </a:p>
@@ -40608,7 +40833,7 @@
                 <a:ea typeface="Trebuchet MS" pitchFamily="34" charset="-122"/>
                 <a:cs typeface="Trebuchet MS" pitchFamily="34" charset="-120"/>
               </a:rPr>
-              <a:t>section</a:t>
+              <a:t>dissect</a:t>
             </a:r>
             <a:endParaRPr lang="en-US" sz="1200" dirty="0"/>
           </a:p>
@@ -40674,7 +40899,7 @@
                 <a:ea typeface="Calibri" pitchFamily="34" charset="-122"/>
                 <a:cs typeface="Calibri" pitchFamily="34" charset="-120"/>
               </a:rPr>
-              <a:t>A small creature with six legs and a body divided into three sections, like an ant or butterfly.</a:t>
+              <a:t>A small creature with six legs and a body divided into three parts.</a:t>
             </a:r>
             <a:endParaRPr lang="en-US" sz="1200" dirty="0"/>
           </a:p>
@@ -40813,7 +41038,7 @@
                 <a:ea typeface="Calibri" pitchFamily="34" charset="-122"/>
                 <a:cs typeface="Calibri" pitchFamily="34" charset="-120"/>
               </a:rPr>
-              <a:t>When two lines or roads cross each other at a point.</a:t>
+              <a:t>To cut or divide something into exactly two equal halves.</a:t>
             </a:r>
             <a:endParaRPr lang="en-US" sz="1200" dirty="0"/>
           </a:p>
@@ -40952,7 +41177,7 @@
                 <a:ea typeface="Calibri" pitchFamily="34" charset="-122"/>
                 <a:cs typeface="Calibri" pitchFamily="34" charset="-120"/>
               </a:rPr>
-              <a:t>To cut or divide something into two equal parts.</a:t>
+              <a:t>A part or piece that has been cut or divided from a whole.</a:t>
             </a:r>
             <a:endParaRPr lang="en-US" sz="1200" dirty="0"/>
           </a:p>
@@ -41025,7 +41250,7 @@
                 <a:ea typeface="Trebuchet MS" pitchFamily="34" charset="-122"/>
                 <a:cs typeface="Trebuchet MS" pitchFamily="34" charset="-120"/>
               </a:rPr>
-              <a:t>dissection</a:t>
+              <a:t>transect</a:t>
             </a:r>
             <a:endParaRPr lang="en-US" sz="1200" dirty="0"/>
           </a:p>
@@ -41091,7 +41316,7 @@
                 <a:ea typeface="Calibri" pitchFamily="34" charset="-122"/>
                 <a:cs typeface="Calibri" pitchFamily="34" charset="-120"/>
               </a:rPr>
-              <a:t>To carefully cut something apart to study it closely, like a scientist examining a frog.</a:t>
+              <a:t>When two lines or roads cross over each other.</a:t>
             </a:r>
             <a:endParaRPr lang="en-US" sz="1200" dirty="0"/>
           </a:p>
@@ -41586,7 +41811,7 @@
                 <a:ea typeface="Calibri" pitchFamily="34" charset="-122"/>
                 <a:cs typeface="Calibri" pitchFamily="34" charset="-120"/>
               </a:rPr>
-              <a:t>In maths today, we will bisect this angle to create two equal parts.</a:t>
+              <a:t>The maths teacher asked us to bisect the angle carefully using a ruler and compass.</a:t>
             </a:r>
             <a:endParaRPr lang="en-US" sz="1500" dirty="0"/>
           </a:p>
@@ -41750,7 +41975,7 @@
                 <a:ea typeface="Calibri" pitchFamily="34" charset="-122"/>
                 <a:cs typeface="Calibri" pitchFamily="34" charset="-120"/>
               </a:rPr>
-              <a:t>The science teacher asked us to carefully dissect the flower to see all its parts.</a:t>
+              <a:t>When two roads intersect, drivers must look both ways before continuing.</a:t>
             </a:r>
             <a:endParaRPr lang="en-US" sz="1500" dirty="0"/>
           </a:p>
@@ -41914,7 +42139,7 @@
                 <a:ea typeface="Calibri" pitchFamily="34" charset="-122"/>
                 <a:cs typeface="Calibri" pitchFamily="34" charset="-120"/>
               </a:rPr>
-              <a:t>We need to turn left at the intersection where the two main roads cross.</a:t>
+              <a:t>The scientist studied each section of the rock sample under the microscope.</a:t>
             </a:r>
             <a:endParaRPr lang="en-US" sz="1500" dirty="0"/>
           </a:p>

--- a/output/wordlabs-sect-3day.pptx
+++ b/output/wordlabs-sect-3day.pptx
@@ -20622,7 +20622,7 @@
                 <a:ea typeface="Trebuchet MS" pitchFamily="34" charset="-122"/>
                 <a:cs typeface="Trebuchet MS" pitchFamily="34" charset="-120"/>
               </a:rPr>
-              <a:t>di</a:t>
+              <a:t>dis</a:t>
             </a:r>
             <a:endParaRPr lang="en-US" sz="1400" dirty="0"/>
           </a:p>
@@ -21956,7 +21956,7 @@
                 <a:ea typeface="Trebuchet MS" pitchFamily="34" charset="-122"/>
                 <a:cs typeface="Trebuchet MS" pitchFamily="34" charset="-120"/>
               </a:rPr>
-              <a:t>di</a:t>
+              <a:t>dis</a:t>
             </a:r>
             <a:endParaRPr lang="en-US" sz="1400" dirty="0"/>
           </a:p>
@@ -22247,11 +22247,11 @@
         <p:spPr>
           <a:xfrm>
             <a:off x="1874520" y="4096512"/>
-            <a:ext cx="6903720" cy="804672"/>
+            <a:ext cx="6903720" cy="658368"/>
           </a:xfrm>
           <a:prstGeom prst="rect">
             <a:avLst>
-              <a:gd name="adj" fmla="val 6818"/>
+              <a:gd name="adj" fmla="val 8333"/>
             </a:avLst>
           </a:prstGeom>
           <a:solidFill>
@@ -22273,12 +22273,12 @@
         </p:nvSpPr>
         <p:spPr>
           <a:xfrm>
-            <a:off x="2023872" y="4169664"/>
-            <a:ext cx="685800" cy="384048"/>
+            <a:off x="1951330" y="4169664"/>
+            <a:ext cx="676656" cy="475488"/>
           </a:xfrm>
           <a:prstGeom prst="rect">
             <a:avLst>
-              <a:gd name="adj" fmla="val 9524"/>
+              <a:gd name="adj" fmla="val 7692"/>
             </a:avLst>
           </a:prstGeom>
           <a:solidFill>
@@ -22300,8 +22300,8 @@
         </p:nvSpPr>
         <p:spPr>
           <a:xfrm>
-            <a:off x="2023872" y="4169664"/>
-            <a:ext cx="685800" cy="384048"/>
+            <a:off x="1951330" y="4169664"/>
+            <a:ext cx="676656" cy="475488"/>
           </a:xfrm>
           <a:prstGeom prst="rect">
             <a:avLst/>
@@ -22339,12 +22339,12 @@
         </p:nvSpPr>
         <p:spPr>
           <a:xfrm>
-            <a:off x="2831592" y="4169664"/>
-            <a:ext cx="685800" cy="384048"/>
+            <a:off x="2677363" y="4169664"/>
+            <a:ext cx="676656" cy="475488"/>
           </a:xfrm>
           <a:prstGeom prst="rect">
             <a:avLst>
-              <a:gd name="adj" fmla="val 9524"/>
+              <a:gd name="adj" fmla="val 7692"/>
             </a:avLst>
           </a:prstGeom>
           <a:solidFill>
@@ -22366,8 +22366,8 @@
         </p:nvSpPr>
         <p:spPr>
           <a:xfrm>
-            <a:off x="2831592" y="4169664"/>
-            <a:ext cx="685800" cy="384048"/>
+            <a:off x="2677363" y="4169664"/>
+            <a:ext cx="676656" cy="475488"/>
           </a:xfrm>
           <a:prstGeom prst="rect">
             <a:avLst/>
@@ -22405,12 +22405,12 @@
         </p:nvSpPr>
         <p:spPr>
           <a:xfrm>
-            <a:off x="3639312" y="4169664"/>
-            <a:ext cx="685800" cy="384048"/>
+            <a:off x="3403397" y="4169664"/>
+            <a:ext cx="676656" cy="475488"/>
           </a:xfrm>
           <a:prstGeom prst="rect">
             <a:avLst>
-              <a:gd name="adj" fmla="val 9524"/>
+              <a:gd name="adj" fmla="val 7692"/>
             </a:avLst>
           </a:prstGeom>
           <a:solidFill>
@@ -22432,8 +22432,8 @@
         </p:nvSpPr>
         <p:spPr>
           <a:xfrm>
-            <a:off x="3639312" y="4169664"/>
-            <a:ext cx="685800" cy="384048"/>
+            <a:off x="3403397" y="4169664"/>
+            <a:ext cx="676656" cy="475488"/>
           </a:xfrm>
           <a:prstGeom prst="rect">
             <a:avLst/>
@@ -22457,7 +22457,7 @@
                 <a:ea typeface="Trebuchet MS" pitchFamily="34" charset="-122"/>
                 <a:cs typeface="Trebuchet MS" pitchFamily="34" charset="-120"/>
               </a:rPr>
-              <a:t>s</a:t>
+              <a:t>ss</a:t>
             </a:r>
             <a:endParaRPr lang="en-US" sz="900" dirty="0"/>
           </a:p>
@@ -22471,12 +22471,12 @@
         </p:nvSpPr>
         <p:spPr>
           <a:xfrm>
-            <a:off x="4447032" y="4169664"/>
-            <a:ext cx="685800" cy="384048"/>
+            <a:off x="4129430" y="4169664"/>
+            <a:ext cx="676656" cy="475488"/>
           </a:xfrm>
           <a:prstGeom prst="rect">
             <a:avLst>
-              <a:gd name="adj" fmla="val 9524"/>
+              <a:gd name="adj" fmla="val 7692"/>
             </a:avLst>
           </a:prstGeom>
           <a:solidFill>
@@ -22498,8 +22498,8 @@
         </p:nvSpPr>
         <p:spPr>
           <a:xfrm>
-            <a:off x="4447032" y="4169664"/>
-            <a:ext cx="685800" cy="384048"/>
+            <a:off x="4129430" y="4169664"/>
+            <a:ext cx="676656" cy="475488"/>
           </a:xfrm>
           <a:prstGeom prst="rect">
             <a:avLst/>
@@ -22537,12 +22537,12 @@
         </p:nvSpPr>
         <p:spPr>
           <a:xfrm>
-            <a:off x="5254752" y="4169664"/>
-            <a:ext cx="685800" cy="384048"/>
+            <a:off x="4855464" y="4169664"/>
+            <a:ext cx="676656" cy="475488"/>
           </a:xfrm>
           <a:prstGeom prst="rect">
             <a:avLst>
-              <a:gd name="adj" fmla="val 9524"/>
+              <a:gd name="adj" fmla="val 7692"/>
             </a:avLst>
           </a:prstGeom>
           <a:solidFill>
@@ -22564,8 +22564,8 @@
         </p:nvSpPr>
         <p:spPr>
           <a:xfrm>
-            <a:off x="5254752" y="4169664"/>
-            <a:ext cx="685800" cy="384048"/>
+            <a:off x="4855464" y="4169664"/>
+            <a:ext cx="676656" cy="475488"/>
           </a:xfrm>
           <a:prstGeom prst="rect">
             <a:avLst/>
@@ -22603,12 +22603,12 @@
         </p:nvSpPr>
         <p:spPr>
           <a:xfrm>
-            <a:off x="6062472" y="4169664"/>
-            <a:ext cx="685800" cy="384048"/>
+            <a:off x="5581498" y="4169664"/>
+            <a:ext cx="676656" cy="475488"/>
           </a:xfrm>
           <a:prstGeom prst="rect">
             <a:avLst>
-              <a:gd name="adj" fmla="val 9524"/>
+              <a:gd name="adj" fmla="val 7692"/>
             </a:avLst>
           </a:prstGeom>
           <a:solidFill>
@@ -22630,8 +22630,8 @@
         </p:nvSpPr>
         <p:spPr>
           <a:xfrm>
-            <a:off x="6062472" y="4169664"/>
-            <a:ext cx="685800" cy="384048"/>
+            <a:off x="5581498" y="4169664"/>
+            <a:ext cx="676656" cy="475488"/>
           </a:xfrm>
           <a:prstGeom prst="rect">
             <a:avLst/>
@@ -22669,12 +22669,12 @@
         </p:nvSpPr>
         <p:spPr>
           <a:xfrm>
-            <a:off x="6870192" y="4169664"/>
-            <a:ext cx="685800" cy="384048"/>
+            <a:off x="6307531" y="4169664"/>
+            <a:ext cx="676656" cy="475488"/>
           </a:xfrm>
           <a:prstGeom prst="rect">
             <a:avLst>
-              <a:gd name="adj" fmla="val 9524"/>
+              <a:gd name="adj" fmla="val 7692"/>
             </a:avLst>
           </a:prstGeom>
           <a:solidFill>
@@ -22696,8 +22696,8 @@
         </p:nvSpPr>
         <p:spPr>
           <a:xfrm>
-            <a:off x="6870192" y="4169664"/>
-            <a:ext cx="685800" cy="384048"/>
+            <a:off x="6307531" y="4169664"/>
+            <a:ext cx="676656" cy="475488"/>
           </a:xfrm>
           <a:prstGeom prst="rect">
             <a:avLst/>
@@ -22735,12 +22735,12 @@
         </p:nvSpPr>
         <p:spPr>
           <a:xfrm>
-            <a:off x="7677912" y="4169664"/>
-            <a:ext cx="685800" cy="384048"/>
+            <a:off x="7033565" y="4169664"/>
+            <a:ext cx="676656" cy="475488"/>
           </a:xfrm>
           <a:prstGeom prst="rect">
             <a:avLst>
-              <a:gd name="adj" fmla="val 9524"/>
+              <a:gd name="adj" fmla="val 7692"/>
             </a:avLst>
           </a:prstGeom>
           <a:solidFill>
@@ -22762,8 +22762,8 @@
         </p:nvSpPr>
         <p:spPr>
           <a:xfrm>
-            <a:off x="7677912" y="4169664"/>
-            <a:ext cx="685800" cy="384048"/>
+            <a:off x="7033565" y="4169664"/>
+            <a:ext cx="676656" cy="475488"/>
           </a:xfrm>
           <a:prstGeom prst="rect">
             <a:avLst/>
@@ -22787,7 +22787,7 @@
                 <a:ea typeface="Trebuchet MS" pitchFamily="34" charset="-122"/>
                 <a:cs typeface="Trebuchet MS" pitchFamily="34" charset="-120"/>
               </a:rPr>
-              <a:t>on</a:t>
+              <a:t>o</a:t>
             </a:r>
             <a:endParaRPr lang="en-US" sz="900" dirty="0"/>
           </a:p>
@@ -22795,40 +22795,67 @@
       </p:sp>
       <p:sp>
         <p:nvSpPr>
-          <p:cNvPr id="55" name="Text 53"/>
-          <p:cNvSpPr/>
-          <p:nvPr/>
-        </p:nvSpPr>
-        <p:spPr>
-          <a:xfrm>
-            <a:off x="7677912" y="4572000"/>
-            <a:ext cx="685800" cy="219456"/>
-          </a:xfrm>
-          <a:prstGeom prst="rect">
-            <a:avLst/>
-          </a:prstGeom>
-          <a:noFill/>
-          <a:ln/>
-        </p:spPr>
-        <p:txBody>
-          <a:bodyPr wrap="square" lIns="0" tIns="0" rIns="0" bIns="0" rtlCol="0" anchor="t"/>
-          <a:lstStyle/>
-          <a:p>
-            <a:pPr algn="ctr" indent="0" marL="0">
-              <a:buNone/>
-            </a:pPr>
-            <a:r>
-              <a:rPr lang="en-US" sz="750" i="1" dirty="0">
-                <a:solidFill>
-                  <a:srgbClr val="94A3B8"/>
-                </a:solidFill>
-                <a:latin typeface="Calibri" pitchFamily="34" charset="0"/>
-                <a:ea typeface="Calibri" pitchFamily="34" charset="-122"/>
-                <a:cs typeface="Calibri" pitchFamily="34" charset="-120"/>
-              </a:rPr>
-              <a:t>/un/</a:t>
-            </a:r>
-            <a:endParaRPr lang="en-US" sz="750" dirty="0"/>
+          <p:cNvPr id="55" name="Shape 53"/>
+          <p:cNvSpPr/>
+          <p:nvPr/>
+        </p:nvSpPr>
+        <p:spPr>
+          <a:xfrm>
+            <a:off x="7759598" y="4169664"/>
+            <a:ext cx="676656" cy="475488"/>
+          </a:xfrm>
+          <a:prstGeom prst="rect">
+            <a:avLst>
+              <a:gd name="adj" fmla="val 7692"/>
+            </a:avLst>
+          </a:prstGeom>
+          <a:solidFill>
+            <a:srgbClr val="FFFFFF"/>
+          </a:solidFill>
+          <a:ln w="12700">
+            <a:solidFill>
+              <a:srgbClr val="DB2777"/>
+            </a:solidFill>
+            <a:prstDash val="solid"/>
+          </a:ln>
+        </p:spPr>
+      </p:sp>
+      <p:sp>
+        <p:nvSpPr>
+          <p:cNvPr id="56" name="Text 54"/>
+          <p:cNvSpPr/>
+          <p:nvPr/>
+        </p:nvSpPr>
+        <p:spPr>
+          <a:xfrm>
+            <a:off x="7759598" y="4169664"/>
+            <a:ext cx="676656" cy="475488"/>
+          </a:xfrm>
+          <a:prstGeom prst="rect">
+            <a:avLst/>
+          </a:prstGeom>
+          <a:noFill/>
+          <a:ln/>
+        </p:spPr>
+        <p:txBody>
+          <a:bodyPr wrap="square" lIns="0" tIns="0" rIns="0" bIns="0" rtlCol="0" anchor="ctr"/>
+          <a:lstStyle/>
+          <a:p>
+            <a:pPr algn="ctr" indent="0" marL="0">
+              <a:buNone/>
+            </a:pPr>
+            <a:r>
+              <a:rPr lang="en-US" sz="900" b="1" dirty="0">
+                <a:solidFill>
+                  <a:srgbClr val="9D174D"/>
+                </a:solidFill>
+                <a:latin typeface="Trebuchet MS" pitchFamily="34" charset="0"/>
+                <a:ea typeface="Trebuchet MS" pitchFamily="34" charset="-122"/>
+                <a:cs typeface="Trebuchet MS" pitchFamily="34" charset="-120"/>
+              </a:rPr>
+              <a:t>n</a:t>
+            </a:r>
+            <a:endParaRPr lang="en-US" sz="900" dirty="0"/>
           </a:p>
         </p:txBody>
       </p:sp>
@@ -36647,7 +36674,7 @@
                 <a:ea typeface="Calibri" pitchFamily="34" charset="-122"/>
                 <a:cs typeface="Calibri" pitchFamily="34" charset="-120"/>
               </a:rPr>
-              <a:t>1.  The word 'insect' has nothing to do with the root 'sect'.</a:t>
+              <a:t>1.  The root 'sect' can be found in the word 'intersect'.</a:t>
             </a:r>
             <a:endParaRPr lang="en-US" sz="1300" dirty="0"/>
           </a:p>
@@ -36670,11 +36697,11 @@
             </a:avLst>
           </a:prstGeom>
           <a:solidFill>
-            <a:srgbClr val="FEE2E2"/>
-          </a:solidFill>
-          <a:ln w="12700">
-            <a:solidFill>
-              <a:srgbClr val="DC2626"/>
+            <a:srgbClr val="DCFCE7"/>
+          </a:solidFill>
+          <a:ln w="12700">
+            <a:solidFill>
+              <a:srgbClr val="16A34A"/>
             </a:solidFill>
             <a:prstDash val="solid"/>
           </a:ln>
@@ -36707,13 +36734,13 @@
             <a:r>
               <a:rPr lang="en-US" sz="1100" b="1" dirty="0">
                 <a:solidFill>
-                  <a:srgbClr val="DC2626"/>
+                  <a:srgbClr val="16A34A"/>
                 </a:solidFill>
                 <a:latin typeface="Trebuchet MS" pitchFamily="34" charset="0"/>
                 <a:ea typeface="Trebuchet MS" pitchFamily="34" charset="-122"/>
                 <a:cs typeface="Trebuchet MS" pitchFamily="34" charset="-120"/>
               </a:rPr>
-              <a:t>FALSE</a:t>
+              <a:t>TRUE</a:t>
             </a:r>
             <a:endParaRPr lang="en-US" sz="1100" dirty="0"/>
           </a:p>
@@ -36786,7 +36813,7 @@
                 <a:ea typeface="Calibri" pitchFamily="34" charset="-122"/>
                 <a:cs typeface="Calibri" pitchFamily="34" charset="-120"/>
               </a:rPr>
-              <a:t>2.  The root 'sect' means to join or connect things together.</a:t>
+              <a:t>2.  To bisect a line means to cut it into two equal parts.</a:t>
             </a:r>
             <a:endParaRPr lang="en-US" sz="1300" dirty="0"/>
           </a:p>
@@ -36809,11 +36836,11 @@
             </a:avLst>
           </a:prstGeom>
           <a:solidFill>
-            <a:srgbClr val="FEE2E2"/>
-          </a:solidFill>
-          <a:ln w="12700">
-            <a:solidFill>
-              <a:srgbClr val="DC2626"/>
+            <a:srgbClr val="DCFCE7"/>
+          </a:solidFill>
+          <a:ln w="12700">
+            <a:solidFill>
+              <a:srgbClr val="16A34A"/>
             </a:solidFill>
             <a:prstDash val="solid"/>
           </a:ln>
@@ -36846,13 +36873,13 @@
             <a:r>
               <a:rPr lang="en-US" sz="1100" b="1" dirty="0">
                 <a:solidFill>
-                  <a:srgbClr val="DC2626"/>
+                  <a:srgbClr val="16A34A"/>
                 </a:solidFill>
                 <a:latin typeface="Trebuchet MS" pitchFamily="34" charset="0"/>
                 <a:ea typeface="Trebuchet MS" pitchFamily="34" charset="-122"/>
                 <a:cs typeface="Trebuchet MS" pitchFamily="34" charset="-120"/>
               </a:rPr>
-              <a:t>FALSE</a:t>
+              <a:t>TRUE</a:t>
             </a:r>
             <a:endParaRPr lang="en-US" sz="1100" dirty="0"/>
           </a:p>
@@ -36925,7 +36952,7 @@
                 <a:ea typeface="Calibri" pitchFamily="34" charset="-122"/>
                 <a:cs typeface="Calibri" pitchFamily="34" charset="-120"/>
               </a:rPr>
-              <a:t>3.  The root 'sect' can be found in the word 'intersect'.</a:t>
+              <a:t>3.  The root 'sect' means to join or connect things together.</a:t>
             </a:r>
             <a:endParaRPr lang="en-US" sz="1300" dirty="0"/>
           </a:p>
@@ -36948,11 +36975,11 @@
             </a:avLst>
           </a:prstGeom>
           <a:solidFill>
-            <a:srgbClr val="DCFCE7"/>
-          </a:solidFill>
-          <a:ln w="12700">
-            <a:solidFill>
-              <a:srgbClr val="16A34A"/>
+            <a:srgbClr val="FEE2E2"/>
+          </a:solidFill>
+          <a:ln w="12700">
+            <a:solidFill>
+              <a:srgbClr val="DC2626"/>
             </a:solidFill>
             <a:prstDash val="solid"/>
           </a:ln>
@@ -36985,13 +37012,13 @@
             <a:r>
               <a:rPr lang="en-US" sz="1100" b="1" dirty="0">
                 <a:solidFill>
-                  <a:srgbClr val="16A34A"/>
+                  <a:srgbClr val="DC2626"/>
                 </a:solidFill>
                 <a:latin typeface="Trebuchet MS" pitchFamily="34" charset="0"/>
                 <a:ea typeface="Trebuchet MS" pitchFamily="34" charset="-122"/>
                 <a:cs typeface="Trebuchet MS" pitchFamily="34" charset="-120"/>
               </a:rPr>
-              <a:t>TRUE</a:t>
+              <a:t>FALSE</a:t>
             </a:r>
             <a:endParaRPr lang="en-US" sz="1100" dirty="0"/>
           </a:p>
@@ -37203,7 +37230,7 @@
                 <a:ea typeface="Calibri" pitchFamily="34" charset="-122"/>
                 <a:cs typeface="Calibri" pitchFamily="34" charset="-120"/>
               </a:rPr>
-              <a:t>5.  To bisect a line means to cut it into two equal parts.</a:t>
+              <a:t>5.  The word 'insect' has nothing to do with the root 'sect'.</a:t>
             </a:r>
             <a:endParaRPr lang="en-US" sz="1300" dirty="0"/>
           </a:p>
@@ -37226,11 +37253,11 @@
             </a:avLst>
           </a:prstGeom>
           <a:solidFill>
-            <a:srgbClr val="DCFCE7"/>
-          </a:solidFill>
-          <a:ln w="12700">
-            <a:solidFill>
-              <a:srgbClr val="16A34A"/>
+            <a:srgbClr val="FEE2E2"/>
+          </a:solidFill>
+          <a:ln w="12700">
+            <a:solidFill>
+              <a:srgbClr val="DC2626"/>
             </a:solidFill>
             <a:prstDash val="solid"/>
           </a:ln>
@@ -37263,13 +37290,13 @@
             <a:r>
               <a:rPr lang="en-US" sz="1100" b="1" dirty="0">
                 <a:solidFill>
-                  <a:srgbClr val="16A34A"/>
+                  <a:srgbClr val="DC2626"/>
                 </a:solidFill>
                 <a:latin typeface="Trebuchet MS" pitchFamily="34" charset="0"/>
                 <a:ea typeface="Trebuchet MS" pitchFamily="34" charset="-122"/>
                 <a:cs typeface="Trebuchet MS" pitchFamily="34" charset="-120"/>
               </a:rPr>
-              <a:t>TRUE</a:t>
+              <a:t>FALSE</a:t>
             </a:r>
             <a:endParaRPr lang="en-US" sz="1100" dirty="0"/>
           </a:p>

--- a/output/wordlabs-sect-3day.pptx
+++ b/output/wordlabs-sect-3day.pptx
@@ -4240,7 +4240,7 @@
                 <a:ea typeface="Calibri" pitchFamily="34" charset="-122"/>
                 <a:cs typeface="Calibri" pitchFamily="34" charset="-120"/>
               </a:rPr>
-              <a:t>"cut, divide, section"</a:t>
+              <a:t>"cut"</a:t>
             </a:r>
             <a:endParaRPr lang="en-US" sz="2200" dirty="0"/>
           </a:p>
@@ -4279,7 +4279,7 @@
                 <a:ea typeface="Calibri" pitchFamily="34" charset="-122"/>
                 <a:cs typeface="Calibri" pitchFamily="34" charset="-120"/>
               </a:rPr>
-              <a:t>Origin: Latin: secare</a:t>
+              <a:t>Origin: Latin root</a:t>
             </a:r>
             <a:endParaRPr lang="en-US" sz="1300" dirty="0"/>
           </a:p>
@@ -5288,7 +5288,7 @@
                 <a:ea typeface="Calibri" pitchFamily="34" charset="-122"/>
                 <a:cs typeface="Calibri" pitchFamily="34" charset="-120"/>
               </a:rPr>
-              <a:t>Word Labs  •  wordlabs.app  •  Root: 'sect' = cut, divide, section</a:t>
+              <a:t>Word Labs  •  wordlabs.app  •  Root: 'sect' = cut</a:t>
             </a:r>
             <a:endParaRPr lang="en-US" sz="800" dirty="0"/>
           </a:p>
@@ -5622,7 +5622,7 @@
                 <a:ea typeface="Trebuchet MS" pitchFamily="34" charset="-122"/>
                 <a:cs typeface="Trebuchet MS" pitchFamily="34" charset="-120"/>
               </a:rPr>
-              <a:t>2</a:t>
+              <a:t>1</a:t>
             </a:r>
             <a:pPr algn="ctr" indent="0" marL="0">
               <a:buNone/>
@@ -5636,7 +5636,7 @@
                 <a:ea typeface="Trebuchet MS" pitchFamily="34" charset="-122"/>
                 <a:cs typeface="Trebuchet MS" pitchFamily="34" charset="-120"/>
               </a:rPr>
-              <a:t>  punctuation marks</a:t>
+              <a:t>  punctuation mark</a:t>
             </a:r>
             <a:endParaRPr lang="en-US" sz="2800" dirty="0"/>
           </a:p>
@@ -5928,7 +5928,7 @@
                 <a:ea typeface="Calibri" pitchFamily="34" charset="-122"/>
                 <a:cs typeface="Calibri" pitchFamily="34" charset="-120"/>
               </a:rPr>
-              <a:t>Word Labs  •  wordlabs.app  •  Root: 'sect' = cut, divide, section</a:t>
+              <a:t>Word Labs  •  wordlabs.app  •  Root: 'sect' = cut</a:t>
             </a:r>
             <a:endParaRPr lang="en-US" sz="800" dirty="0"/>
           </a:p>
@@ -6040,7 +6040,7 @@
                 <a:ea typeface="Calibri" pitchFamily="34" charset="-122"/>
                 <a:cs typeface="Calibri" pitchFamily="34" charset="-120"/>
               </a:rPr>
-              <a:t>Can you </a:t>
+              <a:t>The manufacturing </a:t>
             </a:r>
             <a:pPr algn="l" indent="0" marL="0">
               <a:buNone/>
@@ -6057,7 +6057,7 @@
                 <a:ea typeface="Calibri" pitchFamily="34" charset="-122"/>
                 <a:cs typeface="Calibri" pitchFamily="34" charset="-120"/>
               </a:rPr>
-              <a:t>bisect</a:t>
+              <a:t>sector</a:t>
             </a:r>
             <a:pPr algn="l" indent="0" marL="0">
               <a:buNone/>
@@ -6071,7 +6071,7 @@
                 <a:ea typeface="Calibri" pitchFamily="34" charset="-122"/>
                 <a:cs typeface="Calibri" pitchFamily="34" charset="-120"/>
               </a:rPr>
-              <a:t> this shape, or will you need to </a:t>
+              <a:t> employs thousands of workers. In science, we will </a:t>
             </a:r>
             <a:pPr algn="l" indent="0" marL="0">
               <a:buNone/>
@@ -6088,7 +6088,7 @@
                 <a:ea typeface="Calibri" pitchFamily="34" charset="-122"/>
                 <a:cs typeface="Calibri" pitchFamily="34" charset="-120"/>
               </a:rPr>
-              <a:t>intersect</a:t>
+              <a:t>dissect</a:t>
             </a:r>
             <a:pPr algn="l" indent="0" marL="0">
               <a:buNone/>
@@ -6102,7 +6102,7 @@
                 <a:ea typeface="Calibri" pitchFamily="34" charset="-122"/>
                 <a:cs typeface="Calibri" pitchFamily="34" charset="-120"/>
               </a:rPr>
-              <a:t> those two lines first?</a:t>
+              <a:t> a flower to study its parts.</a:t>
             </a:r>
             <a:endParaRPr lang="en-US" sz="1800" dirty="0"/>
           </a:p>
@@ -6257,7 +6257,7 @@
                 <a:ea typeface="Trebuchet MS" pitchFamily="34" charset="-122"/>
                 <a:cs typeface="Trebuchet MS" pitchFamily="34" charset="-120"/>
               </a:rPr>
-              <a:t>bisect</a:t>
+              <a:t>sector</a:t>
             </a:r>
             <a:endParaRPr lang="en-US" sz="1400" dirty="0"/>
           </a:p>
@@ -6385,7 +6385,7 @@
                 <a:ea typeface="Trebuchet MS" pitchFamily="34" charset="-122"/>
                 <a:cs typeface="Trebuchet MS" pitchFamily="34" charset="-120"/>
               </a:rPr>
-              <a:t>intersect</a:t>
+              <a:t>dissect</a:t>
             </a:r>
             <a:endParaRPr lang="en-US" sz="1400" dirty="0"/>
           </a:p>
@@ -6716,7 +6716,7 @@
                 <a:ea typeface="Calibri" pitchFamily="34" charset="-122"/>
                 <a:cs typeface="Calibri" pitchFamily="34" charset="-120"/>
               </a:rPr>
-              <a:t>Word Labs  •  wordlabs.app  •  Root: 'sect' = cut, divide, section</a:t>
+              <a:t>Word Labs  •  wordlabs.app  •  Root: 'sect' = cut</a:t>
             </a:r>
             <a:endParaRPr lang="en-US" sz="800" dirty="0"/>
           </a:p>
@@ -6855,7 +6855,7 @@
                 <a:ea typeface="Trebuchet MS" pitchFamily="34" charset="-122"/>
                 <a:cs typeface="Trebuchet MS" pitchFamily="34" charset="-120"/>
               </a:rPr>
-              <a:t>bisect</a:t>
+              <a:t>sector</a:t>
             </a:r>
             <a:endParaRPr lang="en-US" sz="2800" dirty="0"/>
           </a:p>
@@ -7543,7 +7543,7 @@
                 <a:ea typeface="Calibri" pitchFamily="34" charset="-122"/>
                 <a:cs typeface="Calibri" pitchFamily="34" charset="-120"/>
               </a:rPr>
-              <a:t>Word Labs  •  wordlabs.app  •  Root: 'sect' = cut, divide, section</a:t>
+              <a:t>Word Labs  •  wordlabs.app  •  Root: 'sect' = cut</a:t>
             </a:r>
             <a:endParaRPr lang="en-US" sz="800" dirty="0"/>
           </a:p>
@@ -7682,7 +7682,7 @@
                 <a:ea typeface="Trebuchet MS" pitchFamily="34" charset="-122"/>
                 <a:cs typeface="Trebuchet MS" pitchFamily="34" charset="-120"/>
               </a:rPr>
-              <a:t>bisect</a:t>
+              <a:t>sector</a:t>
             </a:r>
             <a:endParaRPr lang="en-US" sz="2800" dirty="0"/>
           </a:p>
@@ -7771,11 +7771,11 @@
             </a:avLst>
           </a:prstGeom>
           <a:solidFill>
-            <a:srgbClr val="DDD6FE"/>
+            <a:srgbClr val="CCFBF1"/>
           </a:solidFill>
           <a:ln w="19050">
             <a:solidFill>
-              <a:srgbClr val="7C3AED"/>
+              <a:srgbClr val="0D9488"/>
             </a:solidFill>
             <a:prstDash val="solid"/>
           </a:ln>
@@ -7815,13 +7815,13 @@
             <a:r>
               <a:rPr lang="en-US" sz="1300" b="1" dirty="0">
                 <a:solidFill>
-                  <a:srgbClr val="4C1D95"/>
+                  <a:srgbClr val="0F766E"/>
                 </a:solidFill>
                 <a:latin typeface="Trebuchet MS" pitchFamily="34" charset="0"/>
                 <a:ea typeface="Trebuchet MS" pitchFamily="34" charset="-122"/>
                 <a:cs typeface="Trebuchet MS" pitchFamily="34" charset="-120"/>
               </a:rPr>
-              <a:t>bi</a:t>
+              <a:t>sect</a:t>
             </a:r>
             <a:endParaRPr lang="en-US" sz="1300" dirty="0"/>
           </a:p>
@@ -7860,7 +7860,7 @@
                 <a:ea typeface="Calibri" pitchFamily="34" charset="-122"/>
                 <a:cs typeface="Calibri" pitchFamily="34" charset="-120"/>
               </a:rPr>
-              <a:t>two</a:t>
+              <a:t>cut</a:t>
             </a:r>
             <a:endParaRPr lang="en-US" sz="850" dirty="0"/>
           </a:p>
@@ -7883,11 +7883,11 @@
             </a:avLst>
           </a:prstGeom>
           <a:solidFill>
-            <a:srgbClr val="CCFBF1"/>
+            <a:srgbClr val="FCE7F3"/>
           </a:solidFill>
           <a:ln w="19050">
             <a:solidFill>
-              <a:srgbClr val="0D9488"/>
+              <a:srgbClr val="DB2777"/>
             </a:solidFill>
             <a:prstDash val="solid"/>
           </a:ln>
@@ -7927,13 +7927,13 @@
             <a:r>
               <a:rPr lang="en-US" sz="1300" b="1" dirty="0">
                 <a:solidFill>
-                  <a:srgbClr val="0F766E"/>
+                  <a:srgbClr val="9D174D"/>
                 </a:solidFill>
                 <a:latin typeface="Trebuchet MS" pitchFamily="34" charset="0"/>
                 <a:ea typeface="Trebuchet MS" pitchFamily="34" charset="-122"/>
                 <a:cs typeface="Trebuchet MS" pitchFamily="34" charset="-120"/>
               </a:rPr>
-              <a:t>sect</a:t>
+              <a:t>or</a:t>
             </a:r>
             <a:endParaRPr lang="en-US" sz="1300" dirty="0"/>
           </a:p>
@@ -7972,7 +7972,7 @@
                 <a:ea typeface="Calibri" pitchFamily="34" charset="-122"/>
                 <a:cs typeface="Calibri" pitchFamily="34" charset="-120"/>
               </a:rPr>
-              <a:t>cut, divide</a:t>
+              <a:t>person who</a:t>
             </a:r>
             <a:endParaRPr lang="en-US" sz="850" dirty="0"/>
           </a:p>
@@ -8528,7 +8528,7 @@
                 <a:ea typeface="Calibri" pitchFamily="34" charset="-122"/>
                 <a:cs typeface="Calibri" pitchFamily="34" charset="-120"/>
               </a:rPr>
-              <a:t>Word Labs  •  wordlabs.app  •  Root: 'sect' = cut, divide, section</a:t>
+              <a:t>Word Labs  •  wordlabs.app  •  Root: 'sect' = cut</a:t>
             </a:r>
             <a:endParaRPr lang="en-US" sz="800" dirty="0"/>
           </a:p>
@@ -8667,7 +8667,7 @@
                 <a:ea typeface="Trebuchet MS" pitchFamily="34" charset="-122"/>
                 <a:cs typeface="Trebuchet MS" pitchFamily="34" charset="-120"/>
               </a:rPr>
-              <a:t>bisect</a:t>
+              <a:t>sector</a:t>
             </a:r>
             <a:endParaRPr lang="en-US" sz="2800" dirty="0"/>
           </a:p>
@@ -8756,11 +8756,11 @@
             </a:avLst>
           </a:prstGeom>
           <a:solidFill>
-            <a:srgbClr val="DDD6FE"/>
+            <a:srgbClr val="CCFBF1"/>
           </a:solidFill>
           <a:ln w="19050">
             <a:solidFill>
-              <a:srgbClr val="7C3AED"/>
+              <a:srgbClr val="0D9488"/>
             </a:solidFill>
             <a:prstDash val="solid"/>
           </a:ln>
@@ -8800,13 +8800,13 @@
             <a:r>
               <a:rPr lang="en-US" sz="1300" b="1" dirty="0">
                 <a:solidFill>
-                  <a:srgbClr val="4C1D95"/>
+                  <a:srgbClr val="0F766E"/>
                 </a:solidFill>
                 <a:latin typeface="Trebuchet MS" pitchFamily="34" charset="0"/>
                 <a:ea typeface="Trebuchet MS" pitchFamily="34" charset="-122"/>
                 <a:cs typeface="Trebuchet MS" pitchFamily="34" charset="-120"/>
               </a:rPr>
-              <a:t>bi</a:t>
+              <a:t>sect</a:t>
             </a:r>
             <a:endParaRPr lang="en-US" sz="1300" dirty="0"/>
           </a:p>
@@ -8845,7 +8845,7 @@
                 <a:ea typeface="Calibri" pitchFamily="34" charset="-122"/>
                 <a:cs typeface="Calibri" pitchFamily="34" charset="-120"/>
               </a:rPr>
-              <a:t>two</a:t>
+              <a:t>cut</a:t>
             </a:r>
             <a:endParaRPr lang="en-US" sz="850" dirty="0"/>
           </a:p>
@@ -8868,11 +8868,11 @@
             </a:avLst>
           </a:prstGeom>
           <a:solidFill>
-            <a:srgbClr val="CCFBF1"/>
+            <a:srgbClr val="FCE7F3"/>
           </a:solidFill>
           <a:ln w="19050">
             <a:solidFill>
-              <a:srgbClr val="0D9488"/>
+              <a:srgbClr val="DB2777"/>
             </a:solidFill>
             <a:prstDash val="solid"/>
           </a:ln>
@@ -8912,13 +8912,13 @@
             <a:r>
               <a:rPr lang="en-US" sz="1300" b="1" dirty="0">
                 <a:solidFill>
-                  <a:srgbClr val="0F766E"/>
+                  <a:srgbClr val="9D174D"/>
                 </a:solidFill>
                 <a:latin typeface="Trebuchet MS" pitchFamily="34" charset="0"/>
                 <a:ea typeface="Trebuchet MS" pitchFamily="34" charset="-122"/>
                 <a:cs typeface="Trebuchet MS" pitchFamily="34" charset="-120"/>
               </a:rPr>
-              <a:t>sect</a:t>
+              <a:t>or</a:t>
             </a:r>
             <a:endParaRPr lang="en-US" sz="1300" dirty="0"/>
           </a:p>
@@ -8957,7 +8957,7 @@
                 <a:ea typeface="Calibri" pitchFamily="34" charset="-122"/>
                 <a:cs typeface="Calibri" pitchFamily="34" charset="-120"/>
               </a:rPr>
-              <a:t>cut, divide</a:t>
+              <a:t>person who</a:t>
             </a:r>
             <a:endParaRPr lang="en-US" sz="850" dirty="0"/>
           </a:p>
@@ -9116,7 +9116,7 @@
                 <a:ea typeface="Trebuchet MS" pitchFamily="34" charset="-122"/>
                 <a:cs typeface="Trebuchet MS" pitchFamily="34" charset="-120"/>
               </a:rPr>
-              <a:t>bi</a:t>
+              <a:t>sec</a:t>
             </a:r>
             <a:endParaRPr lang="en-US" sz="1400" dirty="0"/>
           </a:p>
@@ -9221,7 +9221,7 @@
                 <a:ea typeface="Trebuchet MS" pitchFamily="34" charset="-122"/>
                 <a:cs typeface="Trebuchet MS" pitchFamily="34" charset="-120"/>
               </a:rPr>
-              <a:t>sect</a:t>
+              <a:t>tor</a:t>
             </a:r>
             <a:endParaRPr lang="en-US" sz="1400" dirty="0"/>
           </a:p>
@@ -9645,7 +9645,7 @@
                 <a:ea typeface="Calibri" pitchFamily="34" charset="-122"/>
                 <a:cs typeface="Calibri" pitchFamily="34" charset="-120"/>
               </a:rPr>
-              <a:t>Word Labs  •  wordlabs.app  •  Root: 'sect' = cut, divide, section</a:t>
+              <a:t>Word Labs  •  wordlabs.app  •  Root: 'sect' = cut</a:t>
             </a:r>
             <a:endParaRPr lang="en-US" sz="800" dirty="0"/>
           </a:p>
@@ -9784,7 +9784,7 @@
                 <a:ea typeface="Trebuchet MS" pitchFamily="34" charset="-122"/>
                 <a:cs typeface="Trebuchet MS" pitchFamily="34" charset="-120"/>
               </a:rPr>
-              <a:t>bisect</a:t>
+              <a:t>sector</a:t>
             </a:r>
             <a:endParaRPr lang="en-US" sz="2800" dirty="0"/>
           </a:p>
@@ -9873,11 +9873,11 @@
             </a:avLst>
           </a:prstGeom>
           <a:solidFill>
-            <a:srgbClr val="DDD6FE"/>
+            <a:srgbClr val="CCFBF1"/>
           </a:solidFill>
           <a:ln w="19050">
             <a:solidFill>
-              <a:srgbClr val="7C3AED"/>
+              <a:srgbClr val="0D9488"/>
             </a:solidFill>
             <a:prstDash val="solid"/>
           </a:ln>
@@ -9917,13 +9917,13 @@
             <a:r>
               <a:rPr lang="en-US" sz="1300" b="1" dirty="0">
                 <a:solidFill>
-                  <a:srgbClr val="4C1D95"/>
+                  <a:srgbClr val="0F766E"/>
                 </a:solidFill>
                 <a:latin typeface="Trebuchet MS" pitchFamily="34" charset="0"/>
                 <a:ea typeface="Trebuchet MS" pitchFamily="34" charset="-122"/>
                 <a:cs typeface="Trebuchet MS" pitchFamily="34" charset="-120"/>
               </a:rPr>
-              <a:t>bi</a:t>
+              <a:t>sect</a:t>
             </a:r>
             <a:endParaRPr lang="en-US" sz="1300" dirty="0"/>
           </a:p>
@@ -9962,7 +9962,7 @@
                 <a:ea typeface="Calibri" pitchFamily="34" charset="-122"/>
                 <a:cs typeface="Calibri" pitchFamily="34" charset="-120"/>
               </a:rPr>
-              <a:t>two</a:t>
+              <a:t>cut</a:t>
             </a:r>
             <a:endParaRPr lang="en-US" sz="850" dirty="0"/>
           </a:p>
@@ -9985,11 +9985,11 @@
             </a:avLst>
           </a:prstGeom>
           <a:solidFill>
-            <a:srgbClr val="CCFBF1"/>
+            <a:srgbClr val="FCE7F3"/>
           </a:solidFill>
           <a:ln w="19050">
             <a:solidFill>
-              <a:srgbClr val="0D9488"/>
+              <a:srgbClr val="DB2777"/>
             </a:solidFill>
             <a:prstDash val="solid"/>
           </a:ln>
@@ -10029,13 +10029,13 @@
             <a:r>
               <a:rPr lang="en-US" sz="1300" b="1" dirty="0">
                 <a:solidFill>
-                  <a:srgbClr val="0F766E"/>
+                  <a:srgbClr val="9D174D"/>
                 </a:solidFill>
                 <a:latin typeface="Trebuchet MS" pitchFamily="34" charset="0"/>
                 <a:ea typeface="Trebuchet MS" pitchFamily="34" charset="-122"/>
                 <a:cs typeface="Trebuchet MS" pitchFamily="34" charset="-120"/>
               </a:rPr>
-              <a:t>sect</a:t>
+              <a:t>or</a:t>
             </a:r>
             <a:endParaRPr lang="en-US" sz="1300" dirty="0"/>
           </a:p>
@@ -10074,7 +10074,7 @@
                 <a:ea typeface="Calibri" pitchFamily="34" charset="-122"/>
                 <a:cs typeface="Calibri" pitchFamily="34" charset="-120"/>
               </a:rPr>
-              <a:t>cut, divide</a:t>
+              <a:t>person who</a:t>
             </a:r>
             <a:endParaRPr lang="en-US" sz="850" dirty="0"/>
           </a:p>
@@ -10233,7 +10233,7 @@
                 <a:ea typeface="Trebuchet MS" pitchFamily="34" charset="-122"/>
                 <a:cs typeface="Trebuchet MS" pitchFamily="34" charset="-120"/>
               </a:rPr>
-              <a:t>bi</a:t>
+              <a:t>sec</a:t>
             </a:r>
             <a:endParaRPr lang="en-US" sz="1400" dirty="0"/>
           </a:p>
@@ -10338,7 +10338,7 @@
                 <a:ea typeface="Trebuchet MS" pitchFamily="34" charset="-122"/>
                 <a:cs typeface="Trebuchet MS" pitchFamily="34" charset="-120"/>
               </a:rPr>
-              <a:t>sect</a:t>
+              <a:t>tor</a:t>
             </a:r>
             <a:endParaRPr lang="en-US" sz="1400" dirty="0"/>
           </a:p>
@@ -10445,7 +10445,7 @@
         </p:nvSpPr>
         <p:spPr>
           <a:xfrm>
-            <a:off x="2254649" y="4169664"/>
+            <a:off x="2427732" y="4169664"/>
             <a:ext cx="685800" cy="475488"/>
           </a:xfrm>
           <a:prstGeom prst="rect">
@@ -10472,7 +10472,7 @@
         </p:nvSpPr>
         <p:spPr>
           <a:xfrm>
-            <a:off x="2254649" y="4169664"/>
+            <a:off x="2427732" y="4169664"/>
             <a:ext cx="685800" cy="475488"/>
           </a:xfrm>
           <a:prstGeom prst="rect">
@@ -10497,7 +10497,7 @@
                 <a:ea typeface="Trebuchet MS" pitchFamily="34" charset="-122"/>
                 <a:cs typeface="Trebuchet MS" pitchFamily="34" charset="-120"/>
               </a:rPr>
-              <a:t>b</a:t>
+              <a:t>s</a:t>
             </a:r>
             <a:endParaRPr lang="en-US" sz="900" dirty="0"/>
           </a:p>
@@ -10511,7 +10511,7 @@
         </p:nvSpPr>
         <p:spPr>
           <a:xfrm>
-            <a:off x="3293146" y="4169664"/>
+            <a:off x="3639312" y="4169664"/>
             <a:ext cx="685800" cy="475488"/>
           </a:xfrm>
           <a:prstGeom prst="rect">
@@ -10538,7 +10538,7 @@
         </p:nvSpPr>
         <p:spPr>
           <a:xfrm>
-            <a:off x="3293146" y="4169664"/>
+            <a:off x="3639312" y="4169664"/>
             <a:ext cx="685800" cy="475488"/>
           </a:xfrm>
           <a:prstGeom prst="rect">
@@ -10563,7 +10563,7 @@
                 <a:ea typeface="Trebuchet MS" pitchFamily="34" charset="-122"/>
                 <a:cs typeface="Trebuchet MS" pitchFamily="34" charset="-120"/>
               </a:rPr>
-              <a:t>i</a:t>
+              <a:t>e</a:t>
             </a:r>
             <a:endParaRPr lang="en-US" sz="900" dirty="0"/>
           </a:p>
@@ -10577,7 +10577,7 @@
         </p:nvSpPr>
         <p:spPr>
           <a:xfrm>
-            <a:off x="4331643" y="4169664"/>
+            <a:off x="4850892" y="4169664"/>
             <a:ext cx="685800" cy="475488"/>
           </a:xfrm>
           <a:prstGeom prst="rect">
@@ -10604,7 +10604,7 @@
         </p:nvSpPr>
         <p:spPr>
           <a:xfrm>
-            <a:off x="4331643" y="4169664"/>
+            <a:off x="4850892" y="4169664"/>
             <a:ext cx="685800" cy="475488"/>
           </a:xfrm>
           <a:prstGeom prst="rect">
@@ -10629,7 +10629,7 @@
                 <a:ea typeface="Trebuchet MS" pitchFamily="34" charset="-122"/>
                 <a:cs typeface="Trebuchet MS" pitchFamily="34" charset="-120"/>
               </a:rPr>
-              <a:t>s</a:t>
+              <a:t>c</a:t>
             </a:r>
             <a:endParaRPr lang="en-US" sz="900" dirty="0"/>
           </a:p>
@@ -10643,7 +10643,7 @@
         </p:nvSpPr>
         <p:spPr>
           <a:xfrm>
-            <a:off x="5370141" y="4169664"/>
+            <a:off x="6062472" y="4169664"/>
             <a:ext cx="685800" cy="475488"/>
           </a:xfrm>
           <a:prstGeom prst="rect">
@@ -10670,7 +10670,7 @@
         </p:nvSpPr>
         <p:spPr>
           <a:xfrm>
-            <a:off x="5370141" y="4169664"/>
+            <a:off x="6062472" y="4169664"/>
             <a:ext cx="685800" cy="475488"/>
           </a:xfrm>
           <a:prstGeom prst="rect">
@@ -10695,7 +10695,7 @@
                 <a:ea typeface="Trebuchet MS" pitchFamily="34" charset="-122"/>
                 <a:cs typeface="Trebuchet MS" pitchFamily="34" charset="-120"/>
               </a:rPr>
-              <a:t>e</a:t>
+              <a:t>t</a:t>
             </a:r>
             <a:endParaRPr lang="en-US" sz="900" dirty="0"/>
           </a:p>
@@ -10709,7 +10709,7 @@
         </p:nvSpPr>
         <p:spPr>
           <a:xfrm>
-            <a:off x="6408638" y="4169664"/>
+            <a:off x="7274052" y="4169664"/>
             <a:ext cx="685800" cy="475488"/>
           </a:xfrm>
           <a:prstGeom prst="rect">
@@ -10736,7 +10736,7 @@
         </p:nvSpPr>
         <p:spPr>
           <a:xfrm>
-            <a:off x="6408638" y="4169664"/>
+            <a:off x="7274052" y="4169664"/>
             <a:ext cx="685800" cy="475488"/>
           </a:xfrm>
           <a:prstGeom prst="rect">
@@ -10761,73 +10761,7 @@
                 <a:ea typeface="Trebuchet MS" pitchFamily="34" charset="-122"/>
                 <a:cs typeface="Trebuchet MS" pitchFamily="34" charset="-120"/>
               </a:rPr>
-              <a:t>c</a:t>
-            </a:r>
-            <a:endParaRPr lang="en-US" sz="900" dirty="0"/>
-          </a:p>
-        </p:txBody>
-      </p:sp>
-      <p:sp>
-        <p:nvSpPr>
-          <p:cNvPr id="43" name="Shape 41"/>
-          <p:cNvSpPr/>
-          <p:nvPr/>
-        </p:nvSpPr>
-        <p:spPr>
-          <a:xfrm>
-            <a:off x="7447135" y="4169664"/>
-            <a:ext cx="685800" cy="475488"/>
-          </a:xfrm>
-          <a:prstGeom prst="rect">
-            <a:avLst>
-              <a:gd name="adj" fmla="val 7692"/>
-            </a:avLst>
-          </a:prstGeom>
-          <a:solidFill>
-            <a:srgbClr val="FFFFFF"/>
-          </a:solidFill>
-          <a:ln w="12700">
-            <a:solidFill>
-              <a:srgbClr val="DB2777"/>
-            </a:solidFill>
-            <a:prstDash val="solid"/>
-          </a:ln>
-        </p:spPr>
-      </p:sp>
-      <p:sp>
-        <p:nvSpPr>
-          <p:cNvPr id="44" name="Text 42"/>
-          <p:cNvSpPr/>
-          <p:nvPr/>
-        </p:nvSpPr>
-        <p:spPr>
-          <a:xfrm>
-            <a:off x="7447135" y="4169664"/>
-            <a:ext cx="685800" cy="475488"/>
-          </a:xfrm>
-          <a:prstGeom prst="rect">
-            <a:avLst/>
-          </a:prstGeom>
-          <a:noFill/>
-          <a:ln/>
-        </p:spPr>
-        <p:txBody>
-          <a:bodyPr wrap="square" lIns="0" tIns="0" rIns="0" bIns="0" rtlCol="0" anchor="ctr"/>
-          <a:lstStyle/>
-          <a:p>
-            <a:pPr algn="ctr" indent="0" marL="0">
-              <a:buNone/>
-            </a:pPr>
-            <a:r>
-              <a:rPr lang="en-US" sz="900" b="1" dirty="0">
-                <a:solidFill>
-                  <a:srgbClr val="9D174D"/>
-                </a:solidFill>
-                <a:latin typeface="Trebuchet MS" pitchFamily="34" charset="0"/>
-                <a:ea typeface="Trebuchet MS" pitchFamily="34" charset="-122"/>
-                <a:cs typeface="Trebuchet MS" pitchFamily="34" charset="-120"/>
-              </a:rPr>
-              <a:t>t</a:t>
+              <a:t>or</a:t>
             </a:r>
             <a:endParaRPr lang="en-US" sz="900" dirty="0"/>
           </a:p>
@@ -11119,7 +11053,7 @@
                 <a:ea typeface="Calibri" pitchFamily="34" charset="-122"/>
                 <a:cs typeface="Calibri" pitchFamily="34" charset="-120"/>
               </a:rPr>
-              <a:t>Word Labs  •  wordlabs.app  •  Root: 'sect' = cut, divide, section</a:t>
+              <a:t>Word Labs  •  wordlabs.app  •  Root: 'sect' = cut</a:t>
             </a:r>
             <a:endParaRPr lang="en-US" sz="800" dirty="0"/>
           </a:p>
@@ -11258,7 +11192,7 @@
                 <a:ea typeface="Trebuchet MS" pitchFamily="34" charset="-122"/>
                 <a:cs typeface="Trebuchet MS" pitchFamily="34" charset="-120"/>
               </a:rPr>
-              <a:t>intersect</a:t>
+              <a:t>dissect</a:t>
             </a:r>
             <a:endParaRPr lang="en-US" sz="2800" dirty="0"/>
           </a:p>
@@ -11946,7 +11880,7 @@
                 <a:ea typeface="Calibri" pitchFamily="34" charset="-122"/>
                 <a:cs typeface="Calibri" pitchFamily="34" charset="-120"/>
               </a:rPr>
-              <a:t>Word Labs  •  wordlabs.app  •  Root: 'sect' = cut, divide, section</a:t>
+              <a:t>Word Labs  •  wordlabs.app  •  Root: 'sect' = cut</a:t>
             </a:r>
             <a:endParaRPr lang="en-US" sz="800" dirty="0"/>
           </a:p>
@@ -12085,7 +12019,7 @@
                 <a:ea typeface="Trebuchet MS" pitchFamily="34" charset="-122"/>
                 <a:cs typeface="Trebuchet MS" pitchFamily="34" charset="-120"/>
               </a:rPr>
-              <a:t>intersect</a:t>
+              <a:t>dissect</a:t>
             </a:r>
             <a:endParaRPr lang="en-US" sz="2800" dirty="0"/>
           </a:p>
@@ -12224,7 +12158,7 @@
                 <a:ea typeface="Trebuchet MS" pitchFamily="34" charset="-122"/>
                 <a:cs typeface="Trebuchet MS" pitchFamily="34" charset="-120"/>
               </a:rPr>
-              <a:t>inter</a:t>
+              <a:t>dis</a:t>
             </a:r>
             <a:endParaRPr lang="en-US" sz="1300" dirty="0"/>
           </a:p>
@@ -12263,7 +12197,7 @@
                 <a:ea typeface="Calibri" pitchFamily="34" charset="-122"/>
                 <a:cs typeface="Calibri" pitchFamily="34" charset="-120"/>
               </a:rPr>
-              <a:t>between</a:t>
+              <a:t>not; opposite; apart</a:t>
             </a:r>
             <a:endParaRPr lang="en-US" sz="850" dirty="0"/>
           </a:p>
@@ -12375,7 +12309,7 @@
                 <a:ea typeface="Calibri" pitchFamily="34" charset="-122"/>
                 <a:cs typeface="Calibri" pitchFamily="34" charset="-120"/>
               </a:rPr>
-              <a:t>cut, divide</a:t>
+              <a:t>cut</a:t>
             </a:r>
             <a:endParaRPr lang="en-US" sz="850" dirty="0"/>
           </a:p>
@@ -12931,7 +12865,7 @@
                 <a:ea typeface="Calibri" pitchFamily="34" charset="-122"/>
                 <a:cs typeface="Calibri" pitchFamily="34" charset="-120"/>
               </a:rPr>
-              <a:t>Word Labs  •  wordlabs.app  •  Root: 'sect' = cut, divide, section</a:t>
+              <a:t>Word Labs  •  wordlabs.app  •  Root: 'sect' = cut</a:t>
             </a:r>
             <a:endParaRPr lang="en-US" sz="800" dirty="0"/>
           </a:p>
@@ -13070,7 +13004,7 @@
                 <a:ea typeface="Trebuchet MS" pitchFamily="34" charset="-122"/>
                 <a:cs typeface="Trebuchet MS" pitchFamily="34" charset="-120"/>
               </a:rPr>
-              <a:t>intersect</a:t>
+              <a:t>dissect</a:t>
             </a:r>
             <a:endParaRPr lang="en-US" sz="2800" dirty="0"/>
           </a:p>
@@ -13209,7 +13143,7 @@
                 <a:ea typeface="Trebuchet MS" pitchFamily="34" charset="-122"/>
                 <a:cs typeface="Trebuchet MS" pitchFamily="34" charset="-120"/>
               </a:rPr>
-              <a:t>inter</a:t>
+              <a:t>dis</a:t>
             </a:r>
             <a:endParaRPr lang="en-US" sz="1300" dirty="0"/>
           </a:p>
@@ -13248,7 +13182,7 @@
                 <a:ea typeface="Calibri" pitchFamily="34" charset="-122"/>
                 <a:cs typeface="Calibri" pitchFamily="34" charset="-120"/>
               </a:rPr>
-              <a:t>between</a:t>
+              <a:t>not; opposite; apart</a:t>
             </a:r>
             <a:endParaRPr lang="en-US" sz="850" dirty="0"/>
           </a:p>
@@ -13360,7 +13294,7 @@
                 <a:ea typeface="Calibri" pitchFamily="34" charset="-122"/>
                 <a:cs typeface="Calibri" pitchFamily="34" charset="-120"/>
               </a:rPr>
-              <a:t>cut, divide</a:t>
+              <a:t>cut</a:t>
             </a:r>
             <a:endParaRPr lang="en-US" sz="850" dirty="0"/>
           </a:p>
@@ -13467,7 +13401,7 @@
         </p:nvSpPr>
         <p:spPr>
           <a:xfrm>
-            <a:off x="2313432" y="3364992"/>
+            <a:off x="2999232" y="3364992"/>
             <a:ext cx="1645920" cy="475488"/>
           </a:xfrm>
           <a:prstGeom prst="rect">
@@ -13494,7 +13428,7 @@
         </p:nvSpPr>
         <p:spPr>
           <a:xfrm>
-            <a:off x="2313432" y="3364992"/>
+            <a:off x="2999232" y="3364992"/>
             <a:ext cx="1645920" cy="475488"/>
           </a:xfrm>
           <a:prstGeom prst="rect">
@@ -13519,7 +13453,7 @@
                 <a:ea typeface="Trebuchet MS" pitchFamily="34" charset="-122"/>
                 <a:cs typeface="Trebuchet MS" pitchFamily="34" charset="-120"/>
               </a:rPr>
-              <a:t>in</a:t>
+              <a:t>dis</a:t>
             </a:r>
             <a:endParaRPr lang="en-US" sz="1400" dirty="0"/>
           </a:p>
@@ -13533,8 +13467,8 @@
         </p:nvSpPr>
         <p:spPr>
           <a:xfrm>
-            <a:off x="3959352" y="3364992"/>
-            <a:ext cx="411480" cy="475488"/>
+            <a:off x="4645152" y="3364992"/>
+            <a:ext cx="1097280" cy="475488"/>
           </a:xfrm>
           <a:prstGeom prst="rect">
             <a:avLst/>
@@ -13572,7 +13506,7 @@
         </p:nvSpPr>
         <p:spPr>
           <a:xfrm>
-            <a:off x="4370832" y="3364992"/>
+            <a:off x="5742432" y="3364992"/>
             <a:ext cx="1645920" cy="475488"/>
           </a:xfrm>
           <a:prstGeom prst="rect">
@@ -13599,7 +13533,7 @@
         </p:nvSpPr>
         <p:spPr>
           <a:xfrm>
-            <a:off x="4370832" y="3364992"/>
+            <a:off x="5742432" y="3364992"/>
             <a:ext cx="1645920" cy="475488"/>
           </a:xfrm>
           <a:prstGeom prst="rect">
@@ -13624,7 +13558,7 @@
                 <a:ea typeface="Trebuchet MS" pitchFamily="34" charset="-122"/>
                 <a:cs typeface="Trebuchet MS" pitchFamily="34" charset="-120"/>
               </a:rPr>
-              <a:t>ter</a:t>
+              <a:t>sect</a:t>
             </a:r>
             <a:endParaRPr lang="en-US" sz="1400" dirty="0"/>
           </a:p>
@@ -13632,14 +13566,41 @@
       </p:sp>
       <p:sp>
         <p:nvSpPr>
-          <p:cNvPr id="30" name="Text 28"/>
-          <p:cNvSpPr/>
-          <p:nvPr/>
-        </p:nvSpPr>
-        <p:spPr>
-          <a:xfrm>
-            <a:off x="6016752" y="3364992"/>
-            <a:ext cx="411480" cy="475488"/>
+          <p:cNvPr id="30" name="Shape 28"/>
+          <p:cNvSpPr/>
+          <p:nvPr/>
+        </p:nvSpPr>
+        <p:spPr>
+          <a:xfrm>
+            <a:off x="365760" y="4096512"/>
+            <a:ext cx="1371600" cy="804672"/>
+          </a:xfrm>
+          <a:prstGeom prst="rect">
+            <a:avLst>
+              <a:gd name="adj" fmla="val 6818"/>
+            </a:avLst>
+          </a:prstGeom>
+          <a:solidFill>
+            <a:srgbClr val="E2E8F0"/>
+          </a:solidFill>
+          <a:ln w="12700">
+            <a:solidFill>
+              <a:srgbClr val="E2E8F0"/>
+            </a:solidFill>
+            <a:prstDash val="solid"/>
+          </a:ln>
+        </p:spPr>
+      </p:sp>
+      <p:sp>
+        <p:nvSpPr>
+          <p:cNvPr id="31" name="Text 29"/>
+          <p:cNvSpPr/>
+          <p:nvPr/>
+        </p:nvSpPr>
+        <p:spPr>
+          <a:xfrm>
+            <a:off x="365760" y="4096512"/>
+            <a:ext cx="1371600" cy="804672"/>
           </a:xfrm>
           <a:prstGeom prst="rect">
             <a:avLst/>
@@ -13655,96 +13616,30 @@
               <a:buNone/>
             </a:pPr>
             <a:r>
-              <a:rPr lang="en-US" sz="1600" b="1" dirty="0">
-                <a:solidFill>
-                  <a:srgbClr val="0D9488"/>
+              <a:rPr lang="en-US" sz="1100" b="1" dirty="0">
+                <a:solidFill>
+                  <a:srgbClr val="475569"/>
                 </a:solidFill>
                 <a:latin typeface="Trebuchet MS" pitchFamily="34" charset="0"/>
                 <a:ea typeface="Trebuchet MS" pitchFamily="34" charset="-122"/>
                 <a:cs typeface="Trebuchet MS" pitchFamily="34" charset="-120"/>
               </a:rPr>
-              <a:t>·</a:t>
-            </a:r>
-            <a:endParaRPr lang="en-US" sz="1600" dirty="0"/>
-          </a:p>
-        </p:txBody>
-      </p:sp>
-      <p:sp>
-        <p:nvSpPr>
-          <p:cNvPr id="31" name="Shape 29"/>
-          <p:cNvSpPr/>
-          <p:nvPr/>
-        </p:nvSpPr>
-        <p:spPr>
-          <a:xfrm>
-            <a:off x="6428232" y="3364992"/>
-            <a:ext cx="1645920" cy="475488"/>
-          </a:xfrm>
-          <a:prstGeom prst="rect">
-            <a:avLst>
-              <a:gd name="adj" fmla="val 9615"/>
-            </a:avLst>
-          </a:prstGeom>
-          <a:solidFill>
-            <a:srgbClr val="FFFFFF"/>
-          </a:solidFill>
-          <a:ln w="12700">
-            <a:solidFill>
-              <a:srgbClr val="0D9488"/>
-            </a:solidFill>
-            <a:prstDash val="solid"/>
-          </a:ln>
-        </p:spPr>
-      </p:sp>
-      <p:sp>
-        <p:nvSpPr>
-          <p:cNvPr id="32" name="Text 30"/>
-          <p:cNvSpPr/>
-          <p:nvPr/>
-        </p:nvSpPr>
-        <p:spPr>
-          <a:xfrm>
-            <a:off x="6428232" y="3364992"/>
-            <a:ext cx="1645920" cy="475488"/>
-          </a:xfrm>
-          <a:prstGeom prst="rect">
-            <a:avLst/>
-          </a:prstGeom>
-          <a:noFill/>
-          <a:ln/>
-        </p:spPr>
-        <p:txBody>
-          <a:bodyPr wrap="square" lIns="0" tIns="0" rIns="0" bIns="0" rtlCol="0" anchor="ctr"/>
-          <a:lstStyle/>
-          <a:p>
-            <a:pPr algn="ctr" indent="0" marL="0">
-              <a:buNone/>
-            </a:pPr>
-            <a:r>
-              <a:rPr lang="en-US" sz="1400" b="1" dirty="0">
-                <a:solidFill>
-                  <a:srgbClr val="0D9488"/>
-                </a:solidFill>
-                <a:latin typeface="Trebuchet MS" pitchFamily="34" charset="0"/>
-                <a:ea typeface="Trebuchet MS" pitchFamily="34" charset="-122"/>
-                <a:cs typeface="Trebuchet MS" pitchFamily="34" charset="-120"/>
-              </a:rPr>
-              <a:t>sect</a:t>
-            </a:r>
-            <a:endParaRPr lang="en-US" sz="1400" dirty="0"/>
-          </a:p>
-        </p:txBody>
-      </p:sp>
-      <p:sp>
-        <p:nvSpPr>
-          <p:cNvPr id="33" name="Shape 31"/>
-          <p:cNvSpPr/>
-          <p:nvPr/>
-        </p:nvSpPr>
-        <p:spPr>
-          <a:xfrm>
-            <a:off x="365760" y="4096512"/>
-            <a:ext cx="1371600" cy="804672"/>
+              <a:t>Phonemes</a:t>
+            </a:r>
+            <a:endParaRPr lang="en-US" sz="1100" dirty="0"/>
+          </a:p>
+        </p:txBody>
+      </p:sp>
+      <p:sp>
+        <p:nvSpPr>
+          <p:cNvPr id="32" name="Shape 30"/>
+          <p:cNvSpPr/>
+          <p:nvPr/>
+        </p:nvSpPr>
+        <p:spPr>
+          <a:xfrm>
+            <a:off x="1874520" y="4096512"/>
+            <a:ext cx="6903720" cy="804672"/>
           </a:xfrm>
           <a:prstGeom prst="rect">
             <a:avLst>
@@ -13752,85 +13647,19 @@
             </a:avLst>
           </a:prstGeom>
           <a:solidFill>
-            <a:srgbClr val="E2E8F0"/>
+            <a:srgbClr val="F8FAFC"/>
           </a:solidFill>
           <a:ln w="12700">
             <a:solidFill>
               <a:srgbClr val="E2E8F0"/>
             </a:solidFill>
-            <a:prstDash val="solid"/>
-          </a:ln>
-        </p:spPr>
-      </p:sp>
-      <p:sp>
-        <p:nvSpPr>
-          <p:cNvPr id="34" name="Text 32"/>
-          <p:cNvSpPr/>
-          <p:nvPr/>
-        </p:nvSpPr>
-        <p:spPr>
-          <a:xfrm>
-            <a:off x="365760" y="4096512"/>
-            <a:ext cx="1371600" cy="804672"/>
-          </a:xfrm>
-          <a:prstGeom prst="rect">
-            <a:avLst/>
-          </a:prstGeom>
-          <a:noFill/>
-          <a:ln/>
-        </p:spPr>
-        <p:txBody>
-          <a:bodyPr wrap="square" lIns="0" tIns="0" rIns="0" bIns="0" rtlCol="0" anchor="ctr"/>
-          <a:lstStyle/>
-          <a:p>
-            <a:pPr algn="ctr" indent="0" marL="0">
-              <a:buNone/>
-            </a:pPr>
-            <a:r>
-              <a:rPr lang="en-US" sz="1100" b="1" dirty="0">
-                <a:solidFill>
-                  <a:srgbClr val="475569"/>
-                </a:solidFill>
-                <a:latin typeface="Trebuchet MS" pitchFamily="34" charset="0"/>
-                <a:ea typeface="Trebuchet MS" pitchFamily="34" charset="-122"/>
-                <a:cs typeface="Trebuchet MS" pitchFamily="34" charset="-120"/>
-              </a:rPr>
-              <a:t>Phonemes</a:t>
-            </a:r>
-            <a:endParaRPr lang="en-US" sz="1100" dirty="0"/>
-          </a:p>
-        </p:txBody>
-      </p:sp>
-      <p:sp>
-        <p:nvSpPr>
-          <p:cNvPr id="35" name="Shape 33"/>
-          <p:cNvSpPr/>
-          <p:nvPr/>
-        </p:nvSpPr>
-        <p:spPr>
-          <a:xfrm>
-            <a:off x="1874520" y="4096512"/>
-            <a:ext cx="6903720" cy="804672"/>
-          </a:xfrm>
-          <a:prstGeom prst="rect">
-            <a:avLst>
-              <a:gd name="adj" fmla="val 6818"/>
-            </a:avLst>
-          </a:prstGeom>
-          <a:solidFill>
-            <a:srgbClr val="F8FAFC"/>
-          </a:solidFill>
-          <a:ln w="12700">
-            <a:solidFill>
-              <a:srgbClr val="E2E8F0"/>
-            </a:solidFill>
             <a:prstDash val="dash"/>
           </a:ln>
         </p:spPr>
       </p:sp>
       <p:sp>
         <p:nvSpPr>
-          <p:cNvPr id="36" name="Text 34"/>
+          <p:cNvPr id="33" name="Text 31"/>
           <p:cNvSpPr/>
           <p:nvPr/>
         </p:nvSpPr>
@@ -14062,7 +13891,7 @@
                 <a:ea typeface="Calibri" pitchFamily="34" charset="-122"/>
                 <a:cs typeface="Calibri" pitchFamily="34" charset="-120"/>
               </a:rPr>
-              <a:t>Root 'sect' — cut, divide, section</a:t>
+              <a:t>Root 'sect' — cut</a:t>
             </a:r>
             <a:endParaRPr lang="en-US" sz="1600" dirty="0"/>
           </a:p>
@@ -14418,7 +14247,7 @@
                 <a:ea typeface="Calibri" pitchFamily="34" charset="-122"/>
                 <a:cs typeface="Calibri" pitchFamily="34" charset="-120"/>
               </a:rPr>
-              <a:t>Word Labs  •  wordlabs.app  •  Root: 'sect' = cut, divide, section</a:t>
+              <a:t>Word Labs  •  wordlabs.app  •  Root: 'sect' = cut</a:t>
             </a:r>
             <a:endParaRPr lang="en-US" sz="800" dirty="0"/>
           </a:p>
@@ -14557,7 +14386,7 @@
                 <a:ea typeface="Trebuchet MS" pitchFamily="34" charset="-122"/>
                 <a:cs typeface="Trebuchet MS" pitchFamily="34" charset="-120"/>
               </a:rPr>
-              <a:t>intersect</a:t>
+              <a:t>dissect</a:t>
             </a:r>
             <a:endParaRPr lang="en-US" sz="2800" dirty="0"/>
           </a:p>
@@ -14696,7 +14525,7 @@
                 <a:ea typeface="Trebuchet MS" pitchFamily="34" charset="-122"/>
                 <a:cs typeface="Trebuchet MS" pitchFamily="34" charset="-120"/>
               </a:rPr>
-              <a:t>inter</a:t>
+              <a:t>dis</a:t>
             </a:r>
             <a:endParaRPr lang="en-US" sz="1300" dirty="0"/>
           </a:p>
@@ -14735,7 +14564,7 @@
                 <a:ea typeface="Calibri" pitchFamily="34" charset="-122"/>
                 <a:cs typeface="Calibri" pitchFamily="34" charset="-120"/>
               </a:rPr>
-              <a:t>between</a:t>
+              <a:t>not; opposite; apart</a:t>
             </a:r>
             <a:endParaRPr lang="en-US" sz="850" dirty="0"/>
           </a:p>
@@ -14847,7 +14676,7 @@
                 <a:ea typeface="Calibri" pitchFamily="34" charset="-122"/>
                 <a:cs typeface="Calibri" pitchFamily="34" charset="-120"/>
               </a:rPr>
-              <a:t>cut, divide</a:t>
+              <a:t>cut</a:t>
             </a:r>
             <a:endParaRPr lang="en-US" sz="850" dirty="0"/>
           </a:p>
@@ -14954,7 +14783,7 @@
         </p:nvSpPr>
         <p:spPr>
           <a:xfrm>
-            <a:off x="2313432" y="3364992"/>
+            <a:off x="2999232" y="3364992"/>
             <a:ext cx="1645920" cy="475488"/>
           </a:xfrm>
           <a:prstGeom prst="rect">
@@ -14981,7 +14810,7 @@
         </p:nvSpPr>
         <p:spPr>
           <a:xfrm>
-            <a:off x="2313432" y="3364992"/>
+            <a:off x="2999232" y="3364992"/>
             <a:ext cx="1645920" cy="475488"/>
           </a:xfrm>
           <a:prstGeom prst="rect">
@@ -15006,7 +14835,7 @@
                 <a:ea typeface="Trebuchet MS" pitchFamily="34" charset="-122"/>
                 <a:cs typeface="Trebuchet MS" pitchFamily="34" charset="-120"/>
               </a:rPr>
-              <a:t>in</a:t>
+              <a:t>dis</a:t>
             </a:r>
             <a:endParaRPr lang="en-US" sz="1400" dirty="0"/>
           </a:p>
@@ -15020,8 +14849,8 @@
         </p:nvSpPr>
         <p:spPr>
           <a:xfrm>
-            <a:off x="3959352" y="3364992"/>
-            <a:ext cx="411480" cy="475488"/>
+            <a:off x="4645152" y="3364992"/>
+            <a:ext cx="1097280" cy="475488"/>
           </a:xfrm>
           <a:prstGeom prst="rect">
             <a:avLst/>
@@ -15059,7 +14888,7 @@
         </p:nvSpPr>
         <p:spPr>
           <a:xfrm>
-            <a:off x="4370832" y="3364992"/>
+            <a:off x="5742432" y="3364992"/>
             <a:ext cx="1645920" cy="475488"/>
           </a:xfrm>
           <a:prstGeom prst="rect">
@@ -15086,7 +14915,7 @@
         </p:nvSpPr>
         <p:spPr>
           <a:xfrm>
-            <a:off x="4370832" y="3364992"/>
+            <a:off x="5742432" y="3364992"/>
             <a:ext cx="1645920" cy="475488"/>
           </a:xfrm>
           <a:prstGeom prst="rect">
@@ -15111,7 +14940,7 @@
                 <a:ea typeface="Trebuchet MS" pitchFamily="34" charset="-122"/>
                 <a:cs typeface="Trebuchet MS" pitchFamily="34" charset="-120"/>
               </a:rPr>
-              <a:t>ter</a:t>
+              <a:t>sect</a:t>
             </a:r>
             <a:endParaRPr lang="en-US" sz="1400" dirty="0"/>
           </a:p>
@@ -15119,14 +14948,41 @@
       </p:sp>
       <p:sp>
         <p:nvSpPr>
-          <p:cNvPr id="30" name="Text 28"/>
-          <p:cNvSpPr/>
-          <p:nvPr/>
-        </p:nvSpPr>
-        <p:spPr>
-          <a:xfrm>
-            <a:off x="6016752" y="3364992"/>
-            <a:ext cx="411480" cy="475488"/>
+          <p:cNvPr id="30" name="Shape 28"/>
+          <p:cNvSpPr/>
+          <p:nvPr/>
+        </p:nvSpPr>
+        <p:spPr>
+          <a:xfrm>
+            <a:off x="365760" y="4096512"/>
+            <a:ext cx="1371600" cy="804672"/>
+          </a:xfrm>
+          <a:prstGeom prst="rect">
+            <a:avLst>
+              <a:gd name="adj" fmla="val 6818"/>
+            </a:avLst>
+          </a:prstGeom>
+          <a:solidFill>
+            <a:srgbClr val="E2E8F0"/>
+          </a:solidFill>
+          <a:ln w="12700">
+            <a:solidFill>
+              <a:srgbClr val="E2E8F0"/>
+            </a:solidFill>
+            <a:prstDash val="solid"/>
+          </a:ln>
+        </p:spPr>
+      </p:sp>
+      <p:sp>
+        <p:nvSpPr>
+          <p:cNvPr id="31" name="Text 29"/>
+          <p:cNvSpPr/>
+          <p:nvPr/>
+        </p:nvSpPr>
+        <p:spPr>
+          <a:xfrm>
+            <a:off x="365760" y="4096512"/>
+            <a:ext cx="1371600" cy="804672"/>
           </a:xfrm>
           <a:prstGeom prst="rect">
             <a:avLst/>
@@ -15142,57 +14998,84 @@
               <a:buNone/>
             </a:pPr>
             <a:r>
-              <a:rPr lang="en-US" sz="1600" b="1" dirty="0">
-                <a:solidFill>
-                  <a:srgbClr val="0D9488"/>
+              <a:rPr lang="en-US" sz="1100" b="1" dirty="0">
+                <a:solidFill>
+                  <a:srgbClr val="475569"/>
                 </a:solidFill>
                 <a:latin typeface="Trebuchet MS" pitchFamily="34" charset="0"/>
                 <a:ea typeface="Trebuchet MS" pitchFamily="34" charset="-122"/>
                 <a:cs typeface="Trebuchet MS" pitchFamily="34" charset="-120"/>
               </a:rPr>
-              <a:t>·</a:t>
-            </a:r>
-            <a:endParaRPr lang="en-US" sz="1600" dirty="0"/>
-          </a:p>
-        </p:txBody>
-      </p:sp>
-      <p:sp>
-        <p:nvSpPr>
-          <p:cNvPr id="31" name="Shape 29"/>
-          <p:cNvSpPr/>
-          <p:nvPr/>
-        </p:nvSpPr>
-        <p:spPr>
-          <a:xfrm>
-            <a:off x="6428232" y="3364992"/>
-            <a:ext cx="1645920" cy="475488"/>
+              <a:t>Phonemes</a:t>
+            </a:r>
+            <a:endParaRPr lang="en-US" sz="1100" dirty="0"/>
+          </a:p>
+        </p:txBody>
+      </p:sp>
+      <p:sp>
+        <p:nvSpPr>
+          <p:cNvPr id="32" name="Shape 30"/>
+          <p:cNvSpPr/>
+          <p:nvPr/>
+        </p:nvSpPr>
+        <p:spPr>
+          <a:xfrm>
+            <a:off x="1874520" y="4096512"/>
+            <a:ext cx="6903720" cy="658368"/>
           </a:xfrm>
           <a:prstGeom prst="rect">
             <a:avLst>
-              <a:gd name="adj" fmla="val 9615"/>
+              <a:gd name="adj" fmla="val 8333"/>
             </a:avLst>
           </a:prstGeom>
           <a:solidFill>
+            <a:srgbClr val="FCE7F3"/>
+          </a:solidFill>
+          <a:ln w="12700">
+            <a:solidFill>
+              <a:srgbClr val="DB2777"/>
+            </a:solidFill>
+            <a:prstDash val="solid"/>
+          </a:ln>
+        </p:spPr>
+      </p:sp>
+      <p:sp>
+        <p:nvSpPr>
+          <p:cNvPr id="33" name="Shape 31"/>
+          <p:cNvSpPr/>
+          <p:nvPr/>
+        </p:nvSpPr>
+        <p:spPr>
+          <a:xfrm>
+            <a:off x="2254649" y="4169664"/>
+            <a:ext cx="685800" cy="475488"/>
+          </a:xfrm>
+          <a:prstGeom prst="rect">
+            <a:avLst>
+              <a:gd name="adj" fmla="val 7692"/>
+            </a:avLst>
+          </a:prstGeom>
+          <a:solidFill>
             <a:srgbClr val="FFFFFF"/>
           </a:solidFill>
           <a:ln w="12700">
             <a:solidFill>
-              <a:srgbClr val="0D9488"/>
-            </a:solidFill>
-            <a:prstDash val="solid"/>
-          </a:ln>
-        </p:spPr>
-      </p:sp>
-      <p:sp>
-        <p:nvSpPr>
-          <p:cNvPr id="32" name="Text 30"/>
-          <p:cNvSpPr/>
-          <p:nvPr/>
-        </p:nvSpPr>
-        <p:spPr>
-          <a:xfrm>
-            <a:off x="6428232" y="3364992"/>
-            <a:ext cx="1645920" cy="475488"/>
+              <a:srgbClr val="DB2777"/>
+            </a:solidFill>
+            <a:prstDash val="solid"/>
+          </a:ln>
+        </p:spPr>
+      </p:sp>
+      <p:sp>
+        <p:nvSpPr>
+          <p:cNvPr id="34" name="Text 32"/>
+          <p:cNvSpPr/>
+          <p:nvPr/>
+        </p:nvSpPr>
+        <p:spPr>
+          <a:xfrm>
+            <a:off x="2254649" y="4169664"/>
+            <a:ext cx="685800" cy="475488"/>
           </a:xfrm>
           <a:prstGeom prst="rect">
             <a:avLst/>
@@ -15208,57 +15091,57 @@
               <a:buNone/>
             </a:pPr>
             <a:r>
-              <a:rPr lang="en-US" sz="1400" b="1" dirty="0">
-                <a:solidFill>
-                  <a:srgbClr val="0D9488"/>
+              <a:rPr lang="en-US" sz="900" b="1" dirty="0">
+                <a:solidFill>
+                  <a:srgbClr val="9D174D"/>
                 </a:solidFill>
                 <a:latin typeface="Trebuchet MS" pitchFamily="34" charset="0"/>
                 <a:ea typeface="Trebuchet MS" pitchFamily="34" charset="-122"/>
                 <a:cs typeface="Trebuchet MS" pitchFamily="34" charset="-120"/>
               </a:rPr>
-              <a:t>sect</a:t>
-            </a:r>
-            <a:endParaRPr lang="en-US" sz="1400" dirty="0"/>
-          </a:p>
-        </p:txBody>
-      </p:sp>
-      <p:sp>
-        <p:nvSpPr>
-          <p:cNvPr id="33" name="Shape 31"/>
-          <p:cNvSpPr/>
-          <p:nvPr/>
-        </p:nvSpPr>
-        <p:spPr>
-          <a:xfrm>
-            <a:off x="365760" y="4096512"/>
-            <a:ext cx="1371600" cy="804672"/>
+              <a:t>d</a:t>
+            </a:r>
+            <a:endParaRPr lang="en-US" sz="900" dirty="0"/>
+          </a:p>
+        </p:txBody>
+      </p:sp>
+      <p:sp>
+        <p:nvSpPr>
+          <p:cNvPr id="35" name="Shape 33"/>
+          <p:cNvSpPr/>
+          <p:nvPr/>
+        </p:nvSpPr>
+        <p:spPr>
+          <a:xfrm>
+            <a:off x="3293146" y="4169664"/>
+            <a:ext cx="685800" cy="475488"/>
           </a:xfrm>
           <a:prstGeom prst="rect">
             <a:avLst>
-              <a:gd name="adj" fmla="val 6818"/>
+              <a:gd name="adj" fmla="val 7692"/>
             </a:avLst>
           </a:prstGeom>
           <a:solidFill>
-            <a:srgbClr val="E2E8F0"/>
-          </a:solidFill>
-          <a:ln w="12700">
-            <a:solidFill>
-              <a:srgbClr val="E2E8F0"/>
-            </a:solidFill>
-            <a:prstDash val="solid"/>
-          </a:ln>
-        </p:spPr>
-      </p:sp>
-      <p:sp>
-        <p:nvSpPr>
-          <p:cNvPr id="34" name="Text 32"/>
-          <p:cNvSpPr/>
-          <p:nvPr/>
-        </p:nvSpPr>
-        <p:spPr>
-          <a:xfrm>
-            <a:off x="365760" y="4096512"/>
-            <a:ext cx="1371600" cy="804672"/>
+            <a:srgbClr val="FFFFFF"/>
+          </a:solidFill>
+          <a:ln w="12700">
+            <a:solidFill>
+              <a:srgbClr val="DB2777"/>
+            </a:solidFill>
+            <a:prstDash val="solid"/>
+          </a:ln>
+        </p:spPr>
+      </p:sp>
+      <p:sp>
+        <p:nvSpPr>
+          <p:cNvPr id="36" name="Text 34"/>
+          <p:cNvSpPr/>
+          <p:nvPr/>
+        </p:nvSpPr>
+        <p:spPr>
+          <a:xfrm>
+            <a:off x="3293146" y="4169664"/>
+            <a:ext cx="685800" cy="475488"/>
           </a:xfrm>
           <a:prstGeom prst="rect">
             <a:avLst/>
@@ -15274,56 +15157,29 @@
               <a:buNone/>
             </a:pPr>
             <a:r>
-              <a:rPr lang="en-US" sz="1100" b="1" dirty="0">
-                <a:solidFill>
-                  <a:srgbClr val="475569"/>
+              <a:rPr lang="en-US" sz="900" b="1" dirty="0">
+                <a:solidFill>
+                  <a:srgbClr val="9D174D"/>
                 </a:solidFill>
                 <a:latin typeface="Trebuchet MS" pitchFamily="34" charset="0"/>
                 <a:ea typeface="Trebuchet MS" pitchFamily="34" charset="-122"/>
                 <a:cs typeface="Trebuchet MS" pitchFamily="34" charset="-120"/>
               </a:rPr>
-              <a:t>Phonemes</a:t>
-            </a:r>
-            <a:endParaRPr lang="en-US" sz="1100" dirty="0"/>
-          </a:p>
-        </p:txBody>
-      </p:sp>
-      <p:sp>
-        <p:nvSpPr>
-          <p:cNvPr id="35" name="Shape 33"/>
-          <p:cNvSpPr/>
-          <p:nvPr/>
-        </p:nvSpPr>
-        <p:spPr>
-          <a:xfrm>
-            <a:off x="1874520" y="4096512"/>
-            <a:ext cx="6903720" cy="658368"/>
-          </a:xfrm>
-          <a:prstGeom prst="rect">
-            <a:avLst>
-              <a:gd name="adj" fmla="val 8333"/>
-            </a:avLst>
-          </a:prstGeom>
-          <a:solidFill>
-            <a:srgbClr val="FCE7F3"/>
-          </a:solidFill>
-          <a:ln w="12700">
-            <a:solidFill>
-              <a:srgbClr val="DB2777"/>
-            </a:solidFill>
-            <a:prstDash val="solid"/>
-          </a:ln>
-        </p:spPr>
-      </p:sp>
-      <p:sp>
-        <p:nvSpPr>
-          <p:cNvPr id="36" name="Shape 34"/>
-          <p:cNvSpPr/>
-          <p:nvPr/>
-        </p:nvSpPr>
-        <p:spPr>
-          <a:xfrm>
-            <a:off x="2023872" y="4169664"/>
+              <a:t>i</a:t>
+            </a:r>
+            <a:endParaRPr lang="en-US" sz="900" dirty="0"/>
+          </a:p>
+        </p:txBody>
+      </p:sp>
+      <p:sp>
+        <p:nvSpPr>
+          <p:cNvPr id="37" name="Shape 35"/>
+          <p:cNvSpPr/>
+          <p:nvPr/>
+        </p:nvSpPr>
+        <p:spPr>
+          <a:xfrm>
+            <a:off x="4331643" y="4169664"/>
             <a:ext cx="685800" cy="475488"/>
           </a:xfrm>
           <a:prstGeom prst="rect">
@@ -15344,13 +15200,13 @@
       </p:sp>
       <p:sp>
         <p:nvSpPr>
-          <p:cNvPr id="37" name="Text 35"/>
-          <p:cNvSpPr/>
-          <p:nvPr/>
-        </p:nvSpPr>
-        <p:spPr>
-          <a:xfrm>
-            <a:off x="2023872" y="4169664"/>
+          <p:cNvPr id="38" name="Text 36"/>
+          <p:cNvSpPr/>
+          <p:nvPr/>
+        </p:nvSpPr>
+        <p:spPr>
+          <a:xfrm>
+            <a:off x="4331643" y="4169664"/>
             <a:ext cx="685800" cy="475488"/>
           </a:xfrm>
           <a:prstGeom prst="rect">
@@ -15375,7 +15231,7 @@
                 <a:ea typeface="Trebuchet MS" pitchFamily="34" charset="-122"/>
                 <a:cs typeface="Trebuchet MS" pitchFamily="34" charset="-120"/>
               </a:rPr>
-              <a:t>i</a:t>
+              <a:t>ss</a:t>
             </a:r>
             <a:endParaRPr lang="en-US" sz="900" dirty="0"/>
           </a:p>
@@ -15383,13 +15239,13 @@
       </p:sp>
       <p:sp>
         <p:nvSpPr>
-          <p:cNvPr id="38" name="Shape 36"/>
-          <p:cNvSpPr/>
-          <p:nvPr/>
-        </p:nvSpPr>
-        <p:spPr>
-          <a:xfrm>
-            <a:off x="2831592" y="4169664"/>
+          <p:cNvPr id="39" name="Shape 37"/>
+          <p:cNvSpPr/>
+          <p:nvPr/>
+        </p:nvSpPr>
+        <p:spPr>
+          <a:xfrm>
+            <a:off x="5370141" y="4169664"/>
             <a:ext cx="685800" cy="475488"/>
           </a:xfrm>
           <a:prstGeom prst="rect">
@@ -15410,13 +15266,13 @@
       </p:sp>
       <p:sp>
         <p:nvSpPr>
-          <p:cNvPr id="39" name="Text 37"/>
-          <p:cNvSpPr/>
-          <p:nvPr/>
-        </p:nvSpPr>
-        <p:spPr>
-          <a:xfrm>
-            <a:off x="2831592" y="4169664"/>
+          <p:cNvPr id="40" name="Text 38"/>
+          <p:cNvSpPr/>
+          <p:nvPr/>
+        </p:nvSpPr>
+        <p:spPr>
+          <a:xfrm>
+            <a:off x="5370141" y="4169664"/>
             <a:ext cx="685800" cy="475488"/>
           </a:xfrm>
           <a:prstGeom prst="rect">
@@ -15441,7 +15297,7 @@
                 <a:ea typeface="Trebuchet MS" pitchFamily="34" charset="-122"/>
                 <a:cs typeface="Trebuchet MS" pitchFamily="34" charset="-120"/>
               </a:rPr>
-              <a:t>n</a:t>
+              <a:t>e</a:t>
             </a:r>
             <a:endParaRPr lang="en-US" sz="900" dirty="0"/>
           </a:p>
@@ -15449,13 +15305,13 @@
       </p:sp>
       <p:sp>
         <p:nvSpPr>
-          <p:cNvPr id="40" name="Shape 38"/>
-          <p:cNvSpPr/>
-          <p:nvPr/>
-        </p:nvSpPr>
-        <p:spPr>
-          <a:xfrm>
-            <a:off x="3639312" y="4169664"/>
+          <p:cNvPr id="41" name="Shape 39"/>
+          <p:cNvSpPr/>
+          <p:nvPr/>
+        </p:nvSpPr>
+        <p:spPr>
+          <a:xfrm>
+            <a:off x="6408638" y="4169664"/>
             <a:ext cx="685800" cy="475488"/>
           </a:xfrm>
           <a:prstGeom prst="rect">
@@ -15476,13 +15332,13 @@
       </p:sp>
       <p:sp>
         <p:nvSpPr>
-          <p:cNvPr id="41" name="Text 39"/>
-          <p:cNvSpPr/>
-          <p:nvPr/>
-        </p:nvSpPr>
-        <p:spPr>
-          <a:xfrm>
-            <a:off x="3639312" y="4169664"/>
+          <p:cNvPr id="42" name="Text 40"/>
+          <p:cNvSpPr/>
+          <p:nvPr/>
+        </p:nvSpPr>
+        <p:spPr>
+          <a:xfrm>
+            <a:off x="6408638" y="4169664"/>
             <a:ext cx="685800" cy="475488"/>
           </a:xfrm>
           <a:prstGeom prst="rect">
@@ -15507,7 +15363,7 @@
                 <a:ea typeface="Trebuchet MS" pitchFamily="34" charset="-122"/>
                 <a:cs typeface="Trebuchet MS" pitchFamily="34" charset="-120"/>
               </a:rPr>
-              <a:t>t</a:t>
+              <a:t>c</a:t>
             </a:r>
             <a:endParaRPr lang="en-US" sz="900" dirty="0"/>
           </a:p>
@@ -15515,13 +15371,13 @@
       </p:sp>
       <p:sp>
         <p:nvSpPr>
-          <p:cNvPr id="42" name="Shape 40"/>
-          <p:cNvSpPr/>
-          <p:nvPr/>
-        </p:nvSpPr>
-        <p:spPr>
-          <a:xfrm>
-            <a:off x="4447032" y="4169664"/>
+          <p:cNvPr id="43" name="Shape 41"/>
+          <p:cNvSpPr/>
+          <p:nvPr/>
+        </p:nvSpPr>
+        <p:spPr>
+          <a:xfrm>
+            <a:off x="7447135" y="4169664"/>
             <a:ext cx="685800" cy="475488"/>
           </a:xfrm>
           <a:prstGeom prst="rect">
@@ -15542,277 +15398,13 @@
       </p:sp>
       <p:sp>
         <p:nvSpPr>
-          <p:cNvPr id="43" name="Text 41"/>
-          <p:cNvSpPr/>
-          <p:nvPr/>
-        </p:nvSpPr>
-        <p:spPr>
-          <a:xfrm>
-            <a:off x="4447032" y="4169664"/>
-            <a:ext cx="685800" cy="475488"/>
-          </a:xfrm>
-          <a:prstGeom prst="rect">
-            <a:avLst/>
-          </a:prstGeom>
-          <a:noFill/>
-          <a:ln/>
-        </p:spPr>
-        <p:txBody>
-          <a:bodyPr wrap="square" lIns="0" tIns="0" rIns="0" bIns="0" rtlCol="0" anchor="ctr"/>
-          <a:lstStyle/>
-          <a:p>
-            <a:pPr algn="ctr" indent="0" marL="0">
-              <a:buNone/>
-            </a:pPr>
-            <a:r>
-              <a:rPr lang="en-US" sz="900" b="1" dirty="0">
-                <a:solidFill>
-                  <a:srgbClr val="9D174D"/>
-                </a:solidFill>
-                <a:latin typeface="Trebuchet MS" pitchFamily="34" charset="0"/>
-                <a:ea typeface="Trebuchet MS" pitchFamily="34" charset="-122"/>
-                <a:cs typeface="Trebuchet MS" pitchFamily="34" charset="-120"/>
-              </a:rPr>
-              <a:t>er</a:t>
-            </a:r>
-            <a:endParaRPr lang="en-US" sz="900" dirty="0"/>
-          </a:p>
-        </p:txBody>
-      </p:sp>
-      <p:sp>
-        <p:nvSpPr>
-          <p:cNvPr id="44" name="Shape 42"/>
-          <p:cNvSpPr/>
-          <p:nvPr/>
-        </p:nvSpPr>
-        <p:spPr>
-          <a:xfrm>
-            <a:off x="5254752" y="4169664"/>
-            <a:ext cx="685800" cy="475488"/>
-          </a:xfrm>
-          <a:prstGeom prst="rect">
-            <a:avLst>
-              <a:gd name="adj" fmla="val 7692"/>
-            </a:avLst>
-          </a:prstGeom>
-          <a:solidFill>
-            <a:srgbClr val="FFFFFF"/>
-          </a:solidFill>
-          <a:ln w="12700">
-            <a:solidFill>
-              <a:srgbClr val="DB2777"/>
-            </a:solidFill>
-            <a:prstDash val="solid"/>
-          </a:ln>
-        </p:spPr>
-      </p:sp>
-      <p:sp>
-        <p:nvSpPr>
-          <p:cNvPr id="45" name="Text 43"/>
-          <p:cNvSpPr/>
-          <p:nvPr/>
-        </p:nvSpPr>
-        <p:spPr>
-          <a:xfrm>
-            <a:off x="5254752" y="4169664"/>
-            <a:ext cx="685800" cy="475488"/>
-          </a:xfrm>
-          <a:prstGeom prst="rect">
-            <a:avLst/>
-          </a:prstGeom>
-          <a:noFill/>
-          <a:ln/>
-        </p:spPr>
-        <p:txBody>
-          <a:bodyPr wrap="square" lIns="0" tIns="0" rIns="0" bIns="0" rtlCol="0" anchor="ctr"/>
-          <a:lstStyle/>
-          <a:p>
-            <a:pPr algn="ctr" indent="0" marL="0">
-              <a:buNone/>
-            </a:pPr>
-            <a:r>
-              <a:rPr lang="en-US" sz="900" b="1" dirty="0">
-                <a:solidFill>
-                  <a:srgbClr val="9D174D"/>
-                </a:solidFill>
-                <a:latin typeface="Trebuchet MS" pitchFamily="34" charset="0"/>
-                <a:ea typeface="Trebuchet MS" pitchFamily="34" charset="-122"/>
-                <a:cs typeface="Trebuchet MS" pitchFamily="34" charset="-120"/>
-              </a:rPr>
-              <a:t>s</a:t>
-            </a:r>
-            <a:endParaRPr lang="en-US" sz="900" dirty="0"/>
-          </a:p>
-        </p:txBody>
-      </p:sp>
-      <p:sp>
-        <p:nvSpPr>
-          <p:cNvPr id="46" name="Shape 44"/>
-          <p:cNvSpPr/>
-          <p:nvPr/>
-        </p:nvSpPr>
-        <p:spPr>
-          <a:xfrm>
-            <a:off x="6062472" y="4169664"/>
-            <a:ext cx="685800" cy="475488"/>
-          </a:xfrm>
-          <a:prstGeom prst="rect">
-            <a:avLst>
-              <a:gd name="adj" fmla="val 7692"/>
-            </a:avLst>
-          </a:prstGeom>
-          <a:solidFill>
-            <a:srgbClr val="FFFFFF"/>
-          </a:solidFill>
-          <a:ln w="12700">
-            <a:solidFill>
-              <a:srgbClr val="DB2777"/>
-            </a:solidFill>
-            <a:prstDash val="solid"/>
-          </a:ln>
-        </p:spPr>
-      </p:sp>
-      <p:sp>
-        <p:nvSpPr>
-          <p:cNvPr id="47" name="Text 45"/>
-          <p:cNvSpPr/>
-          <p:nvPr/>
-        </p:nvSpPr>
-        <p:spPr>
-          <a:xfrm>
-            <a:off x="6062472" y="4169664"/>
-            <a:ext cx="685800" cy="475488"/>
-          </a:xfrm>
-          <a:prstGeom prst="rect">
-            <a:avLst/>
-          </a:prstGeom>
-          <a:noFill/>
-          <a:ln/>
-        </p:spPr>
-        <p:txBody>
-          <a:bodyPr wrap="square" lIns="0" tIns="0" rIns="0" bIns="0" rtlCol="0" anchor="ctr"/>
-          <a:lstStyle/>
-          <a:p>
-            <a:pPr algn="ctr" indent="0" marL="0">
-              <a:buNone/>
-            </a:pPr>
-            <a:r>
-              <a:rPr lang="en-US" sz="900" b="1" dirty="0">
-                <a:solidFill>
-                  <a:srgbClr val="9D174D"/>
-                </a:solidFill>
-                <a:latin typeface="Trebuchet MS" pitchFamily="34" charset="0"/>
-                <a:ea typeface="Trebuchet MS" pitchFamily="34" charset="-122"/>
-                <a:cs typeface="Trebuchet MS" pitchFamily="34" charset="-120"/>
-              </a:rPr>
-              <a:t>e</a:t>
-            </a:r>
-            <a:endParaRPr lang="en-US" sz="900" dirty="0"/>
-          </a:p>
-        </p:txBody>
-      </p:sp>
-      <p:sp>
-        <p:nvSpPr>
-          <p:cNvPr id="48" name="Shape 46"/>
-          <p:cNvSpPr/>
-          <p:nvPr/>
-        </p:nvSpPr>
-        <p:spPr>
-          <a:xfrm>
-            <a:off x="6870192" y="4169664"/>
-            <a:ext cx="685800" cy="475488"/>
-          </a:xfrm>
-          <a:prstGeom prst="rect">
-            <a:avLst>
-              <a:gd name="adj" fmla="val 7692"/>
-            </a:avLst>
-          </a:prstGeom>
-          <a:solidFill>
-            <a:srgbClr val="FFFFFF"/>
-          </a:solidFill>
-          <a:ln w="12700">
-            <a:solidFill>
-              <a:srgbClr val="DB2777"/>
-            </a:solidFill>
-            <a:prstDash val="solid"/>
-          </a:ln>
-        </p:spPr>
-      </p:sp>
-      <p:sp>
-        <p:nvSpPr>
-          <p:cNvPr id="49" name="Text 47"/>
-          <p:cNvSpPr/>
-          <p:nvPr/>
-        </p:nvSpPr>
-        <p:spPr>
-          <a:xfrm>
-            <a:off x="6870192" y="4169664"/>
-            <a:ext cx="685800" cy="475488"/>
-          </a:xfrm>
-          <a:prstGeom prst="rect">
-            <a:avLst/>
-          </a:prstGeom>
-          <a:noFill/>
-          <a:ln/>
-        </p:spPr>
-        <p:txBody>
-          <a:bodyPr wrap="square" lIns="0" tIns="0" rIns="0" bIns="0" rtlCol="0" anchor="ctr"/>
-          <a:lstStyle/>
-          <a:p>
-            <a:pPr algn="ctr" indent="0" marL="0">
-              <a:buNone/>
-            </a:pPr>
-            <a:r>
-              <a:rPr lang="en-US" sz="900" b="1" dirty="0">
-                <a:solidFill>
-                  <a:srgbClr val="9D174D"/>
-                </a:solidFill>
-                <a:latin typeface="Trebuchet MS" pitchFamily="34" charset="0"/>
-                <a:ea typeface="Trebuchet MS" pitchFamily="34" charset="-122"/>
-                <a:cs typeface="Trebuchet MS" pitchFamily="34" charset="-120"/>
-              </a:rPr>
-              <a:t>c</a:t>
-            </a:r>
-            <a:endParaRPr lang="en-US" sz="900" dirty="0"/>
-          </a:p>
-        </p:txBody>
-      </p:sp>
-      <p:sp>
-        <p:nvSpPr>
-          <p:cNvPr id="50" name="Shape 48"/>
-          <p:cNvSpPr/>
-          <p:nvPr/>
-        </p:nvSpPr>
-        <p:spPr>
-          <a:xfrm>
-            <a:off x="7677912" y="4169664"/>
-            <a:ext cx="685800" cy="475488"/>
-          </a:xfrm>
-          <a:prstGeom prst="rect">
-            <a:avLst>
-              <a:gd name="adj" fmla="val 7692"/>
-            </a:avLst>
-          </a:prstGeom>
-          <a:solidFill>
-            <a:srgbClr val="FFFFFF"/>
-          </a:solidFill>
-          <a:ln w="12700">
-            <a:solidFill>
-              <a:srgbClr val="DB2777"/>
-            </a:solidFill>
-            <a:prstDash val="solid"/>
-          </a:ln>
-        </p:spPr>
-      </p:sp>
-      <p:sp>
-        <p:nvSpPr>
-          <p:cNvPr id="51" name="Text 49"/>
-          <p:cNvSpPr/>
-          <p:nvPr/>
-        </p:nvSpPr>
-        <p:spPr>
-          <a:xfrm>
-            <a:off x="7677912" y="4169664"/>
+          <p:cNvPr id="44" name="Text 42"/>
+          <p:cNvSpPr/>
+          <p:nvPr/>
+        </p:nvSpPr>
+        <p:spPr>
+          <a:xfrm>
+            <a:off x="7447135" y="4169664"/>
             <a:ext cx="685800" cy="475488"/>
           </a:xfrm>
           <a:prstGeom prst="rect">
@@ -16411,7 +16003,7 @@
                 <a:ea typeface="Calibri" pitchFamily="34" charset="-122"/>
                 <a:cs typeface="Calibri" pitchFamily="34" charset="-120"/>
               </a:rPr>
-              <a:t>Word Labs  •  wordlabs.app  •  Root: 'sect' = cut, divide, section</a:t>
+              <a:t>Word Labs  •  wordlabs.app  •  Root: 'sect' = cut</a:t>
             </a:r>
             <a:endParaRPr lang="en-US" sz="800" dirty="0"/>
           </a:p>
@@ -16745,7 +16337,7 @@
                 <a:ea typeface="Trebuchet MS" pitchFamily="34" charset="-122"/>
                 <a:cs typeface="Trebuchet MS" pitchFamily="34" charset="-120"/>
               </a:rPr>
-              <a:t>2</a:t>
+              <a:t>0</a:t>
             </a:r>
             <a:pPr algn="ctr" indent="0" marL="0">
               <a:buNone/>
@@ -16759,7 +16351,7 @@
                 <a:ea typeface="Trebuchet MS" pitchFamily="34" charset="-122"/>
                 <a:cs typeface="Trebuchet MS" pitchFamily="34" charset="-120"/>
               </a:rPr>
-              <a:t>  punctuation marks</a:t>
+              <a:t>  punctuation mark</a:t>
             </a:r>
             <a:endParaRPr lang="en-US" sz="2800" dirty="0"/>
           </a:p>
@@ -17051,7 +16643,7 @@
                 <a:ea typeface="Calibri" pitchFamily="34" charset="-122"/>
                 <a:cs typeface="Calibri" pitchFamily="34" charset="-120"/>
               </a:rPr>
-              <a:t>Word Labs  •  wordlabs.app  •  Root: 'sect' = cut, divide, section</a:t>
+              <a:t>Word Labs  •  wordlabs.app  •  Root: 'sect' = cut</a:t>
             </a:r>
             <a:endParaRPr lang="en-US" sz="800" dirty="0"/>
           </a:p>
@@ -17163,7 +16755,7 @@
                 <a:ea typeface="Calibri" pitchFamily="34" charset="-122"/>
                 <a:cs typeface="Calibri" pitchFamily="34" charset="-120"/>
               </a:rPr>
-              <a:t>During </a:t>
+              <a:t>Bees and ants are both </a:t>
             </a:r>
             <a:pPr algn="l" indent="0" marL="0">
               <a:buNone/>
@@ -17180,7 +16772,7 @@
                 <a:ea typeface="Calibri" pitchFamily="34" charset="-122"/>
                 <a:cs typeface="Calibri" pitchFamily="34" charset="-120"/>
               </a:rPr>
-              <a:t>dissection</a:t>
+              <a:t>insects</a:t>
             </a:r>
             <a:pPr algn="l" indent="0" marL="0">
               <a:buNone/>
@@ -17194,7 +16786,7 @@
                 <a:ea typeface="Calibri" pitchFamily="34" charset="-122"/>
                 <a:cs typeface="Calibri" pitchFamily="34" charset="-120"/>
               </a:rPr>
-              <a:t>, the scientist recorded each </a:t>
+              <a:t>. Different </a:t>
             </a:r>
             <a:pPr algn="l" indent="0" marL="0">
               <a:buNone/>
@@ -17211,7 +16803,7 @@
                 <a:ea typeface="Calibri" pitchFamily="34" charset="-122"/>
                 <a:cs typeface="Calibri" pitchFamily="34" charset="-120"/>
               </a:rPr>
-              <a:t>section</a:t>
+              <a:t>sectors</a:t>
             </a:r>
             <a:pPr algn="l" indent="0" marL="0">
               <a:buNone/>
@@ -17225,7 +16817,7 @@
                 <a:ea typeface="Calibri" pitchFamily="34" charset="-122"/>
                 <a:cs typeface="Calibri" pitchFamily="34" charset="-120"/>
               </a:rPr>
-              <a:t> carefully, then studied the </a:t>
+              <a:t> of the economy grew at different rates. The line </a:t>
             </a:r>
             <a:pPr algn="l" indent="0" marL="0">
               <a:buNone/>
@@ -17242,7 +16834,7 @@
                 <a:ea typeface="Calibri" pitchFamily="34" charset="-122"/>
                 <a:cs typeface="Calibri" pitchFamily="34" charset="-120"/>
               </a:rPr>
-              <a:t>insect</a:t>
+              <a:t>bisect</a:t>
             </a:r>
             <a:pPr algn="l" indent="0" marL="0">
               <a:buNone/>
@@ -17256,7 +16848,7 @@
                 <a:ea typeface="Calibri" pitchFamily="34" charset="-122"/>
                 <a:cs typeface="Calibri" pitchFamily="34" charset="-120"/>
               </a:rPr>
-              <a:t>'s body parts.</a:t>
+              <a:t>s the circle into two equal halves.</a:t>
             </a:r>
             <a:endParaRPr lang="en-US" sz="1800" dirty="0"/>
           </a:p>
@@ -17411,7 +17003,7 @@
                 <a:ea typeface="Trebuchet MS" pitchFamily="34" charset="-122"/>
                 <a:cs typeface="Trebuchet MS" pitchFamily="34" charset="-120"/>
               </a:rPr>
-              <a:t>dissection</a:t>
+              <a:t>insects</a:t>
             </a:r>
             <a:endParaRPr lang="en-US" sz="1400" dirty="0"/>
           </a:p>
@@ -17539,7 +17131,7 @@
                 <a:ea typeface="Trebuchet MS" pitchFamily="34" charset="-122"/>
                 <a:cs typeface="Trebuchet MS" pitchFamily="34" charset="-120"/>
               </a:rPr>
-              <a:t>section</a:t>
+              <a:t>sectors</a:t>
             </a:r>
             <a:endParaRPr lang="en-US" sz="1400" dirty="0"/>
           </a:p>
@@ -17667,7 +17259,7 @@
                 <a:ea typeface="Trebuchet MS" pitchFamily="34" charset="-122"/>
                 <a:cs typeface="Trebuchet MS" pitchFamily="34" charset="-120"/>
               </a:rPr>
-              <a:t>insect</a:t>
+              <a:t>bisect</a:t>
             </a:r>
             <a:endParaRPr lang="en-US" sz="1400" dirty="0"/>
           </a:p>
@@ -17998,7 +17590,7 @@
                 <a:ea typeface="Calibri" pitchFamily="34" charset="-122"/>
                 <a:cs typeface="Calibri" pitchFamily="34" charset="-120"/>
               </a:rPr>
-              <a:t>Word Labs  •  wordlabs.app  •  Root: 'sect' = cut, divide, section</a:t>
+              <a:t>Word Labs  •  wordlabs.app  •  Root: 'sect' = cut</a:t>
             </a:r>
             <a:endParaRPr lang="en-US" sz="800" dirty="0"/>
           </a:p>
@@ -18137,7 +17729,7 @@
                 <a:ea typeface="Trebuchet MS" pitchFamily="34" charset="-122"/>
                 <a:cs typeface="Trebuchet MS" pitchFamily="34" charset="-120"/>
               </a:rPr>
-              <a:t>dissection</a:t>
+              <a:t>insects</a:t>
             </a:r>
             <a:endParaRPr lang="en-US" sz="2800" dirty="0"/>
           </a:p>
@@ -18825,7 +18417,7 @@
                 <a:ea typeface="Calibri" pitchFamily="34" charset="-122"/>
                 <a:cs typeface="Calibri" pitchFamily="34" charset="-120"/>
               </a:rPr>
-              <a:t>Word Labs  •  wordlabs.app  •  Root: 'sect' = cut, divide, section</a:t>
+              <a:t>Word Labs  •  wordlabs.app  •  Root: 'sect' = cut</a:t>
             </a:r>
             <a:endParaRPr lang="en-US" sz="800" dirty="0"/>
           </a:p>
@@ -18964,7 +18556,7 @@
                 <a:ea typeface="Trebuchet MS" pitchFamily="34" charset="-122"/>
                 <a:cs typeface="Trebuchet MS" pitchFamily="34" charset="-120"/>
               </a:rPr>
-              <a:t>dissection</a:t>
+              <a:t>insects</a:t>
             </a:r>
             <a:endParaRPr lang="en-US" sz="2800" dirty="0"/>
           </a:p>
@@ -19103,7 +18695,7 @@
                 <a:ea typeface="Trebuchet MS" pitchFamily="34" charset="-122"/>
                 <a:cs typeface="Trebuchet MS" pitchFamily="34" charset="-120"/>
               </a:rPr>
-              <a:t>di</a:t>
+              <a:t>in</a:t>
             </a:r>
             <a:endParaRPr lang="en-US" sz="1300" dirty="0"/>
           </a:p>
@@ -19142,7 +18734,7 @@
                 <a:ea typeface="Calibri" pitchFamily="34" charset="-122"/>
                 <a:cs typeface="Calibri" pitchFamily="34" charset="-120"/>
               </a:rPr>
-              <a:t>apart, away</a:t>
+              <a:t>not; into</a:t>
             </a:r>
             <a:endParaRPr lang="en-US" sz="850" dirty="0"/>
           </a:p>
@@ -19254,7 +18846,7 @@
                 <a:ea typeface="Calibri" pitchFamily="34" charset="-122"/>
                 <a:cs typeface="Calibri" pitchFamily="34" charset="-120"/>
               </a:rPr>
-              <a:t>cut, divide</a:t>
+              <a:t>cut</a:t>
             </a:r>
             <a:endParaRPr lang="en-US" sz="850" dirty="0"/>
           </a:p>
@@ -19327,7 +18919,7 @@
                 <a:ea typeface="Trebuchet MS" pitchFamily="34" charset="-122"/>
                 <a:cs typeface="Trebuchet MS" pitchFamily="34" charset="-120"/>
               </a:rPr>
-              <a:t>ion</a:t>
+              <a:t>s</a:t>
             </a:r>
             <a:endParaRPr lang="en-US" sz="1300" dirty="0"/>
           </a:p>
@@ -19366,7 +18958,7 @@
                 <a:ea typeface="Calibri" pitchFamily="34" charset="-122"/>
                 <a:cs typeface="Calibri" pitchFamily="34" charset="-120"/>
               </a:rPr>
-              <a:t>act or process of</a:t>
+              <a:t>plural or present tense</a:t>
             </a:r>
             <a:endParaRPr lang="en-US" sz="850" dirty="0"/>
           </a:p>
@@ -19922,7 +19514,7 @@
                 <a:ea typeface="Calibri" pitchFamily="34" charset="-122"/>
                 <a:cs typeface="Calibri" pitchFamily="34" charset="-120"/>
               </a:rPr>
-              <a:t>Word Labs  •  wordlabs.app  •  Root: 'sect' = cut, divide, section</a:t>
+              <a:t>Word Labs  •  wordlabs.app  •  Root: 'sect' = cut</a:t>
             </a:r>
             <a:endParaRPr lang="en-US" sz="800" dirty="0"/>
           </a:p>
@@ -20061,7 +19653,7 @@
                 <a:ea typeface="Trebuchet MS" pitchFamily="34" charset="-122"/>
                 <a:cs typeface="Trebuchet MS" pitchFamily="34" charset="-120"/>
               </a:rPr>
-              <a:t>dissection</a:t>
+              <a:t>insects</a:t>
             </a:r>
             <a:endParaRPr lang="en-US" sz="2800" dirty="0"/>
           </a:p>
@@ -20200,7 +19792,7 @@
                 <a:ea typeface="Trebuchet MS" pitchFamily="34" charset="-122"/>
                 <a:cs typeface="Trebuchet MS" pitchFamily="34" charset="-120"/>
               </a:rPr>
-              <a:t>di</a:t>
+              <a:t>in</a:t>
             </a:r>
             <a:endParaRPr lang="en-US" sz="1300" dirty="0"/>
           </a:p>
@@ -20239,7 +19831,7 @@
                 <a:ea typeface="Calibri" pitchFamily="34" charset="-122"/>
                 <a:cs typeface="Calibri" pitchFamily="34" charset="-120"/>
               </a:rPr>
-              <a:t>apart, away</a:t>
+              <a:t>not; into</a:t>
             </a:r>
             <a:endParaRPr lang="en-US" sz="850" dirty="0"/>
           </a:p>
@@ -20351,7 +19943,7 @@
                 <a:ea typeface="Calibri" pitchFamily="34" charset="-122"/>
                 <a:cs typeface="Calibri" pitchFamily="34" charset="-120"/>
               </a:rPr>
-              <a:t>cut, divide</a:t>
+              <a:t>cut</a:t>
             </a:r>
             <a:endParaRPr lang="en-US" sz="850" dirty="0"/>
           </a:p>
@@ -20424,7 +20016,7 @@
                 <a:ea typeface="Trebuchet MS" pitchFamily="34" charset="-122"/>
                 <a:cs typeface="Trebuchet MS" pitchFamily="34" charset="-120"/>
               </a:rPr>
-              <a:t>ion</a:t>
+              <a:t>s</a:t>
             </a:r>
             <a:endParaRPr lang="en-US" sz="1300" dirty="0"/>
           </a:p>
@@ -20463,7 +20055,7 @@
                 <a:ea typeface="Calibri" pitchFamily="34" charset="-122"/>
                 <a:cs typeface="Calibri" pitchFamily="34" charset="-120"/>
               </a:rPr>
-              <a:t>act or process of</a:t>
+              <a:t>plural or present tense</a:t>
             </a:r>
             <a:endParaRPr lang="en-US" sz="850" dirty="0"/>
           </a:p>
@@ -20570,7 +20162,7 @@
         </p:nvSpPr>
         <p:spPr>
           <a:xfrm>
-            <a:off x="2313432" y="3364992"/>
+            <a:off x="2999232" y="3364992"/>
             <a:ext cx="1645920" cy="475488"/>
           </a:xfrm>
           <a:prstGeom prst="rect">
@@ -20597,7 +20189,7 @@
         </p:nvSpPr>
         <p:spPr>
           <a:xfrm>
-            <a:off x="2313432" y="3364992"/>
+            <a:off x="2999232" y="3364992"/>
             <a:ext cx="1645920" cy="475488"/>
           </a:xfrm>
           <a:prstGeom prst="rect">
@@ -20622,7 +20214,7 @@
                 <a:ea typeface="Trebuchet MS" pitchFamily="34" charset="-122"/>
                 <a:cs typeface="Trebuchet MS" pitchFamily="34" charset="-120"/>
               </a:rPr>
-              <a:t>dis</a:t>
+              <a:t>in</a:t>
             </a:r>
             <a:endParaRPr lang="en-US" sz="1400" dirty="0"/>
           </a:p>
@@ -20636,8 +20228,8 @@
         </p:nvSpPr>
         <p:spPr>
           <a:xfrm>
-            <a:off x="3959352" y="3364992"/>
-            <a:ext cx="411480" cy="475488"/>
+            <a:off x="4645152" y="3364992"/>
+            <a:ext cx="1097280" cy="475488"/>
           </a:xfrm>
           <a:prstGeom prst="rect">
             <a:avLst/>
@@ -20675,7 +20267,7 @@
         </p:nvSpPr>
         <p:spPr>
           <a:xfrm>
-            <a:off x="4370832" y="3364992"/>
+            <a:off x="5742432" y="3364992"/>
             <a:ext cx="1645920" cy="475488"/>
           </a:xfrm>
           <a:prstGeom prst="rect">
@@ -20702,7 +20294,7 @@
         </p:nvSpPr>
         <p:spPr>
           <a:xfrm>
-            <a:off x="4370832" y="3364992"/>
+            <a:off x="5742432" y="3364992"/>
             <a:ext cx="1645920" cy="475488"/>
           </a:xfrm>
           <a:prstGeom prst="rect">
@@ -20727,7 +20319,7 @@
                 <a:ea typeface="Trebuchet MS" pitchFamily="34" charset="-122"/>
                 <a:cs typeface="Trebuchet MS" pitchFamily="34" charset="-120"/>
               </a:rPr>
-              <a:t>sec</a:t>
+              <a:t>sects</a:t>
             </a:r>
             <a:endParaRPr lang="en-US" sz="1400" dirty="0"/>
           </a:p>
@@ -20735,14 +20327,41 @@
       </p:sp>
       <p:sp>
         <p:nvSpPr>
-          <p:cNvPr id="33" name="Text 31"/>
-          <p:cNvSpPr/>
-          <p:nvPr/>
-        </p:nvSpPr>
-        <p:spPr>
-          <a:xfrm>
-            <a:off x="6016752" y="3364992"/>
-            <a:ext cx="411480" cy="475488"/>
+          <p:cNvPr id="33" name="Shape 31"/>
+          <p:cNvSpPr/>
+          <p:nvPr/>
+        </p:nvSpPr>
+        <p:spPr>
+          <a:xfrm>
+            <a:off x="365760" y="4096512"/>
+            <a:ext cx="1371600" cy="804672"/>
+          </a:xfrm>
+          <a:prstGeom prst="rect">
+            <a:avLst>
+              <a:gd name="adj" fmla="val 6818"/>
+            </a:avLst>
+          </a:prstGeom>
+          <a:solidFill>
+            <a:srgbClr val="E2E8F0"/>
+          </a:solidFill>
+          <a:ln w="12700">
+            <a:solidFill>
+              <a:srgbClr val="E2E8F0"/>
+            </a:solidFill>
+            <a:prstDash val="solid"/>
+          </a:ln>
+        </p:spPr>
+      </p:sp>
+      <p:sp>
+        <p:nvSpPr>
+          <p:cNvPr id="34" name="Text 32"/>
+          <p:cNvSpPr/>
+          <p:nvPr/>
+        </p:nvSpPr>
+        <p:spPr>
+          <a:xfrm>
+            <a:off x="365760" y="4096512"/>
+            <a:ext cx="1371600" cy="804672"/>
           </a:xfrm>
           <a:prstGeom prst="rect">
             <a:avLst/>
@@ -20758,96 +20377,30 @@
               <a:buNone/>
             </a:pPr>
             <a:r>
-              <a:rPr lang="en-US" sz="1600" b="1" dirty="0">
-                <a:solidFill>
-                  <a:srgbClr val="0D9488"/>
+              <a:rPr lang="en-US" sz="1100" b="1" dirty="0">
+                <a:solidFill>
+                  <a:srgbClr val="475569"/>
                 </a:solidFill>
                 <a:latin typeface="Trebuchet MS" pitchFamily="34" charset="0"/>
                 <a:ea typeface="Trebuchet MS" pitchFamily="34" charset="-122"/>
                 <a:cs typeface="Trebuchet MS" pitchFamily="34" charset="-120"/>
               </a:rPr>
-              <a:t>·</a:t>
-            </a:r>
-            <a:endParaRPr lang="en-US" sz="1600" dirty="0"/>
-          </a:p>
-        </p:txBody>
-      </p:sp>
-      <p:sp>
-        <p:nvSpPr>
-          <p:cNvPr id="34" name="Shape 32"/>
-          <p:cNvSpPr/>
-          <p:nvPr/>
-        </p:nvSpPr>
-        <p:spPr>
-          <a:xfrm>
-            <a:off x="6428232" y="3364992"/>
-            <a:ext cx="1645920" cy="475488"/>
-          </a:xfrm>
-          <a:prstGeom prst="rect">
-            <a:avLst>
-              <a:gd name="adj" fmla="val 9615"/>
-            </a:avLst>
-          </a:prstGeom>
-          <a:solidFill>
-            <a:srgbClr val="FFFFFF"/>
-          </a:solidFill>
-          <a:ln w="12700">
-            <a:solidFill>
-              <a:srgbClr val="0D9488"/>
-            </a:solidFill>
-            <a:prstDash val="solid"/>
-          </a:ln>
-        </p:spPr>
-      </p:sp>
-      <p:sp>
-        <p:nvSpPr>
-          <p:cNvPr id="35" name="Text 33"/>
-          <p:cNvSpPr/>
-          <p:nvPr/>
-        </p:nvSpPr>
-        <p:spPr>
-          <a:xfrm>
-            <a:off x="6428232" y="3364992"/>
-            <a:ext cx="1645920" cy="475488"/>
-          </a:xfrm>
-          <a:prstGeom prst="rect">
-            <a:avLst/>
-          </a:prstGeom>
-          <a:noFill/>
-          <a:ln/>
-        </p:spPr>
-        <p:txBody>
-          <a:bodyPr wrap="square" lIns="0" tIns="0" rIns="0" bIns="0" rtlCol="0" anchor="ctr"/>
-          <a:lstStyle/>
-          <a:p>
-            <a:pPr algn="ctr" indent="0" marL="0">
-              <a:buNone/>
-            </a:pPr>
-            <a:r>
-              <a:rPr lang="en-US" sz="1400" b="1" dirty="0">
-                <a:solidFill>
-                  <a:srgbClr val="0D9488"/>
-                </a:solidFill>
-                <a:latin typeface="Trebuchet MS" pitchFamily="34" charset="0"/>
-                <a:ea typeface="Trebuchet MS" pitchFamily="34" charset="-122"/>
-                <a:cs typeface="Trebuchet MS" pitchFamily="34" charset="-120"/>
-              </a:rPr>
-              <a:t>tion</a:t>
-            </a:r>
-            <a:endParaRPr lang="en-US" sz="1400" dirty="0"/>
-          </a:p>
-        </p:txBody>
-      </p:sp>
-      <p:sp>
-        <p:nvSpPr>
-          <p:cNvPr id="36" name="Shape 34"/>
-          <p:cNvSpPr/>
-          <p:nvPr/>
-        </p:nvSpPr>
-        <p:spPr>
-          <a:xfrm>
-            <a:off x="365760" y="4096512"/>
-            <a:ext cx="1371600" cy="804672"/>
+              <a:t>Phonemes</a:t>
+            </a:r>
+            <a:endParaRPr lang="en-US" sz="1100" dirty="0"/>
+          </a:p>
+        </p:txBody>
+      </p:sp>
+      <p:sp>
+        <p:nvSpPr>
+          <p:cNvPr id="35" name="Shape 33"/>
+          <p:cNvSpPr/>
+          <p:nvPr/>
+        </p:nvSpPr>
+        <p:spPr>
+          <a:xfrm>
+            <a:off x="1874520" y="4096512"/>
+            <a:ext cx="6903720" cy="804672"/>
           </a:xfrm>
           <a:prstGeom prst="rect">
             <a:avLst>
@@ -20855,85 +20408,19 @@
             </a:avLst>
           </a:prstGeom>
           <a:solidFill>
-            <a:srgbClr val="E2E8F0"/>
+            <a:srgbClr val="F8FAFC"/>
           </a:solidFill>
           <a:ln w="12700">
             <a:solidFill>
               <a:srgbClr val="E2E8F0"/>
             </a:solidFill>
-            <a:prstDash val="solid"/>
-          </a:ln>
-        </p:spPr>
-      </p:sp>
-      <p:sp>
-        <p:nvSpPr>
-          <p:cNvPr id="37" name="Text 35"/>
-          <p:cNvSpPr/>
-          <p:nvPr/>
-        </p:nvSpPr>
-        <p:spPr>
-          <a:xfrm>
-            <a:off x="365760" y="4096512"/>
-            <a:ext cx="1371600" cy="804672"/>
-          </a:xfrm>
-          <a:prstGeom prst="rect">
-            <a:avLst/>
-          </a:prstGeom>
-          <a:noFill/>
-          <a:ln/>
-        </p:spPr>
-        <p:txBody>
-          <a:bodyPr wrap="square" lIns="0" tIns="0" rIns="0" bIns="0" rtlCol="0" anchor="ctr"/>
-          <a:lstStyle/>
-          <a:p>
-            <a:pPr algn="ctr" indent="0" marL="0">
-              <a:buNone/>
-            </a:pPr>
-            <a:r>
-              <a:rPr lang="en-US" sz="1100" b="1" dirty="0">
-                <a:solidFill>
-                  <a:srgbClr val="475569"/>
-                </a:solidFill>
-                <a:latin typeface="Trebuchet MS" pitchFamily="34" charset="0"/>
-                <a:ea typeface="Trebuchet MS" pitchFamily="34" charset="-122"/>
-                <a:cs typeface="Trebuchet MS" pitchFamily="34" charset="-120"/>
-              </a:rPr>
-              <a:t>Phonemes</a:t>
-            </a:r>
-            <a:endParaRPr lang="en-US" sz="1100" dirty="0"/>
-          </a:p>
-        </p:txBody>
-      </p:sp>
-      <p:sp>
-        <p:nvSpPr>
-          <p:cNvPr id="38" name="Shape 36"/>
-          <p:cNvSpPr/>
-          <p:nvPr/>
-        </p:nvSpPr>
-        <p:spPr>
-          <a:xfrm>
-            <a:off x="1874520" y="4096512"/>
-            <a:ext cx="6903720" cy="804672"/>
-          </a:xfrm>
-          <a:prstGeom prst="rect">
-            <a:avLst>
-              <a:gd name="adj" fmla="val 6818"/>
-            </a:avLst>
-          </a:prstGeom>
-          <a:solidFill>
-            <a:srgbClr val="F8FAFC"/>
-          </a:solidFill>
-          <a:ln w="12700">
-            <a:solidFill>
-              <a:srgbClr val="E2E8F0"/>
-            </a:solidFill>
             <a:prstDash val="dash"/>
           </a:ln>
         </p:spPr>
       </p:sp>
       <p:sp>
         <p:nvSpPr>
-          <p:cNvPr id="39" name="Text 37"/>
+          <p:cNvPr id="36" name="Text 34"/>
           <p:cNvSpPr/>
           <p:nvPr/>
         </p:nvSpPr>
@@ -21256,7 +20743,7 @@
                 <a:ea typeface="Calibri" pitchFamily="34" charset="-122"/>
                 <a:cs typeface="Calibri" pitchFamily="34" charset="-120"/>
               </a:rPr>
-              <a:t>Word Labs  •  wordlabs.app  •  Root: 'sect' = cut, divide, section</a:t>
+              <a:t>Word Labs  •  wordlabs.app  •  Root: 'sect' = cut</a:t>
             </a:r>
             <a:endParaRPr lang="en-US" sz="800" dirty="0"/>
           </a:p>
@@ -21395,7 +20882,7 @@
                 <a:ea typeface="Trebuchet MS" pitchFamily="34" charset="-122"/>
                 <a:cs typeface="Trebuchet MS" pitchFamily="34" charset="-120"/>
               </a:rPr>
-              <a:t>dissection</a:t>
+              <a:t>insects</a:t>
             </a:r>
             <a:endParaRPr lang="en-US" sz="2800" dirty="0"/>
           </a:p>
@@ -21534,7 +21021,7 @@
                 <a:ea typeface="Trebuchet MS" pitchFamily="34" charset="-122"/>
                 <a:cs typeface="Trebuchet MS" pitchFamily="34" charset="-120"/>
               </a:rPr>
-              <a:t>di</a:t>
+              <a:t>in</a:t>
             </a:r>
             <a:endParaRPr lang="en-US" sz="1300" dirty="0"/>
           </a:p>
@@ -21573,7 +21060,7 @@
                 <a:ea typeface="Calibri" pitchFamily="34" charset="-122"/>
                 <a:cs typeface="Calibri" pitchFamily="34" charset="-120"/>
               </a:rPr>
-              <a:t>apart, away</a:t>
+              <a:t>not; into</a:t>
             </a:r>
             <a:endParaRPr lang="en-US" sz="850" dirty="0"/>
           </a:p>
@@ -21685,7 +21172,7 @@
                 <a:ea typeface="Calibri" pitchFamily="34" charset="-122"/>
                 <a:cs typeface="Calibri" pitchFamily="34" charset="-120"/>
               </a:rPr>
-              <a:t>cut, divide</a:t>
+              <a:t>cut</a:t>
             </a:r>
             <a:endParaRPr lang="en-US" sz="850" dirty="0"/>
           </a:p>
@@ -21758,7 +21245,7 @@
                 <a:ea typeface="Trebuchet MS" pitchFamily="34" charset="-122"/>
                 <a:cs typeface="Trebuchet MS" pitchFamily="34" charset="-120"/>
               </a:rPr>
-              <a:t>ion</a:t>
+              <a:t>s</a:t>
             </a:r>
             <a:endParaRPr lang="en-US" sz="1300" dirty="0"/>
           </a:p>
@@ -21797,7 +21284,7 @@
                 <a:ea typeface="Calibri" pitchFamily="34" charset="-122"/>
                 <a:cs typeface="Calibri" pitchFamily="34" charset="-120"/>
               </a:rPr>
-              <a:t>act or process of</a:t>
+              <a:t>plural or present tense</a:t>
             </a:r>
             <a:endParaRPr lang="en-US" sz="850" dirty="0"/>
           </a:p>
@@ -21904,7 +21391,7 @@
         </p:nvSpPr>
         <p:spPr>
           <a:xfrm>
-            <a:off x="2313432" y="3364992"/>
+            <a:off x="2999232" y="3364992"/>
             <a:ext cx="1645920" cy="475488"/>
           </a:xfrm>
           <a:prstGeom prst="rect">
@@ -21931,7 +21418,7 @@
         </p:nvSpPr>
         <p:spPr>
           <a:xfrm>
-            <a:off x="2313432" y="3364992"/>
+            <a:off x="2999232" y="3364992"/>
             <a:ext cx="1645920" cy="475488"/>
           </a:xfrm>
           <a:prstGeom prst="rect">
@@ -21956,7 +21443,7 @@
                 <a:ea typeface="Trebuchet MS" pitchFamily="34" charset="-122"/>
                 <a:cs typeface="Trebuchet MS" pitchFamily="34" charset="-120"/>
               </a:rPr>
-              <a:t>dis</a:t>
+              <a:t>in</a:t>
             </a:r>
             <a:endParaRPr lang="en-US" sz="1400" dirty="0"/>
           </a:p>
@@ -21970,8 +21457,8 @@
         </p:nvSpPr>
         <p:spPr>
           <a:xfrm>
-            <a:off x="3959352" y="3364992"/>
-            <a:ext cx="411480" cy="475488"/>
+            <a:off x="4645152" y="3364992"/>
+            <a:ext cx="1097280" cy="475488"/>
           </a:xfrm>
           <a:prstGeom prst="rect">
             <a:avLst/>
@@ -22009,7 +21496,7 @@
         </p:nvSpPr>
         <p:spPr>
           <a:xfrm>
-            <a:off x="4370832" y="3364992"/>
+            <a:off x="5742432" y="3364992"/>
             <a:ext cx="1645920" cy="475488"/>
           </a:xfrm>
           <a:prstGeom prst="rect">
@@ -22036,7 +21523,7 @@
         </p:nvSpPr>
         <p:spPr>
           <a:xfrm>
-            <a:off x="4370832" y="3364992"/>
+            <a:off x="5742432" y="3364992"/>
             <a:ext cx="1645920" cy="475488"/>
           </a:xfrm>
           <a:prstGeom prst="rect">
@@ -22061,7 +21548,7 @@
                 <a:ea typeface="Trebuchet MS" pitchFamily="34" charset="-122"/>
                 <a:cs typeface="Trebuchet MS" pitchFamily="34" charset="-120"/>
               </a:rPr>
-              <a:t>sec</a:t>
+              <a:t>sects</a:t>
             </a:r>
             <a:endParaRPr lang="en-US" sz="1400" dirty="0"/>
           </a:p>
@@ -22069,14 +21556,41 @@
       </p:sp>
       <p:sp>
         <p:nvSpPr>
-          <p:cNvPr id="33" name="Text 31"/>
-          <p:cNvSpPr/>
-          <p:nvPr/>
-        </p:nvSpPr>
-        <p:spPr>
-          <a:xfrm>
-            <a:off x="6016752" y="3364992"/>
-            <a:ext cx="411480" cy="475488"/>
+          <p:cNvPr id="33" name="Shape 31"/>
+          <p:cNvSpPr/>
+          <p:nvPr/>
+        </p:nvSpPr>
+        <p:spPr>
+          <a:xfrm>
+            <a:off x="365760" y="4096512"/>
+            <a:ext cx="1371600" cy="804672"/>
+          </a:xfrm>
+          <a:prstGeom prst="rect">
+            <a:avLst>
+              <a:gd name="adj" fmla="val 6818"/>
+            </a:avLst>
+          </a:prstGeom>
+          <a:solidFill>
+            <a:srgbClr val="E2E8F0"/>
+          </a:solidFill>
+          <a:ln w="12700">
+            <a:solidFill>
+              <a:srgbClr val="E2E8F0"/>
+            </a:solidFill>
+            <a:prstDash val="solid"/>
+          </a:ln>
+        </p:spPr>
+      </p:sp>
+      <p:sp>
+        <p:nvSpPr>
+          <p:cNvPr id="34" name="Text 32"/>
+          <p:cNvSpPr/>
+          <p:nvPr/>
+        </p:nvSpPr>
+        <p:spPr>
+          <a:xfrm>
+            <a:off x="365760" y="4096512"/>
+            <a:ext cx="1371600" cy="804672"/>
           </a:xfrm>
           <a:prstGeom prst="rect">
             <a:avLst/>
@@ -22092,57 +21606,84 @@
               <a:buNone/>
             </a:pPr>
             <a:r>
-              <a:rPr lang="en-US" sz="1600" b="1" dirty="0">
-                <a:solidFill>
-                  <a:srgbClr val="0D9488"/>
+              <a:rPr lang="en-US" sz="1100" b="1" dirty="0">
+                <a:solidFill>
+                  <a:srgbClr val="475569"/>
                 </a:solidFill>
                 <a:latin typeface="Trebuchet MS" pitchFamily="34" charset="0"/>
                 <a:ea typeface="Trebuchet MS" pitchFamily="34" charset="-122"/>
                 <a:cs typeface="Trebuchet MS" pitchFamily="34" charset="-120"/>
               </a:rPr>
-              <a:t>·</a:t>
-            </a:r>
-            <a:endParaRPr lang="en-US" sz="1600" dirty="0"/>
-          </a:p>
-        </p:txBody>
-      </p:sp>
-      <p:sp>
-        <p:nvSpPr>
-          <p:cNvPr id="34" name="Shape 32"/>
-          <p:cNvSpPr/>
-          <p:nvPr/>
-        </p:nvSpPr>
-        <p:spPr>
-          <a:xfrm>
-            <a:off x="6428232" y="3364992"/>
-            <a:ext cx="1645920" cy="475488"/>
+              <a:t>Phonemes</a:t>
+            </a:r>
+            <a:endParaRPr lang="en-US" sz="1100" dirty="0"/>
+          </a:p>
+        </p:txBody>
+      </p:sp>
+      <p:sp>
+        <p:nvSpPr>
+          <p:cNvPr id="35" name="Shape 33"/>
+          <p:cNvSpPr/>
+          <p:nvPr/>
+        </p:nvSpPr>
+        <p:spPr>
+          <a:xfrm>
+            <a:off x="1874520" y="4096512"/>
+            <a:ext cx="6903720" cy="658368"/>
           </a:xfrm>
           <a:prstGeom prst="rect">
             <a:avLst>
-              <a:gd name="adj" fmla="val 9615"/>
+              <a:gd name="adj" fmla="val 8333"/>
             </a:avLst>
           </a:prstGeom>
           <a:solidFill>
+            <a:srgbClr val="FCE7F3"/>
+          </a:solidFill>
+          <a:ln w="12700">
+            <a:solidFill>
+              <a:srgbClr val="DB2777"/>
+            </a:solidFill>
+            <a:prstDash val="solid"/>
+          </a:ln>
+        </p:spPr>
+      </p:sp>
+      <p:sp>
+        <p:nvSpPr>
+          <p:cNvPr id="36" name="Shape 34"/>
+          <p:cNvSpPr/>
+          <p:nvPr/>
+        </p:nvSpPr>
+        <p:spPr>
+          <a:xfrm>
+            <a:off x="2124837" y="4169664"/>
+            <a:ext cx="685800" cy="475488"/>
+          </a:xfrm>
+          <a:prstGeom prst="rect">
+            <a:avLst>
+              <a:gd name="adj" fmla="val 7692"/>
+            </a:avLst>
+          </a:prstGeom>
+          <a:solidFill>
             <a:srgbClr val="FFFFFF"/>
           </a:solidFill>
           <a:ln w="12700">
             <a:solidFill>
-              <a:srgbClr val="0D9488"/>
-            </a:solidFill>
-            <a:prstDash val="solid"/>
-          </a:ln>
-        </p:spPr>
-      </p:sp>
-      <p:sp>
-        <p:nvSpPr>
-          <p:cNvPr id="35" name="Text 33"/>
-          <p:cNvSpPr/>
-          <p:nvPr/>
-        </p:nvSpPr>
-        <p:spPr>
-          <a:xfrm>
-            <a:off x="6428232" y="3364992"/>
-            <a:ext cx="1645920" cy="475488"/>
+              <a:srgbClr val="DB2777"/>
+            </a:solidFill>
+            <a:prstDash val="solid"/>
+          </a:ln>
+        </p:spPr>
+      </p:sp>
+      <p:sp>
+        <p:nvSpPr>
+          <p:cNvPr id="37" name="Text 35"/>
+          <p:cNvSpPr/>
+          <p:nvPr/>
+        </p:nvSpPr>
+        <p:spPr>
+          <a:xfrm>
+            <a:off x="2124837" y="4169664"/>
+            <a:ext cx="685800" cy="475488"/>
           </a:xfrm>
           <a:prstGeom prst="rect">
             <a:avLst/>
@@ -22158,57 +21699,57 @@
               <a:buNone/>
             </a:pPr>
             <a:r>
-              <a:rPr lang="en-US" sz="1400" b="1" dirty="0">
-                <a:solidFill>
-                  <a:srgbClr val="0D9488"/>
+              <a:rPr lang="en-US" sz="900" b="1" dirty="0">
+                <a:solidFill>
+                  <a:srgbClr val="9D174D"/>
                 </a:solidFill>
                 <a:latin typeface="Trebuchet MS" pitchFamily="34" charset="0"/>
                 <a:ea typeface="Trebuchet MS" pitchFamily="34" charset="-122"/>
                 <a:cs typeface="Trebuchet MS" pitchFamily="34" charset="-120"/>
               </a:rPr>
-              <a:t>tion</a:t>
-            </a:r>
-            <a:endParaRPr lang="en-US" sz="1400" dirty="0"/>
-          </a:p>
-        </p:txBody>
-      </p:sp>
-      <p:sp>
-        <p:nvSpPr>
-          <p:cNvPr id="36" name="Shape 34"/>
-          <p:cNvSpPr/>
-          <p:nvPr/>
-        </p:nvSpPr>
-        <p:spPr>
-          <a:xfrm>
-            <a:off x="365760" y="4096512"/>
-            <a:ext cx="1371600" cy="804672"/>
+              <a:t>i</a:t>
+            </a:r>
+            <a:endParaRPr lang="en-US" sz="900" dirty="0"/>
+          </a:p>
+        </p:txBody>
+      </p:sp>
+      <p:sp>
+        <p:nvSpPr>
+          <p:cNvPr id="38" name="Shape 36"/>
+          <p:cNvSpPr/>
+          <p:nvPr/>
+        </p:nvSpPr>
+        <p:spPr>
+          <a:xfrm>
+            <a:off x="3033522" y="4169664"/>
+            <a:ext cx="685800" cy="475488"/>
           </a:xfrm>
           <a:prstGeom prst="rect">
             <a:avLst>
-              <a:gd name="adj" fmla="val 6818"/>
+              <a:gd name="adj" fmla="val 7692"/>
             </a:avLst>
           </a:prstGeom>
           <a:solidFill>
-            <a:srgbClr val="E2E8F0"/>
-          </a:solidFill>
-          <a:ln w="12700">
-            <a:solidFill>
-              <a:srgbClr val="E2E8F0"/>
-            </a:solidFill>
-            <a:prstDash val="solid"/>
-          </a:ln>
-        </p:spPr>
-      </p:sp>
-      <p:sp>
-        <p:nvSpPr>
-          <p:cNvPr id="37" name="Text 35"/>
-          <p:cNvSpPr/>
-          <p:nvPr/>
-        </p:nvSpPr>
-        <p:spPr>
-          <a:xfrm>
-            <a:off x="365760" y="4096512"/>
-            <a:ext cx="1371600" cy="804672"/>
+            <a:srgbClr val="FFFFFF"/>
+          </a:solidFill>
+          <a:ln w="12700">
+            <a:solidFill>
+              <a:srgbClr val="DB2777"/>
+            </a:solidFill>
+            <a:prstDash val="solid"/>
+          </a:ln>
+        </p:spPr>
+      </p:sp>
+      <p:sp>
+        <p:nvSpPr>
+          <p:cNvPr id="39" name="Text 37"/>
+          <p:cNvSpPr/>
+          <p:nvPr/>
+        </p:nvSpPr>
+        <p:spPr>
+          <a:xfrm>
+            <a:off x="3033522" y="4169664"/>
+            <a:ext cx="685800" cy="475488"/>
           </a:xfrm>
           <a:prstGeom prst="rect">
             <a:avLst/>
@@ -22224,57 +21765,30 @@
               <a:buNone/>
             </a:pPr>
             <a:r>
-              <a:rPr lang="en-US" sz="1100" b="1" dirty="0">
-                <a:solidFill>
-                  <a:srgbClr val="475569"/>
+              <a:rPr lang="en-US" sz="900" b="1" dirty="0">
+                <a:solidFill>
+                  <a:srgbClr val="9D174D"/>
                 </a:solidFill>
                 <a:latin typeface="Trebuchet MS" pitchFamily="34" charset="0"/>
                 <a:ea typeface="Trebuchet MS" pitchFamily="34" charset="-122"/>
                 <a:cs typeface="Trebuchet MS" pitchFamily="34" charset="-120"/>
               </a:rPr>
-              <a:t>Phonemes</a:t>
-            </a:r>
-            <a:endParaRPr lang="en-US" sz="1100" dirty="0"/>
-          </a:p>
-        </p:txBody>
-      </p:sp>
-      <p:sp>
-        <p:nvSpPr>
-          <p:cNvPr id="38" name="Shape 36"/>
-          <p:cNvSpPr/>
-          <p:nvPr/>
-        </p:nvSpPr>
-        <p:spPr>
-          <a:xfrm>
-            <a:off x="1874520" y="4096512"/>
-            <a:ext cx="6903720" cy="658368"/>
-          </a:xfrm>
-          <a:prstGeom prst="rect">
-            <a:avLst>
-              <a:gd name="adj" fmla="val 8333"/>
-            </a:avLst>
-          </a:prstGeom>
-          <a:solidFill>
-            <a:srgbClr val="FCE7F3"/>
-          </a:solidFill>
-          <a:ln w="12700">
-            <a:solidFill>
-              <a:srgbClr val="DB2777"/>
-            </a:solidFill>
-            <a:prstDash val="solid"/>
-          </a:ln>
-        </p:spPr>
-      </p:sp>
-      <p:sp>
-        <p:nvSpPr>
-          <p:cNvPr id="39" name="Shape 37"/>
-          <p:cNvSpPr/>
-          <p:nvPr/>
-        </p:nvSpPr>
-        <p:spPr>
-          <a:xfrm>
-            <a:off x="1951330" y="4169664"/>
-            <a:ext cx="676656" cy="475488"/>
+              <a:t>n</a:t>
+            </a:r>
+            <a:endParaRPr lang="en-US" sz="900" dirty="0"/>
+          </a:p>
+        </p:txBody>
+      </p:sp>
+      <p:sp>
+        <p:nvSpPr>
+          <p:cNvPr id="40" name="Shape 38"/>
+          <p:cNvSpPr/>
+          <p:nvPr/>
+        </p:nvSpPr>
+        <p:spPr>
+          <a:xfrm>
+            <a:off x="3942207" y="4169664"/>
+            <a:ext cx="685800" cy="475488"/>
           </a:xfrm>
           <a:prstGeom prst="rect">
             <a:avLst>
@@ -22294,14 +21808,14 @@
       </p:sp>
       <p:sp>
         <p:nvSpPr>
-          <p:cNvPr id="40" name="Text 38"/>
-          <p:cNvSpPr/>
-          <p:nvPr/>
-        </p:nvSpPr>
-        <p:spPr>
-          <a:xfrm>
-            <a:off x="1951330" y="4169664"/>
-            <a:ext cx="676656" cy="475488"/>
+          <p:cNvPr id="41" name="Text 39"/>
+          <p:cNvSpPr/>
+          <p:nvPr/>
+        </p:nvSpPr>
+        <p:spPr>
+          <a:xfrm>
+            <a:off x="3942207" y="4169664"/>
+            <a:ext cx="685800" cy="475488"/>
           </a:xfrm>
           <a:prstGeom prst="rect">
             <a:avLst/>
@@ -22325,7 +21839,7 @@
                 <a:ea typeface="Trebuchet MS" pitchFamily="34" charset="-122"/>
                 <a:cs typeface="Trebuchet MS" pitchFamily="34" charset="-120"/>
               </a:rPr>
-              <a:t>d</a:t>
+              <a:t>s</a:t>
             </a:r>
             <a:endParaRPr lang="en-US" sz="900" dirty="0"/>
           </a:p>
@@ -22333,14 +21847,14 @@
       </p:sp>
       <p:sp>
         <p:nvSpPr>
-          <p:cNvPr id="41" name="Shape 39"/>
-          <p:cNvSpPr/>
-          <p:nvPr/>
-        </p:nvSpPr>
-        <p:spPr>
-          <a:xfrm>
-            <a:off x="2677363" y="4169664"/>
-            <a:ext cx="676656" cy="475488"/>
+          <p:cNvPr id="42" name="Shape 40"/>
+          <p:cNvSpPr/>
+          <p:nvPr/>
+        </p:nvSpPr>
+        <p:spPr>
+          <a:xfrm>
+            <a:off x="4850892" y="4169664"/>
+            <a:ext cx="685800" cy="475488"/>
           </a:xfrm>
           <a:prstGeom prst="rect">
             <a:avLst>
@@ -22360,14 +21874,14 @@
       </p:sp>
       <p:sp>
         <p:nvSpPr>
-          <p:cNvPr id="42" name="Text 40"/>
-          <p:cNvSpPr/>
-          <p:nvPr/>
-        </p:nvSpPr>
-        <p:spPr>
-          <a:xfrm>
-            <a:off x="2677363" y="4169664"/>
-            <a:ext cx="676656" cy="475488"/>
+          <p:cNvPr id="43" name="Text 41"/>
+          <p:cNvSpPr/>
+          <p:nvPr/>
+        </p:nvSpPr>
+        <p:spPr>
+          <a:xfrm>
+            <a:off x="4850892" y="4169664"/>
+            <a:ext cx="685800" cy="475488"/>
           </a:xfrm>
           <a:prstGeom prst="rect">
             <a:avLst/>
@@ -22391,7 +21905,7 @@
                 <a:ea typeface="Trebuchet MS" pitchFamily="34" charset="-122"/>
                 <a:cs typeface="Trebuchet MS" pitchFamily="34" charset="-120"/>
               </a:rPr>
-              <a:t>i</a:t>
+              <a:t>e</a:t>
             </a:r>
             <a:endParaRPr lang="en-US" sz="900" dirty="0"/>
           </a:p>
@@ -22399,14 +21913,14 @@
       </p:sp>
       <p:sp>
         <p:nvSpPr>
-          <p:cNvPr id="43" name="Shape 41"/>
-          <p:cNvSpPr/>
-          <p:nvPr/>
-        </p:nvSpPr>
-        <p:spPr>
-          <a:xfrm>
-            <a:off x="3403397" y="4169664"/>
-            <a:ext cx="676656" cy="475488"/>
+          <p:cNvPr id="44" name="Shape 42"/>
+          <p:cNvSpPr/>
+          <p:nvPr/>
+        </p:nvSpPr>
+        <p:spPr>
+          <a:xfrm>
+            <a:off x="5759577" y="4169664"/>
+            <a:ext cx="685800" cy="475488"/>
           </a:xfrm>
           <a:prstGeom prst="rect">
             <a:avLst>
@@ -22426,14 +21940,14 @@
       </p:sp>
       <p:sp>
         <p:nvSpPr>
-          <p:cNvPr id="44" name="Text 42"/>
-          <p:cNvSpPr/>
-          <p:nvPr/>
-        </p:nvSpPr>
-        <p:spPr>
-          <a:xfrm>
-            <a:off x="3403397" y="4169664"/>
-            <a:ext cx="676656" cy="475488"/>
+          <p:cNvPr id="45" name="Text 43"/>
+          <p:cNvSpPr/>
+          <p:nvPr/>
+        </p:nvSpPr>
+        <p:spPr>
+          <a:xfrm>
+            <a:off x="5759577" y="4169664"/>
+            <a:ext cx="685800" cy="475488"/>
           </a:xfrm>
           <a:prstGeom prst="rect">
             <a:avLst/>
@@ -22457,7 +21971,7 @@
                 <a:ea typeface="Trebuchet MS" pitchFamily="34" charset="-122"/>
                 <a:cs typeface="Trebuchet MS" pitchFamily="34" charset="-120"/>
               </a:rPr>
-              <a:t>ss</a:t>
+              <a:t>c</a:t>
             </a:r>
             <a:endParaRPr lang="en-US" sz="900" dirty="0"/>
           </a:p>
@@ -22465,14 +21979,14 @@
       </p:sp>
       <p:sp>
         <p:nvSpPr>
-          <p:cNvPr id="45" name="Shape 43"/>
-          <p:cNvSpPr/>
-          <p:nvPr/>
-        </p:nvSpPr>
-        <p:spPr>
-          <a:xfrm>
-            <a:off x="4129430" y="4169664"/>
-            <a:ext cx="676656" cy="475488"/>
+          <p:cNvPr id="46" name="Shape 44"/>
+          <p:cNvSpPr/>
+          <p:nvPr/>
+        </p:nvSpPr>
+        <p:spPr>
+          <a:xfrm>
+            <a:off x="6668262" y="4169664"/>
+            <a:ext cx="685800" cy="475488"/>
           </a:xfrm>
           <a:prstGeom prst="rect">
             <a:avLst>
@@ -22492,14 +22006,14 @@
       </p:sp>
       <p:sp>
         <p:nvSpPr>
-          <p:cNvPr id="46" name="Text 44"/>
-          <p:cNvSpPr/>
-          <p:nvPr/>
-        </p:nvSpPr>
-        <p:spPr>
-          <a:xfrm>
-            <a:off x="4129430" y="4169664"/>
-            <a:ext cx="676656" cy="475488"/>
+          <p:cNvPr id="47" name="Text 45"/>
+          <p:cNvSpPr/>
+          <p:nvPr/>
+        </p:nvSpPr>
+        <p:spPr>
+          <a:xfrm>
+            <a:off x="6668262" y="4169664"/>
+            <a:ext cx="685800" cy="475488"/>
           </a:xfrm>
           <a:prstGeom prst="rect">
             <a:avLst/>
@@ -22523,7 +22037,7 @@
                 <a:ea typeface="Trebuchet MS" pitchFamily="34" charset="-122"/>
                 <a:cs typeface="Trebuchet MS" pitchFamily="34" charset="-120"/>
               </a:rPr>
-              <a:t>e</a:t>
+              <a:t>t</a:t>
             </a:r>
             <a:endParaRPr lang="en-US" sz="900" dirty="0"/>
           </a:p>
@@ -22531,14 +22045,14 @@
       </p:sp>
       <p:sp>
         <p:nvSpPr>
-          <p:cNvPr id="47" name="Shape 45"/>
-          <p:cNvSpPr/>
-          <p:nvPr/>
-        </p:nvSpPr>
-        <p:spPr>
-          <a:xfrm>
-            <a:off x="4855464" y="4169664"/>
-            <a:ext cx="676656" cy="475488"/>
+          <p:cNvPr id="48" name="Shape 46"/>
+          <p:cNvSpPr/>
+          <p:nvPr/>
+        </p:nvSpPr>
+        <p:spPr>
+          <a:xfrm>
+            <a:off x="7576947" y="4169664"/>
+            <a:ext cx="685800" cy="475488"/>
           </a:xfrm>
           <a:prstGeom prst="rect">
             <a:avLst>
@@ -22558,14 +22072,14 @@
       </p:sp>
       <p:sp>
         <p:nvSpPr>
-          <p:cNvPr id="48" name="Text 46"/>
-          <p:cNvSpPr/>
-          <p:nvPr/>
-        </p:nvSpPr>
-        <p:spPr>
-          <a:xfrm>
-            <a:off x="4855464" y="4169664"/>
-            <a:ext cx="676656" cy="475488"/>
+          <p:cNvPr id="49" name="Text 47"/>
+          <p:cNvSpPr/>
+          <p:nvPr/>
+        </p:nvSpPr>
+        <p:spPr>
+          <a:xfrm>
+            <a:off x="7576947" y="4169664"/>
+            <a:ext cx="685800" cy="475488"/>
           </a:xfrm>
           <a:prstGeom prst="rect">
             <a:avLst/>
@@ -22589,271 +22103,7 @@
                 <a:ea typeface="Trebuchet MS" pitchFamily="34" charset="-122"/>
                 <a:cs typeface="Trebuchet MS" pitchFamily="34" charset="-120"/>
               </a:rPr>
-              <a:t>c</a:t>
-            </a:r>
-            <a:endParaRPr lang="en-US" sz="900" dirty="0"/>
-          </a:p>
-        </p:txBody>
-      </p:sp>
-      <p:sp>
-        <p:nvSpPr>
-          <p:cNvPr id="49" name="Shape 47"/>
-          <p:cNvSpPr/>
-          <p:nvPr/>
-        </p:nvSpPr>
-        <p:spPr>
-          <a:xfrm>
-            <a:off x="5581498" y="4169664"/>
-            <a:ext cx="676656" cy="475488"/>
-          </a:xfrm>
-          <a:prstGeom prst="rect">
-            <a:avLst>
-              <a:gd name="adj" fmla="val 7692"/>
-            </a:avLst>
-          </a:prstGeom>
-          <a:solidFill>
-            <a:srgbClr val="FFFFFF"/>
-          </a:solidFill>
-          <a:ln w="12700">
-            <a:solidFill>
-              <a:srgbClr val="DB2777"/>
-            </a:solidFill>
-            <a:prstDash val="solid"/>
-          </a:ln>
-        </p:spPr>
-      </p:sp>
-      <p:sp>
-        <p:nvSpPr>
-          <p:cNvPr id="50" name="Text 48"/>
-          <p:cNvSpPr/>
-          <p:nvPr/>
-        </p:nvSpPr>
-        <p:spPr>
-          <a:xfrm>
-            <a:off x="5581498" y="4169664"/>
-            <a:ext cx="676656" cy="475488"/>
-          </a:xfrm>
-          <a:prstGeom prst="rect">
-            <a:avLst/>
-          </a:prstGeom>
-          <a:noFill/>
-          <a:ln/>
-        </p:spPr>
-        <p:txBody>
-          <a:bodyPr wrap="square" lIns="0" tIns="0" rIns="0" bIns="0" rtlCol="0" anchor="ctr"/>
-          <a:lstStyle/>
-          <a:p>
-            <a:pPr algn="ctr" indent="0" marL="0">
-              <a:buNone/>
-            </a:pPr>
-            <a:r>
-              <a:rPr lang="en-US" sz="900" b="1" dirty="0">
-                <a:solidFill>
-                  <a:srgbClr val="9D174D"/>
-                </a:solidFill>
-                <a:latin typeface="Trebuchet MS" pitchFamily="34" charset="0"/>
-                <a:ea typeface="Trebuchet MS" pitchFamily="34" charset="-122"/>
-                <a:cs typeface="Trebuchet MS" pitchFamily="34" charset="-120"/>
-              </a:rPr>
-              <a:t>t</a:t>
-            </a:r>
-            <a:endParaRPr lang="en-US" sz="900" dirty="0"/>
-          </a:p>
-        </p:txBody>
-      </p:sp>
-      <p:sp>
-        <p:nvSpPr>
-          <p:cNvPr id="51" name="Shape 49"/>
-          <p:cNvSpPr/>
-          <p:nvPr/>
-        </p:nvSpPr>
-        <p:spPr>
-          <a:xfrm>
-            <a:off x="6307531" y="4169664"/>
-            <a:ext cx="676656" cy="475488"/>
-          </a:xfrm>
-          <a:prstGeom prst="rect">
-            <a:avLst>
-              <a:gd name="adj" fmla="val 7692"/>
-            </a:avLst>
-          </a:prstGeom>
-          <a:solidFill>
-            <a:srgbClr val="FFFFFF"/>
-          </a:solidFill>
-          <a:ln w="12700">
-            <a:solidFill>
-              <a:srgbClr val="DB2777"/>
-            </a:solidFill>
-            <a:prstDash val="solid"/>
-          </a:ln>
-        </p:spPr>
-      </p:sp>
-      <p:sp>
-        <p:nvSpPr>
-          <p:cNvPr id="52" name="Text 50"/>
-          <p:cNvSpPr/>
-          <p:nvPr/>
-        </p:nvSpPr>
-        <p:spPr>
-          <a:xfrm>
-            <a:off x="6307531" y="4169664"/>
-            <a:ext cx="676656" cy="475488"/>
-          </a:xfrm>
-          <a:prstGeom prst="rect">
-            <a:avLst/>
-          </a:prstGeom>
-          <a:noFill/>
-          <a:ln/>
-        </p:spPr>
-        <p:txBody>
-          <a:bodyPr wrap="square" lIns="0" tIns="0" rIns="0" bIns="0" rtlCol="0" anchor="ctr"/>
-          <a:lstStyle/>
-          <a:p>
-            <a:pPr algn="ctr" indent="0" marL="0">
-              <a:buNone/>
-            </a:pPr>
-            <a:r>
-              <a:rPr lang="en-US" sz="900" b="1" dirty="0">
-                <a:solidFill>
-                  <a:srgbClr val="9D174D"/>
-                </a:solidFill>
-                <a:latin typeface="Trebuchet MS" pitchFamily="34" charset="0"/>
-                <a:ea typeface="Trebuchet MS" pitchFamily="34" charset="-122"/>
-                <a:cs typeface="Trebuchet MS" pitchFamily="34" charset="-120"/>
-              </a:rPr>
-              <a:t>i</a:t>
-            </a:r>
-            <a:endParaRPr lang="en-US" sz="900" dirty="0"/>
-          </a:p>
-        </p:txBody>
-      </p:sp>
-      <p:sp>
-        <p:nvSpPr>
-          <p:cNvPr id="53" name="Shape 51"/>
-          <p:cNvSpPr/>
-          <p:nvPr/>
-        </p:nvSpPr>
-        <p:spPr>
-          <a:xfrm>
-            <a:off x="7033565" y="4169664"/>
-            <a:ext cx="676656" cy="475488"/>
-          </a:xfrm>
-          <a:prstGeom prst="rect">
-            <a:avLst>
-              <a:gd name="adj" fmla="val 7692"/>
-            </a:avLst>
-          </a:prstGeom>
-          <a:solidFill>
-            <a:srgbClr val="FFFFFF"/>
-          </a:solidFill>
-          <a:ln w="12700">
-            <a:solidFill>
-              <a:srgbClr val="DB2777"/>
-            </a:solidFill>
-            <a:prstDash val="solid"/>
-          </a:ln>
-        </p:spPr>
-      </p:sp>
-      <p:sp>
-        <p:nvSpPr>
-          <p:cNvPr id="54" name="Text 52"/>
-          <p:cNvSpPr/>
-          <p:nvPr/>
-        </p:nvSpPr>
-        <p:spPr>
-          <a:xfrm>
-            <a:off x="7033565" y="4169664"/>
-            <a:ext cx="676656" cy="475488"/>
-          </a:xfrm>
-          <a:prstGeom prst="rect">
-            <a:avLst/>
-          </a:prstGeom>
-          <a:noFill/>
-          <a:ln/>
-        </p:spPr>
-        <p:txBody>
-          <a:bodyPr wrap="square" lIns="0" tIns="0" rIns="0" bIns="0" rtlCol="0" anchor="ctr"/>
-          <a:lstStyle/>
-          <a:p>
-            <a:pPr algn="ctr" indent="0" marL="0">
-              <a:buNone/>
-            </a:pPr>
-            <a:r>
-              <a:rPr lang="en-US" sz="900" b="1" dirty="0">
-                <a:solidFill>
-                  <a:srgbClr val="9D174D"/>
-                </a:solidFill>
-                <a:latin typeface="Trebuchet MS" pitchFamily="34" charset="0"/>
-                <a:ea typeface="Trebuchet MS" pitchFamily="34" charset="-122"/>
-                <a:cs typeface="Trebuchet MS" pitchFamily="34" charset="-120"/>
-              </a:rPr>
-              <a:t>o</a:t>
-            </a:r>
-            <a:endParaRPr lang="en-US" sz="900" dirty="0"/>
-          </a:p>
-        </p:txBody>
-      </p:sp>
-      <p:sp>
-        <p:nvSpPr>
-          <p:cNvPr id="55" name="Shape 53"/>
-          <p:cNvSpPr/>
-          <p:nvPr/>
-        </p:nvSpPr>
-        <p:spPr>
-          <a:xfrm>
-            <a:off x="7759598" y="4169664"/>
-            <a:ext cx="676656" cy="475488"/>
-          </a:xfrm>
-          <a:prstGeom prst="rect">
-            <a:avLst>
-              <a:gd name="adj" fmla="val 7692"/>
-            </a:avLst>
-          </a:prstGeom>
-          <a:solidFill>
-            <a:srgbClr val="FFFFFF"/>
-          </a:solidFill>
-          <a:ln w="12700">
-            <a:solidFill>
-              <a:srgbClr val="DB2777"/>
-            </a:solidFill>
-            <a:prstDash val="solid"/>
-          </a:ln>
-        </p:spPr>
-      </p:sp>
-      <p:sp>
-        <p:nvSpPr>
-          <p:cNvPr id="56" name="Text 54"/>
-          <p:cNvSpPr/>
-          <p:nvPr/>
-        </p:nvSpPr>
-        <p:spPr>
-          <a:xfrm>
-            <a:off x="7759598" y="4169664"/>
-            <a:ext cx="676656" cy="475488"/>
-          </a:xfrm>
-          <a:prstGeom prst="rect">
-            <a:avLst/>
-          </a:prstGeom>
-          <a:noFill/>
-          <a:ln/>
-        </p:spPr>
-        <p:txBody>
-          <a:bodyPr wrap="square" lIns="0" tIns="0" rIns="0" bIns="0" rtlCol="0" anchor="ctr"/>
-          <a:lstStyle/>
-          <a:p>
-            <a:pPr algn="ctr" indent="0" marL="0">
-              <a:buNone/>
-            </a:pPr>
-            <a:r>
-              <a:rPr lang="en-US" sz="900" b="1" dirty="0">
-                <a:solidFill>
-                  <a:srgbClr val="9D174D"/>
-                </a:solidFill>
-                <a:latin typeface="Trebuchet MS" pitchFamily="34" charset="0"/>
-                <a:ea typeface="Trebuchet MS" pitchFamily="34" charset="-122"/>
-                <a:cs typeface="Trebuchet MS" pitchFamily="34" charset="-120"/>
-              </a:rPr>
-              <a:t>n</a:t>
+              <a:t>s</a:t>
             </a:r>
             <a:endParaRPr lang="en-US" sz="900" dirty="0"/>
           </a:p>
@@ -23145,7 +22395,7 @@
                 <a:ea typeface="Calibri" pitchFamily="34" charset="-122"/>
                 <a:cs typeface="Calibri" pitchFamily="34" charset="-120"/>
               </a:rPr>
-              <a:t>Word Labs  •  wordlabs.app  •  Root: 'sect' = cut, divide, section</a:t>
+              <a:t>Word Labs  •  wordlabs.app  •  Root: 'sect' = cut</a:t>
             </a:r>
             <a:endParaRPr lang="en-US" sz="800" dirty="0"/>
           </a:p>
@@ -23284,7 +22534,7 @@
                 <a:ea typeface="Trebuchet MS" pitchFamily="34" charset="-122"/>
                 <a:cs typeface="Trebuchet MS" pitchFamily="34" charset="-120"/>
               </a:rPr>
-              <a:t>section</a:t>
+              <a:t>sectors</a:t>
             </a:r>
             <a:endParaRPr lang="en-US" sz="2800" dirty="0"/>
           </a:p>
@@ -23972,7 +23222,7 @@
                 <a:ea typeface="Calibri" pitchFamily="34" charset="-122"/>
                 <a:cs typeface="Calibri" pitchFamily="34" charset="-120"/>
               </a:rPr>
-              <a:t>Word Labs  •  wordlabs.app  •  Root: 'sect' = cut, divide, section</a:t>
+              <a:t>Word Labs  •  wordlabs.app  •  Root: 'sect' = cut</a:t>
             </a:r>
             <a:endParaRPr lang="en-US" sz="800" dirty="0"/>
           </a:p>
@@ -24111,7 +23361,7 @@
                 <a:ea typeface="Trebuchet MS" pitchFamily="34" charset="-122"/>
                 <a:cs typeface="Trebuchet MS" pitchFamily="34" charset="-120"/>
               </a:rPr>
-              <a:t>section</a:t>
+              <a:t>sectors</a:t>
             </a:r>
             <a:endParaRPr lang="en-US" sz="2800" dirty="0"/>
           </a:p>
@@ -24191,7 +23441,7 @@
         </p:nvSpPr>
         <p:spPr>
           <a:xfrm>
-            <a:off x="2938272" y="2258568"/>
+            <a:off x="2221992" y="2258568"/>
             <a:ext cx="1828800" cy="292608"/>
           </a:xfrm>
           <a:prstGeom prst="rect">
@@ -24225,7 +23475,7 @@
         </p:nvSpPr>
         <p:spPr>
           <a:xfrm>
-            <a:off x="2938272" y="2258568"/>
+            <a:off x="2221992" y="2258568"/>
             <a:ext cx="1828800" cy="292608"/>
           </a:xfrm>
           <a:prstGeom prst="rect">
@@ -24264,7 +23514,7 @@
         </p:nvSpPr>
         <p:spPr>
           <a:xfrm>
-            <a:off x="2938272" y="2569464"/>
+            <a:off x="2221992" y="2569464"/>
             <a:ext cx="1828800" cy="201168"/>
           </a:xfrm>
           <a:prstGeom prst="rect">
@@ -24289,7 +23539,7 @@
                 <a:ea typeface="Calibri" pitchFamily="34" charset="-122"/>
                 <a:cs typeface="Calibri" pitchFamily="34" charset="-120"/>
               </a:rPr>
-              <a:t>cut, divide</a:t>
+              <a:t>cut</a:t>
             </a:r>
             <a:endParaRPr lang="en-US" sz="850" dirty="0"/>
           </a:p>
@@ -24303,7 +23553,7 @@
         </p:nvSpPr>
         <p:spPr>
           <a:xfrm>
-            <a:off x="5803392" y="2258568"/>
+            <a:off x="4370832" y="2258568"/>
             <a:ext cx="1828800" cy="292608"/>
           </a:xfrm>
           <a:prstGeom prst="rect">
@@ -24337,7 +23587,7 @@
         </p:nvSpPr>
         <p:spPr>
           <a:xfrm>
-            <a:off x="5803392" y="2258568"/>
+            <a:off x="4370832" y="2258568"/>
             <a:ext cx="1828800" cy="292608"/>
           </a:xfrm>
           <a:prstGeom prst="rect">
@@ -24362,7 +23612,7 @@
                 <a:ea typeface="Trebuchet MS" pitchFamily="34" charset="-122"/>
                 <a:cs typeface="Trebuchet MS" pitchFamily="34" charset="-120"/>
               </a:rPr>
-              <a:t>ion</a:t>
+              <a:t>or</a:t>
             </a:r>
             <a:endParaRPr lang="en-US" sz="1300" dirty="0"/>
           </a:p>
@@ -24376,7 +23626,7 @@
         </p:nvSpPr>
         <p:spPr>
           <a:xfrm>
-            <a:off x="5803392" y="2569464"/>
+            <a:off x="4370832" y="2569464"/>
             <a:ext cx="1828800" cy="201168"/>
           </a:xfrm>
           <a:prstGeom prst="rect">
@@ -24401,7 +23651,7 @@
                 <a:ea typeface="Calibri" pitchFamily="34" charset="-122"/>
                 <a:cs typeface="Calibri" pitchFamily="34" charset="-120"/>
               </a:rPr>
-              <a:t>act or process of</a:t>
+              <a:t>person who</a:t>
             </a:r>
             <a:endParaRPr lang="en-US" sz="850" dirty="0"/>
           </a:p>
@@ -24410,6 +23660,118 @@
       <p:sp>
         <p:nvSpPr>
           <p:cNvPr id="22" name="Shape 20"/>
+          <p:cNvSpPr/>
+          <p:nvPr/>
+        </p:nvSpPr>
+        <p:spPr>
+          <a:xfrm>
+            <a:off x="6519672" y="2258568"/>
+            <a:ext cx="1828800" cy="292608"/>
+          </a:xfrm>
+          <a:prstGeom prst="rect">
+            <a:avLst>
+              <a:gd name="adj" fmla="val 25000"/>
+            </a:avLst>
+          </a:prstGeom>
+          <a:solidFill>
+            <a:srgbClr val="FCE7F3"/>
+          </a:solidFill>
+          <a:ln w="19050">
+            <a:solidFill>
+              <a:srgbClr val="DB2777"/>
+            </a:solidFill>
+            <a:prstDash val="solid"/>
+          </a:ln>
+          <a:effectLst>
+            <a:outerShdw sx="100000" sy="100000" kx="0" ky="0" algn="bl" rotWithShape="0" blurRad="101600" dist="38100" dir="8100000">
+              <a:srgbClr val="000000">
+                <a:alpha val="12000"/>
+              </a:srgbClr>
+            </a:outerShdw>
+          </a:effectLst>
+        </p:spPr>
+      </p:sp>
+      <p:sp>
+        <p:nvSpPr>
+          <p:cNvPr id="23" name="Text 21"/>
+          <p:cNvSpPr/>
+          <p:nvPr/>
+        </p:nvSpPr>
+        <p:spPr>
+          <a:xfrm>
+            <a:off x="6519672" y="2258568"/>
+            <a:ext cx="1828800" cy="292608"/>
+          </a:xfrm>
+          <a:prstGeom prst="rect">
+            <a:avLst/>
+          </a:prstGeom>
+          <a:noFill/>
+          <a:ln/>
+        </p:spPr>
+        <p:txBody>
+          <a:bodyPr wrap="square" lIns="0" tIns="0" rIns="0" bIns="0" rtlCol="0" anchor="ctr"/>
+          <a:lstStyle/>
+          <a:p>
+            <a:pPr algn="ctr" indent="0" marL="0">
+              <a:buNone/>
+            </a:pPr>
+            <a:r>
+              <a:rPr lang="en-US" sz="1300" b="1" dirty="0">
+                <a:solidFill>
+                  <a:srgbClr val="9D174D"/>
+                </a:solidFill>
+                <a:latin typeface="Trebuchet MS" pitchFamily="34" charset="0"/>
+                <a:ea typeface="Trebuchet MS" pitchFamily="34" charset="-122"/>
+                <a:cs typeface="Trebuchet MS" pitchFamily="34" charset="-120"/>
+              </a:rPr>
+              <a:t>s</a:t>
+            </a:r>
+            <a:endParaRPr lang="en-US" sz="1300" dirty="0"/>
+          </a:p>
+        </p:txBody>
+      </p:sp>
+      <p:sp>
+        <p:nvSpPr>
+          <p:cNvPr id="24" name="Text 22"/>
+          <p:cNvSpPr/>
+          <p:nvPr/>
+        </p:nvSpPr>
+        <p:spPr>
+          <a:xfrm>
+            <a:off x="6519672" y="2569464"/>
+            <a:ext cx="1828800" cy="201168"/>
+          </a:xfrm>
+          <a:prstGeom prst="rect">
+            <a:avLst/>
+          </a:prstGeom>
+          <a:noFill/>
+          <a:ln/>
+        </p:spPr>
+        <p:txBody>
+          <a:bodyPr wrap="square" lIns="0" tIns="0" rIns="0" bIns="0" rtlCol="0" anchor="t"/>
+          <a:lstStyle/>
+          <a:p>
+            <a:pPr algn="ctr" indent="0" marL="0">
+              <a:buNone/>
+            </a:pPr>
+            <a:r>
+              <a:rPr lang="en-US" sz="850" dirty="0">
+                <a:solidFill>
+                  <a:srgbClr val="475569"/>
+                </a:solidFill>
+                <a:latin typeface="Calibri" pitchFamily="34" charset="0"/>
+                <a:ea typeface="Calibri" pitchFamily="34" charset="-122"/>
+                <a:cs typeface="Calibri" pitchFamily="34" charset="-120"/>
+              </a:rPr>
+              <a:t>plural or present tense</a:t>
+            </a:r>
+            <a:endParaRPr lang="en-US" sz="850" dirty="0"/>
+          </a:p>
+        </p:txBody>
+      </p:sp>
+      <p:sp>
+        <p:nvSpPr>
+          <p:cNvPr id="25" name="Shape 23"/>
           <p:cNvSpPr/>
           <p:nvPr/>
         </p:nvSpPr>
@@ -24436,7 +23798,7 @@
       </p:sp>
       <p:sp>
         <p:nvSpPr>
-          <p:cNvPr id="23" name="Text 21"/>
+          <p:cNvPr id="26" name="Text 24"/>
           <p:cNvSpPr/>
           <p:nvPr/>
         </p:nvSpPr>
@@ -24475,7 +23837,7 @@
       </p:sp>
       <p:sp>
         <p:nvSpPr>
-          <p:cNvPr id="24" name="Shape 22"/>
+          <p:cNvPr id="27" name="Shape 25"/>
           <p:cNvSpPr/>
           <p:nvPr/>
         </p:nvSpPr>
@@ -24502,7 +23864,7 @@
       </p:sp>
       <p:sp>
         <p:nvSpPr>
-          <p:cNvPr id="25" name="Text 23"/>
+          <p:cNvPr id="28" name="Text 26"/>
           <p:cNvSpPr/>
           <p:nvPr/>
         </p:nvSpPr>
@@ -24541,7 +23903,7 @@
       </p:sp>
       <p:sp>
         <p:nvSpPr>
-          <p:cNvPr id="26" name="Shape 24"/>
+          <p:cNvPr id="29" name="Shape 27"/>
           <p:cNvSpPr/>
           <p:nvPr/>
         </p:nvSpPr>
@@ -24568,7 +23930,7 @@
       </p:sp>
       <p:sp>
         <p:nvSpPr>
-          <p:cNvPr id="27" name="Text 25"/>
+          <p:cNvPr id="30" name="Text 28"/>
           <p:cNvSpPr/>
           <p:nvPr/>
         </p:nvSpPr>
@@ -24607,7 +23969,7 @@
       </p:sp>
       <p:sp>
         <p:nvSpPr>
-          <p:cNvPr id="28" name="Shape 26"/>
+          <p:cNvPr id="31" name="Shape 29"/>
           <p:cNvSpPr/>
           <p:nvPr/>
         </p:nvSpPr>
@@ -24634,7 +23996,7 @@
       </p:sp>
       <p:sp>
         <p:nvSpPr>
-          <p:cNvPr id="29" name="Text 27"/>
+          <p:cNvPr id="32" name="Text 30"/>
           <p:cNvSpPr/>
           <p:nvPr/>
         </p:nvSpPr>
@@ -24957,7 +24319,7 @@
                 <a:ea typeface="Calibri" pitchFamily="34" charset="-122"/>
                 <a:cs typeface="Calibri" pitchFamily="34" charset="-120"/>
               </a:rPr>
-              <a:t>Word Labs  •  wordlabs.app  •  Root: 'sect' = cut, divide, section</a:t>
+              <a:t>Word Labs  •  wordlabs.app  •  Root: 'sect' = cut</a:t>
             </a:r>
             <a:endParaRPr lang="en-US" sz="800" dirty="0"/>
           </a:p>
@@ -25030,7 +24392,7 @@
                 <a:ea typeface="Trebuchet MS" pitchFamily="34" charset="-122"/>
                 <a:cs typeface="Trebuchet MS" pitchFamily="34" charset="-120"/>
               </a:rPr>
-              <a:t>We are learning that the root 'sect' means 'cut, divide, section'.</a:t>
+              <a:t>We are learning that the root 'sect' means 'cut'.</a:t>
             </a:r>
             <a:endParaRPr lang="en-US" sz="2000" dirty="0"/>
           </a:p>
@@ -25676,7 +25038,7 @@
                 <a:ea typeface="Calibri" pitchFamily="34" charset="-122"/>
                 <a:cs typeface="Calibri" pitchFamily="34" charset="-120"/>
               </a:rPr>
-              <a:t>Word Labs  •  wordlabs.app  •  Root: 'sect' = cut, divide, section</a:t>
+              <a:t>Word Labs  •  wordlabs.app  •  Root: 'sect' = cut</a:t>
             </a:r>
             <a:endParaRPr lang="en-US" sz="800" dirty="0"/>
           </a:p>
@@ -25815,7 +25177,7 @@
                 <a:ea typeface="Trebuchet MS" pitchFamily="34" charset="-122"/>
                 <a:cs typeface="Trebuchet MS" pitchFamily="34" charset="-120"/>
               </a:rPr>
-              <a:t>section</a:t>
+              <a:t>sectors</a:t>
             </a:r>
             <a:endParaRPr lang="en-US" sz="2800" dirty="0"/>
           </a:p>
@@ -25895,7 +25257,7 @@
         </p:nvSpPr>
         <p:spPr>
           <a:xfrm>
-            <a:off x="2938272" y="2258568"/>
+            <a:off x="2221992" y="2258568"/>
             <a:ext cx="1828800" cy="292608"/>
           </a:xfrm>
           <a:prstGeom prst="rect">
@@ -25929,7 +25291,7 @@
         </p:nvSpPr>
         <p:spPr>
           <a:xfrm>
-            <a:off x="2938272" y="2258568"/>
+            <a:off x="2221992" y="2258568"/>
             <a:ext cx="1828800" cy="292608"/>
           </a:xfrm>
           <a:prstGeom prst="rect">
@@ -25968,7 +25330,7 @@
         </p:nvSpPr>
         <p:spPr>
           <a:xfrm>
-            <a:off x="2938272" y="2569464"/>
+            <a:off x="2221992" y="2569464"/>
             <a:ext cx="1828800" cy="201168"/>
           </a:xfrm>
           <a:prstGeom prst="rect">
@@ -25993,7 +25355,7 @@
                 <a:ea typeface="Calibri" pitchFamily="34" charset="-122"/>
                 <a:cs typeface="Calibri" pitchFamily="34" charset="-120"/>
               </a:rPr>
-              <a:t>cut, divide</a:t>
+              <a:t>cut</a:t>
             </a:r>
             <a:endParaRPr lang="en-US" sz="850" dirty="0"/>
           </a:p>
@@ -26007,7 +25369,7 @@
         </p:nvSpPr>
         <p:spPr>
           <a:xfrm>
-            <a:off x="5803392" y="2258568"/>
+            <a:off x="4370832" y="2258568"/>
             <a:ext cx="1828800" cy="292608"/>
           </a:xfrm>
           <a:prstGeom prst="rect">
@@ -26041,7 +25403,7 @@
         </p:nvSpPr>
         <p:spPr>
           <a:xfrm>
-            <a:off x="5803392" y="2258568"/>
+            <a:off x="4370832" y="2258568"/>
             <a:ext cx="1828800" cy="292608"/>
           </a:xfrm>
           <a:prstGeom prst="rect">
@@ -26066,7 +25428,7 @@
                 <a:ea typeface="Trebuchet MS" pitchFamily="34" charset="-122"/>
                 <a:cs typeface="Trebuchet MS" pitchFamily="34" charset="-120"/>
               </a:rPr>
-              <a:t>ion</a:t>
+              <a:t>or</a:t>
             </a:r>
             <a:endParaRPr lang="en-US" sz="1300" dirty="0"/>
           </a:p>
@@ -26080,7 +25442,7 @@
         </p:nvSpPr>
         <p:spPr>
           <a:xfrm>
-            <a:off x="5803392" y="2569464"/>
+            <a:off x="4370832" y="2569464"/>
             <a:ext cx="1828800" cy="201168"/>
           </a:xfrm>
           <a:prstGeom prst="rect">
@@ -26105,7 +25467,7 @@
                 <a:ea typeface="Calibri" pitchFamily="34" charset="-122"/>
                 <a:cs typeface="Calibri" pitchFamily="34" charset="-120"/>
               </a:rPr>
-              <a:t>act or process of</a:t>
+              <a:t>person who</a:t>
             </a:r>
             <a:endParaRPr lang="en-US" sz="850" dirty="0"/>
           </a:p>
@@ -26114,6 +25476,118 @@
       <p:sp>
         <p:nvSpPr>
           <p:cNvPr id="22" name="Shape 20"/>
+          <p:cNvSpPr/>
+          <p:nvPr/>
+        </p:nvSpPr>
+        <p:spPr>
+          <a:xfrm>
+            <a:off x="6519672" y="2258568"/>
+            <a:ext cx="1828800" cy="292608"/>
+          </a:xfrm>
+          <a:prstGeom prst="rect">
+            <a:avLst>
+              <a:gd name="adj" fmla="val 25000"/>
+            </a:avLst>
+          </a:prstGeom>
+          <a:solidFill>
+            <a:srgbClr val="FCE7F3"/>
+          </a:solidFill>
+          <a:ln w="19050">
+            <a:solidFill>
+              <a:srgbClr val="DB2777"/>
+            </a:solidFill>
+            <a:prstDash val="solid"/>
+          </a:ln>
+          <a:effectLst>
+            <a:outerShdw sx="100000" sy="100000" kx="0" ky="0" algn="bl" rotWithShape="0" blurRad="101600" dist="38100" dir="8100000">
+              <a:srgbClr val="000000">
+                <a:alpha val="12000"/>
+              </a:srgbClr>
+            </a:outerShdw>
+          </a:effectLst>
+        </p:spPr>
+      </p:sp>
+      <p:sp>
+        <p:nvSpPr>
+          <p:cNvPr id="23" name="Text 21"/>
+          <p:cNvSpPr/>
+          <p:nvPr/>
+        </p:nvSpPr>
+        <p:spPr>
+          <a:xfrm>
+            <a:off x="6519672" y="2258568"/>
+            <a:ext cx="1828800" cy="292608"/>
+          </a:xfrm>
+          <a:prstGeom prst="rect">
+            <a:avLst/>
+          </a:prstGeom>
+          <a:noFill/>
+          <a:ln/>
+        </p:spPr>
+        <p:txBody>
+          <a:bodyPr wrap="square" lIns="0" tIns="0" rIns="0" bIns="0" rtlCol="0" anchor="ctr"/>
+          <a:lstStyle/>
+          <a:p>
+            <a:pPr algn="ctr" indent="0" marL="0">
+              <a:buNone/>
+            </a:pPr>
+            <a:r>
+              <a:rPr lang="en-US" sz="1300" b="1" dirty="0">
+                <a:solidFill>
+                  <a:srgbClr val="9D174D"/>
+                </a:solidFill>
+                <a:latin typeface="Trebuchet MS" pitchFamily="34" charset="0"/>
+                <a:ea typeface="Trebuchet MS" pitchFamily="34" charset="-122"/>
+                <a:cs typeface="Trebuchet MS" pitchFamily="34" charset="-120"/>
+              </a:rPr>
+              <a:t>s</a:t>
+            </a:r>
+            <a:endParaRPr lang="en-US" sz="1300" dirty="0"/>
+          </a:p>
+        </p:txBody>
+      </p:sp>
+      <p:sp>
+        <p:nvSpPr>
+          <p:cNvPr id="24" name="Text 22"/>
+          <p:cNvSpPr/>
+          <p:nvPr/>
+        </p:nvSpPr>
+        <p:spPr>
+          <a:xfrm>
+            <a:off x="6519672" y="2569464"/>
+            <a:ext cx="1828800" cy="201168"/>
+          </a:xfrm>
+          <a:prstGeom prst="rect">
+            <a:avLst/>
+          </a:prstGeom>
+          <a:noFill/>
+          <a:ln/>
+        </p:spPr>
+        <p:txBody>
+          <a:bodyPr wrap="square" lIns="0" tIns="0" rIns="0" bIns="0" rtlCol="0" anchor="t"/>
+          <a:lstStyle/>
+          <a:p>
+            <a:pPr algn="ctr" indent="0" marL="0">
+              <a:buNone/>
+            </a:pPr>
+            <a:r>
+              <a:rPr lang="en-US" sz="850" dirty="0">
+                <a:solidFill>
+                  <a:srgbClr val="475569"/>
+                </a:solidFill>
+                <a:latin typeface="Calibri" pitchFamily="34" charset="0"/>
+                <a:ea typeface="Calibri" pitchFamily="34" charset="-122"/>
+                <a:cs typeface="Calibri" pitchFamily="34" charset="-120"/>
+              </a:rPr>
+              <a:t>plural or present tense</a:t>
+            </a:r>
+            <a:endParaRPr lang="en-US" sz="850" dirty="0"/>
+          </a:p>
+        </p:txBody>
+      </p:sp>
+      <p:sp>
+        <p:nvSpPr>
+          <p:cNvPr id="25" name="Shape 23"/>
           <p:cNvSpPr/>
           <p:nvPr/>
         </p:nvSpPr>
@@ -26140,7 +25614,7 @@
       </p:sp>
       <p:sp>
         <p:nvSpPr>
-          <p:cNvPr id="23" name="Text 21"/>
+          <p:cNvPr id="26" name="Text 24"/>
           <p:cNvSpPr/>
           <p:nvPr/>
         </p:nvSpPr>
@@ -26179,7 +25653,7 @@
       </p:sp>
       <p:sp>
         <p:nvSpPr>
-          <p:cNvPr id="24" name="Shape 22"/>
+          <p:cNvPr id="27" name="Shape 25"/>
           <p:cNvSpPr/>
           <p:nvPr/>
         </p:nvSpPr>
@@ -26206,7 +25680,7 @@
       </p:sp>
       <p:sp>
         <p:nvSpPr>
-          <p:cNvPr id="25" name="Shape 23"/>
+          <p:cNvPr id="28" name="Shape 26"/>
           <p:cNvSpPr/>
           <p:nvPr/>
         </p:nvSpPr>
@@ -26233,7 +25707,7 @@
       </p:sp>
       <p:sp>
         <p:nvSpPr>
-          <p:cNvPr id="26" name="Text 24"/>
+          <p:cNvPr id="29" name="Text 27"/>
           <p:cNvSpPr/>
           <p:nvPr/>
         </p:nvSpPr>
@@ -26272,7 +25746,7 @@
       </p:sp>
       <p:sp>
         <p:nvSpPr>
-          <p:cNvPr id="27" name="Text 25"/>
+          <p:cNvPr id="30" name="Text 28"/>
           <p:cNvSpPr/>
           <p:nvPr/>
         </p:nvSpPr>
@@ -26311,7 +25785,7 @@
       </p:sp>
       <p:sp>
         <p:nvSpPr>
-          <p:cNvPr id="28" name="Shape 26"/>
+          <p:cNvPr id="31" name="Shape 29"/>
           <p:cNvSpPr/>
           <p:nvPr/>
         </p:nvSpPr>
@@ -26338,7 +25812,7 @@
       </p:sp>
       <p:sp>
         <p:nvSpPr>
-          <p:cNvPr id="29" name="Text 27"/>
+          <p:cNvPr id="32" name="Text 30"/>
           <p:cNvSpPr/>
           <p:nvPr/>
         </p:nvSpPr>
@@ -26369,7 +25843,7 @@
                 <a:ea typeface="Trebuchet MS" pitchFamily="34" charset="-122"/>
                 <a:cs typeface="Trebuchet MS" pitchFamily="34" charset="-120"/>
               </a:rPr>
-              <a:t>tion</a:t>
+              <a:t>tors</a:t>
             </a:r>
             <a:endParaRPr lang="en-US" sz="1400" dirty="0"/>
           </a:p>
@@ -26377,7 +25851,7 @@
       </p:sp>
       <p:sp>
         <p:nvSpPr>
-          <p:cNvPr id="30" name="Shape 28"/>
+          <p:cNvPr id="33" name="Shape 31"/>
           <p:cNvSpPr/>
           <p:nvPr/>
         </p:nvSpPr>
@@ -26404,7 +25878,7 @@
       </p:sp>
       <p:sp>
         <p:nvSpPr>
-          <p:cNvPr id="31" name="Text 29"/>
+          <p:cNvPr id="34" name="Text 32"/>
           <p:cNvSpPr/>
           <p:nvPr/>
         </p:nvSpPr>
@@ -26443,7 +25917,7 @@
       </p:sp>
       <p:sp>
         <p:nvSpPr>
-          <p:cNvPr id="32" name="Shape 30"/>
+          <p:cNvPr id="35" name="Shape 33"/>
           <p:cNvSpPr/>
           <p:nvPr/>
         </p:nvSpPr>
@@ -26470,7 +25944,7 @@
       </p:sp>
       <p:sp>
         <p:nvSpPr>
-          <p:cNvPr id="33" name="Text 31"/>
+          <p:cNvPr id="36" name="Text 34"/>
           <p:cNvSpPr/>
           <p:nvPr/>
         </p:nvSpPr>
@@ -26793,7 +26267,7 @@
                 <a:ea typeface="Calibri" pitchFamily="34" charset="-122"/>
                 <a:cs typeface="Calibri" pitchFamily="34" charset="-120"/>
               </a:rPr>
-              <a:t>Word Labs  •  wordlabs.app  •  Root: 'sect' = cut, divide, section</a:t>
+              <a:t>Word Labs  •  wordlabs.app  •  Root: 'sect' = cut</a:t>
             </a:r>
             <a:endParaRPr lang="en-US" sz="800" dirty="0"/>
           </a:p>
@@ -26932,7 +26406,7 @@
                 <a:ea typeface="Trebuchet MS" pitchFamily="34" charset="-122"/>
                 <a:cs typeface="Trebuchet MS" pitchFamily="34" charset="-120"/>
               </a:rPr>
-              <a:t>section</a:t>
+              <a:t>sectors</a:t>
             </a:r>
             <a:endParaRPr lang="en-US" sz="2800" dirty="0"/>
           </a:p>
@@ -27012,7 +26486,7 @@
         </p:nvSpPr>
         <p:spPr>
           <a:xfrm>
-            <a:off x="2938272" y="2258568"/>
+            <a:off x="2221992" y="2258568"/>
             <a:ext cx="1828800" cy="292608"/>
           </a:xfrm>
           <a:prstGeom prst="rect">
@@ -27046,7 +26520,7 @@
         </p:nvSpPr>
         <p:spPr>
           <a:xfrm>
-            <a:off x="2938272" y="2258568"/>
+            <a:off x="2221992" y="2258568"/>
             <a:ext cx="1828800" cy="292608"/>
           </a:xfrm>
           <a:prstGeom prst="rect">
@@ -27085,7 +26559,7 @@
         </p:nvSpPr>
         <p:spPr>
           <a:xfrm>
-            <a:off x="2938272" y="2569464"/>
+            <a:off x="2221992" y="2569464"/>
             <a:ext cx="1828800" cy="201168"/>
           </a:xfrm>
           <a:prstGeom prst="rect">
@@ -27110,7 +26584,7 @@
                 <a:ea typeface="Calibri" pitchFamily="34" charset="-122"/>
                 <a:cs typeface="Calibri" pitchFamily="34" charset="-120"/>
               </a:rPr>
-              <a:t>cut, divide</a:t>
+              <a:t>cut</a:t>
             </a:r>
             <a:endParaRPr lang="en-US" sz="850" dirty="0"/>
           </a:p>
@@ -27124,7 +26598,7 @@
         </p:nvSpPr>
         <p:spPr>
           <a:xfrm>
-            <a:off x="5803392" y="2258568"/>
+            <a:off x="4370832" y="2258568"/>
             <a:ext cx="1828800" cy="292608"/>
           </a:xfrm>
           <a:prstGeom prst="rect">
@@ -27158,7 +26632,7 @@
         </p:nvSpPr>
         <p:spPr>
           <a:xfrm>
-            <a:off x="5803392" y="2258568"/>
+            <a:off x="4370832" y="2258568"/>
             <a:ext cx="1828800" cy="292608"/>
           </a:xfrm>
           <a:prstGeom prst="rect">
@@ -27183,7 +26657,7 @@
                 <a:ea typeface="Trebuchet MS" pitchFamily="34" charset="-122"/>
                 <a:cs typeface="Trebuchet MS" pitchFamily="34" charset="-120"/>
               </a:rPr>
-              <a:t>ion</a:t>
+              <a:t>or</a:t>
             </a:r>
             <a:endParaRPr lang="en-US" sz="1300" dirty="0"/>
           </a:p>
@@ -27197,7 +26671,7 @@
         </p:nvSpPr>
         <p:spPr>
           <a:xfrm>
-            <a:off x="5803392" y="2569464"/>
+            <a:off x="4370832" y="2569464"/>
             <a:ext cx="1828800" cy="201168"/>
           </a:xfrm>
           <a:prstGeom prst="rect">
@@ -27222,7 +26696,7 @@
                 <a:ea typeface="Calibri" pitchFamily="34" charset="-122"/>
                 <a:cs typeface="Calibri" pitchFamily="34" charset="-120"/>
               </a:rPr>
-              <a:t>act or process of</a:t>
+              <a:t>person who</a:t>
             </a:r>
             <a:endParaRPr lang="en-US" sz="850" dirty="0"/>
           </a:p>
@@ -27231,6 +26705,118 @@
       <p:sp>
         <p:nvSpPr>
           <p:cNvPr id="22" name="Shape 20"/>
+          <p:cNvSpPr/>
+          <p:nvPr/>
+        </p:nvSpPr>
+        <p:spPr>
+          <a:xfrm>
+            <a:off x="6519672" y="2258568"/>
+            <a:ext cx="1828800" cy="292608"/>
+          </a:xfrm>
+          <a:prstGeom prst="rect">
+            <a:avLst>
+              <a:gd name="adj" fmla="val 25000"/>
+            </a:avLst>
+          </a:prstGeom>
+          <a:solidFill>
+            <a:srgbClr val="FCE7F3"/>
+          </a:solidFill>
+          <a:ln w="19050">
+            <a:solidFill>
+              <a:srgbClr val="DB2777"/>
+            </a:solidFill>
+            <a:prstDash val="solid"/>
+          </a:ln>
+          <a:effectLst>
+            <a:outerShdw sx="100000" sy="100000" kx="0" ky="0" algn="bl" rotWithShape="0" blurRad="101600" dist="38100" dir="8100000">
+              <a:srgbClr val="000000">
+                <a:alpha val="12000"/>
+              </a:srgbClr>
+            </a:outerShdw>
+          </a:effectLst>
+        </p:spPr>
+      </p:sp>
+      <p:sp>
+        <p:nvSpPr>
+          <p:cNvPr id="23" name="Text 21"/>
+          <p:cNvSpPr/>
+          <p:nvPr/>
+        </p:nvSpPr>
+        <p:spPr>
+          <a:xfrm>
+            <a:off x="6519672" y="2258568"/>
+            <a:ext cx="1828800" cy="292608"/>
+          </a:xfrm>
+          <a:prstGeom prst="rect">
+            <a:avLst/>
+          </a:prstGeom>
+          <a:noFill/>
+          <a:ln/>
+        </p:spPr>
+        <p:txBody>
+          <a:bodyPr wrap="square" lIns="0" tIns="0" rIns="0" bIns="0" rtlCol="0" anchor="ctr"/>
+          <a:lstStyle/>
+          <a:p>
+            <a:pPr algn="ctr" indent="0" marL="0">
+              <a:buNone/>
+            </a:pPr>
+            <a:r>
+              <a:rPr lang="en-US" sz="1300" b="1" dirty="0">
+                <a:solidFill>
+                  <a:srgbClr val="9D174D"/>
+                </a:solidFill>
+                <a:latin typeface="Trebuchet MS" pitchFamily="34" charset="0"/>
+                <a:ea typeface="Trebuchet MS" pitchFamily="34" charset="-122"/>
+                <a:cs typeface="Trebuchet MS" pitchFamily="34" charset="-120"/>
+              </a:rPr>
+              <a:t>s</a:t>
+            </a:r>
+            <a:endParaRPr lang="en-US" sz="1300" dirty="0"/>
+          </a:p>
+        </p:txBody>
+      </p:sp>
+      <p:sp>
+        <p:nvSpPr>
+          <p:cNvPr id="24" name="Text 22"/>
+          <p:cNvSpPr/>
+          <p:nvPr/>
+        </p:nvSpPr>
+        <p:spPr>
+          <a:xfrm>
+            <a:off x="6519672" y="2569464"/>
+            <a:ext cx="1828800" cy="201168"/>
+          </a:xfrm>
+          <a:prstGeom prst="rect">
+            <a:avLst/>
+          </a:prstGeom>
+          <a:noFill/>
+          <a:ln/>
+        </p:spPr>
+        <p:txBody>
+          <a:bodyPr wrap="square" lIns="0" tIns="0" rIns="0" bIns="0" rtlCol="0" anchor="t"/>
+          <a:lstStyle/>
+          <a:p>
+            <a:pPr algn="ctr" indent="0" marL="0">
+              <a:buNone/>
+            </a:pPr>
+            <a:r>
+              <a:rPr lang="en-US" sz="850" dirty="0">
+                <a:solidFill>
+                  <a:srgbClr val="475569"/>
+                </a:solidFill>
+                <a:latin typeface="Calibri" pitchFamily="34" charset="0"/>
+                <a:ea typeface="Calibri" pitchFamily="34" charset="-122"/>
+                <a:cs typeface="Calibri" pitchFamily="34" charset="-120"/>
+              </a:rPr>
+              <a:t>plural or present tense</a:t>
+            </a:r>
+            <a:endParaRPr lang="en-US" sz="850" dirty="0"/>
+          </a:p>
+        </p:txBody>
+      </p:sp>
+      <p:sp>
+        <p:nvSpPr>
+          <p:cNvPr id="25" name="Shape 23"/>
           <p:cNvSpPr/>
           <p:nvPr/>
         </p:nvSpPr>
@@ -27257,7 +26843,7 @@
       </p:sp>
       <p:sp>
         <p:nvSpPr>
-          <p:cNvPr id="23" name="Text 21"/>
+          <p:cNvPr id="26" name="Text 24"/>
           <p:cNvSpPr/>
           <p:nvPr/>
         </p:nvSpPr>
@@ -27296,7 +26882,7 @@
       </p:sp>
       <p:sp>
         <p:nvSpPr>
-          <p:cNvPr id="24" name="Shape 22"/>
+          <p:cNvPr id="27" name="Shape 25"/>
           <p:cNvSpPr/>
           <p:nvPr/>
         </p:nvSpPr>
@@ -27323,7 +26909,7 @@
       </p:sp>
       <p:sp>
         <p:nvSpPr>
-          <p:cNvPr id="25" name="Shape 23"/>
+          <p:cNvPr id="28" name="Shape 26"/>
           <p:cNvSpPr/>
           <p:nvPr/>
         </p:nvSpPr>
@@ -27350,7 +26936,7 @@
       </p:sp>
       <p:sp>
         <p:nvSpPr>
-          <p:cNvPr id="26" name="Text 24"/>
+          <p:cNvPr id="29" name="Text 27"/>
           <p:cNvSpPr/>
           <p:nvPr/>
         </p:nvSpPr>
@@ -27389,7 +26975,7 @@
       </p:sp>
       <p:sp>
         <p:nvSpPr>
-          <p:cNvPr id="27" name="Text 25"/>
+          <p:cNvPr id="30" name="Text 28"/>
           <p:cNvSpPr/>
           <p:nvPr/>
         </p:nvSpPr>
@@ -27428,7 +27014,7 @@
       </p:sp>
       <p:sp>
         <p:nvSpPr>
-          <p:cNvPr id="28" name="Shape 26"/>
+          <p:cNvPr id="31" name="Shape 29"/>
           <p:cNvSpPr/>
           <p:nvPr/>
         </p:nvSpPr>
@@ -27455,7 +27041,7 @@
       </p:sp>
       <p:sp>
         <p:nvSpPr>
-          <p:cNvPr id="29" name="Text 27"/>
+          <p:cNvPr id="32" name="Text 30"/>
           <p:cNvSpPr/>
           <p:nvPr/>
         </p:nvSpPr>
@@ -27486,7 +27072,7 @@
                 <a:ea typeface="Trebuchet MS" pitchFamily="34" charset="-122"/>
                 <a:cs typeface="Trebuchet MS" pitchFamily="34" charset="-120"/>
               </a:rPr>
-              <a:t>tion</a:t>
+              <a:t>tors</a:t>
             </a:r>
             <a:endParaRPr lang="en-US" sz="1400" dirty="0"/>
           </a:p>
@@ -27494,7 +27080,7 @@
       </p:sp>
       <p:sp>
         <p:nvSpPr>
-          <p:cNvPr id="30" name="Shape 28"/>
+          <p:cNvPr id="33" name="Shape 31"/>
           <p:cNvSpPr/>
           <p:nvPr/>
         </p:nvSpPr>
@@ -27521,7 +27107,7 @@
       </p:sp>
       <p:sp>
         <p:nvSpPr>
-          <p:cNvPr id="31" name="Text 29"/>
+          <p:cNvPr id="34" name="Text 32"/>
           <p:cNvSpPr/>
           <p:nvPr/>
         </p:nvSpPr>
@@ -27560,18 +27146,18 @@
       </p:sp>
       <p:sp>
         <p:nvSpPr>
-          <p:cNvPr id="32" name="Shape 30"/>
+          <p:cNvPr id="35" name="Shape 33"/>
           <p:cNvSpPr/>
           <p:nvPr/>
         </p:nvSpPr>
         <p:spPr>
           <a:xfrm>
             <a:off x="1874520" y="4096512"/>
-            <a:ext cx="6903720" cy="804672"/>
+            <a:ext cx="6903720" cy="658368"/>
           </a:xfrm>
           <a:prstGeom prst="rect">
             <a:avLst>
-              <a:gd name="adj" fmla="val 6818"/>
+              <a:gd name="adj" fmla="val 8333"/>
             </a:avLst>
           </a:prstGeom>
           <a:solidFill>
@@ -27587,18 +27173,18 @@
       </p:sp>
       <p:sp>
         <p:nvSpPr>
-          <p:cNvPr id="33" name="Shape 31"/>
+          <p:cNvPr id="36" name="Shape 34"/>
           <p:cNvSpPr/>
           <p:nvPr/>
         </p:nvSpPr>
         <p:spPr>
           <a:xfrm>
             <a:off x="2254649" y="4169664"/>
-            <a:ext cx="685800" cy="384048"/>
+            <a:ext cx="685800" cy="475488"/>
           </a:xfrm>
           <a:prstGeom prst="rect">
             <a:avLst>
-              <a:gd name="adj" fmla="val 9524"/>
+              <a:gd name="adj" fmla="val 7692"/>
             </a:avLst>
           </a:prstGeom>
           <a:solidFill>
@@ -27614,14 +27200,14 @@
       </p:sp>
       <p:sp>
         <p:nvSpPr>
-          <p:cNvPr id="34" name="Text 32"/>
+          <p:cNvPr id="37" name="Text 35"/>
           <p:cNvSpPr/>
           <p:nvPr/>
         </p:nvSpPr>
         <p:spPr>
           <a:xfrm>
             <a:off x="2254649" y="4169664"/>
-            <a:ext cx="685800" cy="384048"/>
+            <a:ext cx="685800" cy="475488"/>
           </a:xfrm>
           <a:prstGeom prst="rect">
             <a:avLst/>
@@ -27653,18 +27239,18 @@
       </p:sp>
       <p:sp>
         <p:nvSpPr>
-          <p:cNvPr id="35" name="Shape 33"/>
+          <p:cNvPr id="38" name="Shape 36"/>
           <p:cNvSpPr/>
           <p:nvPr/>
         </p:nvSpPr>
         <p:spPr>
           <a:xfrm>
             <a:off x="3293146" y="4169664"/>
-            <a:ext cx="685800" cy="384048"/>
+            <a:ext cx="685800" cy="475488"/>
           </a:xfrm>
           <a:prstGeom prst="rect">
             <a:avLst>
-              <a:gd name="adj" fmla="val 9524"/>
+              <a:gd name="adj" fmla="val 7692"/>
             </a:avLst>
           </a:prstGeom>
           <a:solidFill>
@@ -27680,14 +27266,14 @@
       </p:sp>
       <p:sp>
         <p:nvSpPr>
-          <p:cNvPr id="36" name="Text 34"/>
+          <p:cNvPr id="39" name="Text 37"/>
           <p:cNvSpPr/>
           <p:nvPr/>
         </p:nvSpPr>
         <p:spPr>
           <a:xfrm>
             <a:off x="3293146" y="4169664"/>
-            <a:ext cx="685800" cy="384048"/>
+            <a:ext cx="685800" cy="475488"/>
           </a:xfrm>
           <a:prstGeom prst="rect">
             <a:avLst/>
@@ -27719,18 +27305,18 @@
       </p:sp>
       <p:sp>
         <p:nvSpPr>
-          <p:cNvPr id="37" name="Shape 35"/>
+          <p:cNvPr id="40" name="Shape 38"/>
           <p:cNvSpPr/>
           <p:nvPr/>
         </p:nvSpPr>
         <p:spPr>
           <a:xfrm>
             <a:off x="4331643" y="4169664"/>
-            <a:ext cx="685800" cy="384048"/>
+            <a:ext cx="685800" cy="475488"/>
           </a:xfrm>
           <a:prstGeom prst="rect">
             <a:avLst>
-              <a:gd name="adj" fmla="val 9524"/>
+              <a:gd name="adj" fmla="val 7692"/>
             </a:avLst>
           </a:prstGeom>
           <a:solidFill>
@@ -27746,14 +27332,14 @@
       </p:sp>
       <p:sp>
         <p:nvSpPr>
-          <p:cNvPr id="38" name="Text 36"/>
+          <p:cNvPr id="41" name="Text 39"/>
           <p:cNvSpPr/>
           <p:nvPr/>
         </p:nvSpPr>
         <p:spPr>
           <a:xfrm>
             <a:off x="4331643" y="4169664"/>
-            <a:ext cx="685800" cy="384048"/>
+            <a:ext cx="685800" cy="475488"/>
           </a:xfrm>
           <a:prstGeom prst="rect">
             <a:avLst/>
@@ -27785,18 +27371,18 @@
       </p:sp>
       <p:sp>
         <p:nvSpPr>
-          <p:cNvPr id="39" name="Shape 37"/>
+          <p:cNvPr id="42" name="Shape 40"/>
           <p:cNvSpPr/>
           <p:nvPr/>
         </p:nvSpPr>
         <p:spPr>
           <a:xfrm>
             <a:off x="5370141" y="4169664"/>
-            <a:ext cx="685800" cy="384048"/>
+            <a:ext cx="685800" cy="475488"/>
           </a:xfrm>
           <a:prstGeom prst="rect">
             <a:avLst>
-              <a:gd name="adj" fmla="val 9524"/>
+              <a:gd name="adj" fmla="val 7692"/>
             </a:avLst>
           </a:prstGeom>
           <a:solidFill>
@@ -27812,14 +27398,14 @@
       </p:sp>
       <p:sp>
         <p:nvSpPr>
-          <p:cNvPr id="40" name="Text 38"/>
+          <p:cNvPr id="43" name="Text 41"/>
           <p:cNvSpPr/>
           <p:nvPr/>
         </p:nvSpPr>
         <p:spPr>
           <a:xfrm>
             <a:off x="5370141" y="4169664"/>
-            <a:ext cx="685800" cy="384048"/>
+            <a:ext cx="685800" cy="475488"/>
           </a:xfrm>
           <a:prstGeom prst="rect">
             <a:avLst/>
@@ -27851,18 +27437,18 @@
       </p:sp>
       <p:sp>
         <p:nvSpPr>
-          <p:cNvPr id="41" name="Shape 39"/>
+          <p:cNvPr id="44" name="Shape 42"/>
           <p:cNvSpPr/>
           <p:nvPr/>
         </p:nvSpPr>
         <p:spPr>
           <a:xfrm>
             <a:off x="6408638" y="4169664"/>
-            <a:ext cx="685800" cy="384048"/>
+            <a:ext cx="685800" cy="475488"/>
           </a:xfrm>
           <a:prstGeom prst="rect">
             <a:avLst>
-              <a:gd name="adj" fmla="val 9524"/>
+              <a:gd name="adj" fmla="val 7692"/>
             </a:avLst>
           </a:prstGeom>
           <a:solidFill>
@@ -27878,14 +27464,14 @@
       </p:sp>
       <p:sp>
         <p:nvSpPr>
-          <p:cNvPr id="42" name="Text 40"/>
+          <p:cNvPr id="45" name="Text 43"/>
           <p:cNvSpPr/>
           <p:nvPr/>
         </p:nvSpPr>
         <p:spPr>
           <a:xfrm>
             <a:off x="6408638" y="4169664"/>
-            <a:ext cx="685800" cy="384048"/>
+            <a:ext cx="685800" cy="475488"/>
           </a:xfrm>
           <a:prstGeom prst="rect">
             <a:avLst/>
@@ -27909,7 +27495,7 @@
                 <a:ea typeface="Trebuchet MS" pitchFamily="34" charset="-122"/>
                 <a:cs typeface="Trebuchet MS" pitchFamily="34" charset="-120"/>
               </a:rPr>
-              <a:t>i</a:t>
+              <a:t>or</a:t>
             </a:r>
             <a:endParaRPr lang="en-US" sz="900" dirty="0"/>
           </a:p>
@@ -27917,18 +27503,18 @@
       </p:sp>
       <p:sp>
         <p:nvSpPr>
-          <p:cNvPr id="43" name="Shape 41"/>
+          <p:cNvPr id="46" name="Shape 44"/>
           <p:cNvSpPr/>
           <p:nvPr/>
         </p:nvSpPr>
         <p:spPr>
           <a:xfrm>
             <a:off x="7447135" y="4169664"/>
-            <a:ext cx="685800" cy="384048"/>
+            <a:ext cx="685800" cy="475488"/>
           </a:xfrm>
           <a:prstGeom prst="rect">
             <a:avLst>
-              <a:gd name="adj" fmla="val 9524"/>
+              <a:gd name="adj" fmla="val 7692"/>
             </a:avLst>
           </a:prstGeom>
           <a:solidFill>
@@ -27944,14 +27530,14 @@
       </p:sp>
       <p:sp>
         <p:nvSpPr>
-          <p:cNvPr id="44" name="Text 42"/>
+          <p:cNvPr id="47" name="Text 45"/>
           <p:cNvSpPr/>
           <p:nvPr/>
         </p:nvSpPr>
         <p:spPr>
           <a:xfrm>
             <a:off x="7447135" y="4169664"/>
-            <a:ext cx="685800" cy="384048"/>
+            <a:ext cx="685800" cy="475488"/>
           </a:xfrm>
           <a:prstGeom prst="rect">
             <a:avLst/>
@@ -27975,48 +27561,9 @@
                 <a:ea typeface="Trebuchet MS" pitchFamily="34" charset="-122"/>
                 <a:cs typeface="Trebuchet MS" pitchFamily="34" charset="-120"/>
               </a:rPr>
-              <a:t>on</a:t>
+              <a:t>s</a:t>
             </a:r>
             <a:endParaRPr lang="en-US" sz="900" dirty="0"/>
-          </a:p>
-        </p:txBody>
-      </p:sp>
-      <p:sp>
-        <p:nvSpPr>
-          <p:cNvPr id="45" name="Text 43"/>
-          <p:cNvSpPr/>
-          <p:nvPr/>
-        </p:nvSpPr>
-        <p:spPr>
-          <a:xfrm>
-            <a:off x="7447135" y="4572000"/>
-            <a:ext cx="685800" cy="219456"/>
-          </a:xfrm>
-          <a:prstGeom prst="rect">
-            <a:avLst/>
-          </a:prstGeom>
-          <a:noFill/>
-          <a:ln/>
-        </p:spPr>
-        <p:txBody>
-          <a:bodyPr wrap="square" lIns="0" tIns="0" rIns="0" bIns="0" rtlCol="0" anchor="t"/>
-          <a:lstStyle/>
-          <a:p>
-            <a:pPr algn="ctr" indent="0" marL="0">
-              <a:buNone/>
-            </a:pPr>
-            <a:r>
-              <a:rPr lang="en-US" sz="750" i="1" dirty="0">
-                <a:solidFill>
-                  <a:srgbClr val="94A3B8"/>
-                </a:solidFill>
-                <a:latin typeface="Calibri" pitchFamily="34" charset="0"/>
-                <a:ea typeface="Calibri" pitchFamily="34" charset="-122"/>
-                <a:cs typeface="Calibri" pitchFamily="34" charset="-120"/>
-              </a:rPr>
-              <a:t>/un/</a:t>
-            </a:r>
-            <a:endParaRPr lang="en-US" sz="750" dirty="0"/>
           </a:p>
         </p:txBody>
       </p:sp>
@@ -28306,7 +27853,7 @@
                 <a:ea typeface="Calibri" pitchFamily="34" charset="-122"/>
                 <a:cs typeface="Calibri" pitchFamily="34" charset="-120"/>
               </a:rPr>
-              <a:t>Word Labs  •  wordlabs.app  •  Root: 'sect' = cut, divide, section</a:t>
+              <a:t>Word Labs  •  wordlabs.app  •  Root: 'sect' = cut</a:t>
             </a:r>
             <a:endParaRPr lang="en-US" sz="800" dirty="0"/>
           </a:p>
@@ -28445,7 +27992,7 @@
                 <a:ea typeface="Trebuchet MS" pitchFamily="34" charset="-122"/>
                 <a:cs typeface="Trebuchet MS" pitchFamily="34" charset="-120"/>
               </a:rPr>
-              <a:t>insect</a:t>
+              <a:t>bisect</a:t>
             </a:r>
             <a:endParaRPr lang="en-US" sz="2800" dirty="0"/>
           </a:p>
@@ -29133,7 +28680,7 @@
                 <a:ea typeface="Calibri" pitchFamily="34" charset="-122"/>
                 <a:cs typeface="Calibri" pitchFamily="34" charset="-120"/>
               </a:rPr>
-              <a:t>Word Labs  •  wordlabs.app  •  Root: 'sect' = cut, divide, section</a:t>
+              <a:t>Word Labs  •  wordlabs.app  •  Root: 'sect' = cut</a:t>
             </a:r>
             <a:endParaRPr lang="en-US" sz="800" dirty="0"/>
           </a:p>
@@ -29272,7 +28819,7 @@
                 <a:ea typeface="Trebuchet MS" pitchFamily="34" charset="-122"/>
                 <a:cs typeface="Trebuchet MS" pitchFamily="34" charset="-120"/>
               </a:rPr>
-              <a:t>insect</a:t>
+              <a:t>bisect</a:t>
             </a:r>
             <a:endParaRPr lang="en-US" sz="2800" dirty="0"/>
           </a:p>
@@ -29411,7 +28958,7 @@
                 <a:ea typeface="Trebuchet MS" pitchFamily="34" charset="-122"/>
                 <a:cs typeface="Trebuchet MS" pitchFamily="34" charset="-120"/>
               </a:rPr>
-              <a:t>in</a:t>
+              <a:t>bi</a:t>
             </a:r>
             <a:endParaRPr lang="en-US" sz="1300" dirty="0"/>
           </a:p>
@@ -29450,7 +28997,7 @@
                 <a:ea typeface="Calibri" pitchFamily="34" charset="-122"/>
                 <a:cs typeface="Calibri" pitchFamily="34" charset="-120"/>
               </a:rPr>
-              <a:t>into, within</a:t>
+              <a:t>two; twice</a:t>
             </a:r>
             <a:endParaRPr lang="en-US" sz="850" dirty="0"/>
           </a:p>
@@ -29562,7 +29109,7 @@
                 <a:ea typeface="Calibri" pitchFamily="34" charset="-122"/>
                 <a:cs typeface="Calibri" pitchFamily="34" charset="-120"/>
               </a:rPr>
-              <a:t>cut, divide</a:t>
+              <a:t>cut</a:t>
             </a:r>
             <a:endParaRPr lang="en-US" sz="850" dirty="0"/>
           </a:p>
@@ -30118,7 +29665,7 @@
                 <a:ea typeface="Calibri" pitchFamily="34" charset="-122"/>
                 <a:cs typeface="Calibri" pitchFamily="34" charset="-120"/>
               </a:rPr>
-              <a:t>Word Labs  •  wordlabs.app  •  Root: 'sect' = cut, divide, section</a:t>
+              <a:t>Word Labs  •  wordlabs.app  •  Root: 'sect' = cut</a:t>
             </a:r>
             <a:endParaRPr lang="en-US" sz="800" dirty="0"/>
           </a:p>
@@ -30257,7 +29804,7 @@
                 <a:ea typeface="Trebuchet MS" pitchFamily="34" charset="-122"/>
                 <a:cs typeface="Trebuchet MS" pitchFamily="34" charset="-120"/>
               </a:rPr>
-              <a:t>insect</a:t>
+              <a:t>bisect</a:t>
             </a:r>
             <a:endParaRPr lang="en-US" sz="2800" dirty="0"/>
           </a:p>
@@ -30396,7 +29943,7 @@
                 <a:ea typeface="Trebuchet MS" pitchFamily="34" charset="-122"/>
                 <a:cs typeface="Trebuchet MS" pitchFamily="34" charset="-120"/>
               </a:rPr>
-              <a:t>in</a:t>
+              <a:t>bi</a:t>
             </a:r>
             <a:endParaRPr lang="en-US" sz="1300" dirty="0"/>
           </a:p>
@@ -30435,7 +29982,7 @@
                 <a:ea typeface="Calibri" pitchFamily="34" charset="-122"/>
                 <a:cs typeface="Calibri" pitchFamily="34" charset="-120"/>
               </a:rPr>
-              <a:t>into, within</a:t>
+              <a:t>two; twice</a:t>
             </a:r>
             <a:endParaRPr lang="en-US" sz="850" dirty="0"/>
           </a:p>
@@ -30547,7 +30094,7 @@
                 <a:ea typeface="Calibri" pitchFamily="34" charset="-122"/>
                 <a:cs typeface="Calibri" pitchFamily="34" charset="-120"/>
               </a:rPr>
-              <a:t>cut, divide</a:t>
+              <a:t>cut</a:t>
             </a:r>
             <a:endParaRPr lang="en-US" sz="850" dirty="0"/>
           </a:p>
@@ -30706,7 +30253,7 @@
                 <a:ea typeface="Trebuchet MS" pitchFamily="34" charset="-122"/>
                 <a:cs typeface="Trebuchet MS" pitchFamily="34" charset="-120"/>
               </a:rPr>
-              <a:t>in</a:t>
+              <a:t>bi</a:t>
             </a:r>
             <a:endParaRPr lang="en-US" sz="1400" dirty="0"/>
           </a:p>
@@ -31235,7 +30782,7 @@
                 <a:ea typeface="Calibri" pitchFamily="34" charset="-122"/>
                 <a:cs typeface="Calibri" pitchFamily="34" charset="-120"/>
               </a:rPr>
-              <a:t>Word Labs  •  wordlabs.app  •  Root: 'sect' = cut, divide, section</a:t>
+              <a:t>Word Labs  •  wordlabs.app  •  Root: 'sect' = cut</a:t>
             </a:r>
             <a:endParaRPr lang="en-US" sz="800" dirty="0"/>
           </a:p>
@@ -31374,7 +30921,7 @@
                 <a:ea typeface="Trebuchet MS" pitchFamily="34" charset="-122"/>
                 <a:cs typeface="Trebuchet MS" pitchFamily="34" charset="-120"/>
               </a:rPr>
-              <a:t>insect</a:t>
+              <a:t>bisect</a:t>
             </a:r>
             <a:endParaRPr lang="en-US" sz="2800" dirty="0"/>
           </a:p>
@@ -31513,7 +31060,7 @@
                 <a:ea typeface="Trebuchet MS" pitchFamily="34" charset="-122"/>
                 <a:cs typeface="Trebuchet MS" pitchFamily="34" charset="-120"/>
               </a:rPr>
-              <a:t>in</a:t>
+              <a:t>bi</a:t>
             </a:r>
             <a:endParaRPr lang="en-US" sz="1300" dirty="0"/>
           </a:p>
@@ -31552,7 +31099,7 @@
                 <a:ea typeface="Calibri" pitchFamily="34" charset="-122"/>
                 <a:cs typeface="Calibri" pitchFamily="34" charset="-120"/>
               </a:rPr>
-              <a:t>into, within</a:t>
+              <a:t>two; twice</a:t>
             </a:r>
             <a:endParaRPr lang="en-US" sz="850" dirty="0"/>
           </a:p>
@@ -31664,7 +31211,7 @@
                 <a:ea typeface="Calibri" pitchFamily="34" charset="-122"/>
                 <a:cs typeface="Calibri" pitchFamily="34" charset="-120"/>
               </a:rPr>
-              <a:t>cut, divide</a:t>
+              <a:t>cut</a:t>
             </a:r>
             <a:endParaRPr lang="en-US" sz="850" dirty="0"/>
           </a:p>
@@ -31823,7 +31370,7 @@
                 <a:ea typeface="Trebuchet MS" pitchFamily="34" charset="-122"/>
                 <a:cs typeface="Trebuchet MS" pitchFamily="34" charset="-120"/>
               </a:rPr>
-              <a:t>in</a:t>
+              <a:t>bi</a:t>
             </a:r>
             <a:endParaRPr lang="en-US" sz="1400" dirty="0"/>
           </a:p>
@@ -32087,7 +31634,7 @@
                 <a:ea typeface="Trebuchet MS" pitchFamily="34" charset="-122"/>
                 <a:cs typeface="Trebuchet MS" pitchFamily="34" charset="-120"/>
               </a:rPr>
-              <a:t>i</a:t>
+              <a:t>b</a:t>
             </a:r>
             <a:endParaRPr lang="en-US" sz="900" dirty="0"/>
           </a:p>
@@ -32153,7 +31700,7 @@
                 <a:ea typeface="Trebuchet MS" pitchFamily="34" charset="-122"/>
                 <a:cs typeface="Trebuchet MS" pitchFamily="34" charset="-120"/>
               </a:rPr>
-              <a:t>n</a:t>
+              <a:t>i</a:t>
             </a:r>
             <a:endParaRPr lang="en-US" sz="900" dirty="0"/>
           </a:p>
@@ -32709,7 +32256,7 @@
                 <a:ea typeface="Calibri" pitchFamily="34" charset="-122"/>
                 <a:cs typeface="Calibri" pitchFamily="34" charset="-120"/>
               </a:rPr>
-              <a:t>Word Labs  •  wordlabs.app  •  Root: 'sect' = cut, divide, section</a:t>
+              <a:t>Word Labs  •  wordlabs.app  •  Root: 'sect' = cut</a:t>
             </a:r>
             <a:endParaRPr lang="en-US" sz="800" dirty="0"/>
           </a:p>
@@ -33878,7 +33425,7 @@
                 <a:ea typeface="Calibri" pitchFamily="34" charset="-122"/>
                 <a:cs typeface="Calibri" pitchFamily="34" charset="-120"/>
               </a:rPr>
-              <a:t>Word Labs  •  wordlabs.app  •  Root: 'sect' = cut, divide, section</a:t>
+              <a:t>Word Labs  •  wordlabs.app  •  Root: 'sect' = cut</a:t>
             </a:r>
             <a:endParaRPr lang="en-US" sz="800" dirty="0"/>
           </a:p>
@@ -34307,7 +33854,7 @@
                 <a:ea typeface="Trebuchet MS" pitchFamily="34" charset="-122"/>
                 <a:cs typeface="Trebuchet MS" pitchFamily="34" charset="-120"/>
               </a:rPr>
-              <a:t>-ion</a:t>
+              <a:t>-s</a:t>
             </a:r>
             <a:endParaRPr lang="en-US" sz="1300" dirty="0"/>
           </a:p>
@@ -34371,7 +33918,7 @@
                 <a:ea typeface="Trebuchet MS" pitchFamily="34" charset="-122"/>
                 <a:cs typeface="Trebuchet MS" pitchFamily="34" charset="-120"/>
               </a:rPr>
-              <a:t>di-</a:t>
+              <a:t>dis-</a:t>
             </a:r>
             <a:endParaRPr lang="en-US" sz="1300" dirty="0"/>
           </a:p>
@@ -34524,7 +34071,7 @@
                 <a:ea typeface="Trebuchet MS" pitchFamily="34" charset="-122"/>
                 <a:cs typeface="Trebuchet MS" pitchFamily="34" charset="-120"/>
               </a:rPr>
-              <a:t>inter-</a:t>
+              <a:t>in-</a:t>
             </a:r>
             <a:endParaRPr lang="en-US" sz="1300" dirty="0"/>
           </a:p>
@@ -34570,7 +34117,7 @@
             <a:avLst/>
           </a:prstGeom>
           <a:solidFill>
-            <a:srgbClr val="FCE7F3"/>
+            <a:srgbClr val="F8FAFC"/>
           </a:solidFill>
           <a:ln w="12700">
             <a:solidFill>
@@ -34588,8 +34135,8 @@
         </p:nvSpPr>
         <p:spPr>
           <a:xfrm>
-            <a:off x="5943600" y="2404872"/>
-            <a:ext cx="2834640" cy="402336"/>
+            <a:off x="365760" y="3611880"/>
+            <a:ext cx="1828800" cy="347472"/>
           </a:xfrm>
           <a:prstGeom prst="rect">
             <a:avLst/>
@@ -34601,21 +34148,21 @@
           <a:bodyPr wrap="square" lIns="0" tIns="0" rIns="0" bIns="0" rtlCol="0" anchor="ctr"/>
           <a:lstStyle/>
           <a:p>
-            <a:pPr algn="ctr" indent="0" marL="0">
-              <a:buNone/>
-            </a:pPr>
-            <a:r>
-              <a:rPr lang="en-US" sz="1300" b="1" dirty="0">
-                <a:solidFill>
-                  <a:srgbClr val="9D174D"/>
+            <a:pPr algn="l" indent="0" marL="0">
+              <a:buNone/>
+            </a:pPr>
+            <a:r>
+              <a:rPr lang="en-US" sz="1200" b="1" dirty="0">
+                <a:solidFill>
+                  <a:srgbClr val="0F172A"/>
                 </a:solidFill>
                 <a:latin typeface="Trebuchet MS" pitchFamily="34" charset="0"/>
                 <a:ea typeface="Trebuchet MS" pitchFamily="34" charset="-122"/>
                 <a:cs typeface="Trebuchet MS" pitchFamily="34" charset="-120"/>
               </a:rPr>
-              <a:t>-ing</a:t>
-            </a:r>
-            <a:endParaRPr lang="en-US" sz="1300" dirty="0"/>
+              <a:t>Sample words:</a:t>
+            </a:r>
+            <a:endParaRPr lang="en-US" sz="1200" dirty="0"/>
           </a:p>
         </p:txBody>
       </p:sp>
@@ -34627,18 +34174,20 @@
         </p:nvSpPr>
         <p:spPr>
           <a:xfrm>
-            <a:off x="365760" y="2825496"/>
-            <a:ext cx="2468880" cy="402336"/>
-          </a:xfrm>
-          <a:prstGeom prst="rect">
-            <a:avLst/>
-          </a:prstGeom>
-          <a:solidFill>
-            <a:srgbClr val="DDD6FE"/>
-          </a:solidFill>
-          <a:ln w="12700">
-            <a:solidFill>
-              <a:srgbClr val="E2E8F0"/>
+            <a:off x="365760" y="4023360"/>
+            <a:ext cx="2011680" cy="402336"/>
+          </a:xfrm>
+          <a:prstGeom prst="rect">
+            <a:avLst>
+              <a:gd name="adj" fmla="val 13636"/>
+            </a:avLst>
+          </a:prstGeom>
+          <a:solidFill>
+            <a:srgbClr val="EEF2FF"/>
+          </a:solidFill>
+          <a:ln w="12700">
+            <a:solidFill>
+              <a:srgbClr val="6366F1"/>
             </a:solidFill>
             <a:prstDash val="solid"/>
           </a:ln>
@@ -34652,8 +34201,8 @@
         </p:nvSpPr>
         <p:spPr>
           <a:xfrm>
-            <a:off x="365760" y="2825496"/>
-            <a:ext cx="2468880" cy="402336"/>
+            <a:off x="365760" y="4023360"/>
+            <a:ext cx="2011680" cy="402336"/>
           </a:xfrm>
           <a:prstGeom prst="rect">
             <a:avLst/>
@@ -34669,17 +34218,17 @@
               <a:buNone/>
             </a:pPr>
             <a:r>
-              <a:rPr lang="en-US" sz="1300" b="1" dirty="0">
-                <a:solidFill>
-                  <a:srgbClr val="4C1D95"/>
+              <a:rPr lang="en-US" sz="1200" b="1" dirty="0">
+                <a:solidFill>
+                  <a:srgbClr val="4338CA"/>
                 </a:solidFill>
                 <a:latin typeface="Trebuchet MS" pitchFamily="34" charset="0"/>
                 <a:ea typeface="Trebuchet MS" pitchFamily="34" charset="-122"/>
                 <a:cs typeface="Trebuchet MS" pitchFamily="34" charset="-120"/>
               </a:rPr>
-              <a:t>re-</a:t>
-            </a:r>
-            <a:endParaRPr lang="en-US" sz="1300" dirty="0"/>
+              <a:t>sect</a:t>
+            </a:r>
+            <a:endParaRPr lang="en-US" sz="1200" dirty="0"/>
           </a:p>
         </p:txBody>
       </p:sp>
@@ -34691,58 +34240,35 @@
         </p:nvSpPr>
         <p:spPr>
           <a:xfrm>
-            <a:off x="2971800" y="2825496"/>
-            <a:ext cx="2834640" cy="402336"/>
-          </a:xfrm>
-          <a:prstGeom prst="rect">
-            <a:avLst/>
-          </a:prstGeom>
-          <a:solidFill>
-            <a:srgbClr val="F1F5F9"/>
-          </a:solidFill>
-          <a:ln w="12700">
-            <a:solidFill>
-              <a:srgbClr val="E2E8F0"/>
-            </a:solidFill>
-            <a:prstDash val="solid"/>
-          </a:ln>
-        </p:spPr>
-      </p:sp>
-      <p:sp>
-        <p:nvSpPr>
-          <p:cNvPr id="36" name="Shape 34"/>
-          <p:cNvSpPr/>
-          <p:nvPr/>
-        </p:nvSpPr>
-        <p:spPr>
-          <a:xfrm>
-            <a:off x="5943600" y="2825496"/>
-            <a:ext cx="2834640" cy="402336"/>
-          </a:xfrm>
-          <a:prstGeom prst="rect">
-            <a:avLst/>
-          </a:prstGeom>
-          <a:solidFill>
-            <a:srgbClr val="FCE7F3"/>
-          </a:solidFill>
-          <a:ln w="12700">
-            <a:solidFill>
-              <a:srgbClr val="E2E8F0"/>
-            </a:solidFill>
-            <a:prstDash val="solid"/>
-          </a:ln>
-        </p:spPr>
-      </p:sp>
-      <p:sp>
-        <p:nvSpPr>
-          <p:cNvPr id="37" name="Text 35"/>
-          <p:cNvSpPr/>
-          <p:nvPr/>
-        </p:nvSpPr>
-        <p:spPr>
-          <a:xfrm>
-            <a:off x="5943600" y="2825496"/>
-            <a:ext cx="2834640" cy="402336"/>
+            <a:off x="2542032" y="4023360"/>
+            <a:ext cx="2011680" cy="402336"/>
+          </a:xfrm>
+          <a:prstGeom prst="rect">
+            <a:avLst>
+              <a:gd name="adj" fmla="val 13636"/>
+            </a:avLst>
+          </a:prstGeom>
+          <a:solidFill>
+            <a:srgbClr val="EEF2FF"/>
+          </a:solidFill>
+          <a:ln w="12700">
+            <a:solidFill>
+              <a:srgbClr val="6366F1"/>
+            </a:solidFill>
+            <a:prstDash val="solid"/>
+          </a:ln>
+        </p:spPr>
+      </p:sp>
+      <p:sp>
+        <p:nvSpPr>
+          <p:cNvPr id="36" name="Text 34"/>
+          <p:cNvSpPr/>
+          <p:nvPr/>
+        </p:nvSpPr>
+        <p:spPr>
+          <a:xfrm>
+            <a:off x="2542032" y="4023360"/>
+            <a:ext cx="2011680" cy="402336"/>
           </a:xfrm>
           <a:prstGeom prst="rect">
             <a:avLst/>
@@ -34758,735 +34284,15 @@
               <a:buNone/>
             </a:pPr>
             <a:r>
-              <a:rPr lang="en-US" sz="1300" b="1" dirty="0">
-                <a:solidFill>
-                  <a:srgbClr val="9D174D"/>
+              <a:rPr lang="en-US" sz="1200" b="1" dirty="0">
+                <a:solidFill>
+                  <a:srgbClr val="4338CA"/>
                 </a:solidFill>
                 <a:latin typeface="Trebuchet MS" pitchFamily="34" charset="0"/>
                 <a:ea typeface="Trebuchet MS" pitchFamily="34" charset="-122"/>
                 <a:cs typeface="Trebuchet MS" pitchFamily="34" charset="-120"/>
               </a:rPr>
-              <a:t>-ed</a:t>
-            </a:r>
-            <a:endParaRPr lang="en-US" sz="1300" dirty="0"/>
-          </a:p>
-        </p:txBody>
-      </p:sp>
-      <p:sp>
-        <p:nvSpPr>
-          <p:cNvPr id="38" name="Shape 36"/>
-          <p:cNvSpPr/>
-          <p:nvPr/>
-        </p:nvSpPr>
-        <p:spPr>
-          <a:xfrm>
-            <a:off x="365760" y="3246120"/>
-            <a:ext cx="2468880" cy="402336"/>
-          </a:xfrm>
-          <a:prstGeom prst="rect">
-            <a:avLst/>
-          </a:prstGeom>
-          <a:solidFill>
-            <a:srgbClr val="DDD6FE"/>
-          </a:solidFill>
-          <a:ln w="12700">
-            <a:solidFill>
-              <a:srgbClr val="E2E8F0"/>
-            </a:solidFill>
-            <a:prstDash val="solid"/>
-          </a:ln>
-        </p:spPr>
-      </p:sp>
-      <p:sp>
-        <p:nvSpPr>
-          <p:cNvPr id="39" name="Text 37"/>
-          <p:cNvSpPr/>
-          <p:nvPr/>
-        </p:nvSpPr>
-        <p:spPr>
-          <a:xfrm>
-            <a:off x="365760" y="3246120"/>
-            <a:ext cx="2468880" cy="402336"/>
-          </a:xfrm>
-          <a:prstGeom prst="rect">
-            <a:avLst/>
-          </a:prstGeom>
-          <a:noFill/>
-          <a:ln/>
-        </p:spPr>
-        <p:txBody>
-          <a:bodyPr wrap="square" lIns="0" tIns="0" rIns="0" bIns="0" rtlCol="0" anchor="ctr"/>
-          <a:lstStyle/>
-          <a:p>
-            <a:pPr algn="ctr" indent="0" marL="0">
-              <a:buNone/>
-            </a:pPr>
-            <a:r>
-              <a:rPr lang="en-US" sz="1300" b="1" dirty="0">
-                <a:solidFill>
-                  <a:srgbClr val="4C1D95"/>
-                </a:solidFill>
-                <a:latin typeface="Trebuchet MS" pitchFamily="34" charset="0"/>
-                <a:ea typeface="Trebuchet MS" pitchFamily="34" charset="-122"/>
-                <a:cs typeface="Trebuchet MS" pitchFamily="34" charset="-120"/>
-              </a:rPr>
-              <a:t>trans-</a:t>
-            </a:r>
-            <a:endParaRPr lang="en-US" sz="1300" dirty="0"/>
-          </a:p>
-        </p:txBody>
-      </p:sp>
-      <p:sp>
-        <p:nvSpPr>
-          <p:cNvPr id="40" name="Shape 38"/>
-          <p:cNvSpPr/>
-          <p:nvPr/>
-        </p:nvSpPr>
-        <p:spPr>
-          <a:xfrm>
-            <a:off x="2971800" y="3246120"/>
-            <a:ext cx="2834640" cy="402336"/>
-          </a:xfrm>
-          <a:prstGeom prst="rect">
-            <a:avLst/>
-          </a:prstGeom>
-          <a:solidFill>
-            <a:srgbClr val="F8FAFC"/>
-          </a:solidFill>
-          <a:ln w="12700">
-            <a:solidFill>
-              <a:srgbClr val="E2E8F0"/>
-            </a:solidFill>
-            <a:prstDash val="solid"/>
-          </a:ln>
-        </p:spPr>
-      </p:sp>
-      <p:sp>
-        <p:nvSpPr>
-          <p:cNvPr id="41" name="Shape 39"/>
-          <p:cNvSpPr/>
-          <p:nvPr/>
-        </p:nvSpPr>
-        <p:spPr>
-          <a:xfrm>
-            <a:off x="5943600" y="3246120"/>
-            <a:ext cx="2834640" cy="402336"/>
-          </a:xfrm>
-          <a:prstGeom prst="rect">
-            <a:avLst/>
-          </a:prstGeom>
-          <a:solidFill>
-            <a:srgbClr val="FCE7F3"/>
-          </a:solidFill>
-          <a:ln w="12700">
-            <a:solidFill>
-              <a:srgbClr val="E2E8F0"/>
-            </a:solidFill>
-            <a:prstDash val="solid"/>
-          </a:ln>
-        </p:spPr>
-      </p:sp>
-      <p:sp>
-        <p:nvSpPr>
-          <p:cNvPr id="42" name="Text 40"/>
-          <p:cNvSpPr/>
-          <p:nvPr/>
-        </p:nvSpPr>
-        <p:spPr>
-          <a:xfrm>
-            <a:off x="5943600" y="3246120"/>
-            <a:ext cx="2834640" cy="402336"/>
-          </a:xfrm>
-          <a:prstGeom prst="rect">
-            <a:avLst/>
-          </a:prstGeom>
-          <a:noFill/>
-          <a:ln/>
-        </p:spPr>
-        <p:txBody>
-          <a:bodyPr wrap="square" lIns="0" tIns="0" rIns="0" bIns="0" rtlCol="0" anchor="ctr"/>
-          <a:lstStyle/>
-          <a:p>
-            <a:pPr algn="ctr" indent="0" marL="0">
-              <a:buNone/>
-            </a:pPr>
-            <a:r>
-              <a:rPr lang="en-US" sz="1300" b="1" dirty="0">
-                <a:solidFill>
-                  <a:srgbClr val="9D174D"/>
-                </a:solidFill>
-                <a:latin typeface="Trebuchet MS" pitchFamily="34" charset="0"/>
-                <a:ea typeface="Trebuchet MS" pitchFamily="34" charset="-122"/>
-                <a:cs typeface="Trebuchet MS" pitchFamily="34" charset="-120"/>
-              </a:rPr>
-              <a:t>-ile</a:t>
-            </a:r>
-            <a:endParaRPr lang="en-US" sz="1300" dirty="0"/>
-          </a:p>
-        </p:txBody>
-      </p:sp>
-      <p:sp>
-        <p:nvSpPr>
-          <p:cNvPr id="43" name="Text 41"/>
-          <p:cNvSpPr/>
-          <p:nvPr/>
-        </p:nvSpPr>
-        <p:spPr>
-          <a:xfrm>
-            <a:off x="365760" y="3611880"/>
-            <a:ext cx="1828800" cy="347472"/>
-          </a:xfrm>
-          <a:prstGeom prst="rect">
-            <a:avLst/>
-          </a:prstGeom>
-          <a:noFill/>
-          <a:ln/>
-        </p:spPr>
-        <p:txBody>
-          <a:bodyPr wrap="square" lIns="0" tIns="0" rIns="0" bIns="0" rtlCol="0" anchor="ctr"/>
-          <a:lstStyle/>
-          <a:p>
-            <a:pPr algn="l" indent="0" marL="0">
-              <a:buNone/>
-            </a:pPr>
-            <a:r>
-              <a:rPr lang="en-US" sz="1200" b="1" dirty="0">
-                <a:solidFill>
-                  <a:srgbClr val="0F172A"/>
-                </a:solidFill>
-                <a:latin typeface="Trebuchet MS" pitchFamily="34" charset="0"/>
-                <a:ea typeface="Trebuchet MS" pitchFamily="34" charset="-122"/>
-                <a:cs typeface="Trebuchet MS" pitchFamily="34" charset="-120"/>
-              </a:rPr>
-              <a:t>Sample words:</a:t>
-            </a:r>
-            <a:endParaRPr lang="en-US" sz="1200" dirty="0"/>
-          </a:p>
-        </p:txBody>
-      </p:sp>
-      <p:sp>
-        <p:nvSpPr>
-          <p:cNvPr id="44" name="Shape 42"/>
-          <p:cNvSpPr/>
-          <p:nvPr/>
-        </p:nvSpPr>
-        <p:spPr>
-          <a:xfrm>
-            <a:off x="365760" y="4023360"/>
-            <a:ext cx="2011680" cy="402336"/>
-          </a:xfrm>
-          <a:prstGeom prst="rect">
-            <a:avLst>
-              <a:gd name="adj" fmla="val 13636"/>
-            </a:avLst>
-          </a:prstGeom>
-          <a:solidFill>
-            <a:srgbClr val="EEF2FF"/>
-          </a:solidFill>
-          <a:ln w="12700">
-            <a:solidFill>
-              <a:srgbClr val="6366F1"/>
-            </a:solidFill>
-            <a:prstDash val="solid"/>
-          </a:ln>
-        </p:spPr>
-      </p:sp>
-      <p:sp>
-        <p:nvSpPr>
-          <p:cNvPr id="45" name="Text 43"/>
-          <p:cNvSpPr/>
-          <p:nvPr/>
-        </p:nvSpPr>
-        <p:spPr>
-          <a:xfrm>
-            <a:off x="365760" y="4023360"/>
-            <a:ext cx="2011680" cy="402336"/>
-          </a:xfrm>
-          <a:prstGeom prst="rect">
-            <a:avLst/>
-          </a:prstGeom>
-          <a:noFill/>
-          <a:ln/>
-        </p:spPr>
-        <p:txBody>
-          <a:bodyPr wrap="square" lIns="0" tIns="0" rIns="0" bIns="0" rtlCol="0" anchor="ctr"/>
-          <a:lstStyle/>
-          <a:p>
-            <a:pPr algn="ctr" indent="0" marL="0">
-              <a:buNone/>
-            </a:pPr>
-            <a:r>
-              <a:rPr lang="en-US" sz="1200" b="1" dirty="0">
-                <a:solidFill>
-                  <a:srgbClr val="4338CA"/>
-                </a:solidFill>
-                <a:latin typeface="Trebuchet MS" pitchFamily="34" charset="0"/>
-                <a:ea typeface="Trebuchet MS" pitchFamily="34" charset="-122"/>
-                <a:cs typeface="Trebuchet MS" pitchFamily="34" charset="-120"/>
-              </a:rPr>
-              <a:t>section</a:t>
-            </a:r>
-            <a:endParaRPr lang="en-US" sz="1200" dirty="0"/>
-          </a:p>
-        </p:txBody>
-      </p:sp>
-      <p:sp>
-        <p:nvSpPr>
-          <p:cNvPr id="46" name="Shape 44"/>
-          <p:cNvSpPr/>
-          <p:nvPr/>
-        </p:nvSpPr>
-        <p:spPr>
-          <a:xfrm>
-            <a:off x="2542032" y="4023360"/>
-            <a:ext cx="2011680" cy="402336"/>
-          </a:xfrm>
-          <a:prstGeom prst="rect">
-            <a:avLst>
-              <a:gd name="adj" fmla="val 13636"/>
-            </a:avLst>
-          </a:prstGeom>
-          <a:solidFill>
-            <a:srgbClr val="EEF2FF"/>
-          </a:solidFill>
-          <a:ln w="12700">
-            <a:solidFill>
-              <a:srgbClr val="6366F1"/>
-            </a:solidFill>
-            <a:prstDash val="solid"/>
-          </a:ln>
-        </p:spPr>
-      </p:sp>
-      <p:sp>
-        <p:nvSpPr>
-          <p:cNvPr id="47" name="Text 45"/>
-          <p:cNvSpPr/>
-          <p:nvPr/>
-        </p:nvSpPr>
-        <p:spPr>
-          <a:xfrm>
-            <a:off x="2542032" y="4023360"/>
-            <a:ext cx="2011680" cy="402336"/>
-          </a:xfrm>
-          <a:prstGeom prst="rect">
-            <a:avLst/>
-          </a:prstGeom>
-          <a:noFill/>
-          <a:ln/>
-        </p:spPr>
-        <p:txBody>
-          <a:bodyPr wrap="square" lIns="0" tIns="0" rIns="0" bIns="0" rtlCol="0" anchor="ctr"/>
-          <a:lstStyle/>
-          <a:p>
-            <a:pPr algn="ctr" indent="0" marL="0">
-              <a:buNone/>
-            </a:pPr>
-            <a:r>
-              <a:rPr lang="en-US" sz="1200" b="1" dirty="0">
-                <a:solidFill>
-                  <a:srgbClr val="4338CA"/>
-                </a:solidFill>
-                <a:latin typeface="Trebuchet MS" pitchFamily="34" charset="0"/>
-                <a:ea typeface="Trebuchet MS" pitchFamily="34" charset="-122"/>
-                <a:cs typeface="Trebuchet MS" pitchFamily="34" charset="-120"/>
-              </a:rPr>
-              <a:t>intersect</a:t>
-            </a:r>
-            <a:endParaRPr lang="en-US" sz="1200" dirty="0"/>
-          </a:p>
-        </p:txBody>
-      </p:sp>
-      <p:sp>
-        <p:nvSpPr>
-          <p:cNvPr id="48" name="Shape 46"/>
-          <p:cNvSpPr/>
-          <p:nvPr/>
-        </p:nvSpPr>
-        <p:spPr>
-          <a:xfrm>
-            <a:off x="4718304" y="4023360"/>
-            <a:ext cx="2011680" cy="402336"/>
-          </a:xfrm>
-          <a:prstGeom prst="rect">
-            <a:avLst>
-              <a:gd name="adj" fmla="val 13636"/>
-            </a:avLst>
-          </a:prstGeom>
-          <a:solidFill>
-            <a:srgbClr val="EEF2FF"/>
-          </a:solidFill>
-          <a:ln w="12700">
-            <a:solidFill>
-              <a:srgbClr val="6366F1"/>
-            </a:solidFill>
-            <a:prstDash val="solid"/>
-          </a:ln>
-        </p:spPr>
-      </p:sp>
-      <p:sp>
-        <p:nvSpPr>
-          <p:cNvPr id="49" name="Text 47"/>
-          <p:cNvSpPr/>
-          <p:nvPr/>
-        </p:nvSpPr>
-        <p:spPr>
-          <a:xfrm>
-            <a:off x="4718304" y="4023360"/>
-            <a:ext cx="2011680" cy="402336"/>
-          </a:xfrm>
-          <a:prstGeom prst="rect">
-            <a:avLst/>
-          </a:prstGeom>
-          <a:noFill/>
-          <a:ln/>
-        </p:spPr>
-        <p:txBody>
-          <a:bodyPr wrap="square" lIns="0" tIns="0" rIns="0" bIns="0" rtlCol="0" anchor="ctr"/>
-          <a:lstStyle/>
-          <a:p>
-            <a:pPr algn="ctr" indent="0" marL="0">
-              <a:buNone/>
-            </a:pPr>
-            <a:r>
-              <a:rPr lang="en-US" sz="1200" b="1" dirty="0">
-                <a:solidFill>
-                  <a:srgbClr val="4338CA"/>
-                </a:solidFill>
-                <a:latin typeface="Trebuchet MS" pitchFamily="34" charset="0"/>
-                <a:ea typeface="Trebuchet MS" pitchFamily="34" charset="-122"/>
-                <a:cs typeface="Trebuchet MS" pitchFamily="34" charset="-120"/>
-              </a:rPr>
-              <a:t>bisect</a:t>
-            </a:r>
-            <a:endParaRPr lang="en-US" sz="1200" dirty="0"/>
-          </a:p>
-        </p:txBody>
-      </p:sp>
-      <p:sp>
-        <p:nvSpPr>
-          <p:cNvPr id="50" name="Shape 48"/>
-          <p:cNvSpPr/>
-          <p:nvPr/>
-        </p:nvSpPr>
-        <p:spPr>
-          <a:xfrm>
-            <a:off x="6894576" y="4023360"/>
-            <a:ext cx="2011680" cy="402336"/>
-          </a:xfrm>
-          <a:prstGeom prst="rect">
-            <a:avLst>
-              <a:gd name="adj" fmla="val 13636"/>
-            </a:avLst>
-          </a:prstGeom>
-          <a:solidFill>
-            <a:srgbClr val="EEF2FF"/>
-          </a:solidFill>
-          <a:ln w="12700">
-            <a:solidFill>
-              <a:srgbClr val="6366F1"/>
-            </a:solidFill>
-            <a:prstDash val="solid"/>
-          </a:ln>
-        </p:spPr>
-      </p:sp>
-      <p:sp>
-        <p:nvSpPr>
-          <p:cNvPr id="51" name="Text 49"/>
-          <p:cNvSpPr/>
-          <p:nvPr/>
-        </p:nvSpPr>
-        <p:spPr>
-          <a:xfrm>
-            <a:off x="6894576" y="4023360"/>
-            <a:ext cx="2011680" cy="402336"/>
-          </a:xfrm>
-          <a:prstGeom prst="rect">
-            <a:avLst/>
-          </a:prstGeom>
-          <a:noFill/>
-          <a:ln/>
-        </p:spPr>
-        <p:txBody>
-          <a:bodyPr wrap="square" lIns="0" tIns="0" rIns="0" bIns="0" rtlCol="0" anchor="ctr"/>
-          <a:lstStyle/>
-          <a:p>
-            <a:pPr algn="ctr" indent="0" marL="0">
-              <a:buNone/>
-            </a:pPr>
-            <a:r>
-              <a:rPr lang="en-US" sz="1200" b="1" dirty="0">
-                <a:solidFill>
-                  <a:srgbClr val="4338CA"/>
-                </a:solidFill>
-                <a:latin typeface="Trebuchet MS" pitchFamily="34" charset="0"/>
-                <a:ea typeface="Trebuchet MS" pitchFamily="34" charset="-122"/>
-                <a:cs typeface="Trebuchet MS" pitchFamily="34" charset="-120"/>
-              </a:rPr>
-              <a:t>dissect</a:t>
-            </a:r>
-            <a:endParaRPr lang="en-US" sz="1200" dirty="0"/>
-          </a:p>
-        </p:txBody>
-      </p:sp>
-      <p:sp>
-        <p:nvSpPr>
-          <p:cNvPr id="52" name="Shape 50"/>
-          <p:cNvSpPr/>
-          <p:nvPr/>
-        </p:nvSpPr>
-        <p:spPr>
-          <a:xfrm>
-            <a:off x="365760" y="4498848"/>
-            <a:ext cx="2011680" cy="402336"/>
-          </a:xfrm>
-          <a:prstGeom prst="rect">
-            <a:avLst>
-              <a:gd name="adj" fmla="val 13636"/>
-            </a:avLst>
-          </a:prstGeom>
-          <a:solidFill>
-            <a:srgbClr val="EEF2FF"/>
-          </a:solidFill>
-          <a:ln w="12700">
-            <a:solidFill>
-              <a:srgbClr val="6366F1"/>
-            </a:solidFill>
-            <a:prstDash val="solid"/>
-          </a:ln>
-        </p:spPr>
-      </p:sp>
-      <p:sp>
-        <p:nvSpPr>
-          <p:cNvPr id="53" name="Text 51"/>
-          <p:cNvSpPr/>
-          <p:nvPr/>
-        </p:nvSpPr>
-        <p:spPr>
-          <a:xfrm>
-            <a:off x="365760" y="4498848"/>
-            <a:ext cx="2011680" cy="402336"/>
-          </a:xfrm>
-          <a:prstGeom prst="rect">
-            <a:avLst/>
-          </a:prstGeom>
-          <a:noFill/>
-          <a:ln/>
-        </p:spPr>
-        <p:txBody>
-          <a:bodyPr wrap="square" lIns="0" tIns="0" rIns="0" bIns="0" rtlCol="0" anchor="ctr"/>
-          <a:lstStyle/>
-          <a:p>
-            <a:pPr algn="ctr" indent="0" marL="0">
-              <a:buNone/>
-            </a:pPr>
-            <a:r>
-              <a:rPr lang="en-US" sz="1200" b="1" dirty="0">
-                <a:solidFill>
-                  <a:srgbClr val="4338CA"/>
-                </a:solidFill>
-                <a:latin typeface="Trebuchet MS" pitchFamily="34" charset="0"/>
-                <a:ea typeface="Trebuchet MS" pitchFamily="34" charset="-122"/>
-                <a:cs typeface="Trebuchet MS" pitchFamily="34" charset="-120"/>
-              </a:rPr>
-              <a:t>sector</a:t>
-            </a:r>
-            <a:endParaRPr lang="en-US" sz="1200" dirty="0"/>
-          </a:p>
-        </p:txBody>
-      </p:sp>
-      <p:sp>
-        <p:nvSpPr>
-          <p:cNvPr id="54" name="Shape 52"/>
-          <p:cNvSpPr/>
-          <p:nvPr/>
-        </p:nvSpPr>
-        <p:spPr>
-          <a:xfrm>
-            <a:off x="2542032" y="4498848"/>
-            <a:ext cx="2011680" cy="402336"/>
-          </a:xfrm>
-          <a:prstGeom prst="rect">
-            <a:avLst>
-              <a:gd name="adj" fmla="val 13636"/>
-            </a:avLst>
-          </a:prstGeom>
-          <a:solidFill>
-            <a:srgbClr val="EEF2FF"/>
-          </a:solidFill>
-          <a:ln w="12700">
-            <a:solidFill>
-              <a:srgbClr val="6366F1"/>
-            </a:solidFill>
-            <a:prstDash val="solid"/>
-          </a:ln>
-        </p:spPr>
-      </p:sp>
-      <p:sp>
-        <p:nvSpPr>
-          <p:cNvPr id="55" name="Text 53"/>
-          <p:cNvSpPr/>
-          <p:nvPr/>
-        </p:nvSpPr>
-        <p:spPr>
-          <a:xfrm>
-            <a:off x="2542032" y="4498848"/>
-            <a:ext cx="2011680" cy="402336"/>
-          </a:xfrm>
-          <a:prstGeom prst="rect">
-            <a:avLst/>
-          </a:prstGeom>
-          <a:noFill/>
-          <a:ln/>
-        </p:spPr>
-        <p:txBody>
-          <a:bodyPr wrap="square" lIns="0" tIns="0" rIns="0" bIns="0" rtlCol="0" anchor="ctr"/>
-          <a:lstStyle/>
-          <a:p>
-            <a:pPr algn="ctr" indent="0" marL="0">
-              <a:buNone/>
-            </a:pPr>
-            <a:r>
-              <a:rPr lang="en-US" sz="1200" b="1" dirty="0">
-                <a:solidFill>
-                  <a:srgbClr val="4338CA"/>
-                </a:solidFill>
-                <a:latin typeface="Trebuchet MS" pitchFamily="34" charset="0"/>
-                <a:ea typeface="Trebuchet MS" pitchFamily="34" charset="-122"/>
-                <a:cs typeface="Trebuchet MS" pitchFamily="34" charset="-120"/>
-              </a:rPr>
               <a:t>insect</a:t>
-            </a:r>
-            <a:endParaRPr lang="en-US" sz="1200" dirty="0"/>
-          </a:p>
-        </p:txBody>
-      </p:sp>
-      <p:sp>
-        <p:nvSpPr>
-          <p:cNvPr id="56" name="Shape 54"/>
-          <p:cNvSpPr/>
-          <p:nvPr/>
-        </p:nvSpPr>
-        <p:spPr>
-          <a:xfrm>
-            <a:off x="4718304" y="4498848"/>
-            <a:ext cx="2011680" cy="402336"/>
-          </a:xfrm>
-          <a:prstGeom prst="rect">
-            <a:avLst>
-              <a:gd name="adj" fmla="val 13636"/>
-            </a:avLst>
-          </a:prstGeom>
-          <a:solidFill>
-            <a:srgbClr val="EEF2FF"/>
-          </a:solidFill>
-          <a:ln w="12700">
-            <a:solidFill>
-              <a:srgbClr val="6366F1"/>
-            </a:solidFill>
-            <a:prstDash val="solid"/>
-          </a:ln>
-        </p:spPr>
-      </p:sp>
-      <p:sp>
-        <p:nvSpPr>
-          <p:cNvPr id="57" name="Text 55"/>
-          <p:cNvSpPr/>
-          <p:nvPr/>
-        </p:nvSpPr>
-        <p:spPr>
-          <a:xfrm>
-            <a:off x="4718304" y="4498848"/>
-            <a:ext cx="2011680" cy="402336"/>
-          </a:xfrm>
-          <a:prstGeom prst="rect">
-            <a:avLst/>
-          </a:prstGeom>
-          <a:noFill/>
-          <a:ln/>
-        </p:spPr>
-        <p:txBody>
-          <a:bodyPr wrap="square" lIns="0" tIns="0" rIns="0" bIns="0" rtlCol="0" anchor="ctr"/>
-          <a:lstStyle/>
-          <a:p>
-            <a:pPr algn="ctr" indent="0" marL="0">
-              <a:buNone/>
-            </a:pPr>
-            <a:r>
-              <a:rPr lang="en-US" sz="1200" b="1" dirty="0">
-                <a:solidFill>
-                  <a:srgbClr val="4338CA"/>
-                </a:solidFill>
-                <a:latin typeface="Trebuchet MS" pitchFamily="34" charset="0"/>
-                <a:ea typeface="Trebuchet MS" pitchFamily="34" charset="-122"/>
-                <a:cs typeface="Trebuchet MS" pitchFamily="34" charset="-120"/>
-              </a:rPr>
-              <a:t>transect</a:t>
-            </a:r>
-            <a:endParaRPr lang="en-US" sz="1200" dirty="0"/>
-          </a:p>
-        </p:txBody>
-      </p:sp>
-      <p:sp>
-        <p:nvSpPr>
-          <p:cNvPr id="58" name="Shape 56"/>
-          <p:cNvSpPr/>
-          <p:nvPr/>
-        </p:nvSpPr>
-        <p:spPr>
-          <a:xfrm>
-            <a:off x="6894576" y="4498848"/>
-            <a:ext cx="2011680" cy="402336"/>
-          </a:xfrm>
-          <a:prstGeom prst="rect">
-            <a:avLst>
-              <a:gd name="adj" fmla="val 13636"/>
-            </a:avLst>
-          </a:prstGeom>
-          <a:solidFill>
-            <a:srgbClr val="EEF2FF"/>
-          </a:solidFill>
-          <a:ln w="12700">
-            <a:solidFill>
-              <a:srgbClr val="6366F1"/>
-            </a:solidFill>
-            <a:prstDash val="solid"/>
-          </a:ln>
-        </p:spPr>
-      </p:sp>
-      <p:sp>
-        <p:nvSpPr>
-          <p:cNvPr id="59" name="Text 57"/>
-          <p:cNvSpPr/>
-          <p:nvPr/>
-        </p:nvSpPr>
-        <p:spPr>
-          <a:xfrm>
-            <a:off x="6894576" y="4498848"/>
-            <a:ext cx="2011680" cy="402336"/>
-          </a:xfrm>
-          <a:prstGeom prst="rect">
-            <a:avLst/>
-          </a:prstGeom>
-          <a:noFill/>
-          <a:ln/>
-        </p:spPr>
-        <p:txBody>
-          <a:bodyPr wrap="square" lIns="0" tIns="0" rIns="0" bIns="0" rtlCol="0" anchor="ctr"/>
-          <a:lstStyle/>
-          <a:p>
-            <a:pPr algn="ctr" indent="0" marL="0">
-              <a:buNone/>
-            </a:pPr>
-            <a:r>
-              <a:rPr lang="en-US" sz="1200" b="1" dirty="0">
-                <a:solidFill>
-                  <a:srgbClr val="4338CA"/>
-                </a:solidFill>
-                <a:latin typeface="Trebuchet MS" pitchFamily="34" charset="0"/>
-                <a:ea typeface="Trebuchet MS" pitchFamily="34" charset="-122"/>
-                <a:cs typeface="Trebuchet MS" pitchFamily="34" charset="-120"/>
-              </a:rPr>
-              <a:t>resection</a:t>
             </a:r>
             <a:endParaRPr lang="en-US" sz="1200" dirty="0"/>
           </a:p>
@@ -35778,7 +34584,7 @@
                 <a:ea typeface="Calibri" pitchFamily="34" charset="-122"/>
                 <a:cs typeface="Calibri" pitchFamily="34" charset="-120"/>
               </a:rPr>
-              <a:t>Word Labs  •  wordlabs.app  •  Root: 'sect' = cut, divide, section</a:t>
+              <a:t>Word Labs  •  wordlabs.app  •  Root: 'sect' = cut</a:t>
             </a:r>
             <a:endParaRPr lang="en-US" sz="800" dirty="0"/>
           </a:p>
@@ -35942,7 +34748,7 @@
                 <a:ea typeface="Calibri" pitchFamily="34" charset="-122"/>
                 <a:cs typeface="Calibri" pitchFamily="34" charset="-120"/>
               </a:rPr>
-              <a:t>The core part of a word carrying its basic meaning. For example, 'sect' means 'cut, divide, section'.</a:t>
+              <a:t>The core part of a word carrying its basic meaning. For example, 'sect' means 'cut'.</a:t>
             </a:r>
             <a:endParaRPr lang="en-US" sz="1350" dirty="0"/>
           </a:p>
@@ -36562,7 +35368,7 @@
                 <a:ea typeface="Calibri" pitchFamily="34" charset="-122"/>
                 <a:cs typeface="Calibri" pitchFamily="34" charset="-120"/>
               </a:rPr>
-              <a:t>Word Labs  •  wordlabs.app  •  Root: 'sect' = cut, divide, section</a:t>
+              <a:t>Word Labs  •  wordlabs.app  •  Root: 'sect' = cut</a:t>
             </a:r>
             <a:endParaRPr lang="en-US" sz="800" dirty="0"/>
           </a:p>
@@ -36674,7 +35480,7 @@
                 <a:ea typeface="Calibri" pitchFamily="34" charset="-122"/>
                 <a:cs typeface="Calibri" pitchFamily="34" charset="-120"/>
               </a:rPr>
-              <a:t>1.  The root 'sect' can be found in the word 'intersect'.</a:t>
+              <a:t>1.  'insect' means 'a small creature with six legs, often with wings and a hard outer body'.</a:t>
             </a:r>
             <a:endParaRPr lang="en-US" sz="1300" dirty="0"/>
           </a:p>
@@ -36813,7 +35619,7 @@
                 <a:ea typeface="Calibri" pitchFamily="34" charset="-122"/>
                 <a:cs typeface="Calibri" pitchFamily="34" charset="-120"/>
               </a:rPr>
-              <a:t>2.  To bisect a line means to cut it into two equal parts.</a:t>
+              <a:t>2.  'sect' means 'a sharp cutting tool used by builders'.</a:t>
             </a:r>
             <a:endParaRPr lang="en-US" sz="1300" dirty="0"/>
           </a:p>
@@ -36836,11 +35642,11 @@
             </a:avLst>
           </a:prstGeom>
           <a:solidFill>
-            <a:srgbClr val="DCFCE7"/>
-          </a:solidFill>
-          <a:ln w="12700">
-            <a:solidFill>
-              <a:srgbClr val="16A34A"/>
+            <a:srgbClr val="FEE2E2"/>
+          </a:solidFill>
+          <a:ln w="12700">
+            <a:solidFill>
+              <a:srgbClr val="DC2626"/>
             </a:solidFill>
             <a:prstDash val="solid"/>
           </a:ln>
@@ -36873,13 +35679,13 @@
             <a:r>
               <a:rPr lang="en-US" sz="1100" b="1" dirty="0">
                 <a:solidFill>
-                  <a:srgbClr val="16A34A"/>
+                  <a:srgbClr val="DC2626"/>
                 </a:solidFill>
                 <a:latin typeface="Trebuchet MS" pitchFamily="34" charset="0"/>
                 <a:ea typeface="Trebuchet MS" pitchFamily="34" charset="-122"/>
                 <a:cs typeface="Trebuchet MS" pitchFamily="34" charset="-120"/>
               </a:rPr>
-              <a:t>TRUE</a:t>
+              <a:t>FALSE</a:t>
             </a:r>
             <a:endParaRPr lang="en-US" sz="1100" dirty="0"/>
           </a:p>
@@ -36952,7 +35758,7 @@
                 <a:ea typeface="Calibri" pitchFamily="34" charset="-122"/>
                 <a:cs typeface="Calibri" pitchFamily="34" charset="-120"/>
               </a:rPr>
-              <a:t>3.  The root 'sect' means to join or connect things together.</a:t>
+              <a:t>3.  'sect' means 'a smaller group within a larger religion or belief system, with its own beliefs'.</a:t>
             </a:r>
             <a:endParaRPr lang="en-US" sz="1300" dirty="0"/>
           </a:p>
@@ -36975,11 +35781,11 @@
             </a:avLst>
           </a:prstGeom>
           <a:solidFill>
-            <a:srgbClr val="FEE2E2"/>
-          </a:solidFill>
-          <a:ln w="12700">
-            <a:solidFill>
-              <a:srgbClr val="DC2626"/>
+            <a:srgbClr val="DCFCE7"/>
+          </a:solidFill>
+          <a:ln w="12700">
+            <a:solidFill>
+              <a:srgbClr val="16A34A"/>
             </a:solidFill>
             <a:prstDash val="solid"/>
           </a:ln>
@@ -37012,13 +35818,13 @@
             <a:r>
               <a:rPr lang="en-US" sz="1100" b="1" dirty="0">
                 <a:solidFill>
-                  <a:srgbClr val="DC2626"/>
+                  <a:srgbClr val="16A34A"/>
                 </a:solidFill>
                 <a:latin typeface="Trebuchet MS" pitchFamily="34" charset="0"/>
                 <a:ea typeface="Trebuchet MS" pitchFamily="34" charset="-122"/>
                 <a:cs typeface="Trebuchet MS" pitchFamily="34" charset="-120"/>
               </a:rPr>
-              <a:t>FALSE</a:t>
+              <a:t>TRUE</a:t>
             </a:r>
             <a:endParaRPr lang="en-US" sz="1100" dirty="0"/>
           </a:p>
@@ -37091,7 +35897,7 @@
                 <a:ea typeface="Calibri" pitchFamily="34" charset="-122"/>
                 <a:cs typeface="Calibri" pitchFamily="34" charset="-120"/>
               </a:rPr>
-              <a:t>4.  The root 'sect' comes from a Latin word meaning to cut or divide.</a:t>
+              <a:t>4.  'sect' means 'cut'.</a:t>
             </a:r>
             <a:endParaRPr lang="en-US" sz="1300" dirty="0"/>
           </a:p>
@@ -37230,7 +36036,7 @@
                 <a:ea typeface="Calibri" pitchFamily="34" charset="-122"/>
                 <a:cs typeface="Calibri" pitchFamily="34" charset="-120"/>
               </a:rPr>
-              <a:t>5.  The word 'insect' has nothing to do with the root 'sect'.</a:t>
+              <a:t>5.  'insect' means 'a large mammal that lives in the ocean'.</a:t>
             </a:r>
             <a:endParaRPr lang="en-US" sz="1300" dirty="0"/>
           </a:p>
@@ -37588,7 +36394,7 @@
                 <a:ea typeface="Calibri" pitchFamily="34" charset="-122"/>
                 <a:cs typeface="Calibri" pitchFamily="34" charset="-120"/>
               </a:rPr>
-              <a:t>Word Labs  •  wordlabs.app  •  Root: 'sect' = cut, divide, section</a:t>
+              <a:t>Word Labs  •  wordlabs.app  •  Root: 'sect' = cut</a:t>
             </a:r>
             <a:endParaRPr lang="en-US" sz="800" dirty="0"/>
           </a:p>
@@ -37725,7 +36531,7 @@
                 <a:ea typeface="Trebuchet MS" pitchFamily="34" charset="-122"/>
                 <a:cs typeface="Trebuchet MS" pitchFamily="34" charset="-120"/>
               </a:rPr>
-              <a:t>cut, divide, section</a:t>
+              <a:t>cut</a:t>
             </a:r>
             <a:endParaRPr lang="en-US" sz="2000" dirty="0"/>
           </a:p>
@@ -37764,7 +36570,7 @@
                 <a:ea typeface="Calibri" pitchFamily="34" charset="-122"/>
                 <a:cs typeface="Calibri" pitchFamily="34" charset="-120"/>
               </a:rPr>
-              <a:t>Origin: Latin: secare</a:t>
+              <a:t>Origin: Latin root</a:t>
             </a:r>
             <a:endParaRPr lang="en-US" sz="1100" dirty="0"/>
           </a:p>
@@ -37869,7 +36675,7 @@
                 <a:ea typeface="Trebuchet MS" pitchFamily="34" charset="-122"/>
                 <a:cs typeface="Trebuchet MS" pitchFamily="34" charset="-120"/>
               </a:rPr>
-              <a:t>section</a:t>
+              <a:t>sect</a:t>
             </a:r>
             <a:endParaRPr lang="en-US" sz="1300" dirty="0"/>
           </a:p>
@@ -37935,337 +36741,7 @@
                 <a:ea typeface="Trebuchet MS" pitchFamily="34" charset="-122"/>
                 <a:cs typeface="Trebuchet MS" pitchFamily="34" charset="-120"/>
               </a:rPr>
-              <a:t>intersect</a:t>
-            </a:r>
-            <a:endParaRPr lang="en-US" sz="1300" dirty="0"/>
-          </a:p>
-        </p:txBody>
-      </p:sp>
-      <p:sp>
-        <p:nvSpPr>
-          <p:cNvPr id="20" name="Shape 18"/>
-          <p:cNvSpPr/>
-          <p:nvPr/>
-        </p:nvSpPr>
-        <p:spPr>
-          <a:xfrm>
-            <a:off x="4663440" y="2743200"/>
-            <a:ext cx="2011680" cy="502920"/>
-          </a:xfrm>
-          <a:prstGeom prst="rect">
-            <a:avLst>
-              <a:gd name="adj" fmla="val 14545"/>
-            </a:avLst>
-          </a:prstGeom>
-          <a:solidFill>
-            <a:srgbClr val="EEF2FF"/>
-          </a:solidFill>
-          <a:ln w="12700">
-            <a:solidFill>
-              <a:srgbClr val="6366F1"/>
-            </a:solidFill>
-            <a:prstDash val="solid"/>
-          </a:ln>
-        </p:spPr>
-      </p:sp>
-      <p:sp>
-        <p:nvSpPr>
-          <p:cNvPr id="21" name="Text 19"/>
-          <p:cNvSpPr/>
-          <p:nvPr/>
-        </p:nvSpPr>
-        <p:spPr>
-          <a:xfrm>
-            <a:off x="4663440" y="2743200"/>
-            <a:ext cx="2011680" cy="502920"/>
-          </a:xfrm>
-          <a:prstGeom prst="rect">
-            <a:avLst/>
-          </a:prstGeom>
-          <a:noFill/>
-          <a:ln/>
-        </p:spPr>
-        <p:txBody>
-          <a:bodyPr wrap="square" lIns="0" tIns="0" rIns="0" bIns="0" rtlCol="0" anchor="ctr"/>
-          <a:lstStyle/>
-          <a:p>
-            <a:pPr algn="ctr" indent="0" marL="0">
-              <a:buNone/>
-            </a:pPr>
-            <a:r>
-              <a:rPr lang="en-US" sz="1300" b="1" dirty="0">
-                <a:solidFill>
-                  <a:srgbClr val="4338CA"/>
-                </a:solidFill>
-                <a:latin typeface="Trebuchet MS" pitchFamily="34" charset="0"/>
-                <a:ea typeface="Trebuchet MS" pitchFamily="34" charset="-122"/>
-                <a:cs typeface="Trebuchet MS" pitchFamily="34" charset="-120"/>
-              </a:rPr>
-              <a:t>bisect</a:t>
-            </a:r>
-            <a:endParaRPr lang="en-US" sz="1300" dirty="0"/>
-          </a:p>
-        </p:txBody>
-      </p:sp>
-      <p:sp>
-        <p:nvSpPr>
-          <p:cNvPr id="22" name="Shape 20"/>
-          <p:cNvSpPr/>
-          <p:nvPr/>
-        </p:nvSpPr>
-        <p:spPr>
-          <a:xfrm>
-            <a:off x="6812280" y="2743200"/>
-            <a:ext cx="2011680" cy="502920"/>
-          </a:xfrm>
-          <a:prstGeom prst="rect">
-            <a:avLst>
-              <a:gd name="adj" fmla="val 14545"/>
-            </a:avLst>
-          </a:prstGeom>
-          <a:solidFill>
-            <a:srgbClr val="EEF2FF"/>
-          </a:solidFill>
-          <a:ln w="12700">
-            <a:solidFill>
-              <a:srgbClr val="6366F1"/>
-            </a:solidFill>
-            <a:prstDash val="solid"/>
-          </a:ln>
-        </p:spPr>
-      </p:sp>
-      <p:sp>
-        <p:nvSpPr>
-          <p:cNvPr id="23" name="Text 21"/>
-          <p:cNvSpPr/>
-          <p:nvPr/>
-        </p:nvSpPr>
-        <p:spPr>
-          <a:xfrm>
-            <a:off x="6812280" y="2743200"/>
-            <a:ext cx="2011680" cy="502920"/>
-          </a:xfrm>
-          <a:prstGeom prst="rect">
-            <a:avLst/>
-          </a:prstGeom>
-          <a:noFill/>
-          <a:ln/>
-        </p:spPr>
-        <p:txBody>
-          <a:bodyPr wrap="square" lIns="0" tIns="0" rIns="0" bIns="0" rtlCol="0" anchor="ctr"/>
-          <a:lstStyle/>
-          <a:p>
-            <a:pPr algn="ctr" indent="0" marL="0">
-              <a:buNone/>
-            </a:pPr>
-            <a:r>
-              <a:rPr lang="en-US" sz="1300" b="1" dirty="0">
-                <a:solidFill>
-                  <a:srgbClr val="4338CA"/>
-                </a:solidFill>
-                <a:latin typeface="Trebuchet MS" pitchFamily="34" charset="0"/>
-                <a:ea typeface="Trebuchet MS" pitchFamily="34" charset="-122"/>
-                <a:cs typeface="Trebuchet MS" pitchFamily="34" charset="-120"/>
-              </a:rPr>
-              <a:t>dissect</a:t>
-            </a:r>
-            <a:endParaRPr lang="en-US" sz="1300" dirty="0"/>
-          </a:p>
-        </p:txBody>
-      </p:sp>
-      <p:sp>
-        <p:nvSpPr>
-          <p:cNvPr id="24" name="Shape 22"/>
-          <p:cNvSpPr/>
-          <p:nvPr/>
-        </p:nvSpPr>
-        <p:spPr>
-          <a:xfrm>
-            <a:off x="365760" y="3401568"/>
-            <a:ext cx="2011680" cy="502920"/>
-          </a:xfrm>
-          <a:prstGeom prst="rect">
-            <a:avLst>
-              <a:gd name="adj" fmla="val 14545"/>
-            </a:avLst>
-          </a:prstGeom>
-          <a:solidFill>
-            <a:srgbClr val="EEF2FF"/>
-          </a:solidFill>
-          <a:ln w="12700">
-            <a:solidFill>
-              <a:srgbClr val="6366F1"/>
-            </a:solidFill>
-            <a:prstDash val="solid"/>
-          </a:ln>
-        </p:spPr>
-      </p:sp>
-      <p:sp>
-        <p:nvSpPr>
-          <p:cNvPr id="25" name="Text 23"/>
-          <p:cNvSpPr/>
-          <p:nvPr/>
-        </p:nvSpPr>
-        <p:spPr>
-          <a:xfrm>
-            <a:off x="365760" y="3401568"/>
-            <a:ext cx="2011680" cy="502920"/>
-          </a:xfrm>
-          <a:prstGeom prst="rect">
-            <a:avLst/>
-          </a:prstGeom>
-          <a:noFill/>
-          <a:ln/>
-        </p:spPr>
-        <p:txBody>
-          <a:bodyPr wrap="square" lIns="0" tIns="0" rIns="0" bIns="0" rtlCol="0" anchor="ctr"/>
-          <a:lstStyle/>
-          <a:p>
-            <a:pPr algn="ctr" indent="0" marL="0">
-              <a:buNone/>
-            </a:pPr>
-            <a:r>
-              <a:rPr lang="en-US" sz="1300" b="1" dirty="0">
-                <a:solidFill>
-                  <a:srgbClr val="4338CA"/>
-                </a:solidFill>
-                <a:latin typeface="Trebuchet MS" pitchFamily="34" charset="0"/>
-                <a:ea typeface="Trebuchet MS" pitchFamily="34" charset="-122"/>
-                <a:cs typeface="Trebuchet MS" pitchFamily="34" charset="-120"/>
-              </a:rPr>
-              <a:t>sector</a:t>
-            </a:r>
-            <a:endParaRPr lang="en-US" sz="1300" dirty="0"/>
-          </a:p>
-        </p:txBody>
-      </p:sp>
-      <p:sp>
-        <p:nvSpPr>
-          <p:cNvPr id="26" name="Shape 24"/>
-          <p:cNvSpPr/>
-          <p:nvPr/>
-        </p:nvSpPr>
-        <p:spPr>
-          <a:xfrm>
-            <a:off x="2514600" y="3401568"/>
-            <a:ext cx="2011680" cy="502920"/>
-          </a:xfrm>
-          <a:prstGeom prst="rect">
-            <a:avLst>
-              <a:gd name="adj" fmla="val 14545"/>
-            </a:avLst>
-          </a:prstGeom>
-          <a:solidFill>
-            <a:srgbClr val="EEF2FF"/>
-          </a:solidFill>
-          <a:ln w="12700">
-            <a:solidFill>
-              <a:srgbClr val="6366F1"/>
-            </a:solidFill>
-            <a:prstDash val="solid"/>
-          </a:ln>
-        </p:spPr>
-      </p:sp>
-      <p:sp>
-        <p:nvSpPr>
-          <p:cNvPr id="27" name="Text 25"/>
-          <p:cNvSpPr/>
-          <p:nvPr/>
-        </p:nvSpPr>
-        <p:spPr>
-          <a:xfrm>
-            <a:off x="2514600" y="3401568"/>
-            <a:ext cx="2011680" cy="502920"/>
-          </a:xfrm>
-          <a:prstGeom prst="rect">
-            <a:avLst/>
-          </a:prstGeom>
-          <a:noFill/>
-          <a:ln/>
-        </p:spPr>
-        <p:txBody>
-          <a:bodyPr wrap="square" lIns="0" tIns="0" rIns="0" bIns="0" rtlCol="0" anchor="ctr"/>
-          <a:lstStyle/>
-          <a:p>
-            <a:pPr algn="ctr" indent="0" marL="0">
-              <a:buNone/>
-            </a:pPr>
-            <a:r>
-              <a:rPr lang="en-US" sz="1300" b="1" dirty="0">
-                <a:solidFill>
-                  <a:srgbClr val="4338CA"/>
-                </a:solidFill>
-                <a:latin typeface="Trebuchet MS" pitchFamily="34" charset="0"/>
-                <a:ea typeface="Trebuchet MS" pitchFamily="34" charset="-122"/>
-                <a:cs typeface="Trebuchet MS" pitchFamily="34" charset="-120"/>
-              </a:rPr>
               <a:t>insect</a:t>
-            </a:r>
-            <a:endParaRPr lang="en-US" sz="1300" dirty="0"/>
-          </a:p>
-        </p:txBody>
-      </p:sp>
-      <p:sp>
-        <p:nvSpPr>
-          <p:cNvPr id="28" name="Shape 26"/>
-          <p:cNvSpPr/>
-          <p:nvPr/>
-        </p:nvSpPr>
-        <p:spPr>
-          <a:xfrm>
-            <a:off x="4663440" y="3401568"/>
-            <a:ext cx="2011680" cy="502920"/>
-          </a:xfrm>
-          <a:prstGeom prst="rect">
-            <a:avLst>
-              <a:gd name="adj" fmla="val 14545"/>
-            </a:avLst>
-          </a:prstGeom>
-          <a:solidFill>
-            <a:srgbClr val="EEF2FF"/>
-          </a:solidFill>
-          <a:ln w="12700">
-            <a:solidFill>
-              <a:srgbClr val="6366F1"/>
-            </a:solidFill>
-            <a:prstDash val="solid"/>
-          </a:ln>
-        </p:spPr>
-      </p:sp>
-      <p:sp>
-        <p:nvSpPr>
-          <p:cNvPr id="29" name="Text 27"/>
-          <p:cNvSpPr/>
-          <p:nvPr/>
-        </p:nvSpPr>
-        <p:spPr>
-          <a:xfrm>
-            <a:off x="4663440" y="3401568"/>
-            <a:ext cx="2011680" cy="502920"/>
-          </a:xfrm>
-          <a:prstGeom prst="rect">
-            <a:avLst/>
-          </a:prstGeom>
-          <a:noFill/>
-          <a:ln/>
-        </p:spPr>
-        <p:txBody>
-          <a:bodyPr wrap="square" lIns="0" tIns="0" rIns="0" bIns="0" rtlCol="0" anchor="ctr"/>
-          <a:lstStyle/>
-          <a:p>
-            <a:pPr algn="ctr" indent="0" marL="0">
-              <a:buNone/>
-            </a:pPr>
-            <a:r>
-              <a:rPr lang="en-US" sz="1300" b="1" dirty="0">
-                <a:solidFill>
-                  <a:srgbClr val="4338CA"/>
-                </a:solidFill>
-                <a:latin typeface="Trebuchet MS" pitchFamily="34" charset="0"/>
-                <a:ea typeface="Trebuchet MS" pitchFamily="34" charset="-122"/>
-                <a:cs typeface="Trebuchet MS" pitchFamily="34" charset="-120"/>
-              </a:rPr>
-              <a:t>transect</a:t>
             </a:r>
             <a:endParaRPr lang="en-US" sz="1300" dirty="0"/>
           </a:p>
@@ -38557,7 +37033,7 @@
                 <a:ea typeface="Calibri" pitchFamily="34" charset="-122"/>
                 <a:cs typeface="Calibri" pitchFamily="34" charset="-120"/>
               </a:rPr>
-              <a:t>Word Labs  •  wordlabs.app  •  Root: 'sect' = cut, divide, section</a:t>
+              <a:t>Word Labs  •  wordlabs.app  •  Root: 'sect' = cut</a:t>
             </a:r>
             <a:endParaRPr lang="en-US" sz="800" dirty="0"/>
           </a:p>
@@ -38986,7 +37462,7 @@
                 <a:ea typeface="Trebuchet MS" pitchFamily="34" charset="-122"/>
                 <a:cs typeface="Trebuchet MS" pitchFamily="34" charset="-120"/>
               </a:rPr>
-              <a:t>-ion</a:t>
+              <a:t>-s</a:t>
             </a:r>
             <a:endParaRPr lang="en-US" sz="1300" dirty="0"/>
           </a:p>
@@ -39050,7 +37526,7 @@
                 <a:ea typeface="Trebuchet MS" pitchFamily="34" charset="-122"/>
                 <a:cs typeface="Trebuchet MS" pitchFamily="34" charset="-120"/>
               </a:rPr>
-              <a:t>di-</a:t>
+              <a:t>dis-</a:t>
             </a:r>
             <a:endParaRPr lang="en-US" sz="1300" dirty="0"/>
           </a:p>
@@ -39203,7 +37679,7 @@
                 <a:ea typeface="Trebuchet MS" pitchFamily="34" charset="-122"/>
                 <a:cs typeface="Trebuchet MS" pitchFamily="34" charset="-120"/>
               </a:rPr>
-              <a:t>inter-</a:t>
+              <a:t>in-</a:t>
             </a:r>
             <a:endParaRPr lang="en-US" sz="1300" dirty="0"/>
           </a:p>
@@ -39249,7 +37725,7 @@
             <a:avLst/>
           </a:prstGeom>
           <a:solidFill>
-            <a:srgbClr val="FCE7F3"/>
+            <a:srgbClr val="F8FAFC"/>
           </a:solidFill>
           <a:ln w="12700">
             <a:solidFill>
@@ -39267,352 +37743,7 @@
         </p:nvSpPr>
         <p:spPr>
           <a:xfrm>
-            <a:off x="5943600" y="2670048"/>
-            <a:ext cx="1463040" cy="420624"/>
-          </a:xfrm>
-          <a:prstGeom prst="rect">
-            <a:avLst/>
-          </a:prstGeom>
-          <a:noFill/>
-          <a:ln/>
-        </p:spPr>
-        <p:txBody>
-          <a:bodyPr wrap="square" lIns="0" tIns="0" rIns="0" bIns="0" rtlCol="0" anchor="ctr"/>
-          <a:lstStyle/>
-          <a:p>
-            <a:pPr algn="ctr" indent="0" marL="0">
-              <a:buNone/>
-            </a:pPr>
-            <a:r>
-              <a:rPr lang="en-US" sz="1300" b="1" dirty="0">
-                <a:solidFill>
-                  <a:srgbClr val="9D174D"/>
-                </a:solidFill>
-                <a:latin typeface="Trebuchet MS" pitchFamily="34" charset="0"/>
-                <a:ea typeface="Trebuchet MS" pitchFamily="34" charset="-122"/>
-                <a:cs typeface="Trebuchet MS" pitchFamily="34" charset="-120"/>
-              </a:rPr>
-              <a:t>-ing</a:t>
-            </a:r>
-            <a:endParaRPr lang="en-US" sz="1300" dirty="0"/>
-          </a:p>
-        </p:txBody>
-      </p:sp>
-      <p:sp>
-        <p:nvSpPr>
-          <p:cNvPr id="33" name="Shape 31"/>
-          <p:cNvSpPr/>
-          <p:nvPr/>
-        </p:nvSpPr>
-        <p:spPr>
-          <a:xfrm>
-            <a:off x="640080" y="3127248"/>
-            <a:ext cx="1463040" cy="420624"/>
-          </a:xfrm>
-          <a:prstGeom prst="rect">
-            <a:avLst/>
-          </a:prstGeom>
-          <a:solidFill>
-            <a:srgbClr val="DDD6FE"/>
-          </a:solidFill>
-          <a:ln w="12700">
-            <a:solidFill>
-              <a:srgbClr val="E5E7EB"/>
-            </a:solidFill>
-            <a:prstDash val="solid"/>
-          </a:ln>
-        </p:spPr>
-      </p:sp>
-      <p:sp>
-        <p:nvSpPr>
-          <p:cNvPr id="34" name="Text 32"/>
-          <p:cNvSpPr/>
-          <p:nvPr/>
-        </p:nvSpPr>
-        <p:spPr>
-          <a:xfrm>
-            <a:off x="640080" y="3127248"/>
-            <a:ext cx="1463040" cy="420624"/>
-          </a:xfrm>
-          <a:prstGeom prst="rect">
-            <a:avLst/>
-          </a:prstGeom>
-          <a:noFill/>
-          <a:ln/>
-        </p:spPr>
-        <p:txBody>
-          <a:bodyPr wrap="square" lIns="0" tIns="0" rIns="0" bIns="0" rtlCol="0" anchor="ctr"/>
-          <a:lstStyle/>
-          <a:p>
-            <a:pPr algn="ctr" indent="0" marL="0">
-              <a:buNone/>
-            </a:pPr>
-            <a:r>
-              <a:rPr lang="en-US" sz="1300" b="1" dirty="0">
-                <a:solidFill>
-                  <a:srgbClr val="4C1D95"/>
-                </a:solidFill>
-                <a:latin typeface="Trebuchet MS" pitchFamily="34" charset="0"/>
-                <a:ea typeface="Trebuchet MS" pitchFamily="34" charset="-122"/>
-                <a:cs typeface="Trebuchet MS" pitchFamily="34" charset="-120"/>
-              </a:rPr>
-              <a:t>re-</a:t>
-            </a:r>
-            <a:endParaRPr lang="en-US" sz="1300" dirty="0"/>
-          </a:p>
-        </p:txBody>
-      </p:sp>
-      <p:sp>
-        <p:nvSpPr>
-          <p:cNvPr id="35" name="Shape 33"/>
-          <p:cNvSpPr/>
-          <p:nvPr/>
-        </p:nvSpPr>
-        <p:spPr>
-          <a:xfrm>
-            <a:off x="3291840" y="3127248"/>
-            <a:ext cx="1645920" cy="420624"/>
-          </a:xfrm>
-          <a:prstGeom prst="rect">
-            <a:avLst/>
-          </a:prstGeom>
-          <a:solidFill>
-            <a:srgbClr val="F1F5F9"/>
-          </a:solidFill>
-          <a:ln w="12700">
-            <a:solidFill>
-              <a:srgbClr val="E5E7EB"/>
-            </a:solidFill>
-            <a:prstDash val="solid"/>
-          </a:ln>
-        </p:spPr>
-      </p:sp>
-      <p:sp>
-        <p:nvSpPr>
-          <p:cNvPr id="36" name="Shape 34"/>
-          <p:cNvSpPr/>
-          <p:nvPr/>
-        </p:nvSpPr>
-        <p:spPr>
-          <a:xfrm>
-            <a:off x="5943600" y="3127248"/>
-            <a:ext cx="1463040" cy="420624"/>
-          </a:xfrm>
-          <a:prstGeom prst="rect">
-            <a:avLst/>
-          </a:prstGeom>
-          <a:solidFill>
-            <a:srgbClr val="FCE7F3"/>
-          </a:solidFill>
-          <a:ln w="12700">
-            <a:solidFill>
-              <a:srgbClr val="E5E7EB"/>
-            </a:solidFill>
-            <a:prstDash val="solid"/>
-          </a:ln>
-        </p:spPr>
-      </p:sp>
-      <p:sp>
-        <p:nvSpPr>
-          <p:cNvPr id="37" name="Text 35"/>
-          <p:cNvSpPr/>
-          <p:nvPr/>
-        </p:nvSpPr>
-        <p:spPr>
-          <a:xfrm>
-            <a:off x="5943600" y="3127248"/>
-            <a:ext cx="1463040" cy="420624"/>
-          </a:xfrm>
-          <a:prstGeom prst="rect">
-            <a:avLst/>
-          </a:prstGeom>
-          <a:noFill/>
-          <a:ln/>
-        </p:spPr>
-        <p:txBody>
-          <a:bodyPr wrap="square" lIns="0" tIns="0" rIns="0" bIns="0" rtlCol="0" anchor="ctr"/>
-          <a:lstStyle/>
-          <a:p>
-            <a:pPr algn="ctr" indent="0" marL="0">
-              <a:buNone/>
-            </a:pPr>
-            <a:r>
-              <a:rPr lang="en-US" sz="1300" b="1" dirty="0">
-                <a:solidFill>
-                  <a:srgbClr val="9D174D"/>
-                </a:solidFill>
-                <a:latin typeface="Trebuchet MS" pitchFamily="34" charset="0"/>
-                <a:ea typeface="Trebuchet MS" pitchFamily="34" charset="-122"/>
-                <a:cs typeface="Trebuchet MS" pitchFamily="34" charset="-120"/>
-              </a:rPr>
-              <a:t>-ed</a:t>
-            </a:r>
-            <a:endParaRPr lang="en-US" sz="1300" dirty="0"/>
-          </a:p>
-        </p:txBody>
-      </p:sp>
-      <p:sp>
-        <p:nvSpPr>
-          <p:cNvPr id="38" name="Shape 36"/>
-          <p:cNvSpPr/>
-          <p:nvPr/>
-        </p:nvSpPr>
-        <p:spPr>
-          <a:xfrm>
-            <a:off x="640080" y="3584448"/>
-            <a:ext cx="1463040" cy="420624"/>
-          </a:xfrm>
-          <a:prstGeom prst="rect">
-            <a:avLst/>
-          </a:prstGeom>
-          <a:solidFill>
-            <a:srgbClr val="DDD6FE"/>
-          </a:solidFill>
-          <a:ln w="12700">
-            <a:solidFill>
-              <a:srgbClr val="E5E7EB"/>
-            </a:solidFill>
-            <a:prstDash val="solid"/>
-          </a:ln>
-        </p:spPr>
-      </p:sp>
-      <p:sp>
-        <p:nvSpPr>
-          <p:cNvPr id="39" name="Text 37"/>
-          <p:cNvSpPr/>
-          <p:nvPr/>
-        </p:nvSpPr>
-        <p:spPr>
-          <a:xfrm>
-            <a:off x="640080" y="3584448"/>
-            <a:ext cx="1463040" cy="420624"/>
-          </a:xfrm>
-          <a:prstGeom prst="rect">
-            <a:avLst/>
-          </a:prstGeom>
-          <a:noFill/>
-          <a:ln/>
-        </p:spPr>
-        <p:txBody>
-          <a:bodyPr wrap="square" lIns="0" tIns="0" rIns="0" bIns="0" rtlCol="0" anchor="ctr"/>
-          <a:lstStyle/>
-          <a:p>
-            <a:pPr algn="ctr" indent="0" marL="0">
-              <a:buNone/>
-            </a:pPr>
-            <a:r>
-              <a:rPr lang="en-US" sz="1300" b="1" dirty="0">
-                <a:solidFill>
-                  <a:srgbClr val="4C1D95"/>
-                </a:solidFill>
-                <a:latin typeface="Trebuchet MS" pitchFamily="34" charset="0"/>
-                <a:ea typeface="Trebuchet MS" pitchFamily="34" charset="-122"/>
-                <a:cs typeface="Trebuchet MS" pitchFamily="34" charset="-120"/>
-              </a:rPr>
-              <a:t>trans-</a:t>
-            </a:r>
-            <a:endParaRPr lang="en-US" sz="1300" dirty="0"/>
-          </a:p>
-        </p:txBody>
-      </p:sp>
-      <p:sp>
-        <p:nvSpPr>
-          <p:cNvPr id="40" name="Shape 38"/>
-          <p:cNvSpPr/>
-          <p:nvPr/>
-        </p:nvSpPr>
-        <p:spPr>
-          <a:xfrm>
-            <a:off x="3291840" y="3584448"/>
-            <a:ext cx="1645920" cy="420624"/>
-          </a:xfrm>
-          <a:prstGeom prst="rect">
-            <a:avLst/>
-          </a:prstGeom>
-          <a:solidFill>
-            <a:srgbClr val="F8FAFC"/>
-          </a:solidFill>
-          <a:ln w="12700">
-            <a:solidFill>
-              <a:srgbClr val="E5E7EB"/>
-            </a:solidFill>
-            <a:prstDash val="solid"/>
-          </a:ln>
-        </p:spPr>
-      </p:sp>
-      <p:sp>
-        <p:nvSpPr>
-          <p:cNvPr id="41" name="Shape 39"/>
-          <p:cNvSpPr/>
-          <p:nvPr/>
-        </p:nvSpPr>
-        <p:spPr>
-          <a:xfrm>
-            <a:off x="5943600" y="3584448"/>
-            <a:ext cx="1463040" cy="420624"/>
-          </a:xfrm>
-          <a:prstGeom prst="rect">
-            <a:avLst/>
-          </a:prstGeom>
-          <a:solidFill>
-            <a:srgbClr val="FCE7F3"/>
-          </a:solidFill>
-          <a:ln w="12700">
-            <a:solidFill>
-              <a:srgbClr val="E5E7EB"/>
-            </a:solidFill>
-            <a:prstDash val="solid"/>
-          </a:ln>
-        </p:spPr>
-      </p:sp>
-      <p:sp>
-        <p:nvSpPr>
-          <p:cNvPr id="42" name="Text 40"/>
-          <p:cNvSpPr/>
-          <p:nvPr/>
-        </p:nvSpPr>
-        <p:spPr>
-          <a:xfrm>
-            <a:off x="5943600" y="3584448"/>
-            <a:ext cx="1463040" cy="420624"/>
-          </a:xfrm>
-          <a:prstGeom prst="rect">
-            <a:avLst/>
-          </a:prstGeom>
-          <a:noFill/>
-          <a:ln/>
-        </p:spPr>
-        <p:txBody>
-          <a:bodyPr wrap="square" lIns="0" tIns="0" rIns="0" bIns="0" rtlCol="0" anchor="ctr"/>
-          <a:lstStyle/>
-          <a:p>
-            <a:pPr algn="ctr" indent="0" marL="0">
-              <a:buNone/>
-            </a:pPr>
-            <a:r>
-              <a:rPr lang="en-US" sz="1300" b="1" dirty="0">
-                <a:solidFill>
-                  <a:srgbClr val="9D174D"/>
-                </a:solidFill>
-                <a:latin typeface="Trebuchet MS" pitchFamily="34" charset="0"/>
-                <a:ea typeface="Trebuchet MS" pitchFamily="34" charset="-122"/>
-                <a:cs typeface="Trebuchet MS" pitchFamily="34" charset="-120"/>
-              </a:rPr>
-              <a:t>-ile</a:t>
-            </a:r>
-            <a:endParaRPr lang="en-US" sz="1300" dirty="0"/>
-          </a:p>
-        </p:txBody>
-      </p:sp>
-      <p:sp>
-        <p:nvSpPr>
-          <p:cNvPr id="43" name="Text 41"/>
-          <p:cNvSpPr/>
-          <p:nvPr/>
-        </p:nvSpPr>
-        <p:spPr>
-          <a:xfrm>
-            <a:off x="365760" y="4178808"/>
+            <a:off x="365760" y="3264408"/>
             <a:ext cx="1097280" cy="420624"/>
           </a:xfrm>
           <a:prstGeom prst="rect">
@@ -39645,13 +37776,13 @@
       </p:sp>
       <p:sp>
         <p:nvSpPr>
-          <p:cNvPr id="44" name="Shape 42"/>
-          <p:cNvSpPr/>
-          <p:nvPr/>
-        </p:nvSpPr>
-        <p:spPr>
-          <a:xfrm>
-            <a:off x="1508760" y="4178808"/>
+          <p:cNvPr id="33" name="Shape 31"/>
+          <p:cNvSpPr/>
+          <p:nvPr/>
+        </p:nvSpPr>
+        <p:spPr>
+          <a:xfrm>
+            <a:off x="1508760" y="3264408"/>
             <a:ext cx="822960" cy="420624"/>
           </a:xfrm>
           <a:prstGeom prst="rect">
@@ -39679,13 +37810,13 @@
       </p:sp>
       <p:sp>
         <p:nvSpPr>
-          <p:cNvPr id="45" name="Text 43"/>
-          <p:cNvSpPr/>
-          <p:nvPr/>
-        </p:nvSpPr>
-        <p:spPr>
-          <a:xfrm>
-            <a:off x="1508760" y="4178808"/>
+          <p:cNvPr id="34" name="Text 32"/>
+          <p:cNvSpPr/>
+          <p:nvPr/>
+        </p:nvSpPr>
+        <p:spPr>
+          <a:xfrm>
+            <a:off x="1508760" y="3264408"/>
             <a:ext cx="822960" cy="420624"/>
           </a:xfrm>
           <a:prstGeom prst="rect">
@@ -39718,13 +37849,13 @@
       </p:sp>
       <p:sp>
         <p:nvSpPr>
-          <p:cNvPr id="46" name="Text 44"/>
-          <p:cNvSpPr/>
-          <p:nvPr/>
-        </p:nvSpPr>
-        <p:spPr>
-          <a:xfrm>
-            <a:off x="2359152" y="4178808"/>
+          <p:cNvPr id="35" name="Text 33"/>
+          <p:cNvSpPr/>
+          <p:nvPr/>
+        </p:nvSpPr>
+        <p:spPr>
+          <a:xfrm>
+            <a:off x="2359152" y="3264408"/>
             <a:ext cx="320040" cy="420624"/>
           </a:xfrm>
           <a:prstGeom prst="rect">
@@ -39757,13 +37888,13 @@
       </p:sp>
       <p:sp>
         <p:nvSpPr>
-          <p:cNvPr id="47" name="Shape 45"/>
-          <p:cNvSpPr/>
-          <p:nvPr/>
-        </p:nvSpPr>
-        <p:spPr>
-          <a:xfrm>
-            <a:off x="2706624" y="4178808"/>
+          <p:cNvPr id="36" name="Shape 34"/>
+          <p:cNvSpPr/>
+          <p:nvPr/>
+        </p:nvSpPr>
+        <p:spPr>
+          <a:xfrm>
+            <a:off x="2706624" y="3264408"/>
             <a:ext cx="1243584" cy="420624"/>
           </a:xfrm>
           <a:prstGeom prst="rect">
@@ -39791,13 +37922,13 @@
       </p:sp>
       <p:sp>
         <p:nvSpPr>
-          <p:cNvPr id="48" name="Text 46"/>
-          <p:cNvSpPr/>
-          <p:nvPr/>
-        </p:nvSpPr>
-        <p:spPr>
-          <a:xfrm>
-            <a:off x="2706624" y="4178808"/>
+          <p:cNvPr id="37" name="Text 35"/>
+          <p:cNvSpPr/>
+          <p:nvPr/>
+        </p:nvSpPr>
+        <p:spPr>
+          <a:xfrm>
+            <a:off x="2706624" y="3264408"/>
             <a:ext cx="1243584" cy="420624"/>
           </a:xfrm>
           <a:prstGeom prst="rect">
@@ -39830,13 +37961,13 @@
       </p:sp>
       <p:sp>
         <p:nvSpPr>
-          <p:cNvPr id="49" name="Text 47"/>
-          <p:cNvSpPr/>
-          <p:nvPr/>
-        </p:nvSpPr>
-        <p:spPr>
-          <a:xfrm>
-            <a:off x="3977640" y="4178808"/>
+          <p:cNvPr id="38" name="Text 36"/>
+          <p:cNvSpPr/>
+          <p:nvPr/>
+        </p:nvSpPr>
+        <p:spPr>
+          <a:xfrm>
+            <a:off x="3977640" y="3264408"/>
             <a:ext cx="320040" cy="420624"/>
           </a:xfrm>
           <a:prstGeom prst="rect">
@@ -39869,14 +38000,14 @@
       </p:sp>
       <p:sp>
         <p:nvSpPr>
-          <p:cNvPr id="50" name="Shape 48"/>
-          <p:cNvSpPr/>
-          <p:nvPr/>
-        </p:nvSpPr>
-        <p:spPr>
-          <a:xfrm>
-            <a:off x="4325112" y="4178808"/>
-            <a:ext cx="950976" cy="420624"/>
+          <p:cNvPr id="39" name="Shape 37"/>
+          <p:cNvSpPr/>
+          <p:nvPr/>
+        </p:nvSpPr>
+        <p:spPr>
+          <a:xfrm>
+            <a:off x="4325112" y="3264408"/>
+            <a:ext cx="822960" cy="420624"/>
           </a:xfrm>
           <a:prstGeom prst="rect">
             <a:avLst>
@@ -39903,14 +38034,14 @@
       </p:sp>
       <p:sp>
         <p:nvSpPr>
-          <p:cNvPr id="51" name="Text 49"/>
-          <p:cNvSpPr/>
-          <p:nvPr/>
-        </p:nvSpPr>
-        <p:spPr>
-          <a:xfrm>
-            <a:off x="4325112" y="4178808"/>
-            <a:ext cx="950976" cy="420624"/>
+          <p:cNvPr id="40" name="Text 38"/>
+          <p:cNvSpPr/>
+          <p:nvPr/>
+        </p:nvSpPr>
+        <p:spPr>
+          <a:xfrm>
+            <a:off x="4325112" y="3264408"/>
+            <a:ext cx="822960" cy="420624"/>
           </a:xfrm>
           <a:prstGeom prst="rect">
             <a:avLst/>
@@ -39934,7 +38065,7 @@
                 <a:ea typeface="Trebuchet MS" pitchFamily="34" charset="-122"/>
                 <a:cs typeface="Trebuchet MS" pitchFamily="34" charset="-120"/>
               </a:rPr>
-              <a:t>-ion</a:t>
+              <a:t>-s</a:t>
             </a:r>
             <a:endParaRPr lang="en-US" sz="1300" dirty="0"/>
           </a:p>
@@ -39942,13 +38073,13 @@
       </p:sp>
       <p:sp>
         <p:nvSpPr>
-          <p:cNvPr id="52" name="Text 50"/>
-          <p:cNvSpPr/>
-          <p:nvPr/>
-        </p:nvSpPr>
-        <p:spPr>
-          <a:xfrm>
-            <a:off x="5349240" y="4178808"/>
+          <p:cNvPr id="41" name="Text 39"/>
+          <p:cNvSpPr/>
+          <p:nvPr/>
+        </p:nvSpPr>
+        <p:spPr>
+          <a:xfrm>
+            <a:off x="5221224" y="3264408"/>
             <a:ext cx="365760" cy="420624"/>
           </a:xfrm>
           <a:prstGeom prst="rect">
@@ -39981,13 +38112,13 @@
       </p:sp>
       <p:sp>
         <p:nvSpPr>
-          <p:cNvPr id="53" name="Shape 51"/>
-          <p:cNvSpPr/>
-          <p:nvPr/>
-        </p:nvSpPr>
-        <p:spPr>
-          <a:xfrm>
-            <a:off x="5760720" y="4178808"/>
+          <p:cNvPr id="42" name="Shape 40"/>
+          <p:cNvSpPr/>
+          <p:nvPr/>
+        </p:nvSpPr>
+        <p:spPr>
+          <a:xfrm>
+            <a:off x="5632704" y="3264408"/>
             <a:ext cx="2194560" cy="420624"/>
           </a:xfrm>
           <a:prstGeom prst="rect">
@@ -40008,13 +38139,13 @@
       </p:sp>
       <p:sp>
         <p:nvSpPr>
-          <p:cNvPr id="54" name="Text 52"/>
-          <p:cNvSpPr/>
-          <p:nvPr/>
-        </p:nvSpPr>
-        <p:spPr>
-          <a:xfrm>
-            <a:off x="5760720" y="4178808"/>
+          <p:cNvPr id="43" name="Text 41"/>
+          <p:cNvSpPr/>
+          <p:nvPr/>
+        </p:nvSpPr>
+        <p:spPr>
+          <a:xfrm>
+            <a:off x="5632704" y="3264408"/>
             <a:ext cx="2194560" cy="420624"/>
           </a:xfrm>
           <a:prstGeom prst="rect">
@@ -40039,7 +38170,7 @@
                 <a:ea typeface="Trebuchet MS" pitchFamily="34" charset="-122"/>
                 <a:cs typeface="Trebuchet MS" pitchFamily="34" charset="-120"/>
               </a:rPr>
-              <a:t>section</a:t>
+              <a:t>sect</a:t>
             </a:r>
             <a:endParaRPr lang="en-US" sz="1400" dirty="0"/>
           </a:p>
@@ -40331,7 +38462,7 @@
                 <a:ea typeface="Calibri" pitchFamily="34" charset="-122"/>
                 <a:cs typeface="Calibri" pitchFamily="34" charset="-120"/>
               </a:rPr>
-              <a:t>Word Labs  •  wordlabs.app  •  Root: 'sect' = cut, divide, section</a:t>
+              <a:t>Word Labs  •  wordlabs.app  •  Root: 'sect' = cut</a:t>
             </a:r>
             <a:endParaRPr lang="en-US" sz="800" dirty="0"/>
           </a:p>
@@ -40443,7 +38574,7 @@
                 <a:ea typeface="Trebuchet MS" pitchFamily="34" charset="-122"/>
                 <a:cs typeface="Trebuchet MS" pitchFamily="34" charset="-120"/>
               </a:rPr>
-              <a:t>section</a:t>
+              <a:t>sect</a:t>
             </a:r>
             <a:endParaRPr lang="en-US" sz="1200" dirty="0"/>
           </a:p>
@@ -40509,7 +38640,7 @@
                 <a:ea typeface="Calibri" pitchFamily="34" charset="-122"/>
                 <a:cs typeface="Calibri" pitchFamily="34" charset="-120"/>
               </a:rPr>
-              <a:t>A line or strip used by scientists to study plants and animals across an area.</a:t>
+              <a:t>a small creature with six legs, often with wings and a hard outer body</a:t>
             </a:r>
             <a:endParaRPr lang="en-US" sz="1200" dirty="0"/>
           </a:p>
@@ -40582,7 +38713,7 @@
                 <a:ea typeface="Trebuchet MS" pitchFamily="34" charset="-122"/>
                 <a:cs typeface="Trebuchet MS" pitchFamily="34" charset="-120"/>
               </a:rPr>
-              <a:t>intersect</a:t>
+              <a:t>insect</a:t>
             </a:r>
             <a:endParaRPr lang="en-US" sz="1200" dirty="0"/>
           </a:p>
@@ -40648,702 +38779,7 @@
                 <a:ea typeface="Calibri" pitchFamily="34" charset="-122"/>
                 <a:cs typeface="Calibri" pitchFamily="34" charset="-120"/>
               </a:rPr>
-              <a:t>A separate part or division of something, like a city or economy.</a:t>
-            </a:r>
-            <a:endParaRPr lang="en-US" sz="1200" dirty="0"/>
-          </a:p>
-        </p:txBody>
-      </p:sp>
-      <p:sp>
-        <p:nvSpPr>
-          <p:cNvPr id="19" name="Shape 17"/>
-          <p:cNvSpPr/>
-          <p:nvPr/>
-        </p:nvSpPr>
-        <p:spPr>
-          <a:xfrm>
-            <a:off x="365760" y="2249424"/>
-            <a:ext cx="2011680" cy="457200"/>
-          </a:xfrm>
-          <a:prstGeom prst="rect">
-            <a:avLst>
-              <a:gd name="adj" fmla="val 12000"/>
-            </a:avLst>
-          </a:prstGeom>
-          <a:solidFill>
-            <a:srgbClr val="EEF2FF"/>
-          </a:solidFill>
-          <a:ln w="12700">
-            <a:solidFill>
-              <a:srgbClr val="6366F1"/>
-            </a:solidFill>
-            <a:prstDash val="solid"/>
-          </a:ln>
-          <a:effectLst>
-            <a:outerShdw sx="100000" sy="100000" kx="0" ky="0" algn="bl" rotWithShape="0" blurRad="101600" dist="38100" dir="8100000">
-              <a:srgbClr val="000000">
-                <a:alpha val="12000"/>
-              </a:srgbClr>
-            </a:outerShdw>
-          </a:effectLst>
-        </p:spPr>
-      </p:sp>
-      <p:sp>
-        <p:nvSpPr>
-          <p:cNvPr id="20" name="Text 18"/>
-          <p:cNvSpPr/>
-          <p:nvPr/>
-        </p:nvSpPr>
-        <p:spPr>
-          <a:xfrm>
-            <a:off x="365760" y="2249424"/>
-            <a:ext cx="2011680" cy="457200"/>
-          </a:xfrm>
-          <a:prstGeom prst="rect">
-            <a:avLst/>
-          </a:prstGeom>
-          <a:noFill/>
-          <a:ln/>
-        </p:spPr>
-        <p:txBody>
-          <a:bodyPr wrap="square" lIns="0" tIns="0" rIns="0" bIns="0" rtlCol="0" anchor="ctr"/>
-          <a:lstStyle/>
-          <a:p>
-            <a:pPr algn="ctr" indent="0" marL="0">
-              <a:buNone/>
-            </a:pPr>
-            <a:r>
-              <a:rPr lang="en-US" sz="1200" b="1" dirty="0">
-                <a:solidFill>
-                  <a:srgbClr val="4338CA"/>
-                </a:solidFill>
-                <a:latin typeface="Trebuchet MS" pitchFamily="34" charset="0"/>
-                <a:ea typeface="Trebuchet MS" pitchFamily="34" charset="-122"/>
-                <a:cs typeface="Trebuchet MS" pitchFamily="34" charset="-120"/>
-              </a:rPr>
-              <a:t>bisect</a:t>
-            </a:r>
-            <a:endParaRPr lang="en-US" sz="1200" dirty="0"/>
-          </a:p>
-        </p:txBody>
-      </p:sp>
-      <p:sp>
-        <p:nvSpPr>
-          <p:cNvPr id="21" name="Shape 19"/>
-          <p:cNvSpPr/>
-          <p:nvPr/>
-        </p:nvSpPr>
-        <p:spPr>
-          <a:xfrm>
-            <a:off x="2514600" y="2249424"/>
-            <a:ext cx="6263640" cy="457200"/>
-          </a:xfrm>
-          <a:prstGeom prst="rect">
-            <a:avLst>
-              <a:gd name="adj" fmla="val 12000"/>
-            </a:avLst>
-          </a:prstGeom>
-          <a:solidFill>
-            <a:srgbClr val="F8FAFC"/>
-          </a:solidFill>
-          <a:ln w="12700">
-            <a:solidFill>
-              <a:srgbClr val="E2E8F0"/>
-            </a:solidFill>
-            <a:prstDash val="solid"/>
-          </a:ln>
-        </p:spPr>
-      </p:sp>
-      <p:sp>
-        <p:nvSpPr>
-          <p:cNvPr id="22" name="Text 20"/>
-          <p:cNvSpPr/>
-          <p:nvPr/>
-        </p:nvSpPr>
-        <p:spPr>
-          <a:xfrm>
-            <a:off x="2651760" y="2249424"/>
-            <a:ext cx="6035040" cy="457200"/>
-          </a:xfrm>
-          <a:prstGeom prst="rect">
-            <a:avLst/>
-          </a:prstGeom>
-          <a:noFill/>
-          <a:ln/>
-        </p:spPr>
-        <p:txBody>
-          <a:bodyPr wrap="square" rtlCol="0" anchor="ctr"/>
-          <a:lstStyle/>
-          <a:p>
-            <a:pPr algn="l" indent="0" marL="0">
-              <a:buNone/>
-            </a:pPr>
-            <a:r>
-              <a:rPr lang="en-US" sz="1200" dirty="0">
-                <a:solidFill>
-                  <a:srgbClr val="0F172A"/>
-                </a:solidFill>
-                <a:latin typeface="Calibri" pitchFamily="34" charset="0"/>
-                <a:ea typeface="Calibri" pitchFamily="34" charset="-122"/>
-                <a:cs typeface="Calibri" pitchFamily="34" charset="-120"/>
-              </a:rPr>
-              <a:t>To carefully cut something open to examine its parts.</a:t>
-            </a:r>
-            <a:endParaRPr lang="en-US" sz="1200" dirty="0"/>
-          </a:p>
-        </p:txBody>
-      </p:sp>
-      <p:sp>
-        <p:nvSpPr>
-          <p:cNvPr id="23" name="Shape 21"/>
-          <p:cNvSpPr/>
-          <p:nvPr/>
-        </p:nvSpPr>
-        <p:spPr>
-          <a:xfrm>
-            <a:off x="365760" y="2779776"/>
-            <a:ext cx="2011680" cy="457200"/>
-          </a:xfrm>
-          <a:prstGeom prst="rect">
-            <a:avLst>
-              <a:gd name="adj" fmla="val 12000"/>
-            </a:avLst>
-          </a:prstGeom>
-          <a:solidFill>
-            <a:srgbClr val="EEF2FF"/>
-          </a:solidFill>
-          <a:ln w="12700">
-            <a:solidFill>
-              <a:srgbClr val="6366F1"/>
-            </a:solidFill>
-            <a:prstDash val="solid"/>
-          </a:ln>
-          <a:effectLst>
-            <a:outerShdw sx="100000" sy="100000" kx="0" ky="0" algn="bl" rotWithShape="0" blurRad="101600" dist="38100" dir="8100000">
-              <a:srgbClr val="000000">
-                <a:alpha val="12000"/>
-              </a:srgbClr>
-            </a:outerShdw>
-          </a:effectLst>
-        </p:spPr>
-      </p:sp>
-      <p:sp>
-        <p:nvSpPr>
-          <p:cNvPr id="24" name="Text 22"/>
-          <p:cNvSpPr/>
-          <p:nvPr/>
-        </p:nvSpPr>
-        <p:spPr>
-          <a:xfrm>
-            <a:off x="365760" y="2779776"/>
-            <a:ext cx="2011680" cy="457200"/>
-          </a:xfrm>
-          <a:prstGeom prst="rect">
-            <a:avLst/>
-          </a:prstGeom>
-          <a:noFill/>
-          <a:ln/>
-        </p:spPr>
-        <p:txBody>
-          <a:bodyPr wrap="square" lIns="0" tIns="0" rIns="0" bIns="0" rtlCol="0" anchor="ctr"/>
-          <a:lstStyle/>
-          <a:p>
-            <a:pPr algn="ctr" indent="0" marL="0">
-              <a:buNone/>
-            </a:pPr>
-            <a:r>
-              <a:rPr lang="en-US" sz="1200" b="1" dirty="0">
-                <a:solidFill>
-                  <a:srgbClr val="4338CA"/>
-                </a:solidFill>
-                <a:latin typeface="Trebuchet MS" pitchFamily="34" charset="0"/>
-                <a:ea typeface="Trebuchet MS" pitchFamily="34" charset="-122"/>
-                <a:cs typeface="Trebuchet MS" pitchFamily="34" charset="-120"/>
-              </a:rPr>
-              <a:t>dissect</a:t>
-            </a:r>
-            <a:endParaRPr lang="en-US" sz="1200" dirty="0"/>
-          </a:p>
-        </p:txBody>
-      </p:sp>
-      <p:sp>
-        <p:nvSpPr>
-          <p:cNvPr id="25" name="Shape 23"/>
-          <p:cNvSpPr/>
-          <p:nvPr/>
-        </p:nvSpPr>
-        <p:spPr>
-          <a:xfrm>
-            <a:off x="2514600" y="2779776"/>
-            <a:ext cx="6263640" cy="457200"/>
-          </a:xfrm>
-          <a:prstGeom prst="rect">
-            <a:avLst>
-              <a:gd name="adj" fmla="val 12000"/>
-            </a:avLst>
-          </a:prstGeom>
-          <a:solidFill>
-            <a:srgbClr val="F8FAFC"/>
-          </a:solidFill>
-          <a:ln w="12700">
-            <a:solidFill>
-              <a:srgbClr val="E2E8F0"/>
-            </a:solidFill>
-            <a:prstDash val="solid"/>
-          </a:ln>
-        </p:spPr>
-      </p:sp>
-      <p:sp>
-        <p:nvSpPr>
-          <p:cNvPr id="26" name="Text 24"/>
-          <p:cNvSpPr/>
-          <p:nvPr/>
-        </p:nvSpPr>
-        <p:spPr>
-          <a:xfrm>
-            <a:off x="2651760" y="2779776"/>
-            <a:ext cx="6035040" cy="457200"/>
-          </a:xfrm>
-          <a:prstGeom prst="rect">
-            <a:avLst/>
-          </a:prstGeom>
-          <a:noFill/>
-          <a:ln/>
-        </p:spPr>
-        <p:txBody>
-          <a:bodyPr wrap="square" rtlCol="0" anchor="ctr"/>
-          <a:lstStyle/>
-          <a:p>
-            <a:pPr algn="l" indent="0" marL="0">
-              <a:buNone/>
-            </a:pPr>
-            <a:r>
-              <a:rPr lang="en-US" sz="1200" dirty="0">
-                <a:solidFill>
-                  <a:srgbClr val="0F172A"/>
-                </a:solidFill>
-                <a:latin typeface="Calibri" pitchFamily="34" charset="0"/>
-                <a:ea typeface="Calibri" pitchFamily="34" charset="-122"/>
-                <a:cs typeface="Calibri" pitchFamily="34" charset="-120"/>
-              </a:rPr>
-              <a:t>A small creature with six legs and a body divided into three parts.</a:t>
-            </a:r>
-            <a:endParaRPr lang="en-US" sz="1200" dirty="0"/>
-          </a:p>
-        </p:txBody>
-      </p:sp>
-      <p:sp>
-        <p:nvSpPr>
-          <p:cNvPr id="27" name="Shape 25"/>
-          <p:cNvSpPr/>
-          <p:nvPr/>
-        </p:nvSpPr>
-        <p:spPr>
-          <a:xfrm>
-            <a:off x="365760" y="3310128"/>
-            <a:ext cx="2011680" cy="457200"/>
-          </a:xfrm>
-          <a:prstGeom prst="rect">
-            <a:avLst>
-              <a:gd name="adj" fmla="val 12000"/>
-            </a:avLst>
-          </a:prstGeom>
-          <a:solidFill>
-            <a:srgbClr val="EEF2FF"/>
-          </a:solidFill>
-          <a:ln w="12700">
-            <a:solidFill>
-              <a:srgbClr val="6366F1"/>
-            </a:solidFill>
-            <a:prstDash val="solid"/>
-          </a:ln>
-          <a:effectLst>
-            <a:outerShdw sx="100000" sy="100000" kx="0" ky="0" algn="bl" rotWithShape="0" blurRad="101600" dist="38100" dir="8100000">
-              <a:srgbClr val="000000">
-                <a:alpha val="12000"/>
-              </a:srgbClr>
-            </a:outerShdw>
-          </a:effectLst>
-        </p:spPr>
-      </p:sp>
-      <p:sp>
-        <p:nvSpPr>
-          <p:cNvPr id="28" name="Text 26"/>
-          <p:cNvSpPr/>
-          <p:nvPr/>
-        </p:nvSpPr>
-        <p:spPr>
-          <a:xfrm>
-            <a:off x="365760" y="3310128"/>
-            <a:ext cx="2011680" cy="457200"/>
-          </a:xfrm>
-          <a:prstGeom prst="rect">
-            <a:avLst/>
-          </a:prstGeom>
-          <a:noFill/>
-          <a:ln/>
-        </p:spPr>
-        <p:txBody>
-          <a:bodyPr wrap="square" lIns="0" tIns="0" rIns="0" bIns="0" rtlCol="0" anchor="ctr"/>
-          <a:lstStyle/>
-          <a:p>
-            <a:pPr algn="ctr" indent="0" marL="0">
-              <a:buNone/>
-            </a:pPr>
-            <a:r>
-              <a:rPr lang="en-US" sz="1200" b="1" dirty="0">
-                <a:solidFill>
-                  <a:srgbClr val="4338CA"/>
-                </a:solidFill>
-                <a:latin typeface="Trebuchet MS" pitchFamily="34" charset="0"/>
-                <a:ea typeface="Trebuchet MS" pitchFamily="34" charset="-122"/>
-                <a:cs typeface="Trebuchet MS" pitchFamily="34" charset="-120"/>
-              </a:rPr>
-              <a:t>sector</a:t>
-            </a:r>
-            <a:endParaRPr lang="en-US" sz="1200" dirty="0"/>
-          </a:p>
-        </p:txBody>
-      </p:sp>
-      <p:sp>
-        <p:nvSpPr>
-          <p:cNvPr id="29" name="Shape 27"/>
-          <p:cNvSpPr/>
-          <p:nvPr/>
-        </p:nvSpPr>
-        <p:spPr>
-          <a:xfrm>
-            <a:off x="2514600" y="3310128"/>
-            <a:ext cx="6263640" cy="457200"/>
-          </a:xfrm>
-          <a:prstGeom prst="rect">
-            <a:avLst>
-              <a:gd name="adj" fmla="val 12000"/>
-            </a:avLst>
-          </a:prstGeom>
-          <a:solidFill>
-            <a:srgbClr val="F8FAFC"/>
-          </a:solidFill>
-          <a:ln w="12700">
-            <a:solidFill>
-              <a:srgbClr val="E2E8F0"/>
-            </a:solidFill>
-            <a:prstDash val="solid"/>
-          </a:ln>
-        </p:spPr>
-      </p:sp>
-      <p:sp>
-        <p:nvSpPr>
-          <p:cNvPr id="30" name="Text 28"/>
-          <p:cNvSpPr/>
-          <p:nvPr/>
-        </p:nvSpPr>
-        <p:spPr>
-          <a:xfrm>
-            <a:off x="2651760" y="3310128"/>
-            <a:ext cx="6035040" cy="457200"/>
-          </a:xfrm>
-          <a:prstGeom prst="rect">
-            <a:avLst/>
-          </a:prstGeom>
-          <a:noFill/>
-          <a:ln/>
-        </p:spPr>
-        <p:txBody>
-          <a:bodyPr wrap="square" rtlCol="0" anchor="ctr"/>
-          <a:lstStyle/>
-          <a:p>
-            <a:pPr algn="l" indent="0" marL="0">
-              <a:buNone/>
-            </a:pPr>
-            <a:r>
-              <a:rPr lang="en-US" sz="1200" dirty="0">
-                <a:solidFill>
-                  <a:srgbClr val="0F172A"/>
-                </a:solidFill>
-                <a:latin typeface="Calibri" pitchFamily="34" charset="0"/>
-                <a:ea typeface="Calibri" pitchFamily="34" charset="-122"/>
-                <a:cs typeface="Calibri" pitchFamily="34" charset="-120"/>
-              </a:rPr>
-              <a:t>To cut or divide something into exactly two equal halves.</a:t>
-            </a:r>
-            <a:endParaRPr lang="en-US" sz="1200" dirty="0"/>
-          </a:p>
-        </p:txBody>
-      </p:sp>
-      <p:sp>
-        <p:nvSpPr>
-          <p:cNvPr id="31" name="Shape 29"/>
-          <p:cNvSpPr/>
-          <p:nvPr/>
-        </p:nvSpPr>
-        <p:spPr>
-          <a:xfrm>
-            <a:off x="365760" y="3840480"/>
-            <a:ext cx="2011680" cy="457200"/>
-          </a:xfrm>
-          <a:prstGeom prst="rect">
-            <a:avLst>
-              <a:gd name="adj" fmla="val 12000"/>
-            </a:avLst>
-          </a:prstGeom>
-          <a:solidFill>
-            <a:srgbClr val="EEF2FF"/>
-          </a:solidFill>
-          <a:ln w="12700">
-            <a:solidFill>
-              <a:srgbClr val="6366F1"/>
-            </a:solidFill>
-            <a:prstDash val="solid"/>
-          </a:ln>
-          <a:effectLst>
-            <a:outerShdw sx="100000" sy="100000" kx="0" ky="0" algn="bl" rotWithShape="0" blurRad="101600" dist="38100" dir="8100000">
-              <a:srgbClr val="000000">
-                <a:alpha val="12000"/>
-              </a:srgbClr>
-            </a:outerShdw>
-          </a:effectLst>
-        </p:spPr>
-      </p:sp>
-      <p:sp>
-        <p:nvSpPr>
-          <p:cNvPr id="32" name="Text 30"/>
-          <p:cNvSpPr/>
-          <p:nvPr/>
-        </p:nvSpPr>
-        <p:spPr>
-          <a:xfrm>
-            <a:off x="365760" y="3840480"/>
-            <a:ext cx="2011680" cy="457200"/>
-          </a:xfrm>
-          <a:prstGeom prst="rect">
-            <a:avLst/>
-          </a:prstGeom>
-          <a:noFill/>
-          <a:ln/>
-        </p:spPr>
-        <p:txBody>
-          <a:bodyPr wrap="square" lIns="0" tIns="0" rIns="0" bIns="0" rtlCol="0" anchor="ctr"/>
-          <a:lstStyle/>
-          <a:p>
-            <a:pPr algn="ctr" indent="0" marL="0">
-              <a:buNone/>
-            </a:pPr>
-            <a:r>
-              <a:rPr lang="en-US" sz="1200" b="1" dirty="0">
-                <a:solidFill>
-                  <a:srgbClr val="4338CA"/>
-                </a:solidFill>
-                <a:latin typeface="Trebuchet MS" pitchFamily="34" charset="0"/>
-                <a:ea typeface="Trebuchet MS" pitchFamily="34" charset="-122"/>
-                <a:cs typeface="Trebuchet MS" pitchFamily="34" charset="-120"/>
-              </a:rPr>
-              <a:t>insect</a:t>
-            </a:r>
-            <a:endParaRPr lang="en-US" sz="1200" dirty="0"/>
-          </a:p>
-        </p:txBody>
-      </p:sp>
-      <p:sp>
-        <p:nvSpPr>
-          <p:cNvPr id="33" name="Shape 31"/>
-          <p:cNvSpPr/>
-          <p:nvPr/>
-        </p:nvSpPr>
-        <p:spPr>
-          <a:xfrm>
-            <a:off x="2514600" y="3840480"/>
-            <a:ext cx="6263640" cy="457200"/>
-          </a:xfrm>
-          <a:prstGeom prst="rect">
-            <a:avLst>
-              <a:gd name="adj" fmla="val 12000"/>
-            </a:avLst>
-          </a:prstGeom>
-          <a:solidFill>
-            <a:srgbClr val="F8FAFC"/>
-          </a:solidFill>
-          <a:ln w="12700">
-            <a:solidFill>
-              <a:srgbClr val="E2E8F0"/>
-            </a:solidFill>
-            <a:prstDash val="solid"/>
-          </a:ln>
-        </p:spPr>
-      </p:sp>
-      <p:sp>
-        <p:nvSpPr>
-          <p:cNvPr id="34" name="Text 32"/>
-          <p:cNvSpPr/>
-          <p:nvPr/>
-        </p:nvSpPr>
-        <p:spPr>
-          <a:xfrm>
-            <a:off x="2651760" y="3840480"/>
-            <a:ext cx="6035040" cy="457200"/>
-          </a:xfrm>
-          <a:prstGeom prst="rect">
-            <a:avLst/>
-          </a:prstGeom>
-          <a:noFill/>
-          <a:ln/>
-        </p:spPr>
-        <p:txBody>
-          <a:bodyPr wrap="square" rtlCol="0" anchor="ctr"/>
-          <a:lstStyle/>
-          <a:p>
-            <a:pPr algn="l" indent="0" marL="0">
-              <a:buNone/>
-            </a:pPr>
-            <a:r>
-              <a:rPr lang="en-US" sz="1200" dirty="0">
-                <a:solidFill>
-                  <a:srgbClr val="0F172A"/>
-                </a:solidFill>
-                <a:latin typeface="Calibri" pitchFamily="34" charset="0"/>
-                <a:ea typeface="Calibri" pitchFamily="34" charset="-122"/>
-                <a:cs typeface="Calibri" pitchFamily="34" charset="-120"/>
-              </a:rPr>
-              <a:t>A part or piece that has been cut or divided from a whole.</a:t>
-            </a:r>
-            <a:endParaRPr lang="en-US" sz="1200" dirty="0"/>
-          </a:p>
-        </p:txBody>
-      </p:sp>
-      <p:sp>
-        <p:nvSpPr>
-          <p:cNvPr id="35" name="Shape 33"/>
-          <p:cNvSpPr/>
-          <p:nvPr/>
-        </p:nvSpPr>
-        <p:spPr>
-          <a:xfrm>
-            <a:off x="365760" y="4370832"/>
-            <a:ext cx="2011680" cy="457200"/>
-          </a:xfrm>
-          <a:prstGeom prst="rect">
-            <a:avLst>
-              <a:gd name="adj" fmla="val 12000"/>
-            </a:avLst>
-          </a:prstGeom>
-          <a:solidFill>
-            <a:srgbClr val="EEF2FF"/>
-          </a:solidFill>
-          <a:ln w="12700">
-            <a:solidFill>
-              <a:srgbClr val="6366F1"/>
-            </a:solidFill>
-            <a:prstDash val="solid"/>
-          </a:ln>
-          <a:effectLst>
-            <a:outerShdw sx="100000" sy="100000" kx="0" ky="0" algn="bl" rotWithShape="0" blurRad="101600" dist="38100" dir="8100000">
-              <a:srgbClr val="000000">
-                <a:alpha val="12000"/>
-              </a:srgbClr>
-            </a:outerShdw>
-          </a:effectLst>
-        </p:spPr>
-      </p:sp>
-      <p:sp>
-        <p:nvSpPr>
-          <p:cNvPr id="36" name="Text 34"/>
-          <p:cNvSpPr/>
-          <p:nvPr/>
-        </p:nvSpPr>
-        <p:spPr>
-          <a:xfrm>
-            <a:off x="365760" y="4370832"/>
-            <a:ext cx="2011680" cy="457200"/>
-          </a:xfrm>
-          <a:prstGeom prst="rect">
-            <a:avLst/>
-          </a:prstGeom>
-          <a:noFill/>
-          <a:ln/>
-        </p:spPr>
-        <p:txBody>
-          <a:bodyPr wrap="square" lIns="0" tIns="0" rIns="0" bIns="0" rtlCol="0" anchor="ctr"/>
-          <a:lstStyle/>
-          <a:p>
-            <a:pPr algn="ctr" indent="0" marL="0">
-              <a:buNone/>
-            </a:pPr>
-            <a:r>
-              <a:rPr lang="en-US" sz="1200" b="1" dirty="0">
-                <a:solidFill>
-                  <a:srgbClr val="4338CA"/>
-                </a:solidFill>
-                <a:latin typeface="Trebuchet MS" pitchFamily="34" charset="0"/>
-                <a:ea typeface="Trebuchet MS" pitchFamily="34" charset="-122"/>
-                <a:cs typeface="Trebuchet MS" pitchFamily="34" charset="-120"/>
-              </a:rPr>
-              <a:t>transect</a:t>
-            </a:r>
-            <a:endParaRPr lang="en-US" sz="1200" dirty="0"/>
-          </a:p>
-        </p:txBody>
-      </p:sp>
-      <p:sp>
-        <p:nvSpPr>
-          <p:cNvPr id="37" name="Shape 35"/>
-          <p:cNvSpPr/>
-          <p:nvPr/>
-        </p:nvSpPr>
-        <p:spPr>
-          <a:xfrm>
-            <a:off x="2514600" y="4370832"/>
-            <a:ext cx="6263640" cy="457200"/>
-          </a:xfrm>
-          <a:prstGeom prst="rect">
-            <a:avLst>
-              <a:gd name="adj" fmla="val 12000"/>
-            </a:avLst>
-          </a:prstGeom>
-          <a:solidFill>
-            <a:srgbClr val="F8FAFC"/>
-          </a:solidFill>
-          <a:ln w="12700">
-            <a:solidFill>
-              <a:srgbClr val="E2E8F0"/>
-            </a:solidFill>
-            <a:prstDash val="solid"/>
-          </a:ln>
-        </p:spPr>
-      </p:sp>
-      <p:sp>
-        <p:nvSpPr>
-          <p:cNvPr id="38" name="Text 36"/>
-          <p:cNvSpPr/>
-          <p:nvPr/>
-        </p:nvSpPr>
-        <p:spPr>
-          <a:xfrm>
-            <a:off x="2651760" y="4370832"/>
-            <a:ext cx="6035040" cy="457200"/>
-          </a:xfrm>
-          <a:prstGeom prst="rect">
-            <a:avLst/>
-          </a:prstGeom>
-          <a:noFill/>
-          <a:ln/>
-        </p:spPr>
-        <p:txBody>
-          <a:bodyPr wrap="square" rtlCol="0" anchor="ctr"/>
-          <a:lstStyle/>
-          <a:p>
-            <a:pPr algn="l" indent="0" marL="0">
-              <a:buNone/>
-            </a:pPr>
-            <a:r>
-              <a:rPr lang="en-US" sz="1200" dirty="0">
-                <a:solidFill>
-                  <a:srgbClr val="0F172A"/>
-                </a:solidFill>
-                <a:latin typeface="Calibri" pitchFamily="34" charset="0"/>
-                <a:ea typeface="Calibri" pitchFamily="34" charset="-122"/>
-                <a:cs typeface="Calibri" pitchFamily="34" charset="-120"/>
-              </a:rPr>
-              <a:t>When two lines or roads cross over each other.</a:t>
+              <a:t>a smaller group within a larger religion or belief system, with its own beliefs</a:t>
             </a:r>
             <a:endParaRPr lang="en-US" sz="1200" dirty="0"/>
           </a:p>
@@ -41635,7 +39071,7 @@
                 <a:ea typeface="Calibri" pitchFamily="34" charset="-122"/>
                 <a:cs typeface="Calibri" pitchFamily="34" charset="-120"/>
               </a:rPr>
-              <a:t>Word Labs  •  wordlabs.app  •  Root: 'sect' = cut, divide, section</a:t>
+              <a:t>Word Labs  •  wordlabs.app  •  Root: 'sect' = cut</a:t>
             </a:r>
             <a:endParaRPr lang="en-US" sz="800" dirty="0"/>
           </a:p>
@@ -41838,7 +39274,7 @@
                 <a:ea typeface="Calibri" pitchFamily="34" charset="-122"/>
                 <a:cs typeface="Calibri" pitchFamily="34" charset="-120"/>
               </a:rPr>
-              <a:t>The maths teacher asked us to bisect the angle carefully using a ruler and compass.</a:t>
+              <a:t>The small sect followed different customs from the main religion.</a:t>
             </a:r>
             <a:endParaRPr lang="en-US" sz="1500" dirty="0"/>
           </a:p>
@@ -42002,7 +39438,7 @@
                 <a:ea typeface="Calibri" pitchFamily="34" charset="-122"/>
                 <a:cs typeface="Calibri" pitchFamily="34" charset="-120"/>
               </a:rPr>
-              <a:t>When two roads intersect, drivers must look both ways before continuing.</a:t>
+              <a:t>A ladybird is a type of insect.</a:t>
             </a:r>
             <a:endParaRPr lang="en-US" sz="1500" dirty="0"/>
           </a:p>
@@ -42166,7 +39602,7 @@
                 <a:ea typeface="Calibri" pitchFamily="34" charset="-122"/>
                 <a:cs typeface="Calibri" pitchFamily="34" charset="-120"/>
               </a:rPr>
-              <a:t>The scientist studied each section of the rock sample under the microscope.</a:t>
+              <a:t>The manufacturing sector employs thousands of workers.</a:t>
             </a:r>
             <a:endParaRPr lang="en-US" sz="1500" dirty="0"/>
           </a:p>
